--- a/assets/lessons/lectures/astronomy/your-observations-2018.pptx
+++ b/assets/lessons/lectures/astronomy/your-observations-2018.pptx
@@ -28,7 +28,7 @@
     <p:sldId id="273" r:id="rId22"/>
     <p:sldId id="274" r:id="rId23"/>
   </p:sldIdLst>
-  <p:sldSz cy="7559675" cx="10080625"/>
+  <p:sldSz cy="8245475" cx="10080625"/>
   <p:notesSz cx="7772400" cy="10058400"/>
   <p:defaultTextStyle>
     <a:defPPr lvl="0" marR="0" rtl="0" algn="l">
@@ -2574,7 +2574,7 @@
         </p:nvSpPr>
         <p:spPr>
           <a:xfrm>
-            <a:off x="504000" y="301320"/>
+            <a:off x="504000" y="644220"/>
             <a:ext cx="9071640" cy="1262160"/>
           </a:xfrm>
           <a:prstGeom prst="rect">
@@ -2597,7 +2597,7 @@
               </a:spcAft>
               <a:buSzPts val="1400"/>
               <a:buNone/>
-              <a:defRPr b="0" i="0" sz="1800" u="none" cap="none" strike="noStrike"/>
+              <a:defRPr b="0" i="0" sz="1440" u="none" cap="none" strike="noStrike"/>
             </a:lvl1pPr>
             <a:lvl2pPr lvl="1" marR="0" rtl="0" algn="l">
               <a:spcBef>
@@ -2608,7 +2608,7 @@
               </a:spcAft>
               <a:buSzPts val="1400"/>
               <a:buNone/>
-              <a:defRPr b="0" i="0" sz="1800" u="none" cap="none" strike="noStrike"/>
+              <a:defRPr b="0" i="0" sz="1440" u="none" cap="none" strike="noStrike"/>
             </a:lvl2pPr>
             <a:lvl3pPr lvl="2" marR="0" rtl="0" algn="l">
               <a:spcBef>
@@ -2619,7 +2619,7 @@
               </a:spcAft>
               <a:buSzPts val="1400"/>
               <a:buNone/>
-              <a:defRPr b="0" i="0" sz="1800" u="none" cap="none" strike="noStrike"/>
+              <a:defRPr b="0" i="0" sz="1440" u="none" cap="none" strike="noStrike"/>
             </a:lvl3pPr>
             <a:lvl4pPr lvl="3" marR="0" rtl="0" algn="l">
               <a:spcBef>
@@ -2630,7 +2630,7 @@
               </a:spcAft>
               <a:buSzPts val="1400"/>
               <a:buNone/>
-              <a:defRPr b="0" i="0" sz="1800" u="none" cap="none" strike="noStrike"/>
+              <a:defRPr b="0" i="0" sz="1440" u="none" cap="none" strike="noStrike"/>
             </a:lvl4pPr>
             <a:lvl5pPr lvl="4" marR="0" rtl="0" algn="l">
               <a:spcBef>
@@ -2641,7 +2641,7 @@
               </a:spcAft>
               <a:buSzPts val="1400"/>
               <a:buNone/>
-              <a:defRPr b="0" i="0" sz="1800" u="none" cap="none" strike="noStrike"/>
+              <a:defRPr b="0" i="0" sz="1440" u="none" cap="none" strike="noStrike"/>
             </a:lvl5pPr>
             <a:lvl6pPr lvl="5" marR="0" rtl="0" algn="l">
               <a:spcBef>
@@ -2652,7 +2652,7 @@
               </a:spcAft>
               <a:buSzPts val="1400"/>
               <a:buNone/>
-              <a:defRPr b="0" i="0" sz="1800" u="none" cap="none" strike="noStrike"/>
+              <a:defRPr b="0" i="0" sz="1440" u="none" cap="none" strike="noStrike"/>
             </a:lvl6pPr>
             <a:lvl7pPr lvl="6" marR="0" rtl="0" algn="l">
               <a:spcBef>
@@ -2663,7 +2663,7 @@
               </a:spcAft>
               <a:buSzPts val="1400"/>
               <a:buNone/>
-              <a:defRPr b="0" i="0" sz="1800" u="none" cap="none" strike="noStrike"/>
+              <a:defRPr b="0" i="0" sz="1440" u="none" cap="none" strike="noStrike"/>
             </a:lvl7pPr>
             <a:lvl8pPr lvl="7" marR="0" rtl="0" algn="l">
               <a:spcBef>
@@ -2674,7 +2674,7 @@
               </a:spcAft>
               <a:buSzPts val="1400"/>
               <a:buNone/>
-              <a:defRPr b="0" i="0" sz="1800" u="none" cap="none" strike="noStrike"/>
+              <a:defRPr b="0" i="0" sz="1440" u="none" cap="none" strike="noStrike"/>
             </a:lvl8pPr>
             <a:lvl9pPr lvl="8" marR="0" rtl="0" algn="l">
               <a:spcBef>
@@ -2685,7 +2685,7 @@
               </a:spcAft>
               <a:buSzPts val="1400"/>
               <a:buNone/>
-              <a:defRPr b="0" i="0" sz="1800" u="none" cap="none" strike="noStrike"/>
+              <a:defRPr b="0" i="0" sz="1440" u="none" cap="none" strike="noStrike"/>
             </a:lvl9pPr>
           </a:lstStyle>
           <a:p/>
@@ -2701,7 +2701,7 @@
         </p:nvSpPr>
         <p:spPr>
           <a:xfrm>
-            <a:off x="504000" y="1769040"/>
+            <a:off x="504000" y="2111940"/>
             <a:ext cx="9071640" cy="4384440"/>
           </a:xfrm>
           <a:prstGeom prst="rect">
@@ -2724,7 +2724,7 @@
               </a:spcAft>
               <a:buSzPts val="1400"/>
               <a:buNone/>
-              <a:defRPr b="0" i="0" sz="1800" u="none" cap="none" strike="noStrike"/>
+              <a:defRPr b="0" i="0" sz="1440" u="none" cap="none" strike="noStrike"/>
             </a:lvl1pPr>
             <a:lvl2pPr lvl="1" marR="0" rtl="0" algn="l">
               <a:spcBef>
@@ -2735,7 +2735,7 @@
               </a:spcAft>
               <a:buSzPts val="1400"/>
               <a:buNone/>
-              <a:defRPr b="0" i="0" sz="1800" u="none" cap="none" strike="noStrike"/>
+              <a:defRPr b="0" i="0" sz="1440" u="none" cap="none" strike="noStrike"/>
             </a:lvl2pPr>
             <a:lvl3pPr lvl="2" marR="0" rtl="0" algn="l">
               <a:spcBef>
@@ -2746,7 +2746,7 @@
               </a:spcAft>
               <a:buSzPts val="1400"/>
               <a:buNone/>
-              <a:defRPr b="0" i="0" sz="1800" u="none" cap="none" strike="noStrike"/>
+              <a:defRPr b="0" i="0" sz="1440" u="none" cap="none" strike="noStrike"/>
             </a:lvl3pPr>
             <a:lvl4pPr lvl="3" marR="0" rtl="0" algn="l">
               <a:spcBef>
@@ -2757,7 +2757,7 @@
               </a:spcAft>
               <a:buSzPts val="1400"/>
               <a:buNone/>
-              <a:defRPr b="0" i="0" sz="1800" u="none" cap="none" strike="noStrike"/>
+              <a:defRPr b="0" i="0" sz="1440" u="none" cap="none" strike="noStrike"/>
             </a:lvl4pPr>
             <a:lvl5pPr lvl="4" marR="0" rtl="0" algn="l">
               <a:spcBef>
@@ -2768,7 +2768,7 @@
               </a:spcAft>
               <a:buSzPts val="1400"/>
               <a:buNone/>
-              <a:defRPr b="0" i="0" sz="1800" u="none" cap="none" strike="noStrike"/>
+              <a:defRPr b="0" i="0" sz="1440" u="none" cap="none" strike="noStrike"/>
             </a:lvl5pPr>
             <a:lvl6pPr lvl="5" marR="0" rtl="0" algn="l">
               <a:spcBef>
@@ -2779,7 +2779,7 @@
               </a:spcAft>
               <a:buSzPts val="1400"/>
               <a:buNone/>
-              <a:defRPr b="0" i="0" sz="1800" u="none" cap="none" strike="noStrike"/>
+              <a:defRPr b="0" i="0" sz="1440" u="none" cap="none" strike="noStrike"/>
             </a:lvl6pPr>
             <a:lvl7pPr lvl="6" marR="0" rtl="0" algn="l">
               <a:spcBef>
@@ -2790,7 +2790,7 @@
               </a:spcAft>
               <a:buSzPts val="1400"/>
               <a:buNone/>
-              <a:defRPr b="0" i="0" sz="1800" u="none" cap="none" strike="noStrike"/>
+              <a:defRPr b="0" i="0" sz="1440" u="none" cap="none" strike="noStrike"/>
             </a:lvl7pPr>
             <a:lvl8pPr lvl="7" marR="0" rtl="0" algn="l">
               <a:spcBef>
@@ -2801,7 +2801,7 @@
               </a:spcAft>
               <a:buSzPts val="1400"/>
               <a:buNone/>
-              <a:defRPr b="0" i="0" sz="1800" u="none" cap="none" strike="noStrike"/>
+              <a:defRPr b="0" i="0" sz="1440" u="none" cap="none" strike="noStrike"/>
             </a:lvl8pPr>
             <a:lvl9pPr lvl="8" marR="0" rtl="0" algn="l">
               <a:spcBef>
@@ -2812,7 +2812,7 @@
               </a:spcAft>
               <a:buSzPts val="1400"/>
               <a:buNone/>
-              <a:defRPr b="0" i="0" sz="1800" u="none" cap="none" strike="noStrike"/>
+              <a:defRPr b="0" i="0" sz="1440" u="none" cap="none" strike="noStrike"/>
             </a:lvl9pPr>
           </a:lstStyle>
           <a:p/>
@@ -2853,7 +2853,7 @@
         </p:nvSpPr>
         <p:spPr>
           <a:xfrm>
-            <a:off x="504000" y="301320"/>
+            <a:off x="504000" y="644220"/>
             <a:ext cx="9071640" cy="1262160"/>
           </a:xfrm>
           <a:prstGeom prst="rect">
@@ -2876,7 +2876,7 @@
               </a:spcAft>
               <a:buSzPts val="1400"/>
               <a:buNone/>
-              <a:defRPr b="0" i="0" sz="1800" u="none" cap="none" strike="noStrike"/>
+              <a:defRPr b="0" i="0" sz="1440" u="none" cap="none" strike="noStrike"/>
             </a:lvl1pPr>
             <a:lvl2pPr lvl="1" marR="0" rtl="0" algn="l">
               <a:spcBef>
@@ -2887,7 +2887,7 @@
               </a:spcAft>
               <a:buSzPts val="1400"/>
               <a:buNone/>
-              <a:defRPr b="0" i="0" sz="1800" u="none" cap="none" strike="noStrike"/>
+              <a:defRPr b="0" i="0" sz="1440" u="none" cap="none" strike="noStrike"/>
             </a:lvl2pPr>
             <a:lvl3pPr lvl="2" marR="0" rtl="0" algn="l">
               <a:spcBef>
@@ -2898,7 +2898,7 @@
               </a:spcAft>
               <a:buSzPts val="1400"/>
               <a:buNone/>
-              <a:defRPr b="0" i="0" sz="1800" u="none" cap="none" strike="noStrike"/>
+              <a:defRPr b="0" i="0" sz="1440" u="none" cap="none" strike="noStrike"/>
             </a:lvl3pPr>
             <a:lvl4pPr lvl="3" marR="0" rtl="0" algn="l">
               <a:spcBef>
@@ -2909,7 +2909,7 @@
               </a:spcAft>
               <a:buSzPts val="1400"/>
               <a:buNone/>
-              <a:defRPr b="0" i="0" sz="1800" u="none" cap="none" strike="noStrike"/>
+              <a:defRPr b="0" i="0" sz="1440" u="none" cap="none" strike="noStrike"/>
             </a:lvl4pPr>
             <a:lvl5pPr lvl="4" marR="0" rtl="0" algn="l">
               <a:spcBef>
@@ -2920,7 +2920,7 @@
               </a:spcAft>
               <a:buSzPts val="1400"/>
               <a:buNone/>
-              <a:defRPr b="0" i="0" sz="1800" u="none" cap="none" strike="noStrike"/>
+              <a:defRPr b="0" i="0" sz="1440" u="none" cap="none" strike="noStrike"/>
             </a:lvl5pPr>
             <a:lvl6pPr lvl="5" marR="0" rtl="0" algn="l">
               <a:spcBef>
@@ -2931,7 +2931,7 @@
               </a:spcAft>
               <a:buSzPts val="1400"/>
               <a:buNone/>
-              <a:defRPr b="0" i="0" sz="1800" u="none" cap="none" strike="noStrike"/>
+              <a:defRPr b="0" i="0" sz="1440" u="none" cap="none" strike="noStrike"/>
             </a:lvl6pPr>
             <a:lvl7pPr lvl="6" marR="0" rtl="0" algn="l">
               <a:spcBef>
@@ -2942,7 +2942,7 @@
               </a:spcAft>
               <a:buSzPts val="1400"/>
               <a:buNone/>
-              <a:defRPr b="0" i="0" sz="1800" u="none" cap="none" strike="noStrike"/>
+              <a:defRPr b="0" i="0" sz="1440" u="none" cap="none" strike="noStrike"/>
             </a:lvl7pPr>
             <a:lvl8pPr lvl="7" marR="0" rtl="0" algn="l">
               <a:spcBef>
@@ -2953,7 +2953,7 @@
               </a:spcAft>
               <a:buSzPts val="1400"/>
               <a:buNone/>
-              <a:defRPr b="0" i="0" sz="1800" u="none" cap="none" strike="noStrike"/>
+              <a:defRPr b="0" i="0" sz="1440" u="none" cap="none" strike="noStrike"/>
             </a:lvl8pPr>
             <a:lvl9pPr lvl="8" marR="0" rtl="0" algn="l">
               <a:spcBef>
@@ -2964,7 +2964,7 @@
               </a:spcAft>
               <a:buSzPts val="1400"/>
               <a:buNone/>
-              <a:defRPr b="0" i="0" sz="1800" u="none" cap="none" strike="noStrike"/>
+              <a:defRPr b="0" i="0" sz="1440" u="none" cap="none" strike="noStrike"/>
             </a:lvl9pPr>
           </a:lstStyle>
           <a:p/>
@@ -2980,7 +2980,7 @@
         </p:nvSpPr>
         <p:spPr>
           <a:xfrm>
-            <a:off x="504000" y="1769040"/>
+            <a:off x="504000" y="2111940"/>
             <a:ext cx="9071640" cy="2091240"/>
           </a:xfrm>
           <a:prstGeom prst="rect">
@@ -3003,7 +3003,7 @@
               </a:spcAft>
               <a:buSzPts val="1400"/>
               <a:buNone/>
-              <a:defRPr b="0" i="0" sz="1800" u="none" cap="none" strike="noStrike"/>
+              <a:defRPr b="0" i="0" sz="1440" u="none" cap="none" strike="noStrike"/>
             </a:lvl1pPr>
             <a:lvl2pPr indent="-228600" lvl="1" marL="914400" marR="0" rtl="0" algn="l">
               <a:spcBef>
@@ -3014,7 +3014,7 @@
               </a:spcAft>
               <a:buSzPts val="1400"/>
               <a:buNone/>
-              <a:defRPr b="0" i="0" sz="1800" u="none" cap="none" strike="noStrike"/>
+              <a:defRPr b="0" i="0" sz="1440" u="none" cap="none" strike="noStrike"/>
             </a:lvl2pPr>
             <a:lvl3pPr indent="-228600" lvl="2" marL="1371600" marR="0" rtl="0" algn="l">
               <a:spcBef>
@@ -3025,7 +3025,7 @@
               </a:spcAft>
               <a:buSzPts val="1400"/>
               <a:buNone/>
-              <a:defRPr b="0" i="0" sz="1800" u="none" cap="none" strike="noStrike"/>
+              <a:defRPr b="0" i="0" sz="1440" u="none" cap="none" strike="noStrike"/>
             </a:lvl3pPr>
             <a:lvl4pPr indent="-228600" lvl="3" marL="1828800" marR="0" rtl="0" algn="l">
               <a:spcBef>
@@ -3036,7 +3036,7 @@
               </a:spcAft>
               <a:buSzPts val="1400"/>
               <a:buNone/>
-              <a:defRPr b="0" i="0" sz="1800" u="none" cap="none" strike="noStrike"/>
+              <a:defRPr b="0" i="0" sz="1440" u="none" cap="none" strike="noStrike"/>
             </a:lvl4pPr>
             <a:lvl5pPr indent="-228600" lvl="4" marL="2286000" marR="0" rtl="0" algn="l">
               <a:spcBef>
@@ -3047,7 +3047,7 @@
               </a:spcAft>
               <a:buSzPts val="1400"/>
               <a:buNone/>
-              <a:defRPr b="0" i="0" sz="1800" u="none" cap="none" strike="noStrike"/>
+              <a:defRPr b="0" i="0" sz="1440" u="none" cap="none" strike="noStrike"/>
             </a:lvl5pPr>
             <a:lvl6pPr indent="-228600" lvl="5" marL="2743200" marR="0" rtl="0" algn="l">
               <a:spcBef>
@@ -3058,7 +3058,7 @@
               </a:spcAft>
               <a:buSzPts val="1400"/>
               <a:buNone/>
-              <a:defRPr b="0" i="0" sz="1800" u="none" cap="none" strike="noStrike"/>
+              <a:defRPr b="0" i="0" sz="1440" u="none" cap="none" strike="noStrike"/>
             </a:lvl6pPr>
             <a:lvl7pPr indent="-228600" lvl="6" marL="3200400" marR="0" rtl="0" algn="l">
               <a:spcBef>
@@ -3069,7 +3069,7 @@
               </a:spcAft>
               <a:buSzPts val="1400"/>
               <a:buNone/>
-              <a:defRPr b="0" i="0" sz="1800" u="none" cap="none" strike="noStrike"/>
+              <a:defRPr b="0" i="0" sz="1440" u="none" cap="none" strike="noStrike"/>
             </a:lvl7pPr>
             <a:lvl8pPr indent="-228600" lvl="7" marL="3657600" marR="0" rtl="0" algn="l">
               <a:spcBef>
@@ -3080,7 +3080,7 @@
               </a:spcAft>
               <a:buSzPts val="1400"/>
               <a:buNone/>
-              <a:defRPr b="0" i="0" sz="1800" u="none" cap="none" strike="noStrike"/>
+              <a:defRPr b="0" i="0" sz="1440" u="none" cap="none" strike="noStrike"/>
             </a:lvl8pPr>
             <a:lvl9pPr indent="-228600" lvl="8" marL="4114800" marR="0" rtl="0" algn="l">
               <a:spcBef>
@@ -3091,7 +3091,7 @@
               </a:spcAft>
               <a:buSzPts val="1400"/>
               <a:buNone/>
-              <a:defRPr b="0" i="0" sz="1800" u="none" cap="none" strike="noStrike"/>
+              <a:defRPr b="0" i="0" sz="1440" u="none" cap="none" strike="noStrike"/>
             </a:lvl9pPr>
           </a:lstStyle>
           <a:p/>
@@ -3107,7 +3107,7 @@
         </p:nvSpPr>
         <p:spPr>
           <a:xfrm>
-            <a:off x="504000" y="4059360"/>
+            <a:off x="504000" y="4402260"/>
             <a:ext cx="9071640" cy="2091240"/>
           </a:xfrm>
           <a:prstGeom prst="rect">
@@ -3130,7 +3130,7 @@
               </a:spcAft>
               <a:buSzPts val="1400"/>
               <a:buNone/>
-              <a:defRPr b="0" i="0" sz="1800" u="none" cap="none" strike="noStrike"/>
+              <a:defRPr b="0" i="0" sz="1440" u="none" cap="none" strike="noStrike"/>
             </a:lvl1pPr>
             <a:lvl2pPr indent="-228600" lvl="1" marL="914400" marR="0" rtl="0" algn="l">
               <a:spcBef>
@@ -3141,7 +3141,7 @@
               </a:spcAft>
               <a:buSzPts val="1400"/>
               <a:buNone/>
-              <a:defRPr b="0" i="0" sz="1800" u="none" cap="none" strike="noStrike"/>
+              <a:defRPr b="0" i="0" sz="1440" u="none" cap="none" strike="noStrike"/>
             </a:lvl2pPr>
             <a:lvl3pPr indent="-228600" lvl="2" marL="1371600" marR="0" rtl="0" algn="l">
               <a:spcBef>
@@ -3152,7 +3152,7 @@
               </a:spcAft>
               <a:buSzPts val="1400"/>
               <a:buNone/>
-              <a:defRPr b="0" i="0" sz="1800" u="none" cap="none" strike="noStrike"/>
+              <a:defRPr b="0" i="0" sz="1440" u="none" cap="none" strike="noStrike"/>
             </a:lvl3pPr>
             <a:lvl4pPr indent="-228600" lvl="3" marL="1828800" marR="0" rtl="0" algn="l">
               <a:spcBef>
@@ -3163,7 +3163,7 @@
               </a:spcAft>
               <a:buSzPts val="1400"/>
               <a:buNone/>
-              <a:defRPr b="0" i="0" sz="1800" u="none" cap="none" strike="noStrike"/>
+              <a:defRPr b="0" i="0" sz="1440" u="none" cap="none" strike="noStrike"/>
             </a:lvl4pPr>
             <a:lvl5pPr indent="-228600" lvl="4" marL="2286000" marR="0" rtl="0" algn="l">
               <a:spcBef>
@@ -3174,7 +3174,7 @@
               </a:spcAft>
               <a:buSzPts val="1400"/>
               <a:buNone/>
-              <a:defRPr b="0" i="0" sz="1800" u="none" cap="none" strike="noStrike"/>
+              <a:defRPr b="0" i="0" sz="1440" u="none" cap="none" strike="noStrike"/>
             </a:lvl5pPr>
             <a:lvl6pPr indent="-228600" lvl="5" marL="2743200" marR="0" rtl="0" algn="l">
               <a:spcBef>
@@ -3185,7 +3185,7 @@
               </a:spcAft>
               <a:buSzPts val="1400"/>
               <a:buNone/>
-              <a:defRPr b="0" i="0" sz="1800" u="none" cap="none" strike="noStrike"/>
+              <a:defRPr b="0" i="0" sz="1440" u="none" cap="none" strike="noStrike"/>
             </a:lvl6pPr>
             <a:lvl7pPr indent="-228600" lvl="6" marL="3200400" marR="0" rtl="0" algn="l">
               <a:spcBef>
@@ -3196,7 +3196,7 @@
               </a:spcAft>
               <a:buSzPts val="1400"/>
               <a:buNone/>
-              <a:defRPr b="0" i="0" sz="1800" u="none" cap="none" strike="noStrike"/>
+              <a:defRPr b="0" i="0" sz="1440" u="none" cap="none" strike="noStrike"/>
             </a:lvl7pPr>
             <a:lvl8pPr indent="-228600" lvl="7" marL="3657600" marR="0" rtl="0" algn="l">
               <a:spcBef>
@@ -3207,7 +3207,7 @@
               </a:spcAft>
               <a:buSzPts val="1400"/>
               <a:buNone/>
-              <a:defRPr b="0" i="0" sz="1800" u="none" cap="none" strike="noStrike"/>
+              <a:defRPr b="0" i="0" sz="1440" u="none" cap="none" strike="noStrike"/>
             </a:lvl8pPr>
             <a:lvl9pPr indent="-228600" lvl="8" marL="4114800" marR="0" rtl="0" algn="l">
               <a:spcBef>
@@ -3218,7 +3218,7 @@
               </a:spcAft>
               <a:buSzPts val="1400"/>
               <a:buNone/>
-              <a:defRPr b="0" i="0" sz="1800" u="none" cap="none" strike="noStrike"/>
+              <a:defRPr b="0" i="0" sz="1440" u="none" cap="none" strike="noStrike"/>
             </a:lvl9pPr>
           </a:lstStyle>
           <a:p/>
@@ -3259,7 +3259,7 @@
         </p:nvSpPr>
         <p:spPr>
           <a:xfrm>
-            <a:off x="504000" y="301320"/>
+            <a:off x="504000" y="644220"/>
             <a:ext cx="9071640" cy="1262160"/>
           </a:xfrm>
           <a:prstGeom prst="rect">
@@ -3282,7 +3282,7 @@
               </a:spcAft>
               <a:buSzPts val="1400"/>
               <a:buNone/>
-              <a:defRPr b="0" i="0" sz="1800" u="none" cap="none" strike="noStrike"/>
+              <a:defRPr b="0" i="0" sz="1440" u="none" cap="none" strike="noStrike"/>
             </a:lvl1pPr>
             <a:lvl2pPr lvl="1" marR="0" rtl="0" algn="l">
               <a:spcBef>
@@ -3293,7 +3293,7 @@
               </a:spcAft>
               <a:buSzPts val="1400"/>
               <a:buNone/>
-              <a:defRPr b="0" i="0" sz="1800" u="none" cap="none" strike="noStrike"/>
+              <a:defRPr b="0" i="0" sz="1440" u="none" cap="none" strike="noStrike"/>
             </a:lvl2pPr>
             <a:lvl3pPr lvl="2" marR="0" rtl="0" algn="l">
               <a:spcBef>
@@ -3304,7 +3304,7 @@
               </a:spcAft>
               <a:buSzPts val="1400"/>
               <a:buNone/>
-              <a:defRPr b="0" i="0" sz="1800" u="none" cap="none" strike="noStrike"/>
+              <a:defRPr b="0" i="0" sz="1440" u="none" cap="none" strike="noStrike"/>
             </a:lvl3pPr>
             <a:lvl4pPr lvl="3" marR="0" rtl="0" algn="l">
               <a:spcBef>
@@ -3315,7 +3315,7 @@
               </a:spcAft>
               <a:buSzPts val="1400"/>
               <a:buNone/>
-              <a:defRPr b="0" i="0" sz="1800" u="none" cap="none" strike="noStrike"/>
+              <a:defRPr b="0" i="0" sz="1440" u="none" cap="none" strike="noStrike"/>
             </a:lvl4pPr>
             <a:lvl5pPr lvl="4" marR="0" rtl="0" algn="l">
               <a:spcBef>
@@ -3326,7 +3326,7 @@
               </a:spcAft>
               <a:buSzPts val="1400"/>
               <a:buNone/>
-              <a:defRPr b="0" i="0" sz="1800" u="none" cap="none" strike="noStrike"/>
+              <a:defRPr b="0" i="0" sz="1440" u="none" cap="none" strike="noStrike"/>
             </a:lvl5pPr>
             <a:lvl6pPr lvl="5" marR="0" rtl="0" algn="l">
               <a:spcBef>
@@ -3337,7 +3337,7 @@
               </a:spcAft>
               <a:buSzPts val="1400"/>
               <a:buNone/>
-              <a:defRPr b="0" i="0" sz="1800" u="none" cap="none" strike="noStrike"/>
+              <a:defRPr b="0" i="0" sz="1440" u="none" cap="none" strike="noStrike"/>
             </a:lvl6pPr>
             <a:lvl7pPr lvl="6" marR="0" rtl="0" algn="l">
               <a:spcBef>
@@ -3348,7 +3348,7 @@
               </a:spcAft>
               <a:buSzPts val="1400"/>
               <a:buNone/>
-              <a:defRPr b="0" i="0" sz="1800" u="none" cap="none" strike="noStrike"/>
+              <a:defRPr b="0" i="0" sz="1440" u="none" cap="none" strike="noStrike"/>
             </a:lvl7pPr>
             <a:lvl8pPr lvl="7" marR="0" rtl="0" algn="l">
               <a:spcBef>
@@ -3359,7 +3359,7 @@
               </a:spcAft>
               <a:buSzPts val="1400"/>
               <a:buNone/>
-              <a:defRPr b="0" i="0" sz="1800" u="none" cap="none" strike="noStrike"/>
+              <a:defRPr b="0" i="0" sz="1440" u="none" cap="none" strike="noStrike"/>
             </a:lvl8pPr>
             <a:lvl9pPr lvl="8" marR="0" rtl="0" algn="l">
               <a:spcBef>
@@ -3370,7 +3370,7 @@
               </a:spcAft>
               <a:buSzPts val="1400"/>
               <a:buNone/>
-              <a:defRPr b="0" i="0" sz="1800" u="none" cap="none" strike="noStrike"/>
+              <a:defRPr b="0" i="0" sz="1440" u="none" cap="none" strike="noStrike"/>
             </a:lvl9pPr>
           </a:lstStyle>
           <a:p/>
@@ -3386,7 +3386,7 @@
         </p:nvSpPr>
         <p:spPr>
           <a:xfrm>
-            <a:off x="504000" y="1769040"/>
+            <a:off x="504000" y="2111940"/>
             <a:ext cx="4426920" cy="2091240"/>
           </a:xfrm>
           <a:prstGeom prst="rect">
@@ -3409,7 +3409,7 @@
               </a:spcAft>
               <a:buSzPts val="1400"/>
               <a:buNone/>
-              <a:defRPr b="0" i="0" sz="1800" u="none" cap="none" strike="noStrike"/>
+              <a:defRPr b="0" i="0" sz="1440" u="none" cap="none" strike="noStrike"/>
             </a:lvl1pPr>
             <a:lvl2pPr indent="-228600" lvl="1" marL="914400" marR="0" rtl="0" algn="l">
               <a:spcBef>
@@ -3420,7 +3420,7 @@
               </a:spcAft>
               <a:buSzPts val="1400"/>
               <a:buNone/>
-              <a:defRPr b="0" i="0" sz="1800" u="none" cap="none" strike="noStrike"/>
+              <a:defRPr b="0" i="0" sz="1440" u="none" cap="none" strike="noStrike"/>
             </a:lvl2pPr>
             <a:lvl3pPr indent="-228600" lvl="2" marL="1371600" marR="0" rtl="0" algn="l">
               <a:spcBef>
@@ -3431,7 +3431,7 @@
               </a:spcAft>
               <a:buSzPts val="1400"/>
               <a:buNone/>
-              <a:defRPr b="0" i="0" sz="1800" u="none" cap="none" strike="noStrike"/>
+              <a:defRPr b="0" i="0" sz="1440" u="none" cap="none" strike="noStrike"/>
             </a:lvl3pPr>
             <a:lvl4pPr indent="-228600" lvl="3" marL="1828800" marR="0" rtl="0" algn="l">
               <a:spcBef>
@@ -3442,7 +3442,7 @@
               </a:spcAft>
               <a:buSzPts val="1400"/>
               <a:buNone/>
-              <a:defRPr b="0" i="0" sz="1800" u="none" cap="none" strike="noStrike"/>
+              <a:defRPr b="0" i="0" sz="1440" u="none" cap="none" strike="noStrike"/>
             </a:lvl4pPr>
             <a:lvl5pPr indent="-228600" lvl="4" marL="2286000" marR="0" rtl="0" algn="l">
               <a:spcBef>
@@ -3453,7 +3453,7 @@
               </a:spcAft>
               <a:buSzPts val="1400"/>
               <a:buNone/>
-              <a:defRPr b="0" i="0" sz="1800" u="none" cap="none" strike="noStrike"/>
+              <a:defRPr b="0" i="0" sz="1440" u="none" cap="none" strike="noStrike"/>
             </a:lvl5pPr>
             <a:lvl6pPr indent="-228600" lvl="5" marL="2743200" marR="0" rtl="0" algn="l">
               <a:spcBef>
@@ -3464,7 +3464,7 @@
               </a:spcAft>
               <a:buSzPts val="1400"/>
               <a:buNone/>
-              <a:defRPr b="0" i="0" sz="1800" u="none" cap="none" strike="noStrike"/>
+              <a:defRPr b="0" i="0" sz="1440" u="none" cap="none" strike="noStrike"/>
             </a:lvl6pPr>
             <a:lvl7pPr indent="-228600" lvl="6" marL="3200400" marR="0" rtl="0" algn="l">
               <a:spcBef>
@@ -3475,7 +3475,7 @@
               </a:spcAft>
               <a:buSzPts val="1400"/>
               <a:buNone/>
-              <a:defRPr b="0" i="0" sz="1800" u="none" cap="none" strike="noStrike"/>
+              <a:defRPr b="0" i="0" sz="1440" u="none" cap="none" strike="noStrike"/>
             </a:lvl7pPr>
             <a:lvl8pPr indent="-228600" lvl="7" marL="3657600" marR="0" rtl="0" algn="l">
               <a:spcBef>
@@ -3486,7 +3486,7 @@
               </a:spcAft>
               <a:buSzPts val="1400"/>
               <a:buNone/>
-              <a:defRPr b="0" i="0" sz="1800" u="none" cap="none" strike="noStrike"/>
+              <a:defRPr b="0" i="0" sz="1440" u="none" cap="none" strike="noStrike"/>
             </a:lvl8pPr>
             <a:lvl9pPr indent="-228600" lvl="8" marL="4114800" marR="0" rtl="0" algn="l">
               <a:spcBef>
@@ -3497,7 +3497,7 @@
               </a:spcAft>
               <a:buSzPts val="1400"/>
               <a:buNone/>
-              <a:defRPr b="0" i="0" sz="1800" u="none" cap="none" strike="noStrike"/>
+              <a:defRPr b="0" i="0" sz="1440" u="none" cap="none" strike="noStrike"/>
             </a:lvl9pPr>
           </a:lstStyle>
           <a:p/>
@@ -3513,7 +3513,7 @@
         </p:nvSpPr>
         <p:spPr>
           <a:xfrm>
-            <a:off x="5152680" y="1769040"/>
+            <a:off x="5152680" y="2111940"/>
             <a:ext cx="4426920" cy="2091240"/>
           </a:xfrm>
           <a:prstGeom prst="rect">
@@ -3536,7 +3536,7 @@
               </a:spcAft>
               <a:buSzPts val="1400"/>
               <a:buNone/>
-              <a:defRPr b="0" i="0" sz="1800" u="none" cap="none" strike="noStrike"/>
+              <a:defRPr b="0" i="0" sz="1440" u="none" cap="none" strike="noStrike"/>
             </a:lvl1pPr>
             <a:lvl2pPr indent="-228600" lvl="1" marL="914400" marR="0" rtl="0" algn="l">
               <a:spcBef>
@@ -3547,7 +3547,7 @@
               </a:spcAft>
               <a:buSzPts val="1400"/>
               <a:buNone/>
-              <a:defRPr b="0" i="0" sz="1800" u="none" cap="none" strike="noStrike"/>
+              <a:defRPr b="0" i="0" sz="1440" u="none" cap="none" strike="noStrike"/>
             </a:lvl2pPr>
             <a:lvl3pPr indent="-228600" lvl="2" marL="1371600" marR="0" rtl="0" algn="l">
               <a:spcBef>
@@ -3558,7 +3558,7 @@
               </a:spcAft>
               <a:buSzPts val="1400"/>
               <a:buNone/>
-              <a:defRPr b="0" i="0" sz="1800" u="none" cap="none" strike="noStrike"/>
+              <a:defRPr b="0" i="0" sz="1440" u="none" cap="none" strike="noStrike"/>
             </a:lvl3pPr>
             <a:lvl4pPr indent="-228600" lvl="3" marL="1828800" marR="0" rtl="0" algn="l">
               <a:spcBef>
@@ -3569,7 +3569,7 @@
               </a:spcAft>
               <a:buSzPts val="1400"/>
               <a:buNone/>
-              <a:defRPr b="0" i="0" sz="1800" u="none" cap="none" strike="noStrike"/>
+              <a:defRPr b="0" i="0" sz="1440" u="none" cap="none" strike="noStrike"/>
             </a:lvl4pPr>
             <a:lvl5pPr indent="-228600" lvl="4" marL="2286000" marR="0" rtl="0" algn="l">
               <a:spcBef>
@@ -3580,7 +3580,7 @@
               </a:spcAft>
               <a:buSzPts val="1400"/>
               <a:buNone/>
-              <a:defRPr b="0" i="0" sz="1800" u="none" cap="none" strike="noStrike"/>
+              <a:defRPr b="0" i="0" sz="1440" u="none" cap="none" strike="noStrike"/>
             </a:lvl5pPr>
             <a:lvl6pPr indent="-228600" lvl="5" marL="2743200" marR="0" rtl="0" algn="l">
               <a:spcBef>
@@ -3591,7 +3591,7 @@
               </a:spcAft>
               <a:buSzPts val="1400"/>
               <a:buNone/>
-              <a:defRPr b="0" i="0" sz="1800" u="none" cap="none" strike="noStrike"/>
+              <a:defRPr b="0" i="0" sz="1440" u="none" cap="none" strike="noStrike"/>
             </a:lvl6pPr>
             <a:lvl7pPr indent="-228600" lvl="6" marL="3200400" marR="0" rtl="0" algn="l">
               <a:spcBef>
@@ -3602,7 +3602,7 @@
               </a:spcAft>
               <a:buSzPts val="1400"/>
               <a:buNone/>
-              <a:defRPr b="0" i="0" sz="1800" u="none" cap="none" strike="noStrike"/>
+              <a:defRPr b="0" i="0" sz="1440" u="none" cap="none" strike="noStrike"/>
             </a:lvl7pPr>
             <a:lvl8pPr indent="-228600" lvl="7" marL="3657600" marR="0" rtl="0" algn="l">
               <a:spcBef>
@@ -3613,7 +3613,7 @@
               </a:spcAft>
               <a:buSzPts val="1400"/>
               <a:buNone/>
-              <a:defRPr b="0" i="0" sz="1800" u="none" cap="none" strike="noStrike"/>
+              <a:defRPr b="0" i="0" sz="1440" u="none" cap="none" strike="noStrike"/>
             </a:lvl8pPr>
             <a:lvl9pPr indent="-228600" lvl="8" marL="4114800" marR="0" rtl="0" algn="l">
               <a:spcBef>
@@ -3624,7 +3624,7 @@
               </a:spcAft>
               <a:buSzPts val="1400"/>
               <a:buNone/>
-              <a:defRPr b="0" i="0" sz="1800" u="none" cap="none" strike="noStrike"/>
+              <a:defRPr b="0" i="0" sz="1440" u="none" cap="none" strike="noStrike"/>
             </a:lvl9pPr>
           </a:lstStyle>
           <a:p/>
@@ -3640,7 +3640,7 @@
         </p:nvSpPr>
         <p:spPr>
           <a:xfrm>
-            <a:off x="5152680" y="4059360"/>
+            <a:off x="5152680" y="4402260"/>
             <a:ext cx="4426920" cy="2091240"/>
           </a:xfrm>
           <a:prstGeom prst="rect">
@@ -3663,7 +3663,7 @@
               </a:spcAft>
               <a:buSzPts val="1400"/>
               <a:buNone/>
-              <a:defRPr b="0" i="0" sz="1800" u="none" cap="none" strike="noStrike"/>
+              <a:defRPr b="0" i="0" sz="1440" u="none" cap="none" strike="noStrike"/>
             </a:lvl1pPr>
             <a:lvl2pPr indent="-228600" lvl="1" marL="914400" marR="0" rtl="0" algn="l">
               <a:spcBef>
@@ -3674,7 +3674,7 @@
               </a:spcAft>
               <a:buSzPts val="1400"/>
               <a:buNone/>
-              <a:defRPr b="0" i="0" sz="1800" u="none" cap="none" strike="noStrike"/>
+              <a:defRPr b="0" i="0" sz="1440" u="none" cap="none" strike="noStrike"/>
             </a:lvl2pPr>
             <a:lvl3pPr indent="-228600" lvl="2" marL="1371600" marR="0" rtl="0" algn="l">
               <a:spcBef>
@@ -3685,7 +3685,7 @@
               </a:spcAft>
               <a:buSzPts val="1400"/>
               <a:buNone/>
-              <a:defRPr b="0" i="0" sz="1800" u="none" cap="none" strike="noStrike"/>
+              <a:defRPr b="0" i="0" sz="1440" u="none" cap="none" strike="noStrike"/>
             </a:lvl3pPr>
             <a:lvl4pPr indent="-228600" lvl="3" marL="1828800" marR="0" rtl="0" algn="l">
               <a:spcBef>
@@ -3696,7 +3696,7 @@
               </a:spcAft>
               <a:buSzPts val="1400"/>
               <a:buNone/>
-              <a:defRPr b="0" i="0" sz="1800" u="none" cap="none" strike="noStrike"/>
+              <a:defRPr b="0" i="0" sz="1440" u="none" cap="none" strike="noStrike"/>
             </a:lvl4pPr>
             <a:lvl5pPr indent="-228600" lvl="4" marL="2286000" marR="0" rtl="0" algn="l">
               <a:spcBef>
@@ -3707,7 +3707,7 @@
               </a:spcAft>
               <a:buSzPts val="1400"/>
               <a:buNone/>
-              <a:defRPr b="0" i="0" sz="1800" u="none" cap="none" strike="noStrike"/>
+              <a:defRPr b="0" i="0" sz="1440" u="none" cap="none" strike="noStrike"/>
             </a:lvl5pPr>
             <a:lvl6pPr indent="-228600" lvl="5" marL="2743200" marR="0" rtl="0" algn="l">
               <a:spcBef>
@@ -3718,7 +3718,7 @@
               </a:spcAft>
               <a:buSzPts val="1400"/>
               <a:buNone/>
-              <a:defRPr b="0" i="0" sz="1800" u="none" cap="none" strike="noStrike"/>
+              <a:defRPr b="0" i="0" sz="1440" u="none" cap="none" strike="noStrike"/>
             </a:lvl6pPr>
             <a:lvl7pPr indent="-228600" lvl="6" marL="3200400" marR="0" rtl="0" algn="l">
               <a:spcBef>
@@ -3729,7 +3729,7 @@
               </a:spcAft>
               <a:buSzPts val="1400"/>
               <a:buNone/>
-              <a:defRPr b="0" i="0" sz="1800" u="none" cap="none" strike="noStrike"/>
+              <a:defRPr b="0" i="0" sz="1440" u="none" cap="none" strike="noStrike"/>
             </a:lvl7pPr>
             <a:lvl8pPr indent="-228600" lvl="7" marL="3657600" marR="0" rtl="0" algn="l">
               <a:spcBef>
@@ -3740,7 +3740,7 @@
               </a:spcAft>
               <a:buSzPts val="1400"/>
               <a:buNone/>
-              <a:defRPr b="0" i="0" sz="1800" u="none" cap="none" strike="noStrike"/>
+              <a:defRPr b="0" i="0" sz="1440" u="none" cap="none" strike="noStrike"/>
             </a:lvl8pPr>
             <a:lvl9pPr indent="-228600" lvl="8" marL="4114800" marR="0" rtl="0" algn="l">
               <a:spcBef>
@@ -3751,7 +3751,7 @@
               </a:spcAft>
               <a:buSzPts val="1400"/>
               <a:buNone/>
-              <a:defRPr b="0" i="0" sz="1800" u="none" cap="none" strike="noStrike"/>
+              <a:defRPr b="0" i="0" sz="1440" u="none" cap="none" strike="noStrike"/>
             </a:lvl9pPr>
           </a:lstStyle>
           <a:p/>
@@ -3767,7 +3767,7 @@
         </p:nvSpPr>
         <p:spPr>
           <a:xfrm>
-            <a:off x="504000" y="4059360"/>
+            <a:off x="504000" y="4402260"/>
             <a:ext cx="4426920" cy="2091240"/>
           </a:xfrm>
           <a:prstGeom prst="rect">
@@ -3790,7 +3790,7 @@
               </a:spcAft>
               <a:buSzPts val="1400"/>
               <a:buNone/>
-              <a:defRPr b="0" i="0" sz="1800" u="none" cap="none" strike="noStrike"/>
+              <a:defRPr b="0" i="0" sz="1440" u="none" cap="none" strike="noStrike"/>
             </a:lvl1pPr>
             <a:lvl2pPr indent="-228600" lvl="1" marL="914400" marR="0" rtl="0" algn="l">
               <a:spcBef>
@@ -3801,7 +3801,7 @@
               </a:spcAft>
               <a:buSzPts val="1400"/>
               <a:buNone/>
-              <a:defRPr b="0" i="0" sz="1800" u="none" cap="none" strike="noStrike"/>
+              <a:defRPr b="0" i="0" sz="1440" u="none" cap="none" strike="noStrike"/>
             </a:lvl2pPr>
             <a:lvl3pPr indent="-228600" lvl="2" marL="1371600" marR="0" rtl="0" algn="l">
               <a:spcBef>
@@ -3812,7 +3812,7 @@
               </a:spcAft>
               <a:buSzPts val="1400"/>
               <a:buNone/>
-              <a:defRPr b="0" i="0" sz="1800" u="none" cap="none" strike="noStrike"/>
+              <a:defRPr b="0" i="0" sz="1440" u="none" cap="none" strike="noStrike"/>
             </a:lvl3pPr>
             <a:lvl4pPr indent="-228600" lvl="3" marL="1828800" marR="0" rtl="0" algn="l">
               <a:spcBef>
@@ -3823,7 +3823,7 @@
               </a:spcAft>
               <a:buSzPts val="1400"/>
               <a:buNone/>
-              <a:defRPr b="0" i="0" sz="1800" u="none" cap="none" strike="noStrike"/>
+              <a:defRPr b="0" i="0" sz="1440" u="none" cap="none" strike="noStrike"/>
             </a:lvl4pPr>
             <a:lvl5pPr indent="-228600" lvl="4" marL="2286000" marR="0" rtl="0" algn="l">
               <a:spcBef>
@@ -3834,7 +3834,7 @@
               </a:spcAft>
               <a:buSzPts val="1400"/>
               <a:buNone/>
-              <a:defRPr b="0" i="0" sz="1800" u="none" cap="none" strike="noStrike"/>
+              <a:defRPr b="0" i="0" sz="1440" u="none" cap="none" strike="noStrike"/>
             </a:lvl5pPr>
             <a:lvl6pPr indent="-228600" lvl="5" marL="2743200" marR="0" rtl="0" algn="l">
               <a:spcBef>
@@ -3845,7 +3845,7 @@
               </a:spcAft>
               <a:buSzPts val="1400"/>
               <a:buNone/>
-              <a:defRPr b="0" i="0" sz="1800" u="none" cap="none" strike="noStrike"/>
+              <a:defRPr b="0" i="0" sz="1440" u="none" cap="none" strike="noStrike"/>
             </a:lvl6pPr>
             <a:lvl7pPr indent="-228600" lvl="6" marL="3200400" marR="0" rtl="0" algn="l">
               <a:spcBef>
@@ -3856,7 +3856,7 @@
               </a:spcAft>
               <a:buSzPts val="1400"/>
               <a:buNone/>
-              <a:defRPr b="0" i="0" sz="1800" u="none" cap="none" strike="noStrike"/>
+              <a:defRPr b="0" i="0" sz="1440" u="none" cap="none" strike="noStrike"/>
             </a:lvl7pPr>
             <a:lvl8pPr indent="-228600" lvl="7" marL="3657600" marR="0" rtl="0" algn="l">
               <a:spcBef>
@@ -3867,7 +3867,7 @@
               </a:spcAft>
               <a:buSzPts val="1400"/>
               <a:buNone/>
-              <a:defRPr b="0" i="0" sz="1800" u="none" cap="none" strike="noStrike"/>
+              <a:defRPr b="0" i="0" sz="1440" u="none" cap="none" strike="noStrike"/>
             </a:lvl8pPr>
             <a:lvl9pPr indent="-228600" lvl="8" marL="4114800" marR="0" rtl="0" algn="l">
               <a:spcBef>
@@ -3878,7 +3878,7 @@
               </a:spcAft>
               <a:buSzPts val="1400"/>
               <a:buNone/>
-              <a:defRPr b="0" i="0" sz="1800" u="none" cap="none" strike="noStrike"/>
+              <a:defRPr b="0" i="0" sz="1440" u="none" cap="none" strike="noStrike"/>
             </a:lvl9pPr>
           </a:lstStyle>
           <a:p/>
@@ -3919,7 +3919,7 @@
         </p:nvSpPr>
         <p:spPr>
           <a:xfrm>
-            <a:off x="504000" y="301320"/>
+            <a:off x="504000" y="644220"/>
             <a:ext cx="9071640" cy="1262160"/>
           </a:xfrm>
           <a:prstGeom prst="rect">
@@ -3942,7 +3942,7 @@
               </a:spcAft>
               <a:buSzPts val="1400"/>
               <a:buNone/>
-              <a:defRPr b="0" i="0" sz="1800" u="none" cap="none" strike="noStrike"/>
+              <a:defRPr b="0" i="0" sz="1440" u="none" cap="none" strike="noStrike"/>
             </a:lvl1pPr>
             <a:lvl2pPr lvl="1" marR="0" rtl="0" algn="l">
               <a:spcBef>
@@ -3953,7 +3953,7 @@
               </a:spcAft>
               <a:buSzPts val="1400"/>
               <a:buNone/>
-              <a:defRPr b="0" i="0" sz="1800" u="none" cap="none" strike="noStrike"/>
+              <a:defRPr b="0" i="0" sz="1440" u="none" cap="none" strike="noStrike"/>
             </a:lvl2pPr>
             <a:lvl3pPr lvl="2" marR="0" rtl="0" algn="l">
               <a:spcBef>
@@ -3964,7 +3964,7 @@
               </a:spcAft>
               <a:buSzPts val="1400"/>
               <a:buNone/>
-              <a:defRPr b="0" i="0" sz="1800" u="none" cap="none" strike="noStrike"/>
+              <a:defRPr b="0" i="0" sz="1440" u="none" cap="none" strike="noStrike"/>
             </a:lvl3pPr>
             <a:lvl4pPr lvl="3" marR="0" rtl="0" algn="l">
               <a:spcBef>
@@ -3975,7 +3975,7 @@
               </a:spcAft>
               <a:buSzPts val="1400"/>
               <a:buNone/>
-              <a:defRPr b="0" i="0" sz="1800" u="none" cap="none" strike="noStrike"/>
+              <a:defRPr b="0" i="0" sz="1440" u="none" cap="none" strike="noStrike"/>
             </a:lvl4pPr>
             <a:lvl5pPr lvl="4" marR="0" rtl="0" algn="l">
               <a:spcBef>
@@ -3986,7 +3986,7 @@
               </a:spcAft>
               <a:buSzPts val="1400"/>
               <a:buNone/>
-              <a:defRPr b="0" i="0" sz="1800" u="none" cap="none" strike="noStrike"/>
+              <a:defRPr b="0" i="0" sz="1440" u="none" cap="none" strike="noStrike"/>
             </a:lvl5pPr>
             <a:lvl6pPr lvl="5" marR="0" rtl="0" algn="l">
               <a:spcBef>
@@ -3997,7 +3997,7 @@
               </a:spcAft>
               <a:buSzPts val="1400"/>
               <a:buNone/>
-              <a:defRPr b="0" i="0" sz="1800" u="none" cap="none" strike="noStrike"/>
+              <a:defRPr b="0" i="0" sz="1440" u="none" cap="none" strike="noStrike"/>
             </a:lvl6pPr>
             <a:lvl7pPr lvl="6" marR="0" rtl="0" algn="l">
               <a:spcBef>
@@ -4008,7 +4008,7 @@
               </a:spcAft>
               <a:buSzPts val="1400"/>
               <a:buNone/>
-              <a:defRPr b="0" i="0" sz="1800" u="none" cap="none" strike="noStrike"/>
+              <a:defRPr b="0" i="0" sz="1440" u="none" cap="none" strike="noStrike"/>
             </a:lvl7pPr>
             <a:lvl8pPr lvl="7" marR="0" rtl="0" algn="l">
               <a:spcBef>
@@ -4019,7 +4019,7 @@
               </a:spcAft>
               <a:buSzPts val="1400"/>
               <a:buNone/>
-              <a:defRPr b="0" i="0" sz="1800" u="none" cap="none" strike="noStrike"/>
+              <a:defRPr b="0" i="0" sz="1440" u="none" cap="none" strike="noStrike"/>
             </a:lvl8pPr>
             <a:lvl9pPr lvl="8" marR="0" rtl="0" algn="l">
               <a:spcBef>
@@ -4030,7 +4030,7 @@
               </a:spcAft>
               <a:buSzPts val="1400"/>
               <a:buNone/>
-              <a:defRPr b="0" i="0" sz="1800" u="none" cap="none" strike="noStrike"/>
+              <a:defRPr b="0" i="0" sz="1440" u="none" cap="none" strike="noStrike"/>
             </a:lvl9pPr>
           </a:lstStyle>
           <a:p/>
@@ -4046,7 +4046,7 @@
         </p:nvSpPr>
         <p:spPr>
           <a:xfrm>
-            <a:off x="504000" y="1769040"/>
+            <a:off x="504000" y="2111940"/>
             <a:ext cx="9071640" cy="4384440"/>
           </a:xfrm>
           <a:prstGeom prst="rect">
@@ -4069,7 +4069,7 @@
               </a:spcAft>
               <a:buSzPts val="1400"/>
               <a:buNone/>
-              <a:defRPr b="0" i="0" sz="1800" u="none" cap="none" strike="noStrike"/>
+              <a:defRPr b="0" i="0" sz="1440" u="none" cap="none" strike="noStrike"/>
             </a:lvl1pPr>
             <a:lvl2pPr indent="-228600" lvl="1" marL="914400" marR="0" rtl="0" algn="l">
               <a:spcBef>
@@ -4080,7 +4080,7 @@
               </a:spcAft>
               <a:buSzPts val="1400"/>
               <a:buNone/>
-              <a:defRPr b="0" i="0" sz="1800" u="none" cap="none" strike="noStrike"/>
+              <a:defRPr b="0" i="0" sz="1440" u="none" cap="none" strike="noStrike"/>
             </a:lvl2pPr>
             <a:lvl3pPr indent="-228600" lvl="2" marL="1371600" marR="0" rtl="0" algn="l">
               <a:spcBef>
@@ -4091,7 +4091,7 @@
               </a:spcAft>
               <a:buSzPts val="1400"/>
               <a:buNone/>
-              <a:defRPr b="0" i="0" sz="1800" u="none" cap="none" strike="noStrike"/>
+              <a:defRPr b="0" i="0" sz="1440" u="none" cap="none" strike="noStrike"/>
             </a:lvl3pPr>
             <a:lvl4pPr indent="-228600" lvl="3" marL="1828800" marR="0" rtl="0" algn="l">
               <a:spcBef>
@@ -4102,7 +4102,7 @@
               </a:spcAft>
               <a:buSzPts val="1400"/>
               <a:buNone/>
-              <a:defRPr b="0" i="0" sz="1800" u="none" cap="none" strike="noStrike"/>
+              <a:defRPr b="0" i="0" sz="1440" u="none" cap="none" strike="noStrike"/>
             </a:lvl4pPr>
             <a:lvl5pPr indent="-228600" lvl="4" marL="2286000" marR="0" rtl="0" algn="l">
               <a:spcBef>
@@ -4113,7 +4113,7 @@
               </a:spcAft>
               <a:buSzPts val="1400"/>
               <a:buNone/>
-              <a:defRPr b="0" i="0" sz="1800" u="none" cap="none" strike="noStrike"/>
+              <a:defRPr b="0" i="0" sz="1440" u="none" cap="none" strike="noStrike"/>
             </a:lvl5pPr>
             <a:lvl6pPr indent="-228600" lvl="5" marL="2743200" marR="0" rtl="0" algn="l">
               <a:spcBef>
@@ -4124,7 +4124,7 @@
               </a:spcAft>
               <a:buSzPts val="1400"/>
               <a:buNone/>
-              <a:defRPr b="0" i="0" sz="1800" u="none" cap="none" strike="noStrike"/>
+              <a:defRPr b="0" i="0" sz="1440" u="none" cap="none" strike="noStrike"/>
             </a:lvl6pPr>
             <a:lvl7pPr indent="-228600" lvl="6" marL="3200400" marR="0" rtl="0" algn="l">
               <a:spcBef>
@@ -4135,7 +4135,7 @@
               </a:spcAft>
               <a:buSzPts val="1400"/>
               <a:buNone/>
-              <a:defRPr b="0" i="0" sz="1800" u="none" cap="none" strike="noStrike"/>
+              <a:defRPr b="0" i="0" sz="1440" u="none" cap="none" strike="noStrike"/>
             </a:lvl7pPr>
             <a:lvl8pPr indent="-228600" lvl="7" marL="3657600" marR="0" rtl="0" algn="l">
               <a:spcBef>
@@ -4146,7 +4146,7 @@
               </a:spcAft>
               <a:buSzPts val="1400"/>
               <a:buNone/>
-              <a:defRPr b="0" i="0" sz="1800" u="none" cap="none" strike="noStrike"/>
+              <a:defRPr b="0" i="0" sz="1440" u="none" cap="none" strike="noStrike"/>
             </a:lvl8pPr>
             <a:lvl9pPr indent="-228600" lvl="8" marL="4114800" marR="0" rtl="0" algn="l">
               <a:spcBef>
@@ -4157,7 +4157,7 @@
               </a:spcAft>
               <a:buSzPts val="1400"/>
               <a:buNone/>
-              <a:defRPr b="0" i="0" sz="1800" u="none" cap="none" strike="noStrike"/>
+              <a:defRPr b="0" i="0" sz="1440" u="none" cap="none" strike="noStrike"/>
             </a:lvl9pPr>
           </a:lstStyle>
           <a:p/>
@@ -4173,7 +4173,7 @@
         </p:nvSpPr>
         <p:spPr>
           <a:xfrm>
-            <a:off x="504000" y="1769040"/>
+            <a:off x="504000" y="2111940"/>
             <a:ext cx="9071640" cy="4384440"/>
           </a:xfrm>
           <a:prstGeom prst="rect">
@@ -4196,7 +4196,7 @@
               </a:spcAft>
               <a:buSzPts val="1400"/>
               <a:buNone/>
-              <a:defRPr b="0" i="0" sz="1800" u="none" cap="none" strike="noStrike"/>
+              <a:defRPr b="0" i="0" sz="1440" u="none" cap="none" strike="noStrike"/>
             </a:lvl1pPr>
             <a:lvl2pPr indent="-228600" lvl="1" marL="914400" marR="0" rtl="0" algn="l">
               <a:spcBef>
@@ -4207,7 +4207,7 @@
               </a:spcAft>
               <a:buSzPts val="1400"/>
               <a:buNone/>
-              <a:defRPr b="0" i="0" sz="1800" u="none" cap="none" strike="noStrike"/>
+              <a:defRPr b="0" i="0" sz="1440" u="none" cap="none" strike="noStrike"/>
             </a:lvl2pPr>
             <a:lvl3pPr indent="-228600" lvl="2" marL="1371600" marR="0" rtl="0" algn="l">
               <a:spcBef>
@@ -4218,7 +4218,7 @@
               </a:spcAft>
               <a:buSzPts val="1400"/>
               <a:buNone/>
-              <a:defRPr b="0" i="0" sz="1800" u="none" cap="none" strike="noStrike"/>
+              <a:defRPr b="0" i="0" sz="1440" u="none" cap="none" strike="noStrike"/>
             </a:lvl3pPr>
             <a:lvl4pPr indent="-228600" lvl="3" marL="1828800" marR="0" rtl="0" algn="l">
               <a:spcBef>
@@ -4229,7 +4229,7 @@
               </a:spcAft>
               <a:buSzPts val="1400"/>
               <a:buNone/>
-              <a:defRPr b="0" i="0" sz="1800" u="none" cap="none" strike="noStrike"/>
+              <a:defRPr b="0" i="0" sz="1440" u="none" cap="none" strike="noStrike"/>
             </a:lvl4pPr>
             <a:lvl5pPr indent="-228600" lvl="4" marL="2286000" marR="0" rtl="0" algn="l">
               <a:spcBef>
@@ -4240,7 +4240,7 @@
               </a:spcAft>
               <a:buSzPts val="1400"/>
               <a:buNone/>
-              <a:defRPr b="0" i="0" sz="1800" u="none" cap="none" strike="noStrike"/>
+              <a:defRPr b="0" i="0" sz="1440" u="none" cap="none" strike="noStrike"/>
             </a:lvl5pPr>
             <a:lvl6pPr indent="-228600" lvl="5" marL="2743200" marR="0" rtl="0" algn="l">
               <a:spcBef>
@@ -4251,7 +4251,7 @@
               </a:spcAft>
               <a:buSzPts val="1400"/>
               <a:buNone/>
-              <a:defRPr b="0" i="0" sz="1800" u="none" cap="none" strike="noStrike"/>
+              <a:defRPr b="0" i="0" sz="1440" u="none" cap="none" strike="noStrike"/>
             </a:lvl6pPr>
             <a:lvl7pPr indent="-228600" lvl="6" marL="3200400" marR="0" rtl="0" algn="l">
               <a:spcBef>
@@ -4262,7 +4262,7 @@
               </a:spcAft>
               <a:buSzPts val="1400"/>
               <a:buNone/>
-              <a:defRPr b="0" i="0" sz="1800" u="none" cap="none" strike="noStrike"/>
+              <a:defRPr b="0" i="0" sz="1440" u="none" cap="none" strike="noStrike"/>
             </a:lvl7pPr>
             <a:lvl8pPr indent="-228600" lvl="7" marL="3657600" marR="0" rtl="0" algn="l">
               <a:spcBef>
@@ -4273,7 +4273,7 @@
               </a:spcAft>
               <a:buSzPts val="1400"/>
               <a:buNone/>
-              <a:defRPr b="0" i="0" sz="1800" u="none" cap="none" strike="noStrike"/>
+              <a:defRPr b="0" i="0" sz="1440" u="none" cap="none" strike="noStrike"/>
             </a:lvl8pPr>
             <a:lvl9pPr indent="-228600" lvl="8" marL="4114800" marR="0" rtl="0" algn="l">
               <a:spcBef>
@@ -4284,7 +4284,7 @@
               </a:spcAft>
               <a:buSzPts val="1400"/>
               <a:buNone/>
-              <a:defRPr b="0" i="0" sz="1800" u="none" cap="none" strike="noStrike"/>
+              <a:defRPr b="0" i="0" sz="1440" u="none" cap="none" strike="noStrike"/>
             </a:lvl9pPr>
           </a:lstStyle>
           <a:p/>
@@ -4298,7 +4298,7 @@
         </p:nvSpPr>
         <p:spPr>
           <a:xfrm>
-            <a:off x="504000" y="1769040"/>
+            <a:off x="504000" y="2111940"/>
             <a:ext cx="9071640" cy="4384440"/>
           </a:xfrm>
           <a:prstGeom prst="rect">
@@ -4318,7 +4318,7 @@
         </p:nvSpPr>
         <p:spPr>
           <a:xfrm>
-            <a:off x="504000" y="1769040"/>
+            <a:off x="504000" y="2111940"/>
             <a:ext cx="9071640" cy="4384440"/>
           </a:xfrm>
           <a:prstGeom prst="rect">
@@ -4365,7 +4365,7 @@
         </p:nvSpPr>
         <p:spPr>
           <a:xfrm>
-            <a:off x="504000" y="301320"/>
+            <a:off x="504000" y="644220"/>
             <a:ext cx="9071640" cy="1262160"/>
           </a:xfrm>
           <a:prstGeom prst="rect">
@@ -4388,7 +4388,7 @@
               </a:spcAft>
               <a:buSzPts val="1400"/>
               <a:buNone/>
-              <a:defRPr b="0" i="0" sz="1800" u="none" cap="none" strike="noStrike"/>
+              <a:defRPr b="0" i="0" sz="1440" u="none" cap="none" strike="noStrike"/>
             </a:lvl1pPr>
             <a:lvl2pPr lvl="1" marR="0" rtl="0" algn="l">
               <a:spcBef>
@@ -4399,7 +4399,7 @@
               </a:spcAft>
               <a:buSzPts val="1400"/>
               <a:buNone/>
-              <a:defRPr b="0" i="0" sz="1800" u="none" cap="none" strike="noStrike"/>
+              <a:defRPr b="0" i="0" sz="1440" u="none" cap="none" strike="noStrike"/>
             </a:lvl2pPr>
             <a:lvl3pPr lvl="2" marR="0" rtl="0" algn="l">
               <a:spcBef>
@@ -4410,7 +4410,7 @@
               </a:spcAft>
               <a:buSzPts val="1400"/>
               <a:buNone/>
-              <a:defRPr b="0" i="0" sz="1800" u="none" cap="none" strike="noStrike"/>
+              <a:defRPr b="0" i="0" sz="1440" u="none" cap="none" strike="noStrike"/>
             </a:lvl3pPr>
             <a:lvl4pPr lvl="3" marR="0" rtl="0" algn="l">
               <a:spcBef>
@@ -4421,7 +4421,7 @@
               </a:spcAft>
               <a:buSzPts val="1400"/>
               <a:buNone/>
-              <a:defRPr b="0" i="0" sz="1800" u="none" cap="none" strike="noStrike"/>
+              <a:defRPr b="0" i="0" sz="1440" u="none" cap="none" strike="noStrike"/>
             </a:lvl4pPr>
             <a:lvl5pPr lvl="4" marR="0" rtl="0" algn="l">
               <a:spcBef>
@@ -4432,7 +4432,7 @@
               </a:spcAft>
               <a:buSzPts val="1400"/>
               <a:buNone/>
-              <a:defRPr b="0" i="0" sz="1800" u="none" cap="none" strike="noStrike"/>
+              <a:defRPr b="0" i="0" sz="1440" u="none" cap="none" strike="noStrike"/>
             </a:lvl5pPr>
             <a:lvl6pPr lvl="5" marR="0" rtl="0" algn="l">
               <a:spcBef>
@@ -4443,7 +4443,7 @@
               </a:spcAft>
               <a:buSzPts val="1400"/>
               <a:buNone/>
-              <a:defRPr b="0" i="0" sz="1800" u="none" cap="none" strike="noStrike"/>
+              <a:defRPr b="0" i="0" sz="1440" u="none" cap="none" strike="noStrike"/>
             </a:lvl6pPr>
             <a:lvl7pPr lvl="6" marR="0" rtl="0" algn="l">
               <a:spcBef>
@@ -4454,7 +4454,7 @@
               </a:spcAft>
               <a:buSzPts val="1400"/>
               <a:buNone/>
-              <a:defRPr b="0" i="0" sz="1800" u="none" cap="none" strike="noStrike"/>
+              <a:defRPr b="0" i="0" sz="1440" u="none" cap="none" strike="noStrike"/>
             </a:lvl7pPr>
             <a:lvl8pPr lvl="7" marR="0" rtl="0" algn="l">
               <a:spcBef>
@@ -4465,7 +4465,7 @@
               </a:spcAft>
               <a:buSzPts val="1400"/>
               <a:buNone/>
-              <a:defRPr b="0" i="0" sz="1800" u="none" cap="none" strike="noStrike"/>
+              <a:defRPr b="0" i="0" sz="1440" u="none" cap="none" strike="noStrike"/>
             </a:lvl8pPr>
             <a:lvl9pPr lvl="8" marR="0" rtl="0" algn="l">
               <a:spcBef>
@@ -4476,7 +4476,7 @@
               </a:spcAft>
               <a:buSzPts val="1400"/>
               <a:buNone/>
-              <a:defRPr b="0" i="0" sz="1800" u="none" cap="none" strike="noStrike"/>
+              <a:defRPr b="0" i="0" sz="1440" u="none" cap="none" strike="noStrike"/>
             </a:lvl9pPr>
           </a:lstStyle>
           <a:p/>
@@ -4492,7 +4492,7 @@
         </p:nvSpPr>
         <p:spPr>
           <a:xfrm>
-            <a:off x="504000" y="1769040"/>
+            <a:off x="504000" y="2111940"/>
             <a:ext cx="9071640" cy="4384440"/>
           </a:xfrm>
           <a:prstGeom prst="rect">
@@ -4515,7 +4515,7 @@
               </a:spcAft>
               <a:buSzPts val="1400"/>
               <a:buNone/>
-              <a:defRPr b="0" i="0" sz="1800" u="none" cap="none" strike="noStrike"/>
+              <a:defRPr b="0" i="0" sz="1440" u="none" cap="none" strike="noStrike"/>
             </a:lvl1pPr>
             <a:lvl2pPr indent="-228600" lvl="1" marL="914400" marR="0" rtl="0" algn="l">
               <a:spcBef>
@@ -4526,7 +4526,7 @@
               </a:spcAft>
               <a:buSzPts val="1400"/>
               <a:buNone/>
-              <a:defRPr b="0" i="0" sz="1800" u="none" cap="none" strike="noStrike"/>
+              <a:defRPr b="0" i="0" sz="1440" u="none" cap="none" strike="noStrike"/>
             </a:lvl2pPr>
             <a:lvl3pPr indent="-228600" lvl="2" marL="1371600" marR="0" rtl="0" algn="l">
               <a:spcBef>
@@ -4537,7 +4537,7 @@
               </a:spcAft>
               <a:buSzPts val="1400"/>
               <a:buNone/>
-              <a:defRPr b="0" i="0" sz="1800" u="none" cap="none" strike="noStrike"/>
+              <a:defRPr b="0" i="0" sz="1440" u="none" cap="none" strike="noStrike"/>
             </a:lvl3pPr>
             <a:lvl4pPr indent="-228600" lvl="3" marL="1828800" marR="0" rtl="0" algn="l">
               <a:spcBef>
@@ -4548,7 +4548,7 @@
               </a:spcAft>
               <a:buSzPts val="1400"/>
               <a:buNone/>
-              <a:defRPr b="0" i="0" sz="1800" u="none" cap="none" strike="noStrike"/>
+              <a:defRPr b="0" i="0" sz="1440" u="none" cap="none" strike="noStrike"/>
             </a:lvl4pPr>
             <a:lvl5pPr indent="-228600" lvl="4" marL="2286000" marR="0" rtl="0" algn="l">
               <a:spcBef>
@@ -4559,7 +4559,7 @@
               </a:spcAft>
               <a:buSzPts val="1400"/>
               <a:buNone/>
-              <a:defRPr b="0" i="0" sz="1800" u="none" cap="none" strike="noStrike"/>
+              <a:defRPr b="0" i="0" sz="1440" u="none" cap="none" strike="noStrike"/>
             </a:lvl5pPr>
             <a:lvl6pPr indent="-228600" lvl="5" marL="2743200" marR="0" rtl="0" algn="l">
               <a:spcBef>
@@ -4570,7 +4570,7 @@
               </a:spcAft>
               <a:buSzPts val="1400"/>
               <a:buNone/>
-              <a:defRPr b="0" i="0" sz="1800" u="none" cap="none" strike="noStrike"/>
+              <a:defRPr b="0" i="0" sz="1440" u="none" cap="none" strike="noStrike"/>
             </a:lvl6pPr>
             <a:lvl7pPr indent="-228600" lvl="6" marL="3200400" marR="0" rtl="0" algn="l">
               <a:spcBef>
@@ -4581,7 +4581,7 @@
               </a:spcAft>
               <a:buSzPts val="1400"/>
               <a:buNone/>
-              <a:defRPr b="0" i="0" sz="1800" u="none" cap="none" strike="noStrike"/>
+              <a:defRPr b="0" i="0" sz="1440" u="none" cap="none" strike="noStrike"/>
             </a:lvl7pPr>
             <a:lvl8pPr indent="-228600" lvl="7" marL="3657600" marR="0" rtl="0" algn="l">
               <a:spcBef>
@@ -4592,7 +4592,7 @@
               </a:spcAft>
               <a:buSzPts val="1400"/>
               <a:buNone/>
-              <a:defRPr b="0" i="0" sz="1800" u="none" cap="none" strike="noStrike"/>
+              <a:defRPr b="0" i="0" sz="1440" u="none" cap="none" strike="noStrike"/>
             </a:lvl8pPr>
             <a:lvl9pPr indent="-228600" lvl="8" marL="4114800" marR="0" rtl="0" algn="l">
               <a:spcBef>
@@ -4603,7 +4603,7 @@
               </a:spcAft>
               <a:buSzPts val="1400"/>
               <a:buNone/>
-              <a:defRPr b="0" i="0" sz="1800" u="none" cap="none" strike="noStrike"/>
+              <a:defRPr b="0" i="0" sz="1440" u="none" cap="none" strike="noStrike"/>
             </a:lvl9pPr>
           </a:lstStyle>
           <a:p/>
@@ -4669,7 +4669,7 @@
         </p:nvSpPr>
         <p:spPr>
           <a:xfrm>
-            <a:off x="504000" y="301320"/>
+            <a:off x="504000" y="644220"/>
             <a:ext cx="9071640" cy="1262160"/>
           </a:xfrm>
           <a:prstGeom prst="rect">
@@ -4692,7 +4692,7 @@
               </a:spcAft>
               <a:buSzPts val="1400"/>
               <a:buNone/>
-              <a:defRPr b="0" i="0" sz="1800" u="none" cap="none" strike="noStrike"/>
+              <a:defRPr b="0" i="0" sz="1440" u="none" cap="none" strike="noStrike"/>
             </a:lvl1pPr>
             <a:lvl2pPr lvl="1" marR="0" rtl="0" algn="l">
               <a:spcBef>
@@ -4703,7 +4703,7 @@
               </a:spcAft>
               <a:buSzPts val="1400"/>
               <a:buNone/>
-              <a:defRPr b="0" i="0" sz="1800" u="none" cap="none" strike="noStrike"/>
+              <a:defRPr b="0" i="0" sz="1440" u="none" cap="none" strike="noStrike"/>
             </a:lvl2pPr>
             <a:lvl3pPr lvl="2" marR="0" rtl="0" algn="l">
               <a:spcBef>
@@ -4714,7 +4714,7 @@
               </a:spcAft>
               <a:buSzPts val="1400"/>
               <a:buNone/>
-              <a:defRPr b="0" i="0" sz="1800" u="none" cap="none" strike="noStrike"/>
+              <a:defRPr b="0" i="0" sz="1440" u="none" cap="none" strike="noStrike"/>
             </a:lvl3pPr>
             <a:lvl4pPr lvl="3" marR="0" rtl="0" algn="l">
               <a:spcBef>
@@ -4725,7 +4725,7 @@
               </a:spcAft>
               <a:buSzPts val="1400"/>
               <a:buNone/>
-              <a:defRPr b="0" i="0" sz="1800" u="none" cap="none" strike="noStrike"/>
+              <a:defRPr b="0" i="0" sz="1440" u="none" cap="none" strike="noStrike"/>
             </a:lvl4pPr>
             <a:lvl5pPr lvl="4" marR="0" rtl="0" algn="l">
               <a:spcBef>
@@ -4736,7 +4736,7 @@
               </a:spcAft>
               <a:buSzPts val="1400"/>
               <a:buNone/>
-              <a:defRPr b="0" i="0" sz="1800" u="none" cap="none" strike="noStrike"/>
+              <a:defRPr b="0" i="0" sz="1440" u="none" cap="none" strike="noStrike"/>
             </a:lvl5pPr>
             <a:lvl6pPr lvl="5" marR="0" rtl="0" algn="l">
               <a:spcBef>
@@ -4747,7 +4747,7 @@
               </a:spcAft>
               <a:buSzPts val="1400"/>
               <a:buNone/>
-              <a:defRPr b="0" i="0" sz="1800" u="none" cap="none" strike="noStrike"/>
+              <a:defRPr b="0" i="0" sz="1440" u="none" cap="none" strike="noStrike"/>
             </a:lvl6pPr>
             <a:lvl7pPr lvl="6" marR="0" rtl="0" algn="l">
               <a:spcBef>
@@ -4758,7 +4758,7 @@
               </a:spcAft>
               <a:buSzPts val="1400"/>
               <a:buNone/>
-              <a:defRPr b="0" i="0" sz="1800" u="none" cap="none" strike="noStrike"/>
+              <a:defRPr b="0" i="0" sz="1440" u="none" cap="none" strike="noStrike"/>
             </a:lvl7pPr>
             <a:lvl8pPr lvl="7" marR="0" rtl="0" algn="l">
               <a:spcBef>
@@ -4769,7 +4769,7 @@
               </a:spcAft>
               <a:buSzPts val="1400"/>
               <a:buNone/>
-              <a:defRPr b="0" i="0" sz="1800" u="none" cap="none" strike="noStrike"/>
+              <a:defRPr b="0" i="0" sz="1440" u="none" cap="none" strike="noStrike"/>
             </a:lvl8pPr>
             <a:lvl9pPr lvl="8" marR="0" rtl="0" algn="l">
               <a:spcBef>
@@ -4780,7 +4780,7 @@
               </a:spcAft>
               <a:buSzPts val="1400"/>
               <a:buNone/>
-              <a:defRPr b="0" i="0" sz="1800" u="none" cap="none" strike="noStrike"/>
+              <a:defRPr b="0" i="0" sz="1440" u="none" cap="none" strike="noStrike"/>
             </a:lvl9pPr>
           </a:lstStyle>
           <a:p/>
@@ -4796,7 +4796,7 @@
         </p:nvSpPr>
         <p:spPr>
           <a:xfrm>
-            <a:off x="504000" y="1769040"/>
+            <a:off x="504000" y="2111940"/>
             <a:ext cx="4426920" cy="4384440"/>
           </a:xfrm>
           <a:prstGeom prst="rect">
@@ -4819,7 +4819,7 @@
               </a:spcAft>
               <a:buSzPts val="1400"/>
               <a:buNone/>
-              <a:defRPr b="0" i="0" sz="1800" u="none" cap="none" strike="noStrike"/>
+              <a:defRPr b="0" i="0" sz="1440" u="none" cap="none" strike="noStrike"/>
             </a:lvl1pPr>
             <a:lvl2pPr indent="-228600" lvl="1" marL="914400" marR="0" rtl="0" algn="l">
               <a:spcBef>
@@ -4830,7 +4830,7 @@
               </a:spcAft>
               <a:buSzPts val="1400"/>
               <a:buNone/>
-              <a:defRPr b="0" i="0" sz="1800" u="none" cap="none" strike="noStrike"/>
+              <a:defRPr b="0" i="0" sz="1440" u="none" cap="none" strike="noStrike"/>
             </a:lvl2pPr>
             <a:lvl3pPr indent="-228600" lvl="2" marL="1371600" marR="0" rtl="0" algn="l">
               <a:spcBef>
@@ -4841,7 +4841,7 @@
               </a:spcAft>
               <a:buSzPts val="1400"/>
               <a:buNone/>
-              <a:defRPr b="0" i="0" sz="1800" u="none" cap="none" strike="noStrike"/>
+              <a:defRPr b="0" i="0" sz="1440" u="none" cap="none" strike="noStrike"/>
             </a:lvl3pPr>
             <a:lvl4pPr indent="-228600" lvl="3" marL="1828800" marR="0" rtl="0" algn="l">
               <a:spcBef>
@@ -4852,7 +4852,7 @@
               </a:spcAft>
               <a:buSzPts val="1400"/>
               <a:buNone/>
-              <a:defRPr b="0" i="0" sz="1800" u="none" cap="none" strike="noStrike"/>
+              <a:defRPr b="0" i="0" sz="1440" u="none" cap="none" strike="noStrike"/>
             </a:lvl4pPr>
             <a:lvl5pPr indent="-228600" lvl="4" marL="2286000" marR="0" rtl="0" algn="l">
               <a:spcBef>
@@ -4863,7 +4863,7 @@
               </a:spcAft>
               <a:buSzPts val="1400"/>
               <a:buNone/>
-              <a:defRPr b="0" i="0" sz="1800" u="none" cap="none" strike="noStrike"/>
+              <a:defRPr b="0" i="0" sz="1440" u="none" cap="none" strike="noStrike"/>
             </a:lvl5pPr>
             <a:lvl6pPr indent="-228600" lvl="5" marL="2743200" marR="0" rtl="0" algn="l">
               <a:spcBef>
@@ -4874,7 +4874,7 @@
               </a:spcAft>
               <a:buSzPts val="1400"/>
               <a:buNone/>
-              <a:defRPr b="0" i="0" sz="1800" u="none" cap="none" strike="noStrike"/>
+              <a:defRPr b="0" i="0" sz="1440" u="none" cap="none" strike="noStrike"/>
             </a:lvl6pPr>
             <a:lvl7pPr indent="-228600" lvl="6" marL="3200400" marR="0" rtl="0" algn="l">
               <a:spcBef>
@@ -4885,7 +4885,7 @@
               </a:spcAft>
               <a:buSzPts val="1400"/>
               <a:buNone/>
-              <a:defRPr b="0" i="0" sz="1800" u="none" cap="none" strike="noStrike"/>
+              <a:defRPr b="0" i="0" sz="1440" u="none" cap="none" strike="noStrike"/>
             </a:lvl7pPr>
             <a:lvl8pPr indent="-228600" lvl="7" marL="3657600" marR="0" rtl="0" algn="l">
               <a:spcBef>
@@ -4896,7 +4896,7 @@
               </a:spcAft>
               <a:buSzPts val="1400"/>
               <a:buNone/>
-              <a:defRPr b="0" i="0" sz="1800" u="none" cap="none" strike="noStrike"/>
+              <a:defRPr b="0" i="0" sz="1440" u="none" cap="none" strike="noStrike"/>
             </a:lvl8pPr>
             <a:lvl9pPr indent="-228600" lvl="8" marL="4114800" marR="0" rtl="0" algn="l">
               <a:spcBef>
@@ -4907,7 +4907,7 @@
               </a:spcAft>
               <a:buSzPts val="1400"/>
               <a:buNone/>
-              <a:defRPr b="0" i="0" sz="1800" u="none" cap="none" strike="noStrike"/>
+              <a:defRPr b="0" i="0" sz="1440" u="none" cap="none" strike="noStrike"/>
             </a:lvl9pPr>
           </a:lstStyle>
           <a:p/>
@@ -4923,7 +4923,7 @@
         </p:nvSpPr>
         <p:spPr>
           <a:xfrm>
-            <a:off x="5152680" y="1769040"/>
+            <a:off x="5152680" y="2111940"/>
             <a:ext cx="4426920" cy="4384440"/>
           </a:xfrm>
           <a:prstGeom prst="rect">
@@ -4946,7 +4946,7 @@
               </a:spcAft>
               <a:buSzPts val="1400"/>
               <a:buNone/>
-              <a:defRPr b="0" i="0" sz="1800" u="none" cap="none" strike="noStrike"/>
+              <a:defRPr b="0" i="0" sz="1440" u="none" cap="none" strike="noStrike"/>
             </a:lvl1pPr>
             <a:lvl2pPr indent="-228600" lvl="1" marL="914400" marR="0" rtl="0" algn="l">
               <a:spcBef>
@@ -4957,7 +4957,7 @@
               </a:spcAft>
               <a:buSzPts val="1400"/>
               <a:buNone/>
-              <a:defRPr b="0" i="0" sz="1800" u="none" cap="none" strike="noStrike"/>
+              <a:defRPr b="0" i="0" sz="1440" u="none" cap="none" strike="noStrike"/>
             </a:lvl2pPr>
             <a:lvl3pPr indent="-228600" lvl="2" marL="1371600" marR="0" rtl="0" algn="l">
               <a:spcBef>
@@ -4968,7 +4968,7 @@
               </a:spcAft>
               <a:buSzPts val="1400"/>
               <a:buNone/>
-              <a:defRPr b="0" i="0" sz="1800" u="none" cap="none" strike="noStrike"/>
+              <a:defRPr b="0" i="0" sz="1440" u="none" cap="none" strike="noStrike"/>
             </a:lvl3pPr>
             <a:lvl4pPr indent="-228600" lvl="3" marL="1828800" marR="0" rtl="0" algn="l">
               <a:spcBef>
@@ -4979,7 +4979,7 @@
               </a:spcAft>
               <a:buSzPts val="1400"/>
               <a:buNone/>
-              <a:defRPr b="0" i="0" sz="1800" u="none" cap="none" strike="noStrike"/>
+              <a:defRPr b="0" i="0" sz="1440" u="none" cap="none" strike="noStrike"/>
             </a:lvl4pPr>
             <a:lvl5pPr indent="-228600" lvl="4" marL="2286000" marR="0" rtl="0" algn="l">
               <a:spcBef>
@@ -4990,7 +4990,7 @@
               </a:spcAft>
               <a:buSzPts val="1400"/>
               <a:buNone/>
-              <a:defRPr b="0" i="0" sz="1800" u="none" cap="none" strike="noStrike"/>
+              <a:defRPr b="0" i="0" sz="1440" u="none" cap="none" strike="noStrike"/>
             </a:lvl5pPr>
             <a:lvl6pPr indent="-228600" lvl="5" marL="2743200" marR="0" rtl="0" algn="l">
               <a:spcBef>
@@ -5001,7 +5001,7 @@
               </a:spcAft>
               <a:buSzPts val="1400"/>
               <a:buNone/>
-              <a:defRPr b="0" i="0" sz="1800" u="none" cap="none" strike="noStrike"/>
+              <a:defRPr b="0" i="0" sz="1440" u="none" cap="none" strike="noStrike"/>
             </a:lvl6pPr>
             <a:lvl7pPr indent="-228600" lvl="6" marL="3200400" marR="0" rtl="0" algn="l">
               <a:spcBef>
@@ -5012,7 +5012,7 @@
               </a:spcAft>
               <a:buSzPts val="1400"/>
               <a:buNone/>
-              <a:defRPr b="0" i="0" sz="1800" u="none" cap="none" strike="noStrike"/>
+              <a:defRPr b="0" i="0" sz="1440" u="none" cap="none" strike="noStrike"/>
             </a:lvl7pPr>
             <a:lvl8pPr indent="-228600" lvl="7" marL="3657600" marR="0" rtl="0" algn="l">
               <a:spcBef>
@@ -5023,7 +5023,7 @@
               </a:spcAft>
               <a:buSzPts val="1400"/>
               <a:buNone/>
-              <a:defRPr b="0" i="0" sz="1800" u="none" cap="none" strike="noStrike"/>
+              <a:defRPr b="0" i="0" sz="1440" u="none" cap="none" strike="noStrike"/>
             </a:lvl8pPr>
             <a:lvl9pPr indent="-228600" lvl="8" marL="4114800" marR="0" rtl="0" algn="l">
               <a:spcBef>
@@ -5034,7 +5034,7 @@
               </a:spcAft>
               <a:buSzPts val="1400"/>
               <a:buNone/>
-              <a:defRPr b="0" i="0" sz="1800" u="none" cap="none" strike="noStrike"/>
+              <a:defRPr b="0" i="0" sz="1440" u="none" cap="none" strike="noStrike"/>
             </a:lvl9pPr>
           </a:lstStyle>
           <a:p/>
@@ -5075,7 +5075,7 @@
         </p:nvSpPr>
         <p:spPr>
           <a:xfrm>
-            <a:off x="504000" y="301320"/>
+            <a:off x="504000" y="644220"/>
             <a:ext cx="9071640" cy="1262160"/>
           </a:xfrm>
           <a:prstGeom prst="rect">
@@ -5098,7 +5098,7 @@
               </a:spcAft>
               <a:buSzPts val="1400"/>
               <a:buNone/>
-              <a:defRPr b="0" i="0" sz="1800" u="none" cap="none" strike="noStrike"/>
+              <a:defRPr b="0" i="0" sz="1440" u="none" cap="none" strike="noStrike"/>
             </a:lvl1pPr>
             <a:lvl2pPr lvl="1" marR="0" rtl="0" algn="l">
               <a:spcBef>
@@ -5109,7 +5109,7 @@
               </a:spcAft>
               <a:buSzPts val="1400"/>
               <a:buNone/>
-              <a:defRPr b="0" i="0" sz="1800" u="none" cap="none" strike="noStrike"/>
+              <a:defRPr b="0" i="0" sz="1440" u="none" cap="none" strike="noStrike"/>
             </a:lvl2pPr>
             <a:lvl3pPr lvl="2" marR="0" rtl="0" algn="l">
               <a:spcBef>
@@ -5120,7 +5120,7 @@
               </a:spcAft>
               <a:buSzPts val="1400"/>
               <a:buNone/>
-              <a:defRPr b="0" i="0" sz="1800" u="none" cap="none" strike="noStrike"/>
+              <a:defRPr b="0" i="0" sz="1440" u="none" cap="none" strike="noStrike"/>
             </a:lvl3pPr>
             <a:lvl4pPr lvl="3" marR="0" rtl="0" algn="l">
               <a:spcBef>
@@ -5131,7 +5131,7 @@
               </a:spcAft>
               <a:buSzPts val="1400"/>
               <a:buNone/>
-              <a:defRPr b="0" i="0" sz="1800" u="none" cap="none" strike="noStrike"/>
+              <a:defRPr b="0" i="0" sz="1440" u="none" cap="none" strike="noStrike"/>
             </a:lvl4pPr>
             <a:lvl5pPr lvl="4" marR="0" rtl="0" algn="l">
               <a:spcBef>
@@ -5142,7 +5142,7 @@
               </a:spcAft>
               <a:buSzPts val="1400"/>
               <a:buNone/>
-              <a:defRPr b="0" i="0" sz="1800" u="none" cap="none" strike="noStrike"/>
+              <a:defRPr b="0" i="0" sz="1440" u="none" cap="none" strike="noStrike"/>
             </a:lvl5pPr>
             <a:lvl6pPr lvl="5" marR="0" rtl="0" algn="l">
               <a:spcBef>
@@ -5153,7 +5153,7 @@
               </a:spcAft>
               <a:buSzPts val="1400"/>
               <a:buNone/>
-              <a:defRPr b="0" i="0" sz="1800" u="none" cap="none" strike="noStrike"/>
+              <a:defRPr b="0" i="0" sz="1440" u="none" cap="none" strike="noStrike"/>
             </a:lvl6pPr>
             <a:lvl7pPr lvl="6" marR="0" rtl="0" algn="l">
               <a:spcBef>
@@ -5164,7 +5164,7 @@
               </a:spcAft>
               <a:buSzPts val="1400"/>
               <a:buNone/>
-              <a:defRPr b="0" i="0" sz="1800" u="none" cap="none" strike="noStrike"/>
+              <a:defRPr b="0" i="0" sz="1440" u="none" cap="none" strike="noStrike"/>
             </a:lvl7pPr>
             <a:lvl8pPr lvl="7" marR="0" rtl="0" algn="l">
               <a:spcBef>
@@ -5175,7 +5175,7 @@
               </a:spcAft>
               <a:buSzPts val="1400"/>
               <a:buNone/>
-              <a:defRPr b="0" i="0" sz="1800" u="none" cap="none" strike="noStrike"/>
+              <a:defRPr b="0" i="0" sz="1440" u="none" cap="none" strike="noStrike"/>
             </a:lvl8pPr>
             <a:lvl9pPr lvl="8" marR="0" rtl="0" algn="l">
               <a:spcBef>
@@ -5186,7 +5186,7 @@
               </a:spcAft>
               <a:buSzPts val="1400"/>
               <a:buNone/>
-              <a:defRPr b="0" i="0" sz="1800" u="none" cap="none" strike="noStrike"/>
+              <a:defRPr b="0" i="0" sz="1440" u="none" cap="none" strike="noStrike"/>
             </a:lvl9pPr>
           </a:lstStyle>
           <a:p/>
@@ -5227,7 +5227,7 @@
         </p:nvSpPr>
         <p:spPr>
           <a:xfrm>
-            <a:off x="504000" y="301320"/>
+            <a:off x="504000" y="644220"/>
             <a:ext cx="9071640" cy="5851800"/>
           </a:xfrm>
           <a:prstGeom prst="rect">
@@ -5250,7 +5250,7 @@
               </a:spcAft>
               <a:buSzPts val="1400"/>
               <a:buNone/>
-              <a:defRPr b="0" i="0" sz="1800" u="none" cap="none" strike="noStrike"/>
+              <a:defRPr b="0" i="0" sz="1440" u="none" cap="none" strike="noStrike"/>
             </a:lvl1pPr>
             <a:lvl2pPr lvl="1" marR="0" rtl="0" algn="l">
               <a:spcBef>
@@ -5261,7 +5261,7 @@
               </a:spcAft>
               <a:buSzPts val="1400"/>
               <a:buNone/>
-              <a:defRPr b="0" i="0" sz="1800" u="none" cap="none" strike="noStrike"/>
+              <a:defRPr b="0" i="0" sz="1440" u="none" cap="none" strike="noStrike"/>
             </a:lvl2pPr>
             <a:lvl3pPr lvl="2" marR="0" rtl="0" algn="l">
               <a:spcBef>
@@ -5272,7 +5272,7 @@
               </a:spcAft>
               <a:buSzPts val="1400"/>
               <a:buNone/>
-              <a:defRPr b="0" i="0" sz="1800" u="none" cap="none" strike="noStrike"/>
+              <a:defRPr b="0" i="0" sz="1440" u="none" cap="none" strike="noStrike"/>
             </a:lvl3pPr>
             <a:lvl4pPr lvl="3" marR="0" rtl="0" algn="l">
               <a:spcBef>
@@ -5283,7 +5283,7 @@
               </a:spcAft>
               <a:buSzPts val="1400"/>
               <a:buNone/>
-              <a:defRPr b="0" i="0" sz="1800" u="none" cap="none" strike="noStrike"/>
+              <a:defRPr b="0" i="0" sz="1440" u="none" cap="none" strike="noStrike"/>
             </a:lvl4pPr>
             <a:lvl5pPr lvl="4" marR="0" rtl="0" algn="l">
               <a:spcBef>
@@ -5294,7 +5294,7 @@
               </a:spcAft>
               <a:buSzPts val="1400"/>
               <a:buNone/>
-              <a:defRPr b="0" i="0" sz="1800" u="none" cap="none" strike="noStrike"/>
+              <a:defRPr b="0" i="0" sz="1440" u="none" cap="none" strike="noStrike"/>
             </a:lvl5pPr>
             <a:lvl6pPr lvl="5" marR="0" rtl="0" algn="l">
               <a:spcBef>
@@ -5305,7 +5305,7 @@
               </a:spcAft>
               <a:buSzPts val="1400"/>
               <a:buNone/>
-              <a:defRPr b="0" i="0" sz="1800" u="none" cap="none" strike="noStrike"/>
+              <a:defRPr b="0" i="0" sz="1440" u="none" cap="none" strike="noStrike"/>
             </a:lvl6pPr>
             <a:lvl7pPr lvl="6" marR="0" rtl="0" algn="l">
               <a:spcBef>
@@ -5316,7 +5316,7 @@
               </a:spcAft>
               <a:buSzPts val="1400"/>
               <a:buNone/>
-              <a:defRPr b="0" i="0" sz="1800" u="none" cap="none" strike="noStrike"/>
+              <a:defRPr b="0" i="0" sz="1440" u="none" cap="none" strike="noStrike"/>
             </a:lvl7pPr>
             <a:lvl8pPr lvl="7" marR="0" rtl="0" algn="l">
               <a:spcBef>
@@ -5327,7 +5327,7 @@
               </a:spcAft>
               <a:buSzPts val="1400"/>
               <a:buNone/>
-              <a:defRPr b="0" i="0" sz="1800" u="none" cap="none" strike="noStrike"/>
+              <a:defRPr b="0" i="0" sz="1440" u="none" cap="none" strike="noStrike"/>
             </a:lvl8pPr>
             <a:lvl9pPr lvl="8" marR="0" rtl="0" algn="l">
               <a:spcBef>
@@ -5338,7 +5338,7 @@
               </a:spcAft>
               <a:buSzPts val="1400"/>
               <a:buNone/>
-              <a:defRPr b="0" i="0" sz="1800" u="none" cap="none" strike="noStrike"/>
+              <a:defRPr b="0" i="0" sz="1440" u="none" cap="none" strike="noStrike"/>
             </a:lvl9pPr>
           </a:lstStyle>
           <a:p/>
@@ -5379,7 +5379,7 @@
         </p:nvSpPr>
         <p:spPr>
           <a:xfrm>
-            <a:off x="504000" y="301320"/>
+            <a:off x="504000" y="644220"/>
             <a:ext cx="9071640" cy="1262160"/>
           </a:xfrm>
           <a:prstGeom prst="rect">
@@ -5402,7 +5402,7 @@
               </a:spcAft>
               <a:buSzPts val="1400"/>
               <a:buNone/>
-              <a:defRPr b="0" i="0" sz="1800" u="none" cap="none" strike="noStrike"/>
+              <a:defRPr b="0" i="0" sz="1440" u="none" cap="none" strike="noStrike"/>
             </a:lvl1pPr>
             <a:lvl2pPr lvl="1" marR="0" rtl="0" algn="l">
               <a:spcBef>
@@ -5413,7 +5413,7 @@
               </a:spcAft>
               <a:buSzPts val="1400"/>
               <a:buNone/>
-              <a:defRPr b="0" i="0" sz="1800" u="none" cap="none" strike="noStrike"/>
+              <a:defRPr b="0" i="0" sz="1440" u="none" cap="none" strike="noStrike"/>
             </a:lvl2pPr>
             <a:lvl3pPr lvl="2" marR="0" rtl="0" algn="l">
               <a:spcBef>
@@ -5424,7 +5424,7 @@
               </a:spcAft>
               <a:buSzPts val="1400"/>
               <a:buNone/>
-              <a:defRPr b="0" i="0" sz="1800" u="none" cap="none" strike="noStrike"/>
+              <a:defRPr b="0" i="0" sz="1440" u="none" cap="none" strike="noStrike"/>
             </a:lvl3pPr>
             <a:lvl4pPr lvl="3" marR="0" rtl="0" algn="l">
               <a:spcBef>
@@ -5435,7 +5435,7 @@
               </a:spcAft>
               <a:buSzPts val="1400"/>
               <a:buNone/>
-              <a:defRPr b="0" i="0" sz="1800" u="none" cap="none" strike="noStrike"/>
+              <a:defRPr b="0" i="0" sz="1440" u="none" cap="none" strike="noStrike"/>
             </a:lvl4pPr>
             <a:lvl5pPr lvl="4" marR="0" rtl="0" algn="l">
               <a:spcBef>
@@ -5446,7 +5446,7 @@
               </a:spcAft>
               <a:buSzPts val="1400"/>
               <a:buNone/>
-              <a:defRPr b="0" i="0" sz="1800" u="none" cap="none" strike="noStrike"/>
+              <a:defRPr b="0" i="0" sz="1440" u="none" cap="none" strike="noStrike"/>
             </a:lvl5pPr>
             <a:lvl6pPr lvl="5" marR="0" rtl="0" algn="l">
               <a:spcBef>
@@ -5457,7 +5457,7 @@
               </a:spcAft>
               <a:buSzPts val="1400"/>
               <a:buNone/>
-              <a:defRPr b="0" i="0" sz="1800" u="none" cap="none" strike="noStrike"/>
+              <a:defRPr b="0" i="0" sz="1440" u="none" cap="none" strike="noStrike"/>
             </a:lvl6pPr>
             <a:lvl7pPr lvl="6" marR="0" rtl="0" algn="l">
               <a:spcBef>
@@ -5468,7 +5468,7 @@
               </a:spcAft>
               <a:buSzPts val="1400"/>
               <a:buNone/>
-              <a:defRPr b="0" i="0" sz="1800" u="none" cap="none" strike="noStrike"/>
+              <a:defRPr b="0" i="0" sz="1440" u="none" cap="none" strike="noStrike"/>
             </a:lvl7pPr>
             <a:lvl8pPr lvl="7" marR="0" rtl="0" algn="l">
               <a:spcBef>
@@ -5479,7 +5479,7 @@
               </a:spcAft>
               <a:buSzPts val="1400"/>
               <a:buNone/>
-              <a:defRPr b="0" i="0" sz="1800" u="none" cap="none" strike="noStrike"/>
+              <a:defRPr b="0" i="0" sz="1440" u="none" cap="none" strike="noStrike"/>
             </a:lvl8pPr>
             <a:lvl9pPr lvl="8" marR="0" rtl="0" algn="l">
               <a:spcBef>
@@ -5490,7 +5490,7 @@
               </a:spcAft>
               <a:buSzPts val="1400"/>
               <a:buNone/>
-              <a:defRPr b="0" i="0" sz="1800" u="none" cap="none" strike="noStrike"/>
+              <a:defRPr b="0" i="0" sz="1440" u="none" cap="none" strike="noStrike"/>
             </a:lvl9pPr>
           </a:lstStyle>
           <a:p/>
@@ -5506,7 +5506,7 @@
         </p:nvSpPr>
         <p:spPr>
           <a:xfrm>
-            <a:off x="504000" y="1769040"/>
+            <a:off x="504000" y="2111940"/>
             <a:ext cx="4426920" cy="2091240"/>
           </a:xfrm>
           <a:prstGeom prst="rect">
@@ -5529,7 +5529,7 @@
               </a:spcAft>
               <a:buSzPts val="1400"/>
               <a:buNone/>
-              <a:defRPr b="0" i="0" sz="1800" u="none" cap="none" strike="noStrike"/>
+              <a:defRPr b="0" i="0" sz="1440" u="none" cap="none" strike="noStrike"/>
             </a:lvl1pPr>
             <a:lvl2pPr indent="-228600" lvl="1" marL="914400" marR="0" rtl="0" algn="l">
               <a:spcBef>
@@ -5540,7 +5540,7 @@
               </a:spcAft>
               <a:buSzPts val="1400"/>
               <a:buNone/>
-              <a:defRPr b="0" i="0" sz="1800" u="none" cap="none" strike="noStrike"/>
+              <a:defRPr b="0" i="0" sz="1440" u="none" cap="none" strike="noStrike"/>
             </a:lvl2pPr>
             <a:lvl3pPr indent="-228600" lvl="2" marL="1371600" marR="0" rtl="0" algn="l">
               <a:spcBef>
@@ -5551,7 +5551,7 @@
               </a:spcAft>
               <a:buSzPts val="1400"/>
               <a:buNone/>
-              <a:defRPr b="0" i="0" sz="1800" u="none" cap="none" strike="noStrike"/>
+              <a:defRPr b="0" i="0" sz="1440" u="none" cap="none" strike="noStrike"/>
             </a:lvl3pPr>
             <a:lvl4pPr indent="-228600" lvl="3" marL="1828800" marR="0" rtl="0" algn="l">
               <a:spcBef>
@@ -5562,7 +5562,7 @@
               </a:spcAft>
               <a:buSzPts val="1400"/>
               <a:buNone/>
-              <a:defRPr b="0" i="0" sz="1800" u="none" cap="none" strike="noStrike"/>
+              <a:defRPr b="0" i="0" sz="1440" u="none" cap="none" strike="noStrike"/>
             </a:lvl4pPr>
             <a:lvl5pPr indent="-228600" lvl="4" marL="2286000" marR="0" rtl="0" algn="l">
               <a:spcBef>
@@ -5573,7 +5573,7 @@
               </a:spcAft>
               <a:buSzPts val="1400"/>
               <a:buNone/>
-              <a:defRPr b="0" i="0" sz="1800" u="none" cap="none" strike="noStrike"/>
+              <a:defRPr b="0" i="0" sz="1440" u="none" cap="none" strike="noStrike"/>
             </a:lvl5pPr>
             <a:lvl6pPr indent="-228600" lvl="5" marL="2743200" marR="0" rtl="0" algn="l">
               <a:spcBef>
@@ -5584,7 +5584,7 @@
               </a:spcAft>
               <a:buSzPts val="1400"/>
               <a:buNone/>
-              <a:defRPr b="0" i="0" sz="1800" u="none" cap="none" strike="noStrike"/>
+              <a:defRPr b="0" i="0" sz="1440" u="none" cap="none" strike="noStrike"/>
             </a:lvl6pPr>
             <a:lvl7pPr indent="-228600" lvl="6" marL="3200400" marR="0" rtl="0" algn="l">
               <a:spcBef>
@@ -5595,7 +5595,7 @@
               </a:spcAft>
               <a:buSzPts val="1400"/>
               <a:buNone/>
-              <a:defRPr b="0" i="0" sz="1800" u="none" cap="none" strike="noStrike"/>
+              <a:defRPr b="0" i="0" sz="1440" u="none" cap="none" strike="noStrike"/>
             </a:lvl7pPr>
             <a:lvl8pPr indent="-228600" lvl="7" marL="3657600" marR="0" rtl="0" algn="l">
               <a:spcBef>
@@ -5606,7 +5606,7 @@
               </a:spcAft>
               <a:buSzPts val="1400"/>
               <a:buNone/>
-              <a:defRPr b="0" i="0" sz="1800" u="none" cap="none" strike="noStrike"/>
+              <a:defRPr b="0" i="0" sz="1440" u="none" cap="none" strike="noStrike"/>
             </a:lvl8pPr>
             <a:lvl9pPr indent="-228600" lvl="8" marL="4114800" marR="0" rtl="0" algn="l">
               <a:spcBef>
@@ -5617,7 +5617,7 @@
               </a:spcAft>
               <a:buSzPts val="1400"/>
               <a:buNone/>
-              <a:defRPr b="0" i="0" sz="1800" u="none" cap="none" strike="noStrike"/>
+              <a:defRPr b="0" i="0" sz="1440" u="none" cap="none" strike="noStrike"/>
             </a:lvl9pPr>
           </a:lstStyle>
           <a:p/>
@@ -5633,7 +5633,7 @@
         </p:nvSpPr>
         <p:spPr>
           <a:xfrm>
-            <a:off x="504000" y="4059360"/>
+            <a:off x="504000" y="4402260"/>
             <a:ext cx="4426920" cy="2091240"/>
           </a:xfrm>
           <a:prstGeom prst="rect">
@@ -5656,7 +5656,7 @@
               </a:spcAft>
               <a:buSzPts val="1400"/>
               <a:buNone/>
-              <a:defRPr b="0" i="0" sz="1800" u="none" cap="none" strike="noStrike"/>
+              <a:defRPr b="0" i="0" sz="1440" u="none" cap="none" strike="noStrike"/>
             </a:lvl1pPr>
             <a:lvl2pPr indent="-228600" lvl="1" marL="914400" marR="0" rtl="0" algn="l">
               <a:spcBef>
@@ -5667,7 +5667,7 @@
               </a:spcAft>
               <a:buSzPts val="1400"/>
               <a:buNone/>
-              <a:defRPr b="0" i="0" sz="1800" u="none" cap="none" strike="noStrike"/>
+              <a:defRPr b="0" i="0" sz="1440" u="none" cap="none" strike="noStrike"/>
             </a:lvl2pPr>
             <a:lvl3pPr indent="-228600" lvl="2" marL="1371600" marR="0" rtl="0" algn="l">
               <a:spcBef>
@@ -5678,7 +5678,7 @@
               </a:spcAft>
               <a:buSzPts val="1400"/>
               <a:buNone/>
-              <a:defRPr b="0" i="0" sz="1800" u="none" cap="none" strike="noStrike"/>
+              <a:defRPr b="0" i="0" sz="1440" u="none" cap="none" strike="noStrike"/>
             </a:lvl3pPr>
             <a:lvl4pPr indent="-228600" lvl="3" marL="1828800" marR="0" rtl="0" algn="l">
               <a:spcBef>
@@ -5689,7 +5689,7 @@
               </a:spcAft>
               <a:buSzPts val="1400"/>
               <a:buNone/>
-              <a:defRPr b="0" i="0" sz="1800" u="none" cap="none" strike="noStrike"/>
+              <a:defRPr b="0" i="0" sz="1440" u="none" cap="none" strike="noStrike"/>
             </a:lvl4pPr>
             <a:lvl5pPr indent="-228600" lvl="4" marL="2286000" marR="0" rtl="0" algn="l">
               <a:spcBef>
@@ -5700,7 +5700,7 @@
               </a:spcAft>
               <a:buSzPts val="1400"/>
               <a:buNone/>
-              <a:defRPr b="0" i="0" sz="1800" u="none" cap="none" strike="noStrike"/>
+              <a:defRPr b="0" i="0" sz="1440" u="none" cap="none" strike="noStrike"/>
             </a:lvl5pPr>
             <a:lvl6pPr indent="-228600" lvl="5" marL="2743200" marR="0" rtl="0" algn="l">
               <a:spcBef>
@@ -5711,7 +5711,7 @@
               </a:spcAft>
               <a:buSzPts val="1400"/>
               <a:buNone/>
-              <a:defRPr b="0" i="0" sz="1800" u="none" cap="none" strike="noStrike"/>
+              <a:defRPr b="0" i="0" sz="1440" u="none" cap="none" strike="noStrike"/>
             </a:lvl6pPr>
             <a:lvl7pPr indent="-228600" lvl="6" marL="3200400" marR="0" rtl="0" algn="l">
               <a:spcBef>
@@ -5722,7 +5722,7 @@
               </a:spcAft>
               <a:buSzPts val="1400"/>
               <a:buNone/>
-              <a:defRPr b="0" i="0" sz="1800" u="none" cap="none" strike="noStrike"/>
+              <a:defRPr b="0" i="0" sz="1440" u="none" cap="none" strike="noStrike"/>
             </a:lvl7pPr>
             <a:lvl8pPr indent="-228600" lvl="7" marL="3657600" marR="0" rtl="0" algn="l">
               <a:spcBef>
@@ -5733,7 +5733,7 @@
               </a:spcAft>
               <a:buSzPts val="1400"/>
               <a:buNone/>
-              <a:defRPr b="0" i="0" sz="1800" u="none" cap="none" strike="noStrike"/>
+              <a:defRPr b="0" i="0" sz="1440" u="none" cap="none" strike="noStrike"/>
             </a:lvl8pPr>
             <a:lvl9pPr indent="-228600" lvl="8" marL="4114800" marR="0" rtl="0" algn="l">
               <a:spcBef>
@@ -5744,7 +5744,7 @@
               </a:spcAft>
               <a:buSzPts val="1400"/>
               <a:buNone/>
-              <a:defRPr b="0" i="0" sz="1800" u="none" cap="none" strike="noStrike"/>
+              <a:defRPr b="0" i="0" sz="1440" u="none" cap="none" strike="noStrike"/>
             </a:lvl9pPr>
           </a:lstStyle>
           <a:p/>
@@ -5760,7 +5760,7 @@
         </p:nvSpPr>
         <p:spPr>
           <a:xfrm>
-            <a:off x="5152680" y="1769040"/>
+            <a:off x="5152680" y="2111940"/>
             <a:ext cx="4426920" cy="4384440"/>
           </a:xfrm>
           <a:prstGeom prst="rect">
@@ -5783,7 +5783,7 @@
               </a:spcAft>
               <a:buSzPts val="1400"/>
               <a:buNone/>
-              <a:defRPr b="0" i="0" sz="1800" u="none" cap="none" strike="noStrike"/>
+              <a:defRPr b="0" i="0" sz="1440" u="none" cap="none" strike="noStrike"/>
             </a:lvl1pPr>
             <a:lvl2pPr indent="-228600" lvl="1" marL="914400" marR="0" rtl="0" algn="l">
               <a:spcBef>
@@ -5794,7 +5794,7 @@
               </a:spcAft>
               <a:buSzPts val="1400"/>
               <a:buNone/>
-              <a:defRPr b="0" i="0" sz="1800" u="none" cap="none" strike="noStrike"/>
+              <a:defRPr b="0" i="0" sz="1440" u="none" cap="none" strike="noStrike"/>
             </a:lvl2pPr>
             <a:lvl3pPr indent="-228600" lvl="2" marL="1371600" marR="0" rtl="0" algn="l">
               <a:spcBef>
@@ -5805,7 +5805,7 @@
               </a:spcAft>
               <a:buSzPts val="1400"/>
               <a:buNone/>
-              <a:defRPr b="0" i="0" sz="1800" u="none" cap="none" strike="noStrike"/>
+              <a:defRPr b="0" i="0" sz="1440" u="none" cap="none" strike="noStrike"/>
             </a:lvl3pPr>
             <a:lvl4pPr indent="-228600" lvl="3" marL="1828800" marR="0" rtl="0" algn="l">
               <a:spcBef>
@@ -5816,7 +5816,7 @@
               </a:spcAft>
               <a:buSzPts val="1400"/>
               <a:buNone/>
-              <a:defRPr b="0" i="0" sz="1800" u="none" cap="none" strike="noStrike"/>
+              <a:defRPr b="0" i="0" sz="1440" u="none" cap="none" strike="noStrike"/>
             </a:lvl4pPr>
             <a:lvl5pPr indent="-228600" lvl="4" marL="2286000" marR="0" rtl="0" algn="l">
               <a:spcBef>
@@ -5827,7 +5827,7 @@
               </a:spcAft>
               <a:buSzPts val="1400"/>
               <a:buNone/>
-              <a:defRPr b="0" i="0" sz="1800" u="none" cap="none" strike="noStrike"/>
+              <a:defRPr b="0" i="0" sz="1440" u="none" cap="none" strike="noStrike"/>
             </a:lvl5pPr>
             <a:lvl6pPr indent="-228600" lvl="5" marL="2743200" marR="0" rtl="0" algn="l">
               <a:spcBef>
@@ -5838,7 +5838,7 @@
               </a:spcAft>
               <a:buSzPts val="1400"/>
               <a:buNone/>
-              <a:defRPr b="0" i="0" sz="1800" u="none" cap="none" strike="noStrike"/>
+              <a:defRPr b="0" i="0" sz="1440" u="none" cap="none" strike="noStrike"/>
             </a:lvl6pPr>
             <a:lvl7pPr indent="-228600" lvl="6" marL="3200400" marR="0" rtl="0" algn="l">
               <a:spcBef>
@@ -5849,7 +5849,7 @@
               </a:spcAft>
               <a:buSzPts val="1400"/>
               <a:buNone/>
-              <a:defRPr b="0" i="0" sz="1800" u="none" cap="none" strike="noStrike"/>
+              <a:defRPr b="0" i="0" sz="1440" u="none" cap="none" strike="noStrike"/>
             </a:lvl7pPr>
             <a:lvl8pPr indent="-228600" lvl="7" marL="3657600" marR="0" rtl="0" algn="l">
               <a:spcBef>
@@ -5860,7 +5860,7 @@
               </a:spcAft>
               <a:buSzPts val="1400"/>
               <a:buNone/>
-              <a:defRPr b="0" i="0" sz="1800" u="none" cap="none" strike="noStrike"/>
+              <a:defRPr b="0" i="0" sz="1440" u="none" cap="none" strike="noStrike"/>
             </a:lvl8pPr>
             <a:lvl9pPr indent="-228600" lvl="8" marL="4114800" marR="0" rtl="0" algn="l">
               <a:spcBef>
@@ -5871,7 +5871,7 @@
               </a:spcAft>
               <a:buSzPts val="1400"/>
               <a:buNone/>
-              <a:defRPr b="0" i="0" sz="1800" u="none" cap="none" strike="noStrike"/>
+              <a:defRPr b="0" i="0" sz="1440" u="none" cap="none" strike="noStrike"/>
             </a:lvl9pPr>
           </a:lstStyle>
           <a:p/>
@@ -5912,7 +5912,7 @@
         </p:nvSpPr>
         <p:spPr>
           <a:xfrm>
-            <a:off x="504000" y="301320"/>
+            <a:off x="504000" y="644220"/>
             <a:ext cx="9071640" cy="1262160"/>
           </a:xfrm>
           <a:prstGeom prst="rect">
@@ -5935,7 +5935,7 @@
               </a:spcAft>
               <a:buSzPts val="1400"/>
               <a:buNone/>
-              <a:defRPr b="0" i="0" sz="1800" u="none" cap="none" strike="noStrike"/>
+              <a:defRPr b="0" i="0" sz="1440" u="none" cap="none" strike="noStrike"/>
             </a:lvl1pPr>
             <a:lvl2pPr lvl="1" marR="0" rtl="0" algn="l">
               <a:spcBef>
@@ -5946,7 +5946,7 @@
               </a:spcAft>
               <a:buSzPts val="1400"/>
               <a:buNone/>
-              <a:defRPr b="0" i="0" sz="1800" u="none" cap="none" strike="noStrike"/>
+              <a:defRPr b="0" i="0" sz="1440" u="none" cap="none" strike="noStrike"/>
             </a:lvl2pPr>
             <a:lvl3pPr lvl="2" marR="0" rtl="0" algn="l">
               <a:spcBef>
@@ -5957,7 +5957,7 @@
               </a:spcAft>
               <a:buSzPts val="1400"/>
               <a:buNone/>
-              <a:defRPr b="0" i="0" sz="1800" u="none" cap="none" strike="noStrike"/>
+              <a:defRPr b="0" i="0" sz="1440" u="none" cap="none" strike="noStrike"/>
             </a:lvl3pPr>
             <a:lvl4pPr lvl="3" marR="0" rtl="0" algn="l">
               <a:spcBef>
@@ -5968,7 +5968,7 @@
               </a:spcAft>
               <a:buSzPts val="1400"/>
               <a:buNone/>
-              <a:defRPr b="0" i="0" sz="1800" u="none" cap="none" strike="noStrike"/>
+              <a:defRPr b="0" i="0" sz="1440" u="none" cap="none" strike="noStrike"/>
             </a:lvl4pPr>
             <a:lvl5pPr lvl="4" marR="0" rtl="0" algn="l">
               <a:spcBef>
@@ -5979,7 +5979,7 @@
               </a:spcAft>
               <a:buSzPts val="1400"/>
               <a:buNone/>
-              <a:defRPr b="0" i="0" sz="1800" u="none" cap="none" strike="noStrike"/>
+              <a:defRPr b="0" i="0" sz="1440" u="none" cap="none" strike="noStrike"/>
             </a:lvl5pPr>
             <a:lvl6pPr lvl="5" marR="0" rtl="0" algn="l">
               <a:spcBef>
@@ -5990,7 +5990,7 @@
               </a:spcAft>
               <a:buSzPts val="1400"/>
               <a:buNone/>
-              <a:defRPr b="0" i="0" sz="1800" u="none" cap="none" strike="noStrike"/>
+              <a:defRPr b="0" i="0" sz="1440" u="none" cap="none" strike="noStrike"/>
             </a:lvl6pPr>
             <a:lvl7pPr lvl="6" marR="0" rtl="0" algn="l">
               <a:spcBef>
@@ -6001,7 +6001,7 @@
               </a:spcAft>
               <a:buSzPts val="1400"/>
               <a:buNone/>
-              <a:defRPr b="0" i="0" sz="1800" u="none" cap="none" strike="noStrike"/>
+              <a:defRPr b="0" i="0" sz="1440" u="none" cap="none" strike="noStrike"/>
             </a:lvl7pPr>
             <a:lvl8pPr lvl="7" marR="0" rtl="0" algn="l">
               <a:spcBef>
@@ -6012,7 +6012,7 @@
               </a:spcAft>
               <a:buSzPts val="1400"/>
               <a:buNone/>
-              <a:defRPr b="0" i="0" sz="1800" u="none" cap="none" strike="noStrike"/>
+              <a:defRPr b="0" i="0" sz="1440" u="none" cap="none" strike="noStrike"/>
             </a:lvl8pPr>
             <a:lvl9pPr lvl="8" marR="0" rtl="0" algn="l">
               <a:spcBef>
@@ -6023,7 +6023,7 @@
               </a:spcAft>
               <a:buSzPts val="1400"/>
               <a:buNone/>
-              <a:defRPr b="0" i="0" sz="1800" u="none" cap="none" strike="noStrike"/>
+              <a:defRPr b="0" i="0" sz="1440" u="none" cap="none" strike="noStrike"/>
             </a:lvl9pPr>
           </a:lstStyle>
           <a:p/>
@@ -6039,7 +6039,7 @@
         </p:nvSpPr>
         <p:spPr>
           <a:xfrm>
-            <a:off x="504000" y="1769040"/>
+            <a:off x="504000" y="2111940"/>
             <a:ext cx="4426920" cy="4384440"/>
           </a:xfrm>
           <a:prstGeom prst="rect">
@@ -6062,7 +6062,7 @@
               </a:spcAft>
               <a:buSzPts val="1400"/>
               <a:buNone/>
-              <a:defRPr b="0" i="0" sz="1800" u="none" cap="none" strike="noStrike"/>
+              <a:defRPr b="0" i="0" sz="1440" u="none" cap="none" strike="noStrike"/>
             </a:lvl1pPr>
             <a:lvl2pPr indent="-228600" lvl="1" marL="914400" marR="0" rtl="0" algn="l">
               <a:spcBef>
@@ -6073,7 +6073,7 @@
               </a:spcAft>
               <a:buSzPts val="1400"/>
               <a:buNone/>
-              <a:defRPr b="0" i="0" sz="1800" u="none" cap="none" strike="noStrike"/>
+              <a:defRPr b="0" i="0" sz="1440" u="none" cap="none" strike="noStrike"/>
             </a:lvl2pPr>
             <a:lvl3pPr indent="-228600" lvl="2" marL="1371600" marR="0" rtl="0" algn="l">
               <a:spcBef>
@@ -6084,7 +6084,7 @@
               </a:spcAft>
               <a:buSzPts val="1400"/>
               <a:buNone/>
-              <a:defRPr b="0" i="0" sz="1800" u="none" cap="none" strike="noStrike"/>
+              <a:defRPr b="0" i="0" sz="1440" u="none" cap="none" strike="noStrike"/>
             </a:lvl3pPr>
             <a:lvl4pPr indent="-228600" lvl="3" marL="1828800" marR="0" rtl="0" algn="l">
               <a:spcBef>
@@ -6095,7 +6095,7 @@
               </a:spcAft>
               <a:buSzPts val="1400"/>
               <a:buNone/>
-              <a:defRPr b="0" i="0" sz="1800" u="none" cap="none" strike="noStrike"/>
+              <a:defRPr b="0" i="0" sz="1440" u="none" cap="none" strike="noStrike"/>
             </a:lvl4pPr>
             <a:lvl5pPr indent="-228600" lvl="4" marL="2286000" marR="0" rtl="0" algn="l">
               <a:spcBef>
@@ -6106,7 +6106,7 @@
               </a:spcAft>
               <a:buSzPts val="1400"/>
               <a:buNone/>
-              <a:defRPr b="0" i="0" sz="1800" u="none" cap="none" strike="noStrike"/>
+              <a:defRPr b="0" i="0" sz="1440" u="none" cap="none" strike="noStrike"/>
             </a:lvl5pPr>
             <a:lvl6pPr indent="-228600" lvl="5" marL="2743200" marR="0" rtl="0" algn="l">
               <a:spcBef>
@@ -6117,7 +6117,7 @@
               </a:spcAft>
               <a:buSzPts val="1400"/>
               <a:buNone/>
-              <a:defRPr b="0" i="0" sz="1800" u="none" cap="none" strike="noStrike"/>
+              <a:defRPr b="0" i="0" sz="1440" u="none" cap="none" strike="noStrike"/>
             </a:lvl6pPr>
             <a:lvl7pPr indent="-228600" lvl="6" marL="3200400" marR="0" rtl="0" algn="l">
               <a:spcBef>
@@ -6128,7 +6128,7 @@
               </a:spcAft>
               <a:buSzPts val="1400"/>
               <a:buNone/>
-              <a:defRPr b="0" i="0" sz="1800" u="none" cap="none" strike="noStrike"/>
+              <a:defRPr b="0" i="0" sz="1440" u="none" cap="none" strike="noStrike"/>
             </a:lvl7pPr>
             <a:lvl8pPr indent="-228600" lvl="7" marL="3657600" marR="0" rtl="0" algn="l">
               <a:spcBef>
@@ -6139,7 +6139,7 @@
               </a:spcAft>
               <a:buSzPts val="1400"/>
               <a:buNone/>
-              <a:defRPr b="0" i="0" sz="1800" u="none" cap="none" strike="noStrike"/>
+              <a:defRPr b="0" i="0" sz="1440" u="none" cap="none" strike="noStrike"/>
             </a:lvl8pPr>
             <a:lvl9pPr indent="-228600" lvl="8" marL="4114800" marR="0" rtl="0" algn="l">
               <a:spcBef>
@@ -6150,7 +6150,7 @@
               </a:spcAft>
               <a:buSzPts val="1400"/>
               <a:buNone/>
-              <a:defRPr b="0" i="0" sz="1800" u="none" cap="none" strike="noStrike"/>
+              <a:defRPr b="0" i="0" sz="1440" u="none" cap="none" strike="noStrike"/>
             </a:lvl9pPr>
           </a:lstStyle>
           <a:p/>
@@ -6166,7 +6166,7 @@
         </p:nvSpPr>
         <p:spPr>
           <a:xfrm>
-            <a:off x="5152680" y="1769040"/>
+            <a:off x="5152680" y="2111940"/>
             <a:ext cx="4426920" cy="2091240"/>
           </a:xfrm>
           <a:prstGeom prst="rect">
@@ -6189,7 +6189,7 @@
               </a:spcAft>
               <a:buSzPts val="1400"/>
               <a:buNone/>
-              <a:defRPr b="0" i="0" sz="1800" u="none" cap="none" strike="noStrike"/>
+              <a:defRPr b="0" i="0" sz="1440" u="none" cap="none" strike="noStrike"/>
             </a:lvl1pPr>
             <a:lvl2pPr indent="-228600" lvl="1" marL="914400" marR="0" rtl="0" algn="l">
               <a:spcBef>
@@ -6200,7 +6200,7 @@
               </a:spcAft>
               <a:buSzPts val="1400"/>
               <a:buNone/>
-              <a:defRPr b="0" i="0" sz="1800" u="none" cap="none" strike="noStrike"/>
+              <a:defRPr b="0" i="0" sz="1440" u="none" cap="none" strike="noStrike"/>
             </a:lvl2pPr>
             <a:lvl3pPr indent="-228600" lvl="2" marL="1371600" marR="0" rtl="0" algn="l">
               <a:spcBef>
@@ -6211,7 +6211,7 @@
               </a:spcAft>
               <a:buSzPts val="1400"/>
               <a:buNone/>
-              <a:defRPr b="0" i="0" sz="1800" u="none" cap="none" strike="noStrike"/>
+              <a:defRPr b="0" i="0" sz="1440" u="none" cap="none" strike="noStrike"/>
             </a:lvl3pPr>
             <a:lvl4pPr indent="-228600" lvl="3" marL="1828800" marR="0" rtl="0" algn="l">
               <a:spcBef>
@@ -6222,7 +6222,7 @@
               </a:spcAft>
               <a:buSzPts val="1400"/>
               <a:buNone/>
-              <a:defRPr b="0" i="0" sz="1800" u="none" cap="none" strike="noStrike"/>
+              <a:defRPr b="0" i="0" sz="1440" u="none" cap="none" strike="noStrike"/>
             </a:lvl4pPr>
             <a:lvl5pPr indent="-228600" lvl="4" marL="2286000" marR="0" rtl="0" algn="l">
               <a:spcBef>
@@ -6233,7 +6233,7 @@
               </a:spcAft>
               <a:buSzPts val="1400"/>
               <a:buNone/>
-              <a:defRPr b="0" i="0" sz="1800" u="none" cap="none" strike="noStrike"/>
+              <a:defRPr b="0" i="0" sz="1440" u="none" cap="none" strike="noStrike"/>
             </a:lvl5pPr>
             <a:lvl6pPr indent="-228600" lvl="5" marL="2743200" marR="0" rtl="0" algn="l">
               <a:spcBef>
@@ -6244,7 +6244,7 @@
               </a:spcAft>
               <a:buSzPts val="1400"/>
               <a:buNone/>
-              <a:defRPr b="0" i="0" sz="1800" u="none" cap="none" strike="noStrike"/>
+              <a:defRPr b="0" i="0" sz="1440" u="none" cap="none" strike="noStrike"/>
             </a:lvl6pPr>
             <a:lvl7pPr indent="-228600" lvl="6" marL="3200400" marR="0" rtl="0" algn="l">
               <a:spcBef>
@@ -6255,7 +6255,7 @@
               </a:spcAft>
               <a:buSzPts val="1400"/>
               <a:buNone/>
-              <a:defRPr b="0" i="0" sz="1800" u="none" cap="none" strike="noStrike"/>
+              <a:defRPr b="0" i="0" sz="1440" u="none" cap="none" strike="noStrike"/>
             </a:lvl7pPr>
             <a:lvl8pPr indent="-228600" lvl="7" marL="3657600" marR="0" rtl="0" algn="l">
               <a:spcBef>
@@ -6266,7 +6266,7 @@
               </a:spcAft>
               <a:buSzPts val="1400"/>
               <a:buNone/>
-              <a:defRPr b="0" i="0" sz="1800" u="none" cap="none" strike="noStrike"/>
+              <a:defRPr b="0" i="0" sz="1440" u="none" cap="none" strike="noStrike"/>
             </a:lvl8pPr>
             <a:lvl9pPr indent="-228600" lvl="8" marL="4114800" marR="0" rtl="0" algn="l">
               <a:spcBef>
@@ -6277,7 +6277,7 @@
               </a:spcAft>
               <a:buSzPts val="1400"/>
               <a:buNone/>
-              <a:defRPr b="0" i="0" sz="1800" u="none" cap="none" strike="noStrike"/>
+              <a:defRPr b="0" i="0" sz="1440" u="none" cap="none" strike="noStrike"/>
             </a:lvl9pPr>
           </a:lstStyle>
           <a:p/>
@@ -6293,7 +6293,7 @@
         </p:nvSpPr>
         <p:spPr>
           <a:xfrm>
-            <a:off x="5152680" y="4059360"/>
+            <a:off x="5152680" y="4402260"/>
             <a:ext cx="4426920" cy="2091240"/>
           </a:xfrm>
           <a:prstGeom prst="rect">
@@ -6316,7 +6316,7 @@
               </a:spcAft>
               <a:buSzPts val="1400"/>
               <a:buNone/>
-              <a:defRPr b="0" i="0" sz="1800" u="none" cap="none" strike="noStrike"/>
+              <a:defRPr b="0" i="0" sz="1440" u="none" cap="none" strike="noStrike"/>
             </a:lvl1pPr>
             <a:lvl2pPr indent="-228600" lvl="1" marL="914400" marR="0" rtl="0" algn="l">
               <a:spcBef>
@@ -6327,7 +6327,7 @@
               </a:spcAft>
               <a:buSzPts val="1400"/>
               <a:buNone/>
-              <a:defRPr b="0" i="0" sz="1800" u="none" cap="none" strike="noStrike"/>
+              <a:defRPr b="0" i="0" sz="1440" u="none" cap="none" strike="noStrike"/>
             </a:lvl2pPr>
             <a:lvl3pPr indent="-228600" lvl="2" marL="1371600" marR="0" rtl="0" algn="l">
               <a:spcBef>
@@ -6338,7 +6338,7 @@
               </a:spcAft>
               <a:buSzPts val="1400"/>
               <a:buNone/>
-              <a:defRPr b="0" i="0" sz="1800" u="none" cap="none" strike="noStrike"/>
+              <a:defRPr b="0" i="0" sz="1440" u="none" cap="none" strike="noStrike"/>
             </a:lvl3pPr>
             <a:lvl4pPr indent="-228600" lvl="3" marL="1828800" marR="0" rtl="0" algn="l">
               <a:spcBef>
@@ -6349,7 +6349,7 @@
               </a:spcAft>
               <a:buSzPts val="1400"/>
               <a:buNone/>
-              <a:defRPr b="0" i="0" sz="1800" u="none" cap="none" strike="noStrike"/>
+              <a:defRPr b="0" i="0" sz="1440" u="none" cap="none" strike="noStrike"/>
             </a:lvl4pPr>
             <a:lvl5pPr indent="-228600" lvl="4" marL="2286000" marR="0" rtl="0" algn="l">
               <a:spcBef>
@@ -6360,7 +6360,7 @@
               </a:spcAft>
               <a:buSzPts val="1400"/>
               <a:buNone/>
-              <a:defRPr b="0" i="0" sz="1800" u="none" cap="none" strike="noStrike"/>
+              <a:defRPr b="0" i="0" sz="1440" u="none" cap="none" strike="noStrike"/>
             </a:lvl5pPr>
             <a:lvl6pPr indent="-228600" lvl="5" marL="2743200" marR="0" rtl="0" algn="l">
               <a:spcBef>
@@ -6371,7 +6371,7 @@
               </a:spcAft>
               <a:buSzPts val="1400"/>
               <a:buNone/>
-              <a:defRPr b="0" i="0" sz="1800" u="none" cap="none" strike="noStrike"/>
+              <a:defRPr b="0" i="0" sz="1440" u="none" cap="none" strike="noStrike"/>
             </a:lvl6pPr>
             <a:lvl7pPr indent="-228600" lvl="6" marL="3200400" marR="0" rtl="0" algn="l">
               <a:spcBef>
@@ -6382,7 +6382,7 @@
               </a:spcAft>
               <a:buSzPts val="1400"/>
               <a:buNone/>
-              <a:defRPr b="0" i="0" sz="1800" u="none" cap="none" strike="noStrike"/>
+              <a:defRPr b="0" i="0" sz="1440" u="none" cap="none" strike="noStrike"/>
             </a:lvl7pPr>
             <a:lvl8pPr indent="-228600" lvl="7" marL="3657600" marR="0" rtl="0" algn="l">
               <a:spcBef>
@@ -6393,7 +6393,7 @@
               </a:spcAft>
               <a:buSzPts val="1400"/>
               <a:buNone/>
-              <a:defRPr b="0" i="0" sz="1800" u="none" cap="none" strike="noStrike"/>
+              <a:defRPr b="0" i="0" sz="1440" u="none" cap="none" strike="noStrike"/>
             </a:lvl8pPr>
             <a:lvl9pPr indent="-228600" lvl="8" marL="4114800" marR="0" rtl="0" algn="l">
               <a:spcBef>
@@ -6404,7 +6404,7 @@
               </a:spcAft>
               <a:buSzPts val="1400"/>
               <a:buNone/>
-              <a:defRPr b="0" i="0" sz="1800" u="none" cap="none" strike="noStrike"/>
+              <a:defRPr b="0" i="0" sz="1440" u="none" cap="none" strike="noStrike"/>
             </a:lvl9pPr>
           </a:lstStyle>
           <a:p/>
@@ -6445,7 +6445,7 @@
         </p:nvSpPr>
         <p:spPr>
           <a:xfrm>
-            <a:off x="504000" y="301320"/>
+            <a:off x="504000" y="644220"/>
             <a:ext cx="9071640" cy="1262160"/>
           </a:xfrm>
           <a:prstGeom prst="rect">
@@ -6468,7 +6468,7 @@
               </a:spcAft>
               <a:buSzPts val="1400"/>
               <a:buNone/>
-              <a:defRPr b="0" i="0" sz="1800" u="none" cap="none" strike="noStrike"/>
+              <a:defRPr b="0" i="0" sz="1440" u="none" cap="none" strike="noStrike"/>
             </a:lvl1pPr>
             <a:lvl2pPr lvl="1" marR="0" rtl="0" algn="l">
               <a:spcBef>
@@ -6479,7 +6479,7 @@
               </a:spcAft>
               <a:buSzPts val="1400"/>
               <a:buNone/>
-              <a:defRPr b="0" i="0" sz="1800" u="none" cap="none" strike="noStrike"/>
+              <a:defRPr b="0" i="0" sz="1440" u="none" cap="none" strike="noStrike"/>
             </a:lvl2pPr>
             <a:lvl3pPr lvl="2" marR="0" rtl="0" algn="l">
               <a:spcBef>
@@ -6490,7 +6490,7 @@
               </a:spcAft>
               <a:buSzPts val="1400"/>
               <a:buNone/>
-              <a:defRPr b="0" i="0" sz="1800" u="none" cap="none" strike="noStrike"/>
+              <a:defRPr b="0" i="0" sz="1440" u="none" cap="none" strike="noStrike"/>
             </a:lvl3pPr>
             <a:lvl4pPr lvl="3" marR="0" rtl="0" algn="l">
               <a:spcBef>
@@ -6501,7 +6501,7 @@
               </a:spcAft>
               <a:buSzPts val="1400"/>
               <a:buNone/>
-              <a:defRPr b="0" i="0" sz="1800" u="none" cap="none" strike="noStrike"/>
+              <a:defRPr b="0" i="0" sz="1440" u="none" cap="none" strike="noStrike"/>
             </a:lvl4pPr>
             <a:lvl5pPr lvl="4" marR="0" rtl="0" algn="l">
               <a:spcBef>
@@ -6512,7 +6512,7 @@
               </a:spcAft>
               <a:buSzPts val="1400"/>
               <a:buNone/>
-              <a:defRPr b="0" i="0" sz="1800" u="none" cap="none" strike="noStrike"/>
+              <a:defRPr b="0" i="0" sz="1440" u="none" cap="none" strike="noStrike"/>
             </a:lvl5pPr>
             <a:lvl6pPr lvl="5" marR="0" rtl="0" algn="l">
               <a:spcBef>
@@ -6523,7 +6523,7 @@
               </a:spcAft>
               <a:buSzPts val="1400"/>
               <a:buNone/>
-              <a:defRPr b="0" i="0" sz="1800" u="none" cap="none" strike="noStrike"/>
+              <a:defRPr b="0" i="0" sz="1440" u="none" cap="none" strike="noStrike"/>
             </a:lvl6pPr>
             <a:lvl7pPr lvl="6" marR="0" rtl="0" algn="l">
               <a:spcBef>
@@ -6534,7 +6534,7 @@
               </a:spcAft>
               <a:buSzPts val="1400"/>
               <a:buNone/>
-              <a:defRPr b="0" i="0" sz="1800" u="none" cap="none" strike="noStrike"/>
+              <a:defRPr b="0" i="0" sz="1440" u="none" cap="none" strike="noStrike"/>
             </a:lvl7pPr>
             <a:lvl8pPr lvl="7" marR="0" rtl="0" algn="l">
               <a:spcBef>
@@ -6545,7 +6545,7 @@
               </a:spcAft>
               <a:buSzPts val="1400"/>
               <a:buNone/>
-              <a:defRPr b="0" i="0" sz="1800" u="none" cap="none" strike="noStrike"/>
+              <a:defRPr b="0" i="0" sz="1440" u="none" cap="none" strike="noStrike"/>
             </a:lvl8pPr>
             <a:lvl9pPr lvl="8" marR="0" rtl="0" algn="l">
               <a:spcBef>
@@ -6556,7 +6556,7 @@
               </a:spcAft>
               <a:buSzPts val="1400"/>
               <a:buNone/>
-              <a:defRPr b="0" i="0" sz="1800" u="none" cap="none" strike="noStrike"/>
+              <a:defRPr b="0" i="0" sz="1440" u="none" cap="none" strike="noStrike"/>
             </a:lvl9pPr>
           </a:lstStyle>
           <a:p/>
@@ -6572,7 +6572,7 @@
         </p:nvSpPr>
         <p:spPr>
           <a:xfrm>
-            <a:off x="504000" y="1769040"/>
+            <a:off x="504000" y="2111940"/>
             <a:ext cx="4426920" cy="2091240"/>
           </a:xfrm>
           <a:prstGeom prst="rect">
@@ -6595,7 +6595,7 @@
               </a:spcAft>
               <a:buSzPts val="1400"/>
               <a:buNone/>
-              <a:defRPr b="0" i="0" sz="1800" u="none" cap="none" strike="noStrike"/>
+              <a:defRPr b="0" i="0" sz="1440" u="none" cap="none" strike="noStrike"/>
             </a:lvl1pPr>
             <a:lvl2pPr indent="-228600" lvl="1" marL="914400" marR="0" rtl="0" algn="l">
               <a:spcBef>
@@ -6606,7 +6606,7 @@
               </a:spcAft>
               <a:buSzPts val="1400"/>
               <a:buNone/>
-              <a:defRPr b="0" i="0" sz="1800" u="none" cap="none" strike="noStrike"/>
+              <a:defRPr b="0" i="0" sz="1440" u="none" cap="none" strike="noStrike"/>
             </a:lvl2pPr>
             <a:lvl3pPr indent="-228600" lvl="2" marL="1371600" marR="0" rtl="0" algn="l">
               <a:spcBef>
@@ -6617,7 +6617,7 @@
               </a:spcAft>
               <a:buSzPts val="1400"/>
               <a:buNone/>
-              <a:defRPr b="0" i="0" sz="1800" u="none" cap="none" strike="noStrike"/>
+              <a:defRPr b="0" i="0" sz="1440" u="none" cap="none" strike="noStrike"/>
             </a:lvl3pPr>
             <a:lvl4pPr indent="-228600" lvl="3" marL="1828800" marR="0" rtl="0" algn="l">
               <a:spcBef>
@@ -6628,7 +6628,7 @@
               </a:spcAft>
               <a:buSzPts val="1400"/>
               <a:buNone/>
-              <a:defRPr b="0" i="0" sz="1800" u="none" cap="none" strike="noStrike"/>
+              <a:defRPr b="0" i="0" sz="1440" u="none" cap="none" strike="noStrike"/>
             </a:lvl4pPr>
             <a:lvl5pPr indent="-228600" lvl="4" marL="2286000" marR="0" rtl="0" algn="l">
               <a:spcBef>
@@ -6639,7 +6639,7 @@
               </a:spcAft>
               <a:buSzPts val="1400"/>
               <a:buNone/>
-              <a:defRPr b="0" i="0" sz="1800" u="none" cap="none" strike="noStrike"/>
+              <a:defRPr b="0" i="0" sz="1440" u="none" cap="none" strike="noStrike"/>
             </a:lvl5pPr>
             <a:lvl6pPr indent="-228600" lvl="5" marL="2743200" marR="0" rtl="0" algn="l">
               <a:spcBef>
@@ -6650,7 +6650,7 @@
               </a:spcAft>
               <a:buSzPts val="1400"/>
               <a:buNone/>
-              <a:defRPr b="0" i="0" sz="1800" u="none" cap="none" strike="noStrike"/>
+              <a:defRPr b="0" i="0" sz="1440" u="none" cap="none" strike="noStrike"/>
             </a:lvl6pPr>
             <a:lvl7pPr indent="-228600" lvl="6" marL="3200400" marR="0" rtl="0" algn="l">
               <a:spcBef>
@@ -6661,7 +6661,7 @@
               </a:spcAft>
               <a:buSzPts val="1400"/>
               <a:buNone/>
-              <a:defRPr b="0" i="0" sz="1800" u="none" cap="none" strike="noStrike"/>
+              <a:defRPr b="0" i="0" sz="1440" u="none" cap="none" strike="noStrike"/>
             </a:lvl7pPr>
             <a:lvl8pPr indent="-228600" lvl="7" marL="3657600" marR="0" rtl="0" algn="l">
               <a:spcBef>
@@ -6672,7 +6672,7 @@
               </a:spcAft>
               <a:buSzPts val="1400"/>
               <a:buNone/>
-              <a:defRPr b="0" i="0" sz="1800" u="none" cap="none" strike="noStrike"/>
+              <a:defRPr b="0" i="0" sz="1440" u="none" cap="none" strike="noStrike"/>
             </a:lvl8pPr>
             <a:lvl9pPr indent="-228600" lvl="8" marL="4114800" marR="0" rtl="0" algn="l">
               <a:spcBef>
@@ -6683,7 +6683,7 @@
               </a:spcAft>
               <a:buSzPts val="1400"/>
               <a:buNone/>
-              <a:defRPr b="0" i="0" sz="1800" u="none" cap="none" strike="noStrike"/>
+              <a:defRPr b="0" i="0" sz="1440" u="none" cap="none" strike="noStrike"/>
             </a:lvl9pPr>
           </a:lstStyle>
           <a:p/>
@@ -6699,7 +6699,7 @@
         </p:nvSpPr>
         <p:spPr>
           <a:xfrm>
-            <a:off x="5152680" y="1769040"/>
+            <a:off x="5152680" y="2111940"/>
             <a:ext cx="4426920" cy="2091240"/>
           </a:xfrm>
           <a:prstGeom prst="rect">
@@ -6722,7 +6722,7 @@
               </a:spcAft>
               <a:buSzPts val="1400"/>
               <a:buNone/>
-              <a:defRPr b="0" i="0" sz="1800" u="none" cap="none" strike="noStrike"/>
+              <a:defRPr b="0" i="0" sz="1440" u="none" cap="none" strike="noStrike"/>
             </a:lvl1pPr>
             <a:lvl2pPr indent="-228600" lvl="1" marL="914400" marR="0" rtl="0" algn="l">
               <a:spcBef>
@@ -6733,7 +6733,7 @@
               </a:spcAft>
               <a:buSzPts val="1400"/>
               <a:buNone/>
-              <a:defRPr b="0" i="0" sz="1800" u="none" cap="none" strike="noStrike"/>
+              <a:defRPr b="0" i="0" sz="1440" u="none" cap="none" strike="noStrike"/>
             </a:lvl2pPr>
             <a:lvl3pPr indent="-228600" lvl="2" marL="1371600" marR="0" rtl="0" algn="l">
               <a:spcBef>
@@ -6744,7 +6744,7 @@
               </a:spcAft>
               <a:buSzPts val="1400"/>
               <a:buNone/>
-              <a:defRPr b="0" i="0" sz="1800" u="none" cap="none" strike="noStrike"/>
+              <a:defRPr b="0" i="0" sz="1440" u="none" cap="none" strike="noStrike"/>
             </a:lvl3pPr>
             <a:lvl4pPr indent="-228600" lvl="3" marL="1828800" marR="0" rtl="0" algn="l">
               <a:spcBef>
@@ -6755,7 +6755,7 @@
               </a:spcAft>
               <a:buSzPts val="1400"/>
               <a:buNone/>
-              <a:defRPr b="0" i="0" sz="1800" u="none" cap="none" strike="noStrike"/>
+              <a:defRPr b="0" i="0" sz="1440" u="none" cap="none" strike="noStrike"/>
             </a:lvl4pPr>
             <a:lvl5pPr indent="-228600" lvl="4" marL="2286000" marR="0" rtl="0" algn="l">
               <a:spcBef>
@@ -6766,7 +6766,7 @@
               </a:spcAft>
               <a:buSzPts val="1400"/>
               <a:buNone/>
-              <a:defRPr b="0" i="0" sz="1800" u="none" cap="none" strike="noStrike"/>
+              <a:defRPr b="0" i="0" sz="1440" u="none" cap="none" strike="noStrike"/>
             </a:lvl5pPr>
             <a:lvl6pPr indent="-228600" lvl="5" marL="2743200" marR="0" rtl="0" algn="l">
               <a:spcBef>
@@ -6777,7 +6777,7 @@
               </a:spcAft>
               <a:buSzPts val="1400"/>
               <a:buNone/>
-              <a:defRPr b="0" i="0" sz="1800" u="none" cap="none" strike="noStrike"/>
+              <a:defRPr b="0" i="0" sz="1440" u="none" cap="none" strike="noStrike"/>
             </a:lvl6pPr>
             <a:lvl7pPr indent="-228600" lvl="6" marL="3200400" marR="0" rtl="0" algn="l">
               <a:spcBef>
@@ -6788,7 +6788,7 @@
               </a:spcAft>
               <a:buSzPts val="1400"/>
               <a:buNone/>
-              <a:defRPr b="0" i="0" sz="1800" u="none" cap="none" strike="noStrike"/>
+              <a:defRPr b="0" i="0" sz="1440" u="none" cap="none" strike="noStrike"/>
             </a:lvl7pPr>
             <a:lvl8pPr indent="-228600" lvl="7" marL="3657600" marR="0" rtl="0" algn="l">
               <a:spcBef>
@@ -6799,7 +6799,7 @@
               </a:spcAft>
               <a:buSzPts val="1400"/>
               <a:buNone/>
-              <a:defRPr b="0" i="0" sz="1800" u="none" cap="none" strike="noStrike"/>
+              <a:defRPr b="0" i="0" sz="1440" u="none" cap="none" strike="noStrike"/>
             </a:lvl8pPr>
             <a:lvl9pPr indent="-228600" lvl="8" marL="4114800" marR="0" rtl="0" algn="l">
               <a:spcBef>
@@ -6810,7 +6810,7 @@
               </a:spcAft>
               <a:buSzPts val="1400"/>
               <a:buNone/>
-              <a:defRPr b="0" i="0" sz="1800" u="none" cap="none" strike="noStrike"/>
+              <a:defRPr b="0" i="0" sz="1440" u="none" cap="none" strike="noStrike"/>
             </a:lvl9pPr>
           </a:lstStyle>
           <a:p/>
@@ -6826,7 +6826,7 @@
         </p:nvSpPr>
         <p:spPr>
           <a:xfrm>
-            <a:off x="504000" y="4059360"/>
+            <a:off x="504000" y="4402260"/>
             <a:ext cx="9071640" cy="2091240"/>
           </a:xfrm>
           <a:prstGeom prst="rect">
@@ -6849,7 +6849,7 @@
               </a:spcAft>
               <a:buSzPts val="1400"/>
               <a:buNone/>
-              <a:defRPr b="0" i="0" sz="1800" u="none" cap="none" strike="noStrike"/>
+              <a:defRPr b="0" i="0" sz="1440" u="none" cap="none" strike="noStrike"/>
             </a:lvl1pPr>
             <a:lvl2pPr indent="-228600" lvl="1" marL="914400" marR="0" rtl="0" algn="l">
               <a:spcBef>
@@ -6860,7 +6860,7 @@
               </a:spcAft>
               <a:buSzPts val="1400"/>
               <a:buNone/>
-              <a:defRPr b="0" i="0" sz="1800" u="none" cap="none" strike="noStrike"/>
+              <a:defRPr b="0" i="0" sz="1440" u="none" cap="none" strike="noStrike"/>
             </a:lvl2pPr>
             <a:lvl3pPr indent="-228600" lvl="2" marL="1371600" marR="0" rtl="0" algn="l">
               <a:spcBef>
@@ -6871,7 +6871,7 @@
               </a:spcAft>
               <a:buSzPts val="1400"/>
               <a:buNone/>
-              <a:defRPr b="0" i="0" sz="1800" u="none" cap="none" strike="noStrike"/>
+              <a:defRPr b="0" i="0" sz="1440" u="none" cap="none" strike="noStrike"/>
             </a:lvl3pPr>
             <a:lvl4pPr indent="-228600" lvl="3" marL="1828800" marR="0" rtl="0" algn="l">
               <a:spcBef>
@@ -6882,7 +6882,7 @@
               </a:spcAft>
               <a:buSzPts val="1400"/>
               <a:buNone/>
-              <a:defRPr b="0" i="0" sz="1800" u="none" cap="none" strike="noStrike"/>
+              <a:defRPr b="0" i="0" sz="1440" u="none" cap="none" strike="noStrike"/>
             </a:lvl4pPr>
             <a:lvl5pPr indent="-228600" lvl="4" marL="2286000" marR="0" rtl="0" algn="l">
               <a:spcBef>
@@ -6893,7 +6893,7 @@
               </a:spcAft>
               <a:buSzPts val="1400"/>
               <a:buNone/>
-              <a:defRPr b="0" i="0" sz="1800" u="none" cap="none" strike="noStrike"/>
+              <a:defRPr b="0" i="0" sz="1440" u="none" cap="none" strike="noStrike"/>
             </a:lvl5pPr>
             <a:lvl6pPr indent="-228600" lvl="5" marL="2743200" marR="0" rtl="0" algn="l">
               <a:spcBef>
@@ -6904,7 +6904,7 @@
               </a:spcAft>
               <a:buSzPts val="1400"/>
               <a:buNone/>
-              <a:defRPr b="0" i="0" sz="1800" u="none" cap="none" strike="noStrike"/>
+              <a:defRPr b="0" i="0" sz="1440" u="none" cap="none" strike="noStrike"/>
             </a:lvl6pPr>
             <a:lvl7pPr indent="-228600" lvl="6" marL="3200400" marR="0" rtl="0" algn="l">
               <a:spcBef>
@@ -6915,7 +6915,7 @@
               </a:spcAft>
               <a:buSzPts val="1400"/>
               <a:buNone/>
-              <a:defRPr b="0" i="0" sz="1800" u="none" cap="none" strike="noStrike"/>
+              <a:defRPr b="0" i="0" sz="1440" u="none" cap="none" strike="noStrike"/>
             </a:lvl7pPr>
             <a:lvl8pPr indent="-228600" lvl="7" marL="3657600" marR="0" rtl="0" algn="l">
               <a:spcBef>
@@ -6926,7 +6926,7 @@
               </a:spcAft>
               <a:buSzPts val="1400"/>
               <a:buNone/>
-              <a:defRPr b="0" i="0" sz="1800" u="none" cap="none" strike="noStrike"/>
+              <a:defRPr b="0" i="0" sz="1440" u="none" cap="none" strike="noStrike"/>
             </a:lvl8pPr>
             <a:lvl9pPr indent="-228600" lvl="8" marL="4114800" marR="0" rtl="0" algn="l">
               <a:spcBef>
@@ -6937,7 +6937,7 @@
               </a:spcAft>
               <a:buSzPts val="1400"/>
               <a:buNone/>
-              <a:defRPr b="0" i="0" sz="1800" u="none" cap="none" strike="noStrike"/>
+              <a:defRPr b="0" i="0" sz="1440" u="none" cap="none" strike="noStrike"/>
             </a:lvl9pPr>
           </a:lstStyle>
           <a:p/>
@@ -6978,7 +6978,7 @@
         </p:nvSpPr>
         <p:spPr>
           <a:xfrm>
-            <a:off x="504000" y="301320"/>
+            <a:off x="504000" y="644220"/>
             <a:ext cx="9071640" cy="1262160"/>
           </a:xfrm>
           <a:prstGeom prst="rect">
@@ -7001,7 +7001,7 @@
               </a:spcAft>
               <a:buSzPts val="1400"/>
               <a:buNone/>
-              <a:defRPr b="0" i="0" sz="1800" u="none" cap="none" strike="noStrike"/>
+              <a:defRPr b="0" i="0" sz="1440" u="none" cap="none" strike="noStrike"/>
             </a:lvl1pPr>
             <a:lvl2pPr lvl="1" marR="0" rtl="0" algn="l">
               <a:spcBef>
@@ -7012,7 +7012,7 @@
               </a:spcAft>
               <a:buSzPts val="1400"/>
               <a:buNone/>
-              <a:defRPr b="0" i="0" sz="1800" u="none" cap="none" strike="noStrike"/>
+              <a:defRPr b="0" i="0" sz="1440" u="none" cap="none" strike="noStrike"/>
             </a:lvl2pPr>
             <a:lvl3pPr lvl="2" marR="0" rtl="0" algn="l">
               <a:spcBef>
@@ -7023,7 +7023,7 @@
               </a:spcAft>
               <a:buSzPts val="1400"/>
               <a:buNone/>
-              <a:defRPr b="0" i="0" sz="1800" u="none" cap="none" strike="noStrike"/>
+              <a:defRPr b="0" i="0" sz="1440" u="none" cap="none" strike="noStrike"/>
             </a:lvl3pPr>
             <a:lvl4pPr lvl="3" marR="0" rtl="0" algn="l">
               <a:spcBef>
@@ -7034,7 +7034,7 @@
               </a:spcAft>
               <a:buSzPts val="1400"/>
               <a:buNone/>
-              <a:defRPr b="0" i="0" sz="1800" u="none" cap="none" strike="noStrike"/>
+              <a:defRPr b="0" i="0" sz="1440" u="none" cap="none" strike="noStrike"/>
             </a:lvl4pPr>
             <a:lvl5pPr lvl="4" marR="0" rtl="0" algn="l">
               <a:spcBef>
@@ -7045,7 +7045,7 @@
               </a:spcAft>
               <a:buSzPts val="1400"/>
               <a:buNone/>
-              <a:defRPr b="0" i="0" sz="1800" u="none" cap="none" strike="noStrike"/>
+              <a:defRPr b="0" i="0" sz="1440" u="none" cap="none" strike="noStrike"/>
             </a:lvl5pPr>
             <a:lvl6pPr lvl="5" marR="0" rtl="0" algn="l">
               <a:spcBef>
@@ -7056,7 +7056,7 @@
               </a:spcAft>
               <a:buSzPts val="1400"/>
               <a:buNone/>
-              <a:defRPr b="0" i="0" sz="1800" u="none" cap="none" strike="noStrike"/>
+              <a:defRPr b="0" i="0" sz="1440" u="none" cap="none" strike="noStrike"/>
             </a:lvl6pPr>
             <a:lvl7pPr lvl="6" marR="0" rtl="0" algn="l">
               <a:spcBef>
@@ -7067,7 +7067,7 @@
               </a:spcAft>
               <a:buSzPts val="1400"/>
               <a:buNone/>
-              <a:defRPr b="0" i="0" sz="1800" u="none" cap="none" strike="noStrike"/>
+              <a:defRPr b="0" i="0" sz="1440" u="none" cap="none" strike="noStrike"/>
             </a:lvl7pPr>
             <a:lvl8pPr lvl="7" marR="0" rtl="0" algn="l">
               <a:spcBef>
@@ -7078,7 +7078,7 @@
               </a:spcAft>
               <a:buSzPts val="1400"/>
               <a:buNone/>
-              <a:defRPr b="0" i="0" sz="1800" u="none" cap="none" strike="noStrike"/>
+              <a:defRPr b="0" i="0" sz="1440" u="none" cap="none" strike="noStrike"/>
             </a:lvl8pPr>
             <a:lvl9pPr lvl="8" marR="0" rtl="0" algn="l">
               <a:spcBef>
@@ -7089,7 +7089,7 @@
               </a:spcAft>
               <a:buSzPts val="1400"/>
               <a:buNone/>
-              <a:defRPr b="0" i="0" sz="1800" u="none" cap="none" strike="noStrike"/>
+              <a:defRPr b="0" i="0" sz="1440" u="none" cap="none" strike="noStrike"/>
             </a:lvl9pPr>
           </a:lstStyle>
           <a:p/>
@@ -7105,7 +7105,7 @@
         </p:nvSpPr>
         <p:spPr>
           <a:xfrm>
-            <a:off x="504000" y="1769040"/>
+            <a:off x="504000" y="2111940"/>
             <a:ext cx="9071640" cy="4384440"/>
           </a:xfrm>
           <a:prstGeom prst="rect">
@@ -7128,7 +7128,7 @@
               </a:spcAft>
               <a:buSzPts val="1400"/>
               <a:buNone/>
-              <a:defRPr b="0" i="0" sz="1800" u="none" cap="none" strike="noStrike"/>
+              <a:defRPr b="0" i="0" sz="1440" u="none" cap="none" strike="noStrike"/>
             </a:lvl1pPr>
             <a:lvl2pPr indent="-228600" lvl="1" marL="914400" marR="0" rtl="0" algn="l">
               <a:spcBef>
@@ -7139,7 +7139,7 @@
               </a:spcAft>
               <a:buSzPts val="1400"/>
               <a:buNone/>
-              <a:defRPr b="0" i="0" sz="1800" u="none" cap="none" strike="noStrike"/>
+              <a:defRPr b="0" i="0" sz="1440" u="none" cap="none" strike="noStrike"/>
             </a:lvl2pPr>
             <a:lvl3pPr indent="-228600" lvl="2" marL="1371600" marR="0" rtl="0" algn="l">
               <a:spcBef>
@@ -7150,7 +7150,7 @@
               </a:spcAft>
               <a:buSzPts val="1400"/>
               <a:buNone/>
-              <a:defRPr b="0" i="0" sz="1800" u="none" cap="none" strike="noStrike"/>
+              <a:defRPr b="0" i="0" sz="1440" u="none" cap="none" strike="noStrike"/>
             </a:lvl3pPr>
             <a:lvl4pPr indent="-228600" lvl="3" marL="1828800" marR="0" rtl="0" algn="l">
               <a:spcBef>
@@ -7161,7 +7161,7 @@
               </a:spcAft>
               <a:buSzPts val="1400"/>
               <a:buNone/>
-              <a:defRPr b="0" i="0" sz="1800" u="none" cap="none" strike="noStrike"/>
+              <a:defRPr b="0" i="0" sz="1440" u="none" cap="none" strike="noStrike"/>
             </a:lvl4pPr>
             <a:lvl5pPr indent="-228600" lvl="4" marL="2286000" marR="0" rtl="0" algn="l">
               <a:spcBef>
@@ -7172,7 +7172,7 @@
               </a:spcAft>
               <a:buSzPts val="1400"/>
               <a:buNone/>
-              <a:defRPr b="0" i="0" sz="1800" u="none" cap="none" strike="noStrike"/>
+              <a:defRPr b="0" i="0" sz="1440" u="none" cap="none" strike="noStrike"/>
             </a:lvl5pPr>
             <a:lvl6pPr indent="-228600" lvl="5" marL="2743200" marR="0" rtl="0" algn="l">
               <a:spcBef>
@@ -7183,7 +7183,7 @@
               </a:spcAft>
               <a:buSzPts val="1400"/>
               <a:buNone/>
-              <a:defRPr b="0" i="0" sz="1800" u="none" cap="none" strike="noStrike"/>
+              <a:defRPr b="0" i="0" sz="1440" u="none" cap="none" strike="noStrike"/>
             </a:lvl6pPr>
             <a:lvl7pPr indent="-228600" lvl="6" marL="3200400" marR="0" rtl="0" algn="l">
               <a:spcBef>
@@ -7194,7 +7194,7 @@
               </a:spcAft>
               <a:buSzPts val="1400"/>
               <a:buNone/>
-              <a:defRPr b="0" i="0" sz="1800" u="none" cap="none" strike="noStrike"/>
+              <a:defRPr b="0" i="0" sz="1440" u="none" cap="none" strike="noStrike"/>
             </a:lvl7pPr>
             <a:lvl8pPr indent="-228600" lvl="7" marL="3657600" marR="0" rtl="0" algn="l">
               <a:spcBef>
@@ -7205,7 +7205,7 @@
               </a:spcAft>
               <a:buSzPts val="1400"/>
               <a:buNone/>
-              <a:defRPr b="0" i="0" sz="1800" u="none" cap="none" strike="noStrike"/>
+              <a:defRPr b="0" i="0" sz="1440" u="none" cap="none" strike="noStrike"/>
             </a:lvl8pPr>
             <a:lvl9pPr indent="-228600" lvl="8" marL="4114800" marR="0" rtl="0" algn="l">
               <a:spcBef>
@@ -7216,7 +7216,7 @@
               </a:spcAft>
               <a:buSzPts val="1400"/>
               <a:buNone/>
-              <a:defRPr b="0" i="0" sz="1800" u="none" cap="none" strike="noStrike"/>
+              <a:defRPr b="0" i="0" sz="1440" u="none" cap="none" strike="noStrike"/>
             </a:lvl9pPr>
           </a:lstStyle>
           <a:p/>
@@ -7232,7 +7232,7 @@
         </p:nvSpPr>
         <p:spPr>
           <a:xfrm>
-            <a:off x="504000" y="6887160"/>
+            <a:off x="504000" y="7230060"/>
             <a:ext cx="2348280" cy="521280"/>
           </a:xfrm>
           <a:prstGeom prst="rect">
@@ -7255,7 +7255,7 @@
               </a:spcAft>
               <a:buSzPts val="1400"/>
               <a:buNone/>
-              <a:defRPr b="0" i="0" sz="1800" u="none" cap="none" strike="noStrike"/>
+              <a:defRPr b="0" i="0" sz="1440" u="none" cap="none" strike="noStrike"/>
             </a:lvl1pPr>
             <a:lvl2pPr lvl="1" marR="0" rtl="0" algn="l">
               <a:spcBef>
@@ -7266,7 +7266,7 @@
               </a:spcAft>
               <a:buSzPts val="1400"/>
               <a:buNone/>
-              <a:defRPr b="0" i="0" sz="1800" u="none" cap="none" strike="noStrike"/>
+              <a:defRPr b="0" i="0" sz="1440" u="none" cap="none" strike="noStrike"/>
             </a:lvl2pPr>
             <a:lvl3pPr lvl="2" marR="0" rtl="0" algn="l">
               <a:spcBef>
@@ -7277,7 +7277,7 @@
               </a:spcAft>
               <a:buSzPts val="1400"/>
               <a:buNone/>
-              <a:defRPr b="0" i="0" sz="1800" u="none" cap="none" strike="noStrike"/>
+              <a:defRPr b="0" i="0" sz="1440" u="none" cap="none" strike="noStrike"/>
             </a:lvl3pPr>
             <a:lvl4pPr lvl="3" marR="0" rtl="0" algn="l">
               <a:spcBef>
@@ -7288,7 +7288,7 @@
               </a:spcAft>
               <a:buSzPts val="1400"/>
               <a:buNone/>
-              <a:defRPr b="0" i="0" sz="1800" u="none" cap="none" strike="noStrike"/>
+              <a:defRPr b="0" i="0" sz="1440" u="none" cap="none" strike="noStrike"/>
             </a:lvl4pPr>
             <a:lvl5pPr lvl="4" marR="0" rtl="0" algn="l">
               <a:spcBef>
@@ -7299,7 +7299,7 @@
               </a:spcAft>
               <a:buSzPts val="1400"/>
               <a:buNone/>
-              <a:defRPr b="0" i="0" sz="1800" u="none" cap="none" strike="noStrike"/>
+              <a:defRPr b="0" i="0" sz="1440" u="none" cap="none" strike="noStrike"/>
             </a:lvl5pPr>
             <a:lvl6pPr lvl="5" marR="0" rtl="0" algn="l">
               <a:spcBef>
@@ -7310,7 +7310,7 @@
               </a:spcAft>
               <a:buSzPts val="1400"/>
               <a:buNone/>
-              <a:defRPr b="0" i="0" sz="1800" u="none" cap="none" strike="noStrike"/>
+              <a:defRPr b="0" i="0" sz="1440" u="none" cap="none" strike="noStrike"/>
             </a:lvl6pPr>
             <a:lvl7pPr lvl="6" marR="0" rtl="0" algn="l">
               <a:spcBef>
@@ -7321,7 +7321,7 @@
               </a:spcAft>
               <a:buSzPts val="1400"/>
               <a:buNone/>
-              <a:defRPr b="0" i="0" sz="1800" u="none" cap="none" strike="noStrike"/>
+              <a:defRPr b="0" i="0" sz="1440" u="none" cap="none" strike="noStrike"/>
             </a:lvl7pPr>
             <a:lvl8pPr lvl="7" marR="0" rtl="0" algn="l">
               <a:spcBef>
@@ -7332,7 +7332,7 @@
               </a:spcAft>
               <a:buSzPts val="1400"/>
               <a:buNone/>
-              <a:defRPr b="0" i="0" sz="1800" u="none" cap="none" strike="noStrike"/>
+              <a:defRPr b="0" i="0" sz="1440" u="none" cap="none" strike="noStrike"/>
             </a:lvl8pPr>
             <a:lvl9pPr lvl="8" marR="0" rtl="0" algn="l">
               <a:spcBef>
@@ -7343,7 +7343,7 @@
               </a:spcAft>
               <a:buSzPts val="1400"/>
               <a:buNone/>
-              <a:defRPr b="0" i="0" sz="1800" u="none" cap="none" strike="noStrike"/>
+              <a:defRPr b="0" i="0" sz="1440" u="none" cap="none" strike="noStrike"/>
             </a:lvl9pPr>
           </a:lstStyle>
           <a:p/>
@@ -7359,7 +7359,7 @@
         </p:nvSpPr>
         <p:spPr>
           <a:xfrm>
-            <a:off x="3447360" y="6887160"/>
+            <a:off x="3447360" y="7230060"/>
             <a:ext cx="3195000" cy="521280"/>
           </a:xfrm>
           <a:prstGeom prst="rect">
@@ -7382,7 +7382,7 @@
               </a:spcAft>
               <a:buSzPts val="1400"/>
               <a:buNone/>
-              <a:defRPr b="0" i="0" sz="1800" u="none" cap="none" strike="noStrike"/>
+              <a:defRPr b="0" i="0" sz="1440" u="none" cap="none" strike="noStrike"/>
             </a:lvl1pPr>
             <a:lvl2pPr lvl="1" marR="0" rtl="0" algn="l">
               <a:spcBef>
@@ -7393,7 +7393,7 @@
               </a:spcAft>
               <a:buSzPts val="1400"/>
               <a:buNone/>
-              <a:defRPr b="0" i="0" sz="1800" u="none" cap="none" strike="noStrike"/>
+              <a:defRPr b="0" i="0" sz="1440" u="none" cap="none" strike="noStrike"/>
             </a:lvl2pPr>
             <a:lvl3pPr lvl="2" marR="0" rtl="0" algn="l">
               <a:spcBef>
@@ -7404,7 +7404,7 @@
               </a:spcAft>
               <a:buSzPts val="1400"/>
               <a:buNone/>
-              <a:defRPr b="0" i="0" sz="1800" u="none" cap="none" strike="noStrike"/>
+              <a:defRPr b="0" i="0" sz="1440" u="none" cap="none" strike="noStrike"/>
             </a:lvl3pPr>
             <a:lvl4pPr lvl="3" marR="0" rtl="0" algn="l">
               <a:spcBef>
@@ -7415,7 +7415,7 @@
               </a:spcAft>
               <a:buSzPts val="1400"/>
               <a:buNone/>
-              <a:defRPr b="0" i="0" sz="1800" u="none" cap="none" strike="noStrike"/>
+              <a:defRPr b="0" i="0" sz="1440" u="none" cap="none" strike="noStrike"/>
             </a:lvl4pPr>
             <a:lvl5pPr lvl="4" marR="0" rtl="0" algn="l">
               <a:spcBef>
@@ -7426,7 +7426,7 @@
               </a:spcAft>
               <a:buSzPts val="1400"/>
               <a:buNone/>
-              <a:defRPr b="0" i="0" sz="1800" u="none" cap="none" strike="noStrike"/>
+              <a:defRPr b="0" i="0" sz="1440" u="none" cap="none" strike="noStrike"/>
             </a:lvl5pPr>
             <a:lvl6pPr lvl="5" marR="0" rtl="0" algn="l">
               <a:spcBef>
@@ -7437,7 +7437,7 @@
               </a:spcAft>
               <a:buSzPts val="1400"/>
               <a:buNone/>
-              <a:defRPr b="0" i="0" sz="1800" u="none" cap="none" strike="noStrike"/>
+              <a:defRPr b="0" i="0" sz="1440" u="none" cap="none" strike="noStrike"/>
             </a:lvl6pPr>
             <a:lvl7pPr lvl="6" marR="0" rtl="0" algn="l">
               <a:spcBef>
@@ -7448,7 +7448,7 @@
               </a:spcAft>
               <a:buSzPts val="1400"/>
               <a:buNone/>
-              <a:defRPr b="0" i="0" sz="1800" u="none" cap="none" strike="noStrike"/>
+              <a:defRPr b="0" i="0" sz="1440" u="none" cap="none" strike="noStrike"/>
             </a:lvl7pPr>
             <a:lvl8pPr lvl="7" marR="0" rtl="0" algn="l">
               <a:spcBef>
@@ -7459,7 +7459,7 @@
               </a:spcAft>
               <a:buSzPts val="1400"/>
               <a:buNone/>
-              <a:defRPr b="0" i="0" sz="1800" u="none" cap="none" strike="noStrike"/>
+              <a:defRPr b="0" i="0" sz="1440" u="none" cap="none" strike="noStrike"/>
             </a:lvl8pPr>
             <a:lvl9pPr lvl="8" marR="0" rtl="0" algn="l">
               <a:spcBef>
@@ -7470,190 +7470,10 @@
               </a:spcAft>
               <a:buSzPts val="1400"/>
               <a:buNone/>
-              <a:defRPr b="0" i="0" sz="1800" u="none" cap="none" strike="noStrike"/>
+              <a:defRPr b="0" i="0" sz="1440" u="none" cap="none" strike="noStrike"/>
             </a:lvl9pPr>
           </a:lstStyle>
           <a:p/>
-        </p:txBody>
-      </p:sp>
-      <p:sp>
-        <p:nvSpPr>
-          <p:cNvPr id="10" name="Google Shape;10;p1"/>
-          <p:cNvSpPr txBox="1"/>
-          <p:nvPr>
-            <p:ph idx="12" type="sldNum"/>
-          </p:nvPr>
-        </p:nvSpPr>
-        <p:spPr>
-          <a:xfrm>
-            <a:off x="7227360" y="6887160"/>
-            <a:ext cx="2348280" cy="521280"/>
-          </a:xfrm>
-          <a:prstGeom prst="rect">
-            <a:avLst/>
-          </a:prstGeom>
-          <a:noFill/>
-          <a:ln>
-            <a:noFill/>
-          </a:ln>
-        </p:spPr>
-        <p:txBody>
-          <a:bodyPr anchorCtr="0" anchor="t" bIns="0" lIns="0" spcFirstLastPara="1" rIns="0" wrap="square" tIns="0">
-            <a:noAutofit/>
-          </a:bodyPr>
-          <a:lstStyle>
-            <a:lvl1pPr indent="0" lvl="0" marL="0" marR="0" rtl="0" algn="r">
-              <a:spcBef>
-                <a:spcPts val="0"/>
-              </a:spcBef>
-              <a:buNone/>
-              <a:defRPr b="0" i="0" sz="1400" u="none" cap="none" strike="noStrike">
-                <a:solidFill>
-                  <a:srgbClr val="000000"/>
-                </a:solidFill>
-                <a:latin typeface="Times New Roman"/>
-                <a:ea typeface="Times New Roman"/>
-                <a:cs typeface="Times New Roman"/>
-                <a:sym typeface="Times New Roman"/>
-              </a:defRPr>
-            </a:lvl1pPr>
-            <a:lvl2pPr indent="0" lvl="1" marL="0" marR="0" rtl="0" algn="r">
-              <a:spcBef>
-                <a:spcPts val="0"/>
-              </a:spcBef>
-              <a:buNone/>
-              <a:defRPr b="0" i="0" sz="1400" u="none" cap="none" strike="noStrike">
-                <a:solidFill>
-                  <a:srgbClr val="000000"/>
-                </a:solidFill>
-                <a:latin typeface="Times New Roman"/>
-                <a:ea typeface="Times New Roman"/>
-                <a:cs typeface="Times New Roman"/>
-                <a:sym typeface="Times New Roman"/>
-              </a:defRPr>
-            </a:lvl2pPr>
-            <a:lvl3pPr indent="0" lvl="2" marL="0" marR="0" rtl="0" algn="r">
-              <a:spcBef>
-                <a:spcPts val="0"/>
-              </a:spcBef>
-              <a:buNone/>
-              <a:defRPr b="0" i="0" sz="1400" u="none" cap="none" strike="noStrike">
-                <a:solidFill>
-                  <a:srgbClr val="000000"/>
-                </a:solidFill>
-                <a:latin typeface="Times New Roman"/>
-                <a:ea typeface="Times New Roman"/>
-                <a:cs typeface="Times New Roman"/>
-                <a:sym typeface="Times New Roman"/>
-              </a:defRPr>
-            </a:lvl3pPr>
-            <a:lvl4pPr indent="0" lvl="3" marL="0" marR="0" rtl="0" algn="r">
-              <a:spcBef>
-                <a:spcPts val="0"/>
-              </a:spcBef>
-              <a:buNone/>
-              <a:defRPr b="0" i="0" sz="1400" u="none" cap="none" strike="noStrike">
-                <a:solidFill>
-                  <a:srgbClr val="000000"/>
-                </a:solidFill>
-                <a:latin typeface="Times New Roman"/>
-                <a:ea typeface="Times New Roman"/>
-                <a:cs typeface="Times New Roman"/>
-                <a:sym typeface="Times New Roman"/>
-              </a:defRPr>
-            </a:lvl4pPr>
-            <a:lvl5pPr indent="0" lvl="4" marL="0" marR="0" rtl="0" algn="r">
-              <a:spcBef>
-                <a:spcPts val="0"/>
-              </a:spcBef>
-              <a:buNone/>
-              <a:defRPr b="0" i="0" sz="1400" u="none" cap="none" strike="noStrike">
-                <a:solidFill>
-                  <a:srgbClr val="000000"/>
-                </a:solidFill>
-                <a:latin typeface="Times New Roman"/>
-                <a:ea typeface="Times New Roman"/>
-                <a:cs typeface="Times New Roman"/>
-                <a:sym typeface="Times New Roman"/>
-              </a:defRPr>
-            </a:lvl5pPr>
-            <a:lvl6pPr indent="0" lvl="5" marL="0" marR="0" rtl="0" algn="r">
-              <a:spcBef>
-                <a:spcPts val="0"/>
-              </a:spcBef>
-              <a:buNone/>
-              <a:defRPr b="0" i="0" sz="1400" u="none" cap="none" strike="noStrike">
-                <a:solidFill>
-                  <a:srgbClr val="000000"/>
-                </a:solidFill>
-                <a:latin typeface="Times New Roman"/>
-                <a:ea typeface="Times New Roman"/>
-                <a:cs typeface="Times New Roman"/>
-                <a:sym typeface="Times New Roman"/>
-              </a:defRPr>
-            </a:lvl6pPr>
-            <a:lvl7pPr indent="0" lvl="6" marL="0" marR="0" rtl="0" algn="r">
-              <a:spcBef>
-                <a:spcPts val="0"/>
-              </a:spcBef>
-              <a:buNone/>
-              <a:defRPr b="0" i="0" sz="1400" u="none" cap="none" strike="noStrike">
-                <a:solidFill>
-                  <a:srgbClr val="000000"/>
-                </a:solidFill>
-                <a:latin typeface="Times New Roman"/>
-                <a:ea typeface="Times New Roman"/>
-                <a:cs typeface="Times New Roman"/>
-                <a:sym typeface="Times New Roman"/>
-              </a:defRPr>
-            </a:lvl7pPr>
-            <a:lvl8pPr indent="0" lvl="7" marL="0" marR="0" rtl="0" algn="r">
-              <a:spcBef>
-                <a:spcPts val="0"/>
-              </a:spcBef>
-              <a:buNone/>
-              <a:defRPr b="0" i="0" sz="1400" u="none" cap="none" strike="noStrike">
-                <a:solidFill>
-                  <a:srgbClr val="000000"/>
-                </a:solidFill>
-                <a:latin typeface="Times New Roman"/>
-                <a:ea typeface="Times New Roman"/>
-                <a:cs typeface="Times New Roman"/>
-                <a:sym typeface="Times New Roman"/>
-              </a:defRPr>
-            </a:lvl8pPr>
-            <a:lvl9pPr indent="0" lvl="8" marL="0" marR="0" rtl="0" algn="r">
-              <a:spcBef>
-                <a:spcPts val="0"/>
-              </a:spcBef>
-              <a:buNone/>
-              <a:defRPr b="0" i="0" sz="1400" u="none" cap="none" strike="noStrike">
-                <a:solidFill>
-                  <a:srgbClr val="000000"/>
-                </a:solidFill>
-                <a:latin typeface="Times New Roman"/>
-                <a:ea typeface="Times New Roman"/>
-                <a:cs typeface="Times New Roman"/>
-                <a:sym typeface="Times New Roman"/>
-              </a:defRPr>
-            </a:lvl9pPr>
-          </a:lstStyle>
-          <a:p>
-            <a:pPr indent="0" lvl="0" marL="0">
-              <a:spcBef>
-                <a:spcPts val="0"/>
-              </a:spcBef>
-              <a:spcAft>
-                <a:spcPts val="0"/>
-              </a:spcAft>
-              <a:buNone/>
-            </a:pPr>
-            <a:fld id="{00000000-1234-1234-1234-123412341234}" type="slidenum">
-              <a:rPr lang="en-US"/>
-              <a:t>‹#›</a:t>
-            </a:fld>
-            <a:endParaRPr/>
-          </a:p>
         </p:txBody>
       </p:sp>
     </p:spTree>
@@ -7701,7 +7521,7 @@
           <a:srgbClr val="000000"/>
         </a:buClr>
         <a:buFont typeface="Arial"/>
-        <a:defRPr b="0" i="0" sz="1400" u="none" cap="none" strike="noStrike">
+        <a:defRPr b="0" i="0" sz="1120" u="none" cap="none" strike="noStrike">
           <a:solidFill>
             <a:srgbClr val="000000"/>
           </a:solidFill>
@@ -7725,7 +7545,7 @@
           <a:srgbClr val="000000"/>
         </a:buClr>
         <a:buFont typeface="Arial"/>
-        <a:defRPr b="0" i="0" sz="1400" u="none" cap="none" strike="noStrike">
+        <a:defRPr b="0" i="0" sz="1120" u="none" cap="none" strike="noStrike">
           <a:solidFill>
             <a:srgbClr val="000000"/>
           </a:solidFill>
@@ -7749,7 +7569,7 @@
           <a:srgbClr val="000000"/>
         </a:buClr>
         <a:buFont typeface="Arial"/>
-        <a:defRPr b="0" i="0" sz="1400" u="none" cap="none" strike="noStrike">
+        <a:defRPr b="0" i="0" sz="1120" u="none" cap="none" strike="noStrike">
           <a:solidFill>
             <a:srgbClr val="000000"/>
           </a:solidFill>
@@ -7773,7 +7593,7 @@
           <a:srgbClr val="000000"/>
         </a:buClr>
         <a:buFont typeface="Arial"/>
-        <a:defRPr b="0" i="0" sz="1400" u="none" cap="none" strike="noStrike">
+        <a:defRPr b="0" i="0" sz="1120" u="none" cap="none" strike="noStrike">
           <a:solidFill>
             <a:srgbClr val="000000"/>
           </a:solidFill>
@@ -7797,7 +7617,7 @@
           <a:srgbClr val="000000"/>
         </a:buClr>
         <a:buFont typeface="Arial"/>
-        <a:defRPr b="0" i="0" sz="1400" u="none" cap="none" strike="noStrike">
+        <a:defRPr b="0" i="0" sz="1120" u="none" cap="none" strike="noStrike">
           <a:solidFill>
             <a:srgbClr val="000000"/>
           </a:solidFill>
@@ -7821,7 +7641,7 @@
           <a:srgbClr val="000000"/>
         </a:buClr>
         <a:buFont typeface="Arial"/>
-        <a:defRPr b="0" i="0" sz="1400" u="none" cap="none" strike="noStrike">
+        <a:defRPr b="0" i="0" sz="1120" u="none" cap="none" strike="noStrike">
           <a:solidFill>
             <a:srgbClr val="000000"/>
           </a:solidFill>
@@ -7845,7 +7665,7 @@
           <a:srgbClr val="000000"/>
         </a:buClr>
         <a:buFont typeface="Arial"/>
-        <a:defRPr b="0" i="0" sz="1400" u="none" cap="none" strike="noStrike">
+        <a:defRPr b="0" i="0" sz="1120" u="none" cap="none" strike="noStrike">
           <a:solidFill>
             <a:srgbClr val="000000"/>
           </a:solidFill>
@@ -7869,7 +7689,7 @@
           <a:srgbClr val="000000"/>
         </a:buClr>
         <a:buFont typeface="Arial"/>
-        <a:defRPr b="0" i="0" sz="1400" u="none" cap="none" strike="noStrike">
+        <a:defRPr b="0" i="0" sz="1120" u="none" cap="none" strike="noStrike">
           <a:solidFill>
             <a:srgbClr val="000000"/>
           </a:solidFill>
@@ -7893,7 +7713,7 @@
           <a:srgbClr val="000000"/>
         </a:buClr>
         <a:buFont typeface="Arial"/>
-        <a:defRPr b="0" i="0" sz="1400" u="none" cap="none" strike="noStrike">
+        <a:defRPr b="0" i="0" sz="1120" u="none" cap="none" strike="noStrike">
           <a:solidFill>
             <a:srgbClr val="000000"/>
           </a:solidFill>
@@ -7930,7 +7750,7 @@
           <a:srgbClr val="000000"/>
         </a:buClr>
         <a:buFont typeface="Arial"/>
-        <a:defRPr b="0" i="0" sz="1400" u="none" cap="none" strike="noStrike">
+        <a:defRPr b="0" i="0" sz="1120" u="none" cap="none" strike="noStrike">
           <a:solidFill>
             <a:srgbClr val="000000"/>
           </a:solidFill>
@@ -7954,7 +7774,7 @@
           <a:srgbClr val="000000"/>
         </a:buClr>
         <a:buFont typeface="Arial"/>
-        <a:defRPr b="0" i="0" sz="1400" u="none" cap="none" strike="noStrike">
+        <a:defRPr b="0" i="0" sz="1120" u="none" cap="none" strike="noStrike">
           <a:solidFill>
             <a:srgbClr val="000000"/>
           </a:solidFill>
@@ -7978,7 +7798,7 @@
           <a:srgbClr val="000000"/>
         </a:buClr>
         <a:buFont typeface="Arial"/>
-        <a:defRPr b="0" i="0" sz="1400" u="none" cap="none" strike="noStrike">
+        <a:defRPr b="0" i="0" sz="1120" u="none" cap="none" strike="noStrike">
           <a:solidFill>
             <a:srgbClr val="000000"/>
           </a:solidFill>
@@ -8002,7 +7822,7 @@
           <a:srgbClr val="000000"/>
         </a:buClr>
         <a:buFont typeface="Arial"/>
-        <a:defRPr b="0" i="0" sz="1400" u="none" cap="none" strike="noStrike">
+        <a:defRPr b="0" i="0" sz="1120" u="none" cap="none" strike="noStrike">
           <a:solidFill>
             <a:srgbClr val="000000"/>
           </a:solidFill>
@@ -8026,7 +7846,7 @@
           <a:srgbClr val="000000"/>
         </a:buClr>
         <a:buFont typeface="Arial"/>
-        <a:defRPr b="0" i="0" sz="1400" u="none" cap="none" strike="noStrike">
+        <a:defRPr b="0" i="0" sz="1120" u="none" cap="none" strike="noStrike">
           <a:solidFill>
             <a:srgbClr val="000000"/>
           </a:solidFill>
@@ -8050,7 +7870,7 @@
           <a:srgbClr val="000000"/>
         </a:buClr>
         <a:buFont typeface="Arial"/>
-        <a:defRPr b="0" i="0" sz="1400" u="none" cap="none" strike="noStrike">
+        <a:defRPr b="0" i="0" sz="1120" u="none" cap="none" strike="noStrike">
           <a:solidFill>
             <a:srgbClr val="000000"/>
           </a:solidFill>
@@ -8074,7 +7894,7 @@
           <a:srgbClr val="000000"/>
         </a:buClr>
         <a:buFont typeface="Arial"/>
-        <a:defRPr b="0" i="0" sz="1400" u="none" cap="none" strike="noStrike">
+        <a:defRPr b="0" i="0" sz="1120" u="none" cap="none" strike="noStrike">
           <a:solidFill>
             <a:srgbClr val="000000"/>
           </a:solidFill>
@@ -8098,7 +7918,7 @@
           <a:srgbClr val="000000"/>
         </a:buClr>
         <a:buFont typeface="Arial"/>
-        <a:defRPr b="0" i="0" sz="1400" u="none" cap="none" strike="noStrike">
+        <a:defRPr b="0" i="0" sz="1120" u="none" cap="none" strike="noStrike">
           <a:solidFill>
             <a:srgbClr val="000000"/>
           </a:solidFill>
@@ -8122,7 +7942,7 @@
           <a:srgbClr val="000000"/>
         </a:buClr>
         <a:buFont typeface="Arial"/>
-        <a:defRPr b="0" i="0" sz="1400" u="none" cap="none" strike="noStrike">
+        <a:defRPr b="0" i="0" sz="1120" u="none" cap="none" strike="noStrike">
           <a:solidFill>
             <a:srgbClr val="000000"/>
           </a:solidFill>
@@ -8159,7 +7979,7 @@
           <a:srgbClr val="000000"/>
         </a:buClr>
         <a:buFont typeface="Arial"/>
-        <a:defRPr b="0" i="0" sz="1400" u="none" cap="none" strike="noStrike">
+        <a:defRPr b="0" i="0" sz="1120" u="none" cap="none" strike="noStrike">
           <a:solidFill>
             <a:srgbClr val="000000"/>
           </a:solidFill>
@@ -8183,7 +8003,7 @@
           <a:srgbClr val="000000"/>
         </a:buClr>
         <a:buFont typeface="Arial"/>
-        <a:defRPr b="0" i="0" sz="1400" u="none" cap="none" strike="noStrike">
+        <a:defRPr b="0" i="0" sz="1120" u="none" cap="none" strike="noStrike">
           <a:solidFill>
             <a:srgbClr val="000000"/>
           </a:solidFill>
@@ -8207,7 +8027,7 @@
           <a:srgbClr val="000000"/>
         </a:buClr>
         <a:buFont typeface="Arial"/>
-        <a:defRPr b="0" i="0" sz="1400" u="none" cap="none" strike="noStrike">
+        <a:defRPr b="0" i="0" sz="1120" u="none" cap="none" strike="noStrike">
           <a:solidFill>
             <a:srgbClr val="000000"/>
           </a:solidFill>
@@ -8231,7 +8051,7 @@
           <a:srgbClr val="000000"/>
         </a:buClr>
         <a:buFont typeface="Arial"/>
-        <a:defRPr b="0" i="0" sz="1400" u="none" cap="none" strike="noStrike">
+        <a:defRPr b="0" i="0" sz="1120" u="none" cap="none" strike="noStrike">
           <a:solidFill>
             <a:srgbClr val="000000"/>
           </a:solidFill>
@@ -8255,7 +8075,7 @@
           <a:srgbClr val="000000"/>
         </a:buClr>
         <a:buFont typeface="Arial"/>
-        <a:defRPr b="0" i="0" sz="1400" u="none" cap="none" strike="noStrike">
+        <a:defRPr b="0" i="0" sz="1120" u="none" cap="none" strike="noStrike">
           <a:solidFill>
             <a:srgbClr val="000000"/>
           </a:solidFill>
@@ -8279,7 +8099,7 @@
           <a:srgbClr val="000000"/>
         </a:buClr>
         <a:buFont typeface="Arial"/>
-        <a:defRPr b="0" i="0" sz="1400" u="none" cap="none" strike="noStrike">
+        <a:defRPr b="0" i="0" sz="1120" u="none" cap="none" strike="noStrike">
           <a:solidFill>
             <a:srgbClr val="000000"/>
           </a:solidFill>
@@ -8303,7 +8123,7 @@
           <a:srgbClr val="000000"/>
         </a:buClr>
         <a:buFont typeface="Arial"/>
-        <a:defRPr b="0" i="0" sz="1400" u="none" cap="none" strike="noStrike">
+        <a:defRPr b="0" i="0" sz="1120" u="none" cap="none" strike="noStrike">
           <a:solidFill>
             <a:srgbClr val="000000"/>
           </a:solidFill>
@@ -8327,7 +8147,7 @@
           <a:srgbClr val="000000"/>
         </a:buClr>
         <a:buFont typeface="Arial"/>
-        <a:defRPr b="0" i="0" sz="1400" u="none" cap="none" strike="noStrike">
+        <a:defRPr b="0" i="0" sz="1120" u="none" cap="none" strike="noStrike">
           <a:solidFill>
             <a:srgbClr val="000000"/>
           </a:solidFill>
@@ -8351,7 +8171,7 @@
           <a:srgbClr val="000000"/>
         </a:buClr>
         <a:buFont typeface="Arial"/>
-        <a:defRPr b="0" i="0" sz="1400" u="none" cap="none" strike="noStrike">
+        <a:defRPr b="0" i="0" sz="1120" u="none" cap="none" strike="noStrike">
           <a:solidFill>
             <a:srgbClr val="000000"/>
           </a:solidFill>
@@ -8393,7 +8213,7 @@
         </p:nvSpPr>
         <p:spPr>
           <a:xfrm>
-            <a:off x="504000" y="301320"/>
+            <a:off x="504000" y="644220"/>
             <a:ext cx="9071700" cy="1262100"/>
           </a:xfrm>
           <a:prstGeom prst="rect">
@@ -8416,10 +8236,10 @@
               <a:buNone/>
             </a:pPr>
             <a:r>
-              <a:rPr lang="en-US" sz="3800"/>
+              <a:rPr lang="en-US" sz="3040"/>
               <a:t>Your Observations</a:t>
             </a:r>
-            <a:endParaRPr sz="3800"/>
+            <a:endParaRPr sz="3040"/>
           </a:p>
         </p:txBody>
       </p:sp>
@@ -8433,7 +8253,7 @@
         </p:nvSpPr>
         <p:spPr>
           <a:xfrm>
-            <a:off x="504000" y="1769040"/>
+            <a:off x="504000" y="2111940"/>
             <a:ext cx="9071700" cy="4384500"/>
           </a:xfrm>
           <a:prstGeom prst="rect">
@@ -8459,6 +8279,207 @@
               <a:t/>
             </a:r>
             <a:endParaRPr/>
+          </a:p>
+        </p:txBody>
+      </p:sp>
+      <p:sp>
+        <p:nvSpPr>
+          <p:cNvPr id="63" name="DSPIRA 1"/>
+          <p:cNvSpPr>
+            <a:spLocks noGrp="1"/>
+          </p:cNvSpPr>
+          <p:nvPr/>
+        </p:nvSpPr>
+        <p:spPr>
+          <a:xfrm>
+            <a:off x="0" y="0"/>
+            <a:ext cx="10080625" cy="342900"/>
+          </a:xfrm>
+          <a:prstGeom prst="rect">
+            <a:avLst/>
+          </a:prstGeom>
+          <a:solidFill>
+            <a:srgbClr val="FFFFFF"/>
+          </a:solidFill>
+          <a:ln w="0">
+            <a:noFill/>
+          </a:ln>
+        </p:spPr>
+      </p:sp>
+      <p:sp>
+        <p:nvSpPr>
+          <p:cNvPr id="64" name="DSPIRA 2"/>
+          <p:cNvSpPr>
+            <a:spLocks noGrp="1"/>
+          </p:cNvSpPr>
+          <p:nvPr/>
+        </p:nvSpPr>
+        <p:spPr>
+          <a:xfrm>
+            <a:off x="0" y="7902575"/>
+            <a:ext cx="10080625" cy="342900"/>
+          </a:xfrm>
+          <a:prstGeom prst="rect">
+            <a:avLst/>
+          </a:prstGeom>
+          <a:solidFill>
+            <a:srgbClr val="FFFFFF"/>
+          </a:solidFill>
+          <a:ln w="0">
+            <a:noFill/>
+          </a:ln>
+        </p:spPr>
+      </p:sp>
+      <p:sp>
+        <p:nvSpPr>
+          <p:cNvPr id="65" name="DSPIRA 3"/>
+          <p:cNvSpPr>
+            <a:spLocks noGrp="1"/>
+          </p:cNvSpPr>
+          <p:nvPr/>
+        </p:nvSpPr>
+        <p:spPr>
+          <a:xfrm>
+            <a:off x="228600" y="76200"/>
+            <a:ext cx="4762500" cy="228600"/>
+          </a:xfrm>
+          <a:prstGeom prst="rect">
+            <a:avLst/>
+          </a:prstGeom>
+          <a:noFill/>
+          <a:ln w="0">
+            <a:noFill/>
+          </a:ln>
+        </p:spPr>
+        <p:txBody>
+          <a:bodyPr>
+            <a:noAutofit/>
+          </a:bodyPr>
+          <a:lstStyle/>
+          <a:p>
+            <a:pPr>
+              <a:defRPr sz="1200" b="1">
+                <a:solidFill>
+                  <a:srgbClr val="002855"/>
+                </a:solidFill>
+                <a:latin typeface="Arial"/>
+                <a:ea typeface="Arial"/>
+                <a:cs typeface="Arial"/>
+              </a:defRPr>
+            </a:pPr>
+            <a:r>
+              <a:rPr sz="1200" b="1">
+                <a:solidFill>
+                  <a:srgbClr val="002855"/>
+                </a:solidFill>
+                <a:latin typeface="Arial"/>
+                <a:ea typeface="Arial"/>
+                <a:cs typeface="Arial"/>
+              </a:rPr>
+              <a:t>WVU DSPIRA</a:t>
+            </a:r>
+          </a:p>
+        </p:txBody>
+      </p:sp>
+      <p:sp>
+        <p:nvSpPr>
+          <p:cNvPr id="66" name="DSPIRA 4"/>
+          <p:cNvSpPr>
+            <a:spLocks noGrp="1"/>
+          </p:cNvSpPr>
+          <p:nvPr/>
+        </p:nvSpPr>
+        <p:spPr>
+          <a:xfrm>
+            <a:off x="228600" y="7978775"/>
+            <a:ext cx="6667500" cy="228600"/>
+          </a:xfrm>
+          <a:prstGeom prst="rect">
+            <a:avLst/>
+          </a:prstGeom>
+          <a:noFill/>
+          <a:ln w="0">
+            <a:noFill/>
+          </a:ln>
+        </p:spPr>
+        <p:txBody>
+          <a:bodyPr>
+            <a:noAutofit/>
+          </a:bodyPr>
+          <a:lstStyle/>
+          <a:p>
+            <a:pPr>
+              <a:defRPr sz="900" b="0">
+                <a:solidFill>
+                  <a:srgbClr val="002855"/>
+                </a:solidFill>
+                <a:latin typeface="Arial"/>
+                <a:ea typeface="Arial"/>
+                <a:cs typeface="Arial"/>
+              </a:defRPr>
+            </a:pPr>
+            <a:r>
+              <a:rPr sz="900" b="0">
+                <a:solidFill>
+                  <a:srgbClr val="002855"/>
+                </a:solidFill>
+                <a:latin typeface="Arial"/>
+                <a:ea typeface="Arial"/>
+                <a:cs typeface="Arial"/>
+              </a:rPr>
+              <a:t>wvurail.org/dspira</a:t>
+            </a:r>
+          </a:p>
+        </p:txBody>
+      </p:sp>
+      <p:sp>
+        <p:nvSpPr>
+          <p:cNvPr id="67" name="DSPIRA 5"/>
+          <p:cNvSpPr>
+            <a:spLocks noGrp="1"/>
+          </p:cNvSpPr>
+          <p:nvPr/>
+        </p:nvSpPr>
+        <p:spPr>
+          <a:xfrm>
+            <a:off x="9080500" y="7978775"/>
+            <a:ext cx="762000" cy="228600"/>
+          </a:xfrm>
+          <a:prstGeom prst="rect">
+            <a:avLst/>
+          </a:prstGeom>
+          <a:noFill/>
+          <a:ln w="0">
+            <a:noFill/>
+          </a:ln>
+        </p:spPr>
+        <p:txBody>
+          <a:bodyPr>
+            <a:noAutofit/>
+          </a:bodyPr>
+          <a:lstStyle/>
+          <a:p>
+            <a:pPr>
+              <a:defRPr sz="900" b="0">
+                <a:solidFill>
+                  <a:srgbClr val="002855"/>
+                </a:solidFill>
+                <a:latin typeface="Arial"/>
+                <a:ea typeface="Arial"/>
+                <a:cs typeface="Arial"/>
+              </a:defRPr>
+            </a:pPr>
+            <a:r>
+              <a:rPr sz="900" b="0">
+                <a:solidFill>
+                  <a:srgbClr val="002855"/>
+                </a:solidFill>
+                <a:latin typeface="Arial"/>
+                <a:ea typeface="Arial"/>
+                <a:cs typeface="Arial"/>
+              </a:rPr>
+              <a:t>1 of 19</a:t>
+            </a:r>
           </a:p>
         </p:txBody>
       </p:sp>
@@ -8497,7 +8518,7 @@
         </p:nvSpPr>
         <p:spPr>
           <a:xfrm>
-            <a:off x="504000" y="301320"/>
+            <a:off x="504000" y="644220"/>
             <a:ext cx="9071700" cy="1262100"/>
           </a:xfrm>
           <a:prstGeom prst="rect">
@@ -8520,10 +8541,10 @@
               <a:buNone/>
             </a:pPr>
             <a:r>
-              <a:rPr lang="en-US" sz="3800"/>
+              <a:rPr lang="en-US" sz="3040"/>
               <a:t>Turning into Velocities</a:t>
             </a:r>
-            <a:endParaRPr sz="3800"/>
+            <a:endParaRPr sz="3040"/>
           </a:p>
         </p:txBody>
       </p:sp>
@@ -8537,7 +8558,7 @@
         </p:nvSpPr>
         <p:spPr>
           <a:xfrm>
-            <a:off x="504000" y="1769040"/>
+            <a:off x="504000" y="2111940"/>
             <a:ext cx="9071700" cy="4384500"/>
           </a:xfrm>
           <a:prstGeom prst="rect">
@@ -8560,7 +8581,7 @@
               <a:buNone/>
             </a:pPr>
             <a:r>
-              <a:rPr lang="en-US" sz="2400">
+              <a:rPr lang="en-US" sz="1920">
                 <a:solidFill>
                   <a:schemeClr val="dk1"/>
                 </a:solidFill>
@@ -8586,7 +8607,7 @@
         </p:blipFill>
         <p:spPr>
           <a:xfrm>
-            <a:off x="2065022" y="2986303"/>
+            <a:off x="2065022" y="3329203"/>
             <a:ext cx="5543850" cy="4126925"/>
           </a:xfrm>
           <a:prstGeom prst="rect">
@@ -8606,7 +8627,7 @@
         </p:nvCxnSpPr>
         <p:spPr>
           <a:xfrm>
-            <a:off x="5371625" y="3205475"/>
+            <a:off x="5371625" y="3548375"/>
             <a:ext cx="11100" cy="2964900"/>
           </a:xfrm>
           <a:prstGeom prst="straightConnector1">
@@ -8632,7 +8653,7 @@
         </p:nvSpPr>
         <p:spPr>
           <a:xfrm>
-            <a:off x="5207525" y="6202700"/>
+            <a:off x="5207525" y="6545600"/>
             <a:ext cx="6301500" cy="601800"/>
           </a:xfrm>
           <a:prstGeom prst="rect">
@@ -8684,7 +8705,7 @@
         </p:nvSpPr>
         <p:spPr>
           <a:xfrm>
-            <a:off x="3938475" y="6771975"/>
+            <a:off x="3938475" y="7114875"/>
             <a:ext cx="2647500" cy="470400"/>
           </a:xfrm>
           <a:prstGeom prst="rect">
@@ -8716,6 +8737,207 @@
               <a:t/>
             </a:r>
             <a:endParaRPr/>
+          </a:p>
+        </p:txBody>
+      </p:sp>
+      <p:sp>
+        <p:nvSpPr>
+          <p:cNvPr id="129" name="DSPIRA 1"/>
+          <p:cNvSpPr>
+            <a:spLocks noGrp="1"/>
+          </p:cNvSpPr>
+          <p:nvPr/>
+        </p:nvSpPr>
+        <p:spPr>
+          <a:xfrm>
+            <a:off x="0" y="0"/>
+            <a:ext cx="10080625" cy="342900"/>
+          </a:xfrm>
+          <a:prstGeom prst="rect">
+            <a:avLst/>
+          </a:prstGeom>
+          <a:solidFill>
+            <a:srgbClr val="FFFFFF"/>
+          </a:solidFill>
+          <a:ln w="0">
+            <a:noFill/>
+          </a:ln>
+        </p:spPr>
+      </p:sp>
+      <p:sp>
+        <p:nvSpPr>
+          <p:cNvPr id="130" name="DSPIRA 2"/>
+          <p:cNvSpPr>
+            <a:spLocks noGrp="1"/>
+          </p:cNvSpPr>
+          <p:nvPr/>
+        </p:nvSpPr>
+        <p:spPr>
+          <a:xfrm>
+            <a:off x="0" y="7902575"/>
+            <a:ext cx="10080625" cy="342900"/>
+          </a:xfrm>
+          <a:prstGeom prst="rect">
+            <a:avLst/>
+          </a:prstGeom>
+          <a:solidFill>
+            <a:srgbClr val="FFFFFF"/>
+          </a:solidFill>
+          <a:ln w="0">
+            <a:noFill/>
+          </a:ln>
+        </p:spPr>
+      </p:sp>
+      <p:sp>
+        <p:nvSpPr>
+          <p:cNvPr id="131" name="DSPIRA 3"/>
+          <p:cNvSpPr>
+            <a:spLocks noGrp="1"/>
+          </p:cNvSpPr>
+          <p:nvPr/>
+        </p:nvSpPr>
+        <p:spPr>
+          <a:xfrm>
+            <a:off x="228600" y="76200"/>
+            <a:ext cx="4762500" cy="228600"/>
+          </a:xfrm>
+          <a:prstGeom prst="rect">
+            <a:avLst/>
+          </a:prstGeom>
+          <a:noFill/>
+          <a:ln w="0">
+            <a:noFill/>
+          </a:ln>
+        </p:spPr>
+        <p:txBody>
+          <a:bodyPr>
+            <a:noAutofit/>
+          </a:bodyPr>
+          <a:lstStyle/>
+          <a:p>
+            <a:pPr>
+              <a:defRPr sz="1200" b="1">
+                <a:solidFill>
+                  <a:srgbClr val="002855"/>
+                </a:solidFill>
+                <a:latin typeface="Arial"/>
+                <a:ea typeface="Arial"/>
+                <a:cs typeface="Arial"/>
+              </a:defRPr>
+            </a:pPr>
+            <a:r>
+              <a:rPr sz="1200" b="1">
+                <a:solidFill>
+                  <a:srgbClr val="002855"/>
+                </a:solidFill>
+                <a:latin typeface="Arial"/>
+                <a:ea typeface="Arial"/>
+                <a:cs typeface="Arial"/>
+              </a:rPr>
+              <a:t>WVU DSPIRA</a:t>
+            </a:r>
+          </a:p>
+        </p:txBody>
+      </p:sp>
+      <p:sp>
+        <p:nvSpPr>
+          <p:cNvPr id="132" name="DSPIRA 4"/>
+          <p:cNvSpPr>
+            <a:spLocks noGrp="1"/>
+          </p:cNvSpPr>
+          <p:nvPr/>
+        </p:nvSpPr>
+        <p:spPr>
+          <a:xfrm>
+            <a:off x="228600" y="7978775"/>
+            <a:ext cx="6667500" cy="228600"/>
+          </a:xfrm>
+          <a:prstGeom prst="rect">
+            <a:avLst/>
+          </a:prstGeom>
+          <a:noFill/>
+          <a:ln w="0">
+            <a:noFill/>
+          </a:ln>
+        </p:spPr>
+        <p:txBody>
+          <a:bodyPr>
+            <a:noAutofit/>
+          </a:bodyPr>
+          <a:lstStyle/>
+          <a:p>
+            <a:pPr>
+              <a:defRPr sz="900" b="0">
+                <a:solidFill>
+                  <a:srgbClr val="002855"/>
+                </a:solidFill>
+                <a:latin typeface="Arial"/>
+                <a:ea typeface="Arial"/>
+                <a:cs typeface="Arial"/>
+              </a:defRPr>
+            </a:pPr>
+            <a:r>
+              <a:rPr sz="900" b="0">
+                <a:solidFill>
+                  <a:srgbClr val="002855"/>
+                </a:solidFill>
+                <a:latin typeface="Arial"/>
+                <a:ea typeface="Arial"/>
+                <a:cs typeface="Arial"/>
+              </a:rPr>
+              <a:t>wvurail.org/dspira</a:t>
+            </a:r>
+          </a:p>
+        </p:txBody>
+      </p:sp>
+      <p:sp>
+        <p:nvSpPr>
+          <p:cNvPr id="133" name="DSPIRA 5"/>
+          <p:cNvSpPr>
+            <a:spLocks noGrp="1"/>
+          </p:cNvSpPr>
+          <p:nvPr/>
+        </p:nvSpPr>
+        <p:spPr>
+          <a:xfrm>
+            <a:off x="9080500" y="7978775"/>
+            <a:ext cx="762000" cy="228600"/>
+          </a:xfrm>
+          <a:prstGeom prst="rect">
+            <a:avLst/>
+          </a:prstGeom>
+          <a:noFill/>
+          <a:ln w="0">
+            <a:noFill/>
+          </a:ln>
+        </p:spPr>
+        <p:txBody>
+          <a:bodyPr>
+            <a:noAutofit/>
+          </a:bodyPr>
+          <a:lstStyle/>
+          <a:p>
+            <a:pPr>
+              <a:defRPr sz="900" b="0">
+                <a:solidFill>
+                  <a:srgbClr val="002855"/>
+                </a:solidFill>
+                <a:latin typeface="Arial"/>
+                <a:ea typeface="Arial"/>
+                <a:cs typeface="Arial"/>
+              </a:defRPr>
+            </a:pPr>
+            <a:r>
+              <a:rPr sz="900" b="0">
+                <a:solidFill>
+                  <a:srgbClr val="002855"/>
+                </a:solidFill>
+                <a:latin typeface="Arial"/>
+                <a:ea typeface="Arial"/>
+                <a:cs typeface="Arial"/>
+              </a:rPr>
+              <a:t>10 of 19</a:t>
+            </a:r>
           </a:p>
         </p:txBody>
       </p:sp>
@@ -8754,7 +8976,7 @@
         </p:nvSpPr>
         <p:spPr>
           <a:xfrm>
-            <a:off x="504000" y="301320"/>
+            <a:off x="504000" y="644220"/>
             <a:ext cx="9071700" cy="1262100"/>
           </a:xfrm>
           <a:prstGeom prst="rect">
@@ -8777,10 +8999,10 @@
               <a:buNone/>
             </a:pPr>
             <a:r>
-              <a:rPr lang="en-US" sz="3800"/>
+              <a:rPr lang="en-US" sz="3040"/>
               <a:t>Turning into Velocities</a:t>
             </a:r>
-            <a:endParaRPr sz="3800"/>
+            <a:endParaRPr sz="3040"/>
           </a:p>
         </p:txBody>
       </p:sp>
@@ -8794,7 +9016,7 @@
         </p:nvSpPr>
         <p:spPr>
           <a:xfrm>
-            <a:off x="504000" y="1769040"/>
+            <a:off x="504000" y="2111940"/>
             <a:ext cx="9071700" cy="4384500"/>
           </a:xfrm>
           <a:prstGeom prst="rect">
@@ -8817,7 +9039,7 @@
               <a:buNone/>
             </a:pPr>
             <a:r>
-              <a:rPr lang="en-US" sz="2400">
+              <a:rPr lang="en-US" sz="1920">
                 <a:solidFill>
                   <a:schemeClr val="dk1"/>
                 </a:solidFill>
@@ -8843,7 +9065,7 @@
         </p:blipFill>
         <p:spPr>
           <a:xfrm>
-            <a:off x="2065022" y="2986303"/>
+            <a:off x="2065022" y="3329203"/>
             <a:ext cx="5543850" cy="4126925"/>
           </a:xfrm>
           <a:prstGeom prst="rect">
@@ -8863,7 +9085,7 @@
         </p:nvCxnSpPr>
         <p:spPr>
           <a:xfrm>
-            <a:off x="5371625" y="3205475"/>
+            <a:off x="5371625" y="3548375"/>
             <a:ext cx="11100" cy="2964900"/>
           </a:xfrm>
           <a:prstGeom prst="straightConnector1">
@@ -8889,7 +9111,7 @@
         </p:nvSpPr>
         <p:spPr>
           <a:xfrm>
-            <a:off x="5207525" y="6202700"/>
+            <a:off x="5207525" y="6545600"/>
             <a:ext cx="6301500" cy="601800"/>
           </a:xfrm>
           <a:prstGeom prst="rect">
@@ -8953,7 +9175,7 @@
         </p:nvSpPr>
         <p:spPr>
           <a:xfrm>
-            <a:off x="2089575" y="6213650"/>
+            <a:off x="2089575" y="6556550"/>
             <a:ext cx="3205500" cy="525000"/>
           </a:xfrm>
           <a:prstGeom prst="rect">
@@ -9005,7 +9227,7 @@
         </p:nvSpPr>
         <p:spPr>
           <a:xfrm>
-            <a:off x="3796250" y="6586000"/>
+            <a:off x="3796250" y="6928900"/>
             <a:ext cx="2811600" cy="754800"/>
           </a:xfrm>
           <a:prstGeom prst="rect">
@@ -9034,18 +9256,219 @@
               <a:buNone/>
             </a:pPr>
             <a:r>
-              <a:rPr b="1" lang="en-US" sz="1800">
+              <a:rPr b="1" lang="en-US" sz="1440">
                 <a:solidFill>
                   <a:srgbClr val="FF0000"/>
                 </a:solidFill>
               </a:rPr>
               <a:t>Velocity (km/s)</a:t>
             </a:r>
-            <a:endParaRPr b="1" sz="1800">
+            <a:endParaRPr b="1" sz="1440">
               <a:solidFill>
                 <a:srgbClr val="FF0000"/>
               </a:solidFill>
             </a:endParaRPr>
+          </a:p>
+        </p:txBody>
+      </p:sp>
+      <p:sp>
+        <p:nvSpPr>
+          <p:cNvPr id="140" name="DSPIRA 1"/>
+          <p:cNvSpPr>
+            <a:spLocks noGrp="1"/>
+          </p:cNvSpPr>
+          <p:nvPr/>
+        </p:nvSpPr>
+        <p:spPr>
+          <a:xfrm>
+            <a:off x="0" y="0"/>
+            <a:ext cx="10080625" cy="342900"/>
+          </a:xfrm>
+          <a:prstGeom prst="rect">
+            <a:avLst/>
+          </a:prstGeom>
+          <a:solidFill>
+            <a:srgbClr val="FFFFFF"/>
+          </a:solidFill>
+          <a:ln w="0">
+            <a:noFill/>
+          </a:ln>
+        </p:spPr>
+      </p:sp>
+      <p:sp>
+        <p:nvSpPr>
+          <p:cNvPr id="141" name="DSPIRA 2"/>
+          <p:cNvSpPr>
+            <a:spLocks noGrp="1"/>
+          </p:cNvSpPr>
+          <p:nvPr/>
+        </p:nvSpPr>
+        <p:spPr>
+          <a:xfrm>
+            <a:off x="0" y="7902575"/>
+            <a:ext cx="10080625" cy="342900"/>
+          </a:xfrm>
+          <a:prstGeom prst="rect">
+            <a:avLst/>
+          </a:prstGeom>
+          <a:solidFill>
+            <a:srgbClr val="FFFFFF"/>
+          </a:solidFill>
+          <a:ln w="0">
+            <a:noFill/>
+          </a:ln>
+        </p:spPr>
+      </p:sp>
+      <p:sp>
+        <p:nvSpPr>
+          <p:cNvPr id="142" name="DSPIRA 3"/>
+          <p:cNvSpPr>
+            <a:spLocks noGrp="1"/>
+          </p:cNvSpPr>
+          <p:nvPr/>
+        </p:nvSpPr>
+        <p:spPr>
+          <a:xfrm>
+            <a:off x="228600" y="76200"/>
+            <a:ext cx="4762500" cy="228600"/>
+          </a:xfrm>
+          <a:prstGeom prst="rect">
+            <a:avLst/>
+          </a:prstGeom>
+          <a:noFill/>
+          <a:ln w="0">
+            <a:noFill/>
+          </a:ln>
+        </p:spPr>
+        <p:txBody>
+          <a:bodyPr>
+            <a:noAutofit/>
+          </a:bodyPr>
+          <a:lstStyle/>
+          <a:p>
+            <a:pPr>
+              <a:defRPr sz="1200" b="1">
+                <a:solidFill>
+                  <a:srgbClr val="002855"/>
+                </a:solidFill>
+                <a:latin typeface="Arial"/>
+                <a:ea typeface="Arial"/>
+                <a:cs typeface="Arial"/>
+              </a:defRPr>
+            </a:pPr>
+            <a:r>
+              <a:rPr sz="1200" b="1">
+                <a:solidFill>
+                  <a:srgbClr val="002855"/>
+                </a:solidFill>
+                <a:latin typeface="Arial"/>
+                <a:ea typeface="Arial"/>
+                <a:cs typeface="Arial"/>
+              </a:rPr>
+              <a:t>WVU DSPIRA</a:t>
+            </a:r>
+          </a:p>
+        </p:txBody>
+      </p:sp>
+      <p:sp>
+        <p:nvSpPr>
+          <p:cNvPr id="143" name="DSPIRA 4"/>
+          <p:cNvSpPr>
+            <a:spLocks noGrp="1"/>
+          </p:cNvSpPr>
+          <p:nvPr/>
+        </p:nvSpPr>
+        <p:spPr>
+          <a:xfrm>
+            <a:off x="228600" y="7978775"/>
+            <a:ext cx="6667500" cy="228600"/>
+          </a:xfrm>
+          <a:prstGeom prst="rect">
+            <a:avLst/>
+          </a:prstGeom>
+          <a:noFill/>
+          <a:ln w="0">
+            <a:noFill/>
+          </a:ln>
+        </p:spPr>
+        <p:txBody>
+          <a:bodyPr>
+            <a:noAutofit/>
+          </a:bodyPr>
+          <a:lstStyle/>
+          <a:p>
+            <a:pPr>
+              <a:defRPr sz="900" b="0">
+                <a:solidFill>
+                  <a:srgbClr val="002855"/>
+                </a:solidFill>
+                <a:latin typeface="Arial"/>
+                <a:ea typeface="Arial"/>
+                <a:cs typeface="Arial"/>
+              </a:defRPr>
+            </a:pPr>
+            <a:r>
+              <a:rPr sz="900" b="0">
+                <a:solidFill>
+                  <a:srgbClr val="002855"/>
+                </a:solidFill>
+                <a:latin typeface="Arial"/>
+                <a:ea typeface="Arial"/>
+                <a:cs typeface="Arial"/>
+              </a:rPr>
+              <a:t>wvurail.org/dspira</a:t>
+            </a:r>
+          </a:p>
+        </p:txBody>
+      </p:sp>
+      <p:sp>
+        <p:nvSpPr>
+          <p:cNvPr id="144" name="DSPIRA 5"/>
+          <p:cNvSpPr>
+            <a:spLocks noGrp="1"/>
+          </p:cNvSpPr>
+          <p:nvPr/>
+        </p:nvSpPr>
+        <p:spPr>
+          <a:xfrm>
+            <a:off x="9080500" y="7978775"/>
+            <a:ext cx="762000" cy="228600"/>
+          </a:xfrm>
+          <a:prstGeom prst="rect">
+            <a:avLst/>
+          </a:prstGeom>
+          <a:noFill/>
+          <a:ln w="0">
+            <a:noFill/>
+          </a:ln>
+        </p:spPr>
+        <p:txBody>
+          <a:bodyPr>
+            <a:noAutofit/>
+          </a:bodyPr>
+          <a:lstStyle/>
+          <a:p>
+            <a:pPr>
+              <a:defRPr sz="900" b="0">
+                <a:solidFill>
+                  <a:srgbClr val="002855"/>
+                </a:solidFill>
+                <a:latin typeface="Arial"/>
+                <a:ea typeface="Arial"/>
+                <a:cs typeface="Arial"/>
+              </a:defRPr>
+            </a:pPr>
+            <a:r>
+              <a:rPr sz="900" b="0">
+                <a:solidFill>
+                  <a:srgbClr val="002855"/>
+                </a:solidFill>
+                <a:latin typeface="Arial"/>
+                <a:ea typeface="Arial"/>
+                <a:cs typeface="Arial"/>
+              </a:rPr>
+              <a:t>11 of 19</a:t>
+            </a:r>
           </a:p>
         </p:txBody>
       </p:sp>
@@ -9084,7 +9507,7 @@
         </p:nvSpPr>
         <p:spPr>
           <a:xfrm>
-            <a:off x="504000" y="301320"/>
+            <a:off x="504000" y="644220"/>
             <a:ext cx="9071700" cy="1262100"/>
           </a:xfrm>
           <a:prstGeom prst="rect">
@@ -9107,10 +9530,10 @@
               <a:buNone/>
             </a:pPr>
             <a:r>
-              <a:rPr lang="en-US" sz="3800"/>
+              <a:rPr lang="en-US" sz="3040"/>
               <a:t>Correcting to the LSR Velocity Frame</a:t>
             </a:r>
-            <a:endParaRPr sz="3800"/>
+            <a:endParaRPr sz="3040"/>
           </a:p>
         </p:txBody>
       </p:sp>
@@ -9124,7 +9547,7 @@
         </p:nvSpPr>
         <p:spPr>
           <a:xfrm>
-            <a:off x="504000" y="1769040"/>
+            <a:off x="504000" y="2111940"/>
             <a:ext cx="9071700" cy="4384500"/>
           </a:xfrm>
           <a:prstGeom prst="rect">
@@ -9147,10 +9570,10 @@
               <a:buNone/>
             </a:pPr>
             <a:r>
-              <a:rPr lang="en-US" sz="2000"/>
+              <a:rPr lang="en-US" sz="1600"/>
               <a:t>Let’s assume our observations were taken now, toward Orion at (RA, Dec) = (+5:35:17, -5:23:28).</a:t>
             </a:r>
-            <a:endParaRPr sz="2000"/>
+            <a:endParaRPr sz="1600"/>
           </a:p>
           <a:p>
             <a:pPr indent="0" lvl="0" marL="0" rtl="0">
@@ -9165,7 +9588,7 @@
             <a:r>
               <a:t/>
             </a:r>
-            <a:endParaRPr sz="2000"/>
+            <a:endParaRPr sz="1600"/>
           </a:p>
           <a:p>
             <a:pPr indent="0" lvl="0" marL="0">
@@ -9178,7 +9601,7 @@
               <a:buNone/>
             </a:pPr>
             <a:r>
-              <a:rPr lang="en-US" sz="2000" u="sng">
+              <a:rPr lang="en-US" sz="1600" u="sng">
                 <a:solidFill>
                   <a:schemeClr val="hlink"/>
                 </a:solidFill>
@@ -9186,7 +9609,7 @@
               </a:rPr>
               <a:t>http://www.gb.nrao.edu/GBT/setups/radvelcalc.html</a:t>
             </a:r>
-            <a:endParaRPr sz="2000">
+            <a:endParaRPr sz="1600">
               <a:solidFill>
                 <a:schemeClr val="dk1"/>
               </a:solidFill>
@@ -9205,7 +9628,7 @@
             <a:r>
               <a:t/>
             </a:r>
-            <a:endParaRPr sz="2000">
+            <a:endParaRPr sz="1600">
               <a:solidFill>
                 <a:schemeClr val="dk1"/>
               </a:solidFill>
@@ -9229,7 +9652,7 @@
             <a:r>
               <a:t/>
             </a:r>
-            <a:endParaRPr sz="2000">
+            <a:endParaRPr sz="1600">
               <a:solidFill>
                 <a:schemeClr val="dk1"/>
               </a:solidFill>
@@ -9248,7 +9671,208 @@
             <a:r>
               <a:t/>
             </a:r>
-            <a:endParaRPr sz="2000"/>
+            <a:endParaRPr sz="1600"/>
+          </a:p>
+        </p:txBody>
+      </p:sp>
+      <p:sp>
+        <p:nvSpPr>
+          <p:cNvPr id="146" name="DSPIRA 1"/>
+          <p:cNvSpPr>
+            <a:spLocks noGrp="1"/>
+          </p:cNvSpPr>
+          <p:nvPr/>
+        </p:nvSpPr>
+        <p:spPr>
+          <a:xfrm>
+            <a:off x="0" y="0"/>
+            <a:ext cx="10080625" cy="342900"/>
+          </a:xfrm>
+          <a:prstGeom prst="rect">
+            <a:avLst/>
+          </a:prstGeom>
+          <a:solidFill>
+            <a:srgbClr val="FFFFFF"/>
+          </a:solidFill>
+          <a:ln w="0">
+            <a:noFill/>
+          </a:ln>
+        </p:spPr>
+      </p:sp>
+      <p:sp>
+        <p:nvSpPr>
+          <p:cNvPr id="147" name="DSPIRA 2"/>
+          <p:cNvSpPr>
+            <a:spLocks noGrp="1"/>
+          </p:cNvSpPr>
+          <p:nvPr/>
+        </p:nvSpPr>
+        <p:spPr>
+          <a:xfrm>
+            <a:off x="0" y="7902575"/>
+            <a:ext cx="10080625" cy="342900"/>
+          </a:xfrm>
+          <a:prstGeom prst="rect">
+            <a:avLst/>
+          </a:prstGeom>
+          <a:solidFill>
+            <a:srgbClr val="FFFFFF"/>
+          </a:solidFill>
+          <a:ln w="0">
+            <a:noFill/>
+          </a:ln>
+        </p:spPr>
+      </p:sp>
+      <p:sp>
+        <p:nvSpPr>
+          <p:cNvPr id="148" name="DSPIRA 3"/>
+          <p:cNvSpPr>
+            <a:spLocks noGrp="1"/>
+          </p:cNvSpPr>
+          <p:nvPr/>
+        </p:nvSpPr>
+        <p:spPr>
+          <a:xfrm>
+            <a:off x="228600" y="76200"/>
+            <a:ext cx="4762500" cy="228600"/>
+          </a:xfrm>
+          <a:prstGeom prst="rect">
+            <a:avLst/>
+          </a:prstGeom>
+          <a:noFill/>
+          <a:ln w="0">
+            <a:noFill/>
+          </a:ln>
+        </p:spPr>
+        <p:txBody>
+          <a:bodyPr>
+            <a:noAutofit/>
+          </a:bodyPr>
+          <a:lstStyle/>
+          <a:p>
+            <a:pPr>
+              <a:defRPr sz="1200" b="1">
+                <a:solidFill>
+                  <a:srgbClr val="002855"/>
+                </a:solidFill>
+                <a:latin typeface="Arial"/>
+                <a:ea typeface="Arial"/>
+                <a:cs typeface="Arial"/>
+              </a:defRPr>
+            </a:pPr>
+            <a:r>
+              <a:rPr sz="1200" b="1">
+                <a:solidFill>
+                  <a:srgbClr val="002855"/>
+                </a:solidFill>
+                <a:latin typeface="Arial"/>
+                <a:ea typeface="Arial"/>
+                <a:cs typeface="Arial"/>
+              </a:rPr>
+              <a:t>WVU DSPIRA</a:t>
+            </a:r>
+          </a:p>
+        </p:txBody>
+      </p:sp>
+      <p:sp>
+        <p:nvSpPr>
+          <p:cNvPr id="149" name="DSPIRA 4"/>
+          <p:cNvSpPr>
+            <a:spLocks noGrp="1"/>
+          </p:cNvSpPr>
+          <p:nvPr/>
+        </p:nvSpPr>
+        <p:spPr>
+          <a:xfrm>
+            <a:off x="228600" y="7978775"/>
+            <a:ext cx="6667500" cy="228600"/>
+          </a:xfrm>
+          <a:prstGeom prst="rect">
+            <a:avLst/>
+          </a:prstGeom>
+          <a:noFill/>
+          <a:ln w="0">
+            <a:noFill/>
+          </a:ln>
+        </p:spPr>
+        <p:txBody>
+          <a:bodyPr>
+            <a:noAutofit/>
+          </a:bodyPr>
+          <a:lstStyle/>
+          <a:p>
+            <a:pPr>
+              <a:defRPr sz="900" b="0">
+                <a:solidFill>
+                  <a:srgbClr val="002855"/>
+                </a:solidFill>
+                <a:latin typeface="Arial"/>
+                <a:ea typeface="Arial"/>
+                <a:cs typeface="Arial"/>
+              </a:defRPr>
+            </a:pPr>
+            <a:r>
+              <a:rPr sz="900" b="0">
+                <a:solidFill>
+                  <a:srgbClr val="002855"/>
+                </a:solidFill>
+                <a:latin typeface="Arial"/>
+                <a:ea typeface="Arial"/>
+                <a:cs typeface="Arial"/>
+              </a:rPr>
+              <a:t>wvurail.org/dspira</a:t>
+            </a:r>
+          </a:p>
+        </p:txBody>
+      </p:sp>
+      <p:sp>
+        <p:nvSpPr>
+          <p:cNvPr id="150" name="DSPIRA 5"/>
+          <p:cNvSpPr>
+            <a:spLocks noGrp="1"/>
+          </p:cNvSpPr>
+          <p:nvPr/>
+        </p:nvSpPr>
+        <p:spPr>
+          <a:xfrm>
+            <a:off x="9080500" y="7978775"/>
+            <a:ext cx="762000" cy="228600"/>
+          </a:xfrm>
+          <a:prstGeom prst="rect">
+            <a:avLst/>
+          </a:prstGeom>
+          <a:noFill/>
+          <a:ln w="0">
+            <a:noFill/>
+          </a:ln>
+        </p:spPr>
+        <p:txBody>
+          <a:bodyPr>
+            <a:noAutofit/>
+          </a:bodyPr>
+          <a:lstStyle/>
+          <a:p>
+            <a:pPr>
+              <a:defRPr sz="900" b="0">
+                <a:solidFill>
+                  <a:srgbClr val="002855"/>
+                </a:solidFill>
+                <a:latin typeface="Arial"/>
+                <a:ea typeface="Arial"/>
+                <a:cs typeface="Arial"/>
+              </a:defRPr>
+            </a:pPr>
+            <a:r>
+              <a:rPr sz="900" b="0">
+                <a:solidFill>
+                  <a:srgbClr val="002855"/>
+                </a:solidFill>
+                <a:latin typeface="Arial"/>
+                <a:ea typeface="Arial"/>
+                <a:cs typeface="Arial"/>
+              </a:rPr>
+              <a:t>12 of 19</a:t>
+            </a:r>
           </a:p>
         </p:txBody>
       </p:sp>
@@ -9287,7 +9911,7 @@
         </p:nvSpPr>
         <p:spPr>
           <a:xfrm>
-            <a:off x="504000" y="301320"/>
+            <a:off x="504000" y="644220"/>
             <a:ext cx="9071700" cy="1262100"/>
           </a:xfrm>
           <a:prstGeom prst="rect">
@@ -9310,10 +9934,10 @@
               <a:buNone/>
             </a:pPr>
             <a:r>
-              <a:rPr lang="en-US" sz="3800"/>
+              <a:rPr lang="en-US" sz="3040"/>
               <a:t>Correcting to the LSR Velocity Frame</a:t>
             </a:r>
-            <a:endParaRPr sz="3800"/>
+            <a:endParaRPr sz="3040"/>
           </a:p>
         </p:txBody>
       </p:sp>
@@ -9327,7 +9951,7 @@
         </p:nvSpPr>
         <p:spPr>
           <a:xfrm>
-            <a:off x="504000" y="1769040"/>
+            <a:off x="504000" y="2111940"/>
             <a:ext cx="9071700" cy="4384500"/>
           </a:xfrm>
           <a:prstGeom prst="rect">
@@ -9350,18 +9974,18 @@
               <a:buNone/>
             </a:pPr>
             <a:r>
-              <a:rPr lang="en-US" sz="2000"/>
+              <a:rPr lang="en-US" sz="1600"/>
               <a:t>Let’s assume our observations were taken now, toward (RA, Dec) = (+19h, +15deg.), or (l, b) = (</a:t>
             </a:r>
             <a:r>
-              <a:rPr lang="en-US" sz="2000">
+              <a:rPr lang="en-US" sz="1600">
                 <a:highlight>
                   <a:srgbClr val="FFFFFF"/>
                 </a:highlight>
               </a:rPr>
               <a:t>47.3,  4.9)</a:t>
             </a:r>
-            <a:endParaRPr sz="2000">
+            <a:endParaRPr sz="1600">
               <a:highlight>
                 <a:srgbClr val="FFFFFF"/>
               </a:highlight>
@@ -9380,7 +10004,7 @@
             <a:r>
               <a:t/>
             </a:r>
-            <a:endParaRPr sz="2000"/>
+            <a:endParaRPr sz="1600"/>
           </a:p>
           <a:p>
             <a:pPr indent="0" lvl="0" marL="0" rtl="0">
@@ -9395,7 +10019,7 @@
             <a:r>
               <a:t/>
             </a:r>
-            <a:endParaRPr sz="2000"/>
+            <a:endParaRPr sz="1600"/>
           </a:p>
           <a:p>
             <a:pPr indent="0" lvl="0" marL="0">
@@ -9408,7 +10032,7 @@
               <a:buNone/>
             </a:pPr>
             <a:r>
-              <a:rPr lang="en-US" sz="2000" u="sng">
+              <a:rPr lang="en-US" sz="1600" u="sng">
                 <a:solidFill>
                   <a:schemeClr val="hlink"/>
                 </a:solidFill>
@@ -9416,7 +10040,7 @@
               </a:rPr>
               <a:t>http://www.gb.nrao.edu/GBT/setups/radvelcalc.html</a:t>
             </a:r>
-            <a:endParaRPr sz="2000">
+            <a:endParaRPr sz="1600">
               <a:solidFill>
                 <a:schemeClr val="dk1"/>
               </a:solidFill>
@@ -9435,7 +10059,7 @@
             <a:r>
               <a:t/>
             </a:r>
-            <a:endParaRPr sz="2000">
+            <a:endParaRPr sz="1600">
               <a:solidFill>
                 <a:schemeClr val="dk1"/>
               </a:solidFill>
@@ -9452,14 +10076,14 @@
               <a:buNone/>
             </a:pPr>
             <a:r>
-              <a:rPr lang="en-US" sz="2000">
+              <a:rPr lang="en-US" sz="1600">
                 <a:solidFill>
                   <a:schemeClr val="dk1"/>
                 </a:solidFill>
               </a:rPr>
               <a:t>I get:</a:t>
             </a:r>
-            <a:endParaRPr sz="2000">
+            <a:endParaRPr sz="1600">
               <a:solidFill>
                 <a:schemeClr val="dk1"/>
               </a:solidFill>
@@ -9476,14 +10100,14 @@
               <a:buNone/>
             </a:pPr>
             <a:r>
-              <a:rPr lang="en-US" sz="2000">
+              <a:rPr lang="en-US" sz="1600">
                 <a:solidFill>
                   <a:schemeClr val="dk1"/>
                 </a:solidFill>
               </a:rPr>
               <a:t>v_helio = +0.34 km/s</a:t>
             </a:r>
-            <a:endParaRPr sz="2000">
+            <a:endParaRPr sz="1600">
               <a:solidFill>
                 <a:schemeClr val="dk1"/>
               </a:solidFill>
@@ -9500,14 +10124,14 @@
               <a:buNone/>
             </a:pPr>
             <a:r>
-              <a:rPr lang="en-US" sz="2000">
+              <a:rPr lang="en-US" sz="1600">
                 <a:solidFill>
                   <a:schemeClr val="dk1"/>
                 </a:solidFill>
               </a:rPr>
               <a:t>v_lsr = -18.5 km/s</a:t>
             </a:r>
-            <a:endParaRPr sz="2000">
+            <a:endParaRPr sz="1600">
               <a:solidFill>
                 <a:schemeClr val="dk1"/>
               </a:solidFill>
@@ -9526,7 +10150,7 @@
             <a:r>
               <a:t/>
             </a:r>
-            <a:endParaRPr sz="2000">
+            <a:endParaRPr sz="1600">
               <a:solidFill>
                 <a:schemeClr val="dk1"/>
               </a:solidFill>
@@ -9545,7 +10169,7 @@
             <a:r>
               <a:t/>
             </a:r>
-            <a:endParaRPr sz="2000">
+            <a:endParaRPr sz="1600">
               <a:solidFill>
                 <a:schemeClr val="dk1"/>
               </a:solidFill>
@@ -9562,14 +10186,14 @@
               <a:buNone/>
             </a:pPr>
             <a:r>
-              <a:rPr lang="en-US" sz="2000">
+              <a:rPr lang="en-US" sz="1600">
                 <a:solidFill>
                   <a:schemeClr val="dk1"/>
                 </a:solidFill>
               </a:rPr>
               <a:t>So the LSR velocity frame is moving toward us at 18.5 km/s.  We must add 18.5 km/s to our velocity axis.</a:t>
             </a:r>
-            <a:endParaRPr sz="2000">
+            <a:endParaRPr sz="1600">
               <a:solidFill>
                 <a:schemeClr val="dk1"/>
               </a:solidFill>
@@ -9588,7 +10212,208 @@
             <a:r>
               <a:t/>
             </a:r>
-            <a:endParaRPr sz="2000"/>
+            <a:endParaRPr sz="1600"/>
+          </a:p>
+        </p:txBody>
+      </p:sp>
+      <p:sp>
+        <p:nvSpPr>
+          <p:cNvPr id="152" name="DSPIRA 1"/>
+          <p:cNvSpPr>
+            <a:spLocks noGrp="1"/>
+          </p:cNvSpPr>
+          <p:nvPr/>
+        </p:nvSpPr>
+        <p:spPr>
+          <a:xfrm>
+            <a:off x="0" y="0"/>
+            <a:ext cx="10080625" cy="342900"/>
+          </a:xfrm>
+          <a:prstGeom prst="rect">
+            <a:avLst/>
+          </a:prstGeom>
+          <a:solidFill>
+            <a:srgbClr val="FFFFFF"/>
+          </a:solidFill>
+          <a:ln w="0">
+            <a:noFill/>
+          </a:ln>
+        </p:spPr>
+      </p:sp>
+      <p:sp>
+        <p:nvSpPr>
+          <p:cNvPr id="153" name="DSPIRA 2"/>
+          <p:cNvSpPr>
+            <a:spLocks noGrp="1"/>
+          </p:cNvSpPr>
+          <p:nvPr/>
+        </p:nvSpPr>
+        <p:spPr>
+          <a:xfrm>
+            <a:off x="0" y="7902575"/>
+            <a:ext cx="10080625" cy="342900"/>
+          </a:xfrm>
+          <a:prstGeom prst="rect">
+            <a:avLst/>
+          </a:prstGeom>
+          <a:solidFill>
+            <a:srgbClr val="FFFFFF"/>
+          </a:solidFill>
+          <a:ln w="0">
+            <a:noFill/>
+          </a:ln>
+        </p:spPr>
+      </p:sp>
+      <p:sp>
+        <p:nvSpPr>
+          <p:cNvPr id="154" name="DSPIRA 3"/>
+          <p:cNvSpPr>
+            <a:spLocks noGrp="1"/>
+          </p:cNvSpPr>
+          <p:nvPr/>
+        </p:nvSpPr>
+        <p:spPr>
+          <a:xfrm>
+            <a:off x="228600" y="76200"/>
+            <a:ext cx="4762500" cy="228600"/>
+          </a:xfrm>
+          <a:prstGeom prst="rect">
+            <a:avLst/>
+          </a:prstGeom>
+          <a:noFill/>
+          <a:ln w="0">
+            <a:noFill/>
+          </a:ln>
+        </p:spPr>
+        <p:txBody>
+          <a:bodyPr>
+            <a:noAutofit/>
+          </a:bodyPr>
+          <a:lstStyle/>
+          <a:p>
+            <a:pPr>
+              <a:defRPr sz="1200" b="1">
+                <a:solidFill>
+                  <a:srgbClr val="002855"/>
+                </a:solidFill>
+                <a:latin typeface="Arial"/>
+                <a:ea typeface="Arial"/>
+                <a:cs typeface="Arial"/>
+              </a:defRPr>
+            </a:pPr>
+            <a:r>
+              <a:rPr sz="1200" b="1">
+                <a:solidFill>
+                  <a:srgbClr val="002855"/>
+                </a:solidFill>
+                <a:latin typeface="Arial"/>
+                <a:ea typeface="Arial"/>
+                <a:cs typeface="Arial"/>
+              </a:rPr>
+              <a:t>WVU DSPIRA</a:t>
+            </a:r>
+          </a:p>
+        </p:txBody>
+      </p:sp>
+      <p:sp>
+        <p:nvSpPr>
+          <p:cNvPr id="155" name="DSPIRA 4"/>
+          <p:cNvSpPr>
+            <a:spLocks noGrp="1"/>
+          </p:cNvSpPr>
+          <p:nvPr/>
+        </p:nvSpPr>
+        <p:spPr>
+          <a:xfrm>
+            <a:off x="228600" y="7978775"/>
+            <a:ext cx="6667500" cy="228600"/>
+          </a:xfrm>
+          <a:prstGeom prst="rect">
+            <a:avLst/>
+          </a:prstGeom>
+          <a:noFill/>
+          <a:ln w="0">
+            <a:noFill/>
+          </a:ln>
+        </p:spPr>
+        <p:txBody>
+          <a:bodyPr>
+            <a:noAutofit/>
+          </a:bodyPr>
+          <a:lstStyle/>
+          <a:p>
+            <a:pPr>
+              <a:defRPr sz="900" b="0">
+                <a:solidFill>
+                  <a:srgbClr val="002855"/>
+                </a:solidFill>
+                <a:latin typeface="Arial"/>
+                <a:ea typeface="Arial"/>
+                <a:cs typeface="Arial"/>
+              </a:defRPr>
+            </a:pPr>
+            <a:r>
+              <a:rPr sz="900" b="0">
+                <a:solidFill>
+                  <a:srgbClr val="002855"/>
+                </a:solidFill>
+                <a:latin typeface="Arial"/>
+                <a:ea typeface="Arial"/>
+                <a:cs typeface="Arial"/>
+              </a:rPr>
+              <a:t>wvurail.org/dspira</a:t>
+            </a:r>
+          </a:p>
+        </p:txBody>
+      </p:sp>
+      <p:sp>
+        <p:nvSpPr>
+          <p:cNvPr id="156" name="DSPIRA 5"/>
+          <p:cNvSpPr>
+            <a:spLocks noGrp="1"/>
+          </p:cNvSpPr>
+          <p:nvPr/>
+        </p:nvSpPr>
+        <p:spPr>
+          <a:xfrm>
+            <a:off x="9080500" y="7978775"/>
+            <a:ext cx="762000" cy="228600"/>
+          </a:xfrm>
+          <a:prstGeom prst="rect">
+            <a:avLst/>
+          </a:prstGeom>
+          <a:noFill/>
+          <a:ln w="0">
+            <a:noFill/>
+          </a:ln>
+        </p:spPr>
+        <p:txBody>
+          <a:bodyPr>
+            <a:noAutofit/>
+          </a:bodyPr>
+          <a:lstStyle/>
+          <a:p>
+            <a:pPr>
+              <a:defRPr sz="900" b="0">
+                <a:solidFill>
+                  <a:srgbClr val="002855"/>
+                </a:solidFill>
+                <a:latin typeface="Arial"/>
+                <a:ea typeface="Arial"/>
+                <a:cs typeface="Arial"/>
+              </a:defRPr>
+            </a:pPr>
+            <a:r>
+              <a:rPr sz="900" b="0">
+                <a:solidFill>
+                  <a:srgbClr val="002855"/>
+                </a:solidFill>
+                <a:latin typeface="Arial"/>
+                <a:ea typeface="Arial"/>
+                <a:cs typeface="Arial"/>
+              </a:rPr>
+              <a:t>13 of 19</a:t>
+            </a:r>
           </a:p>
         </p:txBody>
       </p:sp>
@@ -9627,7 +10452,7 @@
         </p:nvSpPr>
         <p:spPr>
           <a:xfrm>
-            <a:off x="504000" y="301320"/>
+            <a:off x="504000" y="644220"/>
             <a:ext cx="9071700" cy="1262100"/>
           </a:xfrm>
           <a:prstGeom prst="rect">
@@ -9650,10 +10475,10 @@
               <a:buNone/>
             </a:pPr>
             <a:r>
-              <a:rPr lang="en-US" sz="3800"/>
+              <a:rPr lang="en-US" sz="3040"/>
               <a:t>Turning into Velocities</a:t>
             </a:r>
-            <a:endParaRPr sz="3800"/>
+            <a:endParaRPr sz="3040"/>
           </a:p>
         </p:txBody>
       </p:sp>
@@ -9667,7 +10492,7 @@
         </p:nvSpPr>
         <p:spPr>
           <a:xfrm>
-            <a:off x="504000" y="1769040"/>
+            <a:off x="504000" y="2111940"/>
             <a:ext cx="9071700" cy="4384500"/>
           </a:xfrm>
           <a:prstGeom prst="rect">
@@ -9690,7 +10515,7 @@
               <a:buNone/>
             </a:pPr>
             <a:r>
-              <a:rPr lang="en-US" sz="2400">
+              <a:rPr lang="en-US" sz="1920">
                 <a:solidFill>
                   <a:schemeClr val="dk1"/>
                 </a:solidFill>
@@ -9716,7 +10541,7 @@
         </p:blipFill>
         <p:spPr>
           <a:xfrm>
-            <a:off x="2065022" y="2986303"/>
+            <a:off x="2065022" y="3329203"/>
             <a:ext cx="5543850" cy="4126925"/>
           </a:xfrm>
           <a:prstGeom prst="rect">
@@ -9736,7 +10561,7 @@
         </p:nvCxnSpPr>
         <p:spPr>
           <a:xfrm>
-            <a:off x="5371625" y="3205475"/>
+            <a:off x="5371625" y="3548375"/>
             <a:ext cx="11100" cy="2964900"/>
           </a:xfrm>
           <a:prstGeom prst="straightConnector1">
@@ -9762,7 +10587,7 @@
         </p:nvSpPr>
         <p:spPr>
           <a:xfrm>
-            <a:off x="5055125" y="6202700"/>
+            <a:off x="5055125" y="6545600"/>
             <a:ext cx="6301500" cy="601800"/>
           </a:xfrm>
           <a:prstGeom prst="rect">
@@ -9822,7 +10647,7 @@
         </p:nvSpPr>
         <p:spPr>
           <a:xfrm>
-            <a:off x="2013375" y="6213650"/>
+            <a:off x="2013375" y="6556550"/>
             <a:ext cx="3205500" cy="525000"/>
           </a:xfrm>
           <a:prstGeom prst="rect">
@@ -9874,7 +10699,7 @@
         </p:nvSpPr>
         <p:spPr>
           <a:xfrm>
-            <a:off x="3796250" y="6586000"/>
+            <a:off x="3796250" y="6928900"/>
             <a:ext cx="2811600" cy="754800"/>
           </a:xfrm>
           <a:prstGeom prst="rect">
@@ -9903,18 +10728,219 @@
               <a:buNone/>
             </a:pPr>
             <a:r>
-              <a:rPr b="1" lang="en-US" sz="1800">
+              <a:rPr b="1" lang="en-US" sz="1440">
                 <a:solidFill>
                   <a:srgbClr val="FF0000"/>
                 </a:solidFill>
               </a:rPr>
               <a:t>Velocity (km/s)</a:t>
             </a:r>
-            <a:endParaRPr b="1" sz="1800">
+            <a:endParaRPr b="1" sz="1440">
               <a:solidFill>
                 <a:srgbClr val="FF0000"/>
               </a:solidFill>
             </a:endParaRPr>
+          </a:p>
+        </p:txBody>
+      </p:sp>
+      <p:sp>
+        <p:nvSpPr>
+          <p:cNvPr id="163" name="DSPIRA 1"/>
+          <p:cNvSpPr>
+            <a:spLocks noGrp="1"/>
+          </p:cNvSpPr>
+          <p:nvPr/>
+        </p:nvSpPr>
+        <p:spPr>
+          <a:xfrm>
+            <a:off x="0" y="0"/>
+            <a:ext cx="10080625" cy="342900"/>
+          </a:xfrm>
+          <a:prstGeom prst="rect">
+            <a:avLst/>
+          </a:prstGeom>
+          <a:solidFill>
+            <a:srgbClr val="FFFFFF"/>
+          </a:solidFill>
+          <a:ln w="0">
+            <a:noFill/>
+          </a:ln>
+        </p:spPr>
+      </p:sp>
+      <p:sp>
+        <p:nvSpPr>
+          <p:cNvPr id="164" name="DSPIRA 2"/>
+          <p:cNvSpPr>
+            <a:spLocks noGrp="1"/>
+          </p:cNvSpPr>
+          <p:nvPr/>
+        </p:nvSpPr>
+        <p:spPr>
+          <a:xfrm>
+            <a:off x="0" y="7902575"/>
+            <a:ext cx="10080625" cy="342900"/>
+          </a:xfrm>
+          <a:prstGeom prst="rect">
+            <a:avLst/>
+          </a:prstGeom>
+          <a:solidFill>
+            <a:srgbClr val="FFFFFF"/>
+          </a:solidFill>
+          <a:ln w="0">
+            <a:noFill/>
+          </a:ln>
+        </p:spPr>
+      </p:sp>
+      <p:sp>
+        <p:nvSpPr>
+          <p:cNvPr id="165" name="DSPIRA 3"/>
+          <p:cNvSpPr>
+            <a:spLocks noGrp="1"/>
+          </p:cNvSpPr>
+          <p:nvPr/>
+        </p:nvSpPr>
+        <p:spPr>
+          <a:xfrm>
+            <a:off x="228600" y="76200"/>
+            <a:ext cx="4762500" cy="228600"/>
+          </a:xfrm>
+          <a:prstGeom prst="rect">
+            <a:avLst/>
+          </a:prstGeom>
+          <a:noFill/>
+          <a:ln w="0">
+            <a:noFill/>
+          </a:ln>
+        </p:spPr>
+        <p:txBody>
+          <a:bodyPr>
+            <a:noAutofit/>
+          </a:bodyPr>
+          <a:lstStyle/>
+          <a:p>
+            <a:pPr>
+              <a:defRPr sz="1200" b="1">
+                <a:solidFill>
+                  <a:srgbClr val="002855"/>
+                </a:solidFill>
+                <a:latin typeface="Arial"/>
+                <a:ea typeface="Arial"/>
+                <a:cs typeface="Arial"/>
+              </a:defRPr>
+            </a:pPr>
+            <a:r>
+              <a:rPr sz="1200" b="1">
+                <a:solidFill>
+                  <a:srgbClr val="002855"/>
+                </a:solidFill>
+                <a:latin typeface="Arial"/>
+                <a:ea typeface="Arial"/>
+                <a:cs typeface="Arial"/>
+              </a:rPr>
+              <a:t>WVU DSPIRA</a:t>
+            </a:r>
+          </a:p>
+        </p:txBody>
+      </p:sp>
+      <p:sp>
+        <p:nvSpPr>
+          <p:cNvPr id="166" name="DSPIRA 4"/>
+          <p:cNvSpPr>
+            <a:spLocks noGrp="1"/>
+          </p:cNvSpPr>
+          <p:nvPr/>
+        </p:nvSpPr>
+        <p:spPr>
+          <a:xfrm>
+            <a:off x="228600" y="7978775"/>
+            <a:ext cx="6667500" cy="228600"/>
+          </a:xfrm>
+          <a:prstGeom prst="rect">
+            <a:avLst/>
+          </a:prstGeom>
+          <a:noFill/>
+          <a:ln w="0">
+            <a:noFill/>
+          </a:ln>
+        </p:spPr>
+        <p:txBody>
+          <a:bodyPr>
+            <a:noAutofit/>
+          </a:bodyPr>
+          <a:lstStyle/>
+          <a:p>
+            <a:pPr>
+              <a:defRPr sz="900" b="0">
+                <a:solidFill>
+                  <a:srgbClr val="002855"/>
+                </a:solidFill>
+                <a:latin typeface="Arial"/>
+                <a:ea typeface="Arial"/>
+                <a:cs typeface="Arial"/>
+              </a:defRPr>
+            </a:pPr>
+            <a:r>
+              <a:rPr sz="900" b="0">
+                <a:solidFill>
+                  <a:srgbClr val="002855"/>
+                </a:solidFill>
+                <a:latin typeface="Arial"/>
+                <a:ea typeface="Arial"/>
+                <a:cs typeface="Arial"/>
+              </a:rPr>
+              <a:t>wvurail.org/dspira</a:t>
+            </a:r>
+          </a:p>
+        </p:txBody>
+      </p:sp>
+      <p:sp>
+        <p:nvSpPr>
+          <p:cNvPr id="167" name="DSPIRA 5"/>
+          <p:cNvSpPr>
+            <a:spLocks noGrp="1"/>
+          </p:cNvSpPr>
+          <p:nvPr/>
+        </p:nvSpPr>
+        <p:spPr>
+          <a:xfrm>
+            <a:off x="9080500" y="7978775"/>
+            <a:ext cx="762000" cy="228600"/>
+          </a:xfrm>
+          <a:prstGeom prst="rect">
+            <a:avLst/>
+          </a:prstGeom>
+          <a:noFill/>
+          <a:ln w="0">
+            <a:noFill/>
+          </a:ln>
+        </p:spPr>
+        <p:txBody>
+          <a:bodyPr>
+            <a:noAutofit/>
+          </a:bodyPr>
+          <a:lstStyle/>
+          <a:p>
+            <a:pPr>
+              <a:defRPr sz="900" b="0">
+                <a:solidFill>
+                  <a:srgbClr val="002855"/>
+                </a:solidFill>
+                <a:latin typeface="Arial"/>
+                <a:ea typeface="Arial"/>
+                <a:cs typeface="Arial"/>
+              </a:defRPr>
+            </a:pPr>
+            <a:r>
+              <a:rPr sz="900" b="0">
+                <a:solidFill>
+                  <a:srgbClr val="002855"/>
+                </a:solidFill>
+                <a:latin typeface="Arial"/>
+                <a:ea typeface="Arial"/>
+                <a:cs typeface="Arial"/>
+              </a:rPr>
+              <a:t>14 of 19</a:t>
+            </a:r>
           </a:p>
         </p:txBody>
       </p:sp>
@@ -9953,7 +10979,7 @@
         </p:nvSpPr>
         <p:spPr>
           <a:xfrm>
-            <a:off x="504000" y="301320"/>
+            <a:off x="504000" y="644220"/>
             <a:ext cx="9071700" cy="1262100"/>
           </a:xfrm>
           <a:prstGeom prst="rect">
@@ -9976,10 +11002,10 @@
               <a:buNone/>
             </a:pPr>
             <a:r>
-              <a:rPr lang="en-US" sz="3800"/>
+              <a:rPr lang="en-US" sz="3040"/>
               <a:t>Results!</a:t>
             </a:r>
-            <a:endParaRPr sz="3800"/>
+            <a:endParaRPr sz="3040"/>
           </a:p>
         </p:txBody>
       </p:sp>
@@ -9993,7 +11019,7 @@
         </p:nvSpPr>
         <p:spPr>
           <a:xfrm>
-            <a:off x="504000" y="1769040"/>
+            <a:off x="504000" y="2111940"/>
             <a:ext cx="9071700" cy="4384500"/>
           </a:xfrm>
           <a:prstGeom prst="rect">
@@ -10054,7 +11080,7 @@
         </p:blipFill>
         <p:spPr>
           <a:xfrm>
-            <a:off x="2065022" y="2986303"/>
+            <a:off x="2065022" y="3329203"/>
             <a:ext cx="5543850" cy="4126925"/>
           </a:xfrm>
           <a:prstGeom prst="rect">
@@ -10074,7 +11100,7 @@
         </p:nvCxnSpPr>
         <p:spPr>
           <a:xfrm>
-            <a:off x="5371625" y="3205475"/>
+            <a:off x="5371625" y="3548375"/>
             <a:ext cx="11100" cy="2964900"/>
           </a:xfrm>
           <a:prstGeom prst="straightConnector1">
@@ -10100,7 +11126,7 @@
         </p:nvSpPr>
         <p:spPr>
           <a:xfrm>
-            <a:off x="5055125" y="6202700"/>
+            <a:off x="5055125" y="6545600"/>
             <a:ext cx="6301500" cy="601800"/>
           </a:xfrm>
           <a:prstGeom prst="rect">
@@ -10152,7 +11178,7 @@
         </p:nvSpPr>
         <p:spPr>
           <a:xfrm>
-            <a:off x="2013375" y="6213650"/>
+            <a:off x="2013375" y="6556550"/>
             <a:ext cx="3205500" cy="525000"/>
           </a:xfrm>
           <a:prstGeom prst="rect">
@@ -10204,7 +11230,7 @@
         </p:nvSpPr>
         <p:spPr>
           <a:xfrm>
-            <a:off x="3796250" y="6586000"/>
+            <a:off x="3796250" y="6928900"/>
             <a:ext cx="2811600" cy="754800"/>
           </a:xfrm>
           <a:prstGeom prst="rect">
@@ -10233,18 +11259,219 @@
               <a:buNone/>
             </a:pPr>
             <a:r>
-              <a:rPr b="1" lang="en-US" sz="1800">
+              <a:rPr b="1" lang="en-US" sz="1440">
                 <a:solidFill>
                   <a:srgbClr val="FF0000"/>
                 </a:solidFill>
               </a:rPr>
               <a:t>Velocity (km/s)</a:t>
             </a:r>
-            <a:endParaRPr b="1" sz="1800">
+            <a:endParaRPr b="1" sz="1440">
               <a:solidFill>
                 <a:srgbClr val="FF0000"/>
               </a:solidFill>
             </a:endParaRPr>
+          </a:p>
+        </p:txBody>
+      </p:sp>
+      <p:sp>
+        <p:nvSpPr>
+          <p:cNvPr id="174" name="DSPIRA 1"/>
+          <p:cNvSpPr>
+            <a:spLocks noGrp="1"/>
+          </p:cNvSpPr>
+          <p:nvPr/>
+        </p:nvSpPr>
+        <p:spPr>
+          <a:xfrm>
+            <a:off x="0" y="0"/>
+            <a:ext cx="10080625" cy="342900"/>
+          </a:xfrm>
+          <a:prstGeom prst="rect">
+            <a:avLst/>
+          </a:prstGeom>
+          <a:solidFill>
+            <a:srgbClr val="FFFFFF"/>
+          </a:solidFill>
+          <a:ln w="0">
+            <a:noFill/>
+          </a:ln>
+        </p:spPr>
+      </p:sp>
+      <p:sp>
+        <p:nvSpPr>
+          <p:cNvPr id="175" name="DSPIRA 2"/>
+          <p:cNvSpPr>
+            <a:spLocks noGrp="1"/>
+          </p:cNvSpPr>
+          <p:nvPr/>
+        </p:nvSpPr>
+        <p:spPr>
+          <a:xfrm>
+            <a:off x="0" y="7902575"/>
+            <a:ext cx="10080625" cy="342900"/>
+          </a:xfrm>
+          <a:prstGeom prst="rect">
+            <a:avLst/>
+          </a:prstGeom>
+          <a:solidFill>
+            <a:srgbClr val="FFFFFF"/>
+          </a:solidFill>
+          <a:ln w="0">
+            <a:noFill/>
+          </a:ln>
+        </p:spPr>
+      </p:sp>
+      <p:sp>
+        <p:nvSpPr>
+          <p:cNvPr id="176" name="DSPIRA 3"/>
+          <p:cNvSpPr>
+            <a:spLocks noGrp="1"/>
+          </p:cNvSpPr>
+          <p:nvPr/>
+        </p:nvSpPr>
+        <p:spPr>
+          <a:xfrm>
+            <a:off x="228600" y="76200"/>
+            <a:ext cx="4762500" cy="228600"/>
+          </a:xfrm>
+          <a:prstGeom prst="rect">
+            <a:avLst/>
+          </a:prstGeom>
+          <a:noFill/>
+          <a:ln w="0">
+            <a:noFill/>
+          </a:ln>
+        </p:spPr>
+        <p:txBody>
+          <a:bodyPr>
+            <a:noAutofit/>
+          </a:bodyPr>
+          <a:lstStyle/>
+          <a:p>
+            <a:pPr>
+              <a:defRPr sz="1200" b="1">
+                <a:solidFill>
+                  <a:srgbClr val="002855"/>
+                </a:solidFill>
+                <a:latin typeface="Arial"/>
+                <a:ea typeface="Arial"/>
+                <a:cs typeface="Arial"/>
+              </a:defRPr>
+            </a:pPr>
+            <a:r>
+              <a:rPr sz="1200" b="1">
+                <a:solidFill>
+                  <a:srgbClr val="002855"/>
+                </a:solidFill>
+                <a:latin typeface="Arial"/>
+                <a:ea typeface="Arial"/>
+                <a:cs typeface="Arial"/>
+              </a:rPr>
+              <a:t>WVU DSPIRA</a:t>
+            </a:r>
+          </a:p>
+        </p:txBody>
+      </p:sp>
+      <p:sp>
+        <p:nvSpPr>
+          <p:cNvPr id="177" name="DSPIRA 4"/>
+          <p:cNvSpPr>
+            <a:spLocks noGrp="1"/>
+          </p:cNvSpPr>
+          <p:nvPr/>
+        </p:nvSpPr>
+        <p:spPr>
+          <a:xfrm>
+            <a:off x="228600" y="7978775"/>
+            <a:ext cx="6667500" cy="228600"/>
+          </a:xfrm>
+          <a:prstGeom prst="rect">
+            <a:avLst/>
+          </a:prstGeom>
+          <a:noFill/>
+          <a:ln w="0">
+            <a:noFill/>
+          </a:ln>
+        </p:spPr>
+        <p:txBody>
+          <a:bodyPr>
+            <a:noAutofit/>
+          </a:bodyPr>
+          <a:lstStyle/>
+          <a:p>
+            <a:pPr>
+              <a:defRPr sz="900" b="0">
+                <a:solidFill>
+                  <a:srgbClr val="002855"/>
+                </a:solidFill>
+                <a:latin typeface="Arial"/>
+                <a:ea typeface="Arial"/>
+                <a:cs typeface="Arial"/>
+              </a:defRPr>
+            </a:pPr>
+            <a:r>
+              <a:rPr sz="900" b="0">
+                <a:solidFill>
+                  <a:srgbClr val="002855"/>
+                </a:solidFill>
+                <a:latin typeface="Arial"/>
+                <a:ea typeface="Arial"/>
+                <a:cs typeface="Arial"/>
+              </a:rPr>
+              <a:t>wvurail.org/dspira</a:t>
+            </a:r>
+          </a:p>
+        </p:txBody>
+      </p:sp>
+      <p:sp>
+        <p:nvSpPr>
+          <p:cNvPr id="178" name="DSPIRA 5"/>
+          <p:cNvSpPr>
+            <a:spLocks noGrp="1"/>
+          </p:cNvSpPr>
+          <p:nvPr/>
+        </p:nvSpPr>
+        <p:spPr>
+          <a:xfrm>
+            <a:off x="9080500" y="7978775"/>
+            <a:ext cx="762000" cy="228600"/>
+          </a:xfrm>
+          <a:prstGeom prst="rect">
+            <a:avLst/>
+          </a:prstGeom>
+          <a:noFill/>
+          <a:ln w="0">
+            <a:noFill/>
+          </a:ln>
+        </p:spPr>
+        <p:txBody>
+          <a:bodyPr>
+            <a:noAutofit/>
+          </a:bodyPr>
+          <a:lstStyle/>
+          <a:p>
+            <a:pPr>
+              <a:defRPr sz="900" b="0">
+                <a:solidFill>
+                  <a:srgbClr val="002855"/>
+                </a:solidFill>
+                <a:latin typeface="Arial"/>
+                <a:ea typeface="Arial"/>
+                <a:cs typeface="Arial"/>
+              </a:defRPr>
+            </a:pPr>
+            <a:r>
+              <a:rPr sz="900" b="0">
+                <a:solidFill>
+                  <a:srgbClr val="002855"/>
+                </a:solidFill>
+                <a:latin typeface="Arial"/>
+                <a:ea typeface="Arial"/>
+                <a:cs typeface="Arial"/>
+              </a:rPr>
+              <a:t>15 of 19</a:t>
+            </a:r>
           </a:p>
         </p:txBody>
       </p:sp>
@@ -10283,7 +11510,7 @@
         </p:nvSpPr>
         <p:spPr>
           <a:xfrm>
-            <a:off x="504000" y="301320"/>
+            <a:off x="504000" y="644220"/>
             <a:ext cx="9071700" cy="1262100"/>
           </a:xfrm>
           <a:prstGeom prst="rect">
@@ -10322,7 +11549,7 @@
         </p:nvSpPr>
         <p:spPr>
           <a:xfrm>
-            <a:off x="504000" y="1769040"/>
+            <a:off x="504000" y="2111940"/>
             <a:ext cx="9071700" cy="4384500"/>
           </a:xfrm>
           <a:prstGeom prst="rect">
@@ -10367,7 +11594,7 @@
         </p:blipFill>
         <p:spPr>
           <a:xfrm>
-            <a:off x="1279252" y="1212850"/>
+            <a:off x="1279252" y="1555750"/>
             <a:ext cx="7304375" cy="6305375"/>
           </a:xfrm>
           <a:prstGeom prst="rect">
@@ -10387,7 +11614,7 @@
         </p:nvCxnSpPr>
         <p:spPr>
           <a:xfrm>
-            <a:off x="4433650" y="1650275"/>
+            <a:off x="4433650" y="1993175"/>
             <a:ext cx="10200" cy="4923900"/>
           </a:xfrm>
           <a:prstGeom prst="straightConnector1">
@@ -10413,7 +11640,7 @@
         </p:nvSpPr>
         <p:spPr>
           <a:xfrm>
-            <a:off x="4210150" y="3629025"/>
+            <a:off x="4210150" y="3971925"/>
             <a:ext cx="457200" cy="457200"/>
           </a:xfrm>
           <a:prstGeom prst="mathPlus">
@@ -10464,7 +11691,7 @@
         </p:nvSpPr>
         <p:spPr>
           <a:xfrm>
-            <a:off x="4210150" y="3400425"/>
+            <a:off x="4210150" y="3743325"/>
             <a:ext cx="457200" cy="457200"/>
           </a:xfrm>
           <a:prstGeom prst="mathPlus">
@@ -10515,7 +11742,7 @@
         </p:nvSpPr>
         <p:spPr>
           <a:xfrm>
-            <a:off x="4210150" y="3171825"/>
+            <a:off x="4210150" y="3514725"/>
             <a:ext cx="457200" cy="457200"/>
           </a:xfrm>
           <a:prstGeom prst="mathPlus">
@@ -10555,6 +11782,207 @@
               <a:t/>
             </a:r>
             <a:endParaRPr/>
+          </a:p>
+        </p:txBody>
+      </p:sp>
+      <p:sp>
+        <p:nvSpPr>
+          <p:cNvPr id="185" name="DSPIRA 1"/>
+          <p:cNvSpPr>
+            <a:spLocks noGrp="1"/>
+          </p:cNvSpPr>
+          <p:nvPr/>
+        </p:nvSpPr>
+        <p:spPr>
+          <a:xfrm>
+            <a:off x="0" y="0"/>
+            <a:ext cx="10080625" cy="342900"/>
+          </a:xfrm>
+          <a:prstGeom prst="rect">
+            <a:avLst/>
+          </a:prstGeom>
+          <a:solidFill>
+            <a:srgbClr val="FFFFFF"/>
+          </a:solidFill>
+          <a:ln w="0">
+            <a:noFill/>
+          </a:ln>
+        </p:spPr>
+      </p:sp>
+      <p:sp>
+        <p:nvSpPr>
+          <p:cNvPr id="186" name="DSPIRA 2"/>
+          <p:cNvSpPr>
+            <a:spLocks noGrp="1"/>
+          </p:cNvSpPr>
+          <p:nvPr/>
+        </p:nvSpPr>
+        <p:spPr>
+          <a:xfrm>
+            <a:off x="0" y="7902575"/>
+            <a:ext cx="10080625" cy="342900"/>
+          </a:xfrm>
+          <a:prstGeom prst="rect">
+            <a:avLst/>
+          </a:prstGeom>
+          <a:solidFill>
+            <a:srgbClr val="FFFFFF"/>
+          </a:solidFill>
+          <a:ln w="0">
+            <a:noFill/>
+          </a:ln>
+        </p:spPr>
+      </p:sp>
+      <p:sp>
+        <p:nvSpPr>
+          <p:cNvPr id="187" name="DSPIRA 3"/>
+          <p:cNvSpPr>
+            <a:spLocks noGrp="1"/>
+          </p:cNvSpPr>
+          <p:nvPr/>
+        </p:nvSpPr>
+        <p:spPr>
+          <a:xfrm>
+            <a:off x="228600" y="76200"/>
+            <a:ext cx="4762500" cy="228600"/>
+          </a:xfrm>
+          <a:prstGeom prst="rect">
+            <a:avLst/>
+          </a:prstGeom>
+          <a:noFill/>
+          <a:ln w="0">
+            <a:noFill/>
+          </a:ln>
+        </p:spPr>
+        <p:txBody>
+          <a:bodyPr>
+            <a:noAutofit/>
+          </a:bodyPr>
+          <a:lstStyle/>
+          <a:p>
+            <a:pPr>
+              <a:defRPr sz="1200" b="1">
+                <a:solidFill>
+                  <a:srgbClr val="002855"/>
+                </a:solidFill>
+                <a:latin typeface="Arial"/>
+                <a:ea typeface="Arial"/>
+                <a:cs typeface="Arial"/>
+              </a:defRPr>
+            </a:pPr>
+            <a:r>
+              <a:rPr sz="1200" b="1">
+                <a:solidFill>
+                  <a:srgbClr val="002855"/>
+                </a:solidFill>
+                <a:latin typeface="Arial"/>
+                <a:ea typeface="Arial"/>
+                <a:cs typeface="Arial"/>
+              </a:rPr>
+              <a:t>WVU DSPIRA</a:t>
+            </a:r>
+          </a:p>
+        </p:txBody>
+      </p:sp>
+      <p:sp>
+        <p:nvSpPr>
+          <p:cNvPr id="188" name="DSPIRA 4"/>
+          <p:cNvSpPr>
+            <a:spLocks noGrp="1"/>
+          </p:cNvSpPr>
+          <p:nvPr/>
+        </p:nvSpPr>
+        <p:spPr>
+          <a:xfrm>
+            <a:off x="228600" y="7978775"/>
+            <a:ext cx="6667500" cy="228600"/>
+          </a:xfrm>
+          <a:prstGeom prst="rect">
+            <a:avLst/>
+          </a:prstGeom>
+          <a:noFill/>
+          <a:ln w="0">
+            <a:noFill/>
+          </a:ln>
+        </p:spPr>
+        <p:txBody>
+          <a:bodyPr>
+            <a:noAutofit/>
+          </a:bodyPr>
+          <a:lstStyle/>
+          <a:p>
+            <a:pPr>
+              <a:defRPr sz="900" b="0">
+                <a:solidFill>
+                  <a:srgbClr val="002855"/>
+                </a:solidFill>
+                <a:latin typeface="Arial"/>
+                <a:ea typeface="Arial"/>
+                <a:cs typeface="Arial"/>
+              </a:defRPr>
+            </a:pPr>
+            <a:r>
+              <a:rPr sz="900" b="0">
+                <a:solidFill>
+                  <a:srgbClr val="002855"/>
+                </a:solidFill>
+                <a:latin typeface="Arial"/>
+                <a:ea typeface="Arial"/>
+                <a:cs typeface="Arial"/>
+              </a:rPr>
+              <a:t>wvurail.org/dspira</a:t>
+            </a:r>
+          </a:p>
+        </p:txBody>
+      </p:sp>
+      <p:sp>
+        <p:nvSpPr>
+          <p:cNvPr id="189" name="DSPIRA 5"/>
+          <p:cNvSpPr>
+            <a:spLocks noGrp="1"/>
+          </p:cNvSpPr>
+          <p:nvPr/>
+        </p:nvSpPr>
+        <p:spPr>
+          <a:xfrm>
+            <a:off x="9080500" y="7978775"/>
+            <a:ext cx="762000" cy="228600"/>
+          </a:xfrm>
+          <a:prstGeom prst="rect">
+            <a:avLst/>
+          </a:prstGeom>
+          <a:noFill/>
+          <a:ln w="0">
+            <a:noFill/>
+          </a:ln>
+        </p:spPr>
+        <p:txBody>
+          <a:bodyPr>
+            <a:noAutofit/>
+          </a:bodyPr>
+          <a:lstStyle/>
+          <a:p>
+            <a:pPr>
+              <a:defRPr sz="900" b="0">
+                <a:solidFill>
+                  <a:srgbClr val="002855"/>
+                </a:solidFill>
+                <a:latin typeface="Arial"/>
+                <a:ea typeface="Arial"/>
+                <a:cs typeface="Arial"/>
+              </a:defRPr>
+            </a:pPr>
+            <a:r>
+              <a:rPr sz="900" b="0">
+                <a:solidFill>
+                  <a:srgbClr val="002855"/>
+                </a:solidFill>
+                <a:latin typeface="Arial"/>
+                <a:ea typeface="Arial"/>
+                <a:cs typeface="Arial"/>
+              </a:rPr>
+              <a:t>16 of 19</a:t>
+            </a:r>
           </a:p>
         </p:txBody>
       </p:sp>
@@ -10593,7 +12021,7 @@
         </p:nvSpPr>
         <p:spPr>
           <a:xfrm>
-            <a:off x="504000" y="301320"/>
+            <a:off x="504000" y="644220"/>
             <a:ext cx="9071700" cy="1262100"/>
           </a:xfrm>
           <a:prstGeom prst="rect">
@@ -10616,10 +12044,10 @@
               <a:buNone/>
             </a:pPr>
             <a:r>
-              <a:rPr lang="en-US" sz="3800"/>
+              <a:rPr lang="en-US" sz="3040"/>
               <a:t>Where is this gas?</a:t>
             </a:r>
-            <a:endParaRPr sz="3800"/>
+            <a:endParaRPr sz="3040"/>
           </a:p>
         </p:txBody>
       </p:sp>
@@ -10633,7 +12061,7 @@
         </p:nvSpPr>
         <p:spPr>
           <a:xfrm>
-            <a:off x="504000" y="1769040"/>
+            <a:off x="504000" y="2111940"/>
             <a:ext cx="9071700" cy="4384500"/>
           </a:xfrm>
           <a:prstGeom prst="rect">
@@ -10661,7 +12089,7 @@
               <a:buNone/>
             </a:pPr>
             <a:r>
-              <a:rPr lang="en-US" sz="2000">
+              <a:rPr lang="en-US" sz="1600">
                 <a:solidFill>
                   <a:schemeClr val="dk1"/>
                 </a:solidFill>
@@ -10669,7 +12097,7 @@
               <a:t>V</a:t>
             </a:r>
             <a:r>
-              <a:rPr baseline="-25000" lang="en-US" sz="2000">
+              <a:rPr baseline="-25000" lang="en-US" sz="1600">
                 <a:solidFill>
                   <a:schemeClr val="dk1"/>
                 </a:solidFill>
@@ -10677,7 +12105,7 @@
               <a:t>rad</a:t>
             </a:r>
             <a:r>
-              <a:rPr lang="en-US" sz="2000">
+              <a:rPr lang="en-US" sz="1600">
                 <a:solidFill>
                   <a:schemeClr val="dk1"/>
                 </a:solidFill>
@@ -10685,7 +12113,7 @@
               <a:t>= (ω-ω</a:t>
             </a:r>
             <a:r>
-              <a:rPr baseline="-25000" lang="en-US" sz="2000">
+              <a:rPr baseline="-25000" lang="en-US" sz="1600">
                 <a:solidFill>
                   <a:schemeClr val="dk1"/>
                 </a:solidFill>
@@ -10693,7 +12121,7 @@
               <a:t>0</a:t>
             </a:r>
             <a:r>
-              <a:rPr lang="en-US" sz="2000">
+              <a:rPr lang="en-US" sz="1600">
                 <a:solidFill>
                   <a:schemeClr val="dk1"/>
                 </a:solidFill>
@@ -10701,7 +12129,7 @@
               <a:t>) R</a:t>
             </a:r>
             <a:r>
-              <a:rPr baseline="-25000" lang="en-US" sz="2000">
+              <a:rPr baseline="-25000" lang="en-US" sz="1600">
                 <a:solidFill>
                   <a:schemeClr val="dk1"/>
                 </a:solidFill>
@@ -10709,14 +12137,14 @@
               <a:t>0</a:t>
             </a:r>
             <a:r>
-              <a:rPr lang="en-US" sz="2000">
+              <a:rPr lang="en-US" sz="1600">
                 <a:solidFill>
                   <a:schemeClr val="dk1"/>
                 </a:solidFill>
               </a:rPr>
               <a:t> sin l</a:t>
             </a:r>
-            <a:endParaRPr sz="2000">
+            <a:endParaRPr sz="1600">
               <a:solidFill>
                 <a:schemeClr val="dk1"/>
               </a:solidFill>
@@ -10740,7 +12168,7 @@
             <a:r>
               <a:t/>
             </a:r>
-            <a:endParaRPr sz="2000">
+            <a:endParaRPr sz="1600">
               <a:solidFill>
                 <a:schemeClr val="dk1"/>
               </a:solidFill>
@@ -10757,7 +12185,7 @@
               <a:buNone/>
             </a:pPr>
             <a:r>
-              <a:rPr lang="en-US" sz="2000">
+              <a:rPr lang="en-US" sz="1600">
                 <a:solidFill>
                   <a:schemeClr val="dk1"/>
                 </a:solidFill>
@@ -10765,7 +12193,7 @@
               <a:t>where ω is the angular velocity defined as v/R, R is the distance from the center of the Galaxy, l is the Galactic longitude, and the “0” subscripts denote Solar quantities.  R</a:t>
             </a:r>
             <a:r>
-              <a:rPr baseline="-25000" lang="en-US" sz="2000">
+              <a:rPr baseline="-25000" lang="en-US" sz="1600">
                 <a:solidFill>
                   <a:schemeClr val="dk1"/>
                 </a:solidFill>
@@ -10773,7 +12201,7 @@
               <a:t>0</a:t>
             </a:r>
             <a:r>
-              <a:rPr lang="en-US" sz="2000">
+              <a:rPr lang="en-US" sz="1600">
                 <a:solidFill>
                   <a:schemeClr val="dk1"/>
                 </a:solidFill>
@@ -10781,7 +12209,7 @@
               <a:t> = 8.3kpc and ω</a:t>
             </a:r>
             <a:r>
-              <a:rPr baseline="-25000" lang="en-US" sz="2000">
+              <a:rPr baseline="-25000" lang="en-US" sz="1600">
                 <a:solidFill>
                   <a:schemeClr val="dk1"/>
                 </a:solidFill>
@@ -10789,14 +12217,14 @@
               <a:t>0</a:t>
             </a:r>
             <a:r>
-              <a:rPr lang="en-US" sz="2000">
+              <a:rPr lang="en-US" sz="1600">
                 <a:solidFill>
                   <a:schemeClr val="dk1"/>
                 </a:solidFill>
               </a:rPr>
               <a:t> = 29 (km/s)/kpc.</a:t>
             </a:r>
-            <a:endParaRPr sz="2000">
+            <a:endParaRPr sz="1600">
               <a:solidFill>
                 <a:schemeClr val="dk1"/>
               </a:solidFill>
@@ -10815,7 +12243,7 @@
             <a:r>
               <a:t/>
             </a:r>
-            <a:endParaRPr sz="2000">
+            <a:endParaRPr sz="1600">
               <a:solidFill>
                 <a:schemeClr val="dk1"/>
               </a:solidFill>
@@ -10832,14 +12260,14 @@
               <a:buNone/>
             </a:pPr>
             <a:r>
-              <a:rPr lang="en-US" sz="2000">
+              <a:rPr lang="en-US" sz="1600">
                 <a:solidFill>
                   <a:schemeClr val="dk1"/>
                 </a:solidFill>
               </a:rPr>
               <a:t>Let’s assume the rotation curve is completely flat, so v = 230km/s everywhere.  Then, ω = 230 km/s / R</a:t>
             </a:r>
-            <a:endParaRPr sz="2000">
+            <a:endParaRPr sz="1600">
               <a:solidFill>
                 <a:schemeClr val="dk1"/>
               </a:solidFill>
@@ -10856,14 +12284,14 @@
               <a:buNone/>
             </a:pPr>
             <a:r>
-              <a:rPr lang="en-US" sz="2000">
+              <a:rPr lang="en-US" sz="1600">
                 <a:solidFill>
                   <a:schemeClr val="dk1"/>
                 </a:solidFill>
               </a:rPr>
               <a:t>Rearranging,</a:t>
             </a:r>
-            <a:endParaRPr sz="2000">
+            <a:endParaRPr sz="1600">
               <a:solidFill>
                 <a:schemeClr val="dk1"/>
               </a:solidFill>
@@ -10880,7 +12308,7 @@
               <a:buNone/>
             </a:pPr>
             <a:r>
-              <a:rPr lang="en-US" sz="2000">
+              <a:rPr lang="en-US" sz="1600">
                 <a:solidFill>
                   <a:schemeClr val="dk1"/>
                 </a:solidFill>
@@ -10888,7 +12316,7 @@
               <a:t>ω = </a:t>
             </a:r>
             <a:r>
-              <a:rPr lang="en-US" sz="2000">
+              <a:rPr lang="en-US" sz="1600">
                 <a:solidFill>
                   <a:schemeClr val="dk1"/>
                 </a:solidFill>
@@ -10896,7 +12324,7 @@
               <a:t>V</a:t>
             </a:r>
             <a:r>
-              <a:rPr baseline="-25000" lang="en-US" sz="2000">
+              <a:rPr baseline="-25000" lang="en-US" sz="1600">
                 <a:solidFill>
                   <a:schemeClr val="dk1"/>
                 </a:solidFill>
@@ -10904,7 +12332,7 @@
               <a:t>rad</a:t>
             </a:r>
             <a:r>
-              <a:rPr baseline="30000" lang="en-US" sz="2000">
+              <a:rPr baseline="30000" lang="en-US" sz="1600">
                 <a:solidFill>
                   <a:schemeClr val="dk1"/>
                 </a:solidFill>
@@ -10912,7 +12340,7 @@
               <a:t> </a:t>
             </a:r>
             <a:r>
-              <a:rPr lang="en-US" sz="2000">
+              <a:rPr lang="en-US" sz="1600">
                 <a:solidFill>
                   <a:schemeClr val="dk1"/>
                 </a:solidFill>
@@ -10920,7 +12348,7 @@
               <a:t>/ (R</a:t>
             </a:r>
             <a:r>
-              <a:rPr baseline="-25000" lang="en-US" sz="2000">
+              <a:rPr baseline="-25000" lang="en-US" sz="1600">
                 <a:solidFill>
                   <a:schemeClr val="dk1"/>
                 </a:solidFill>
@@ -10928,7 +12356,7 @@
               <a:t>0</a:t>
             </a:r>
             <a:r>
-              <a:rPr lang="en-US" sz="2000">
+              <a:rPr lang="en-US" sz="1600">
                 <a:solidFill>
                   <a:schemeClr val="dk1"/>
                 </a:solidFill>
@@ -10936,7 +12364,7 @@
               <a:t>sin l) + ω</a:t>
             </a:r>
             <a:r>
-              <a:rPr baseline="-25000" lang="en-US" sz="2000">
+              <a:rPr baseline="-25000" lang="en-US" sz="1600">
                 <a:solidFill>
                   <a:schemeClr val="dk1"/>
                 </a:solidFill>
@@ -10944,14 +12372,14 @@
               <a:t>0</a:t>
             </a:r>
             <a:r>
-              <a:rPr lang="en-US" sz="2000">
+              <a:rPr lang="en-US" sz="1600">
                 <a:solidFill>
                   <a:schemeClr val="dk1"/>
                 </a:solidFill>
               </a:rPr>
               <a:t> = 230 km/s / R</a:t>
             </a:r>
-            <a:endParaRPr sz="2000">
+            <a:endParaRPr sz="1600">
               <a:solidFill>
                 <a:schemeClr val="dk1"/>
               </a:solidFill>
@@ -10968,14 +12396,14 @@
               <a:buNone/>
             </a:pPr>
             <a:r>
-              <a:rPr lang="en-US" sz="2000">
+              <a:rPr lang="en-US" sz="1600">
                 <a:solidFill>
                   <a:schemeClr val="dk1"/>
                 </a:solidFill>
               </a:rPr>
               <a:t>or</a:t>
             </a:r>
-            <a:endParaRPr sz="2000">
+            <a:endParaRPr sz="1600">
               <a:solidFill>
                 <a:schemeClr val="dk1"/>
               </a:solidFill>
@@ -10992,7 +12420,7 @@
               <a:buNone/>
             </a:pPr>
             <a:r>
-              <a:rPr lang="en-US" sz="2000">
+              <a:rPr lang="en-US" sz="1600">
                 <a:solidFill>
                   <a:schemeClr val="dk1"/>
                 </a:solidFill>
@@ -11000,7 +12428,7 @@
               <a:t>R = 230 km/s / (V</a:t>
             </a:r>
             <a:r>
-              <a:rPr baseline="-25000" lang="en-US" sz="2000">
+              <a:rPr baseline="-25000" lang="en-US" sz="1600">
                 <a:solidFill>
                   <a:schemeClr val="dk1"/>
                 </a:solidFill>
@@ -11008,14 +12436,14 @@
               <a:t>rad</a:t>
             </a:r>
             <a:r>
-              <a:rPr lang="en-US" sz="2000">
+              <a:rPr lang="en-US" sz="1600">
                 <a:solidFill>
                   <a:schemeClr val="dk1"/>
                 </a:solidFill>
               </a:rPr>
               <a:t> / (8.3kpc sin l) + 29 (km/s) / kpc) </a:t>
             </a:r>
-            <a:endParaRPr sz="2000">
+            <a:endParaRPr sz="1600">
               <a:solidFill>
                 <a:schemeClr val="dk1"/>
               </a:solidFill>
@@ -11034,7 +12462,7 @@
             <a:r>
               <a:t/>
             </a:r>
-            <a:endParaRPr sz="2000">
+            <a:endParaRPr sz="1600">
               <a:solidFill>
                 <a:schemeClr val="dk1"/>
               </a:solidFill>
@@ -11053,7 +12481,208 @@
             <a:r>
               <a:t/>
             </a:r>
-            <a:endParaRPr sz="2000"/>
+            <a:endParaRPr sz="1600"/>
+          </a:p>
+        </p:txBody>
+      </p:sp>
+      <p:sp>
+        <p:nvSpPr>
+          <p:cNvPr id="191" name="DSPIRA 1"/>
+          <p:cNvSpPr>
+            <a:spLocks noGrp="1"/>
+          </p:cNvSpPr>
+          <p:nvPr/>
+        </p:nvSpPr>
+        <p:spPr>
+          <a:xfrm>
+            <a:off x="0" y="0"/>
+            <a:ext cx="10080625" cy="342900"/>
+          </a:xfrm>
+          <a:prstGeom prst="rect">
+            <a:avLst/>
+          </a:prstGeom>
+          <a:solidFill>
+            <a:srgbClr val="FFFFFF"/>
+          </a:solidFill>
+          <a:ln w="0">
+            <a:noFill/>
+          </a:ln>
+        </p:spPr>
+      </p:sp>
+      <p:sp>
+        <p:nvSpPr>
+          <p:cNvPr id="192" name="DSPIRA 2"/>
+          <p:cNvSpPr>
+            <a:spLocks noGrp="1"/>
+          </p:cNvSpPr>
+          <p:nvPr/>
+        </p:nvSpPr>
+        <p:spPr>
+          <a:xfrm>
+            <a:off x="0" y="7902575"/>
+            <a:ext cx="10080625" cy="342900"/>
+          </a:xfrm>
+          <a:prstGeom prst="rect">
+            <a:avLst/>
+          </a:prstGeom>
+          <a:solidFill>
+            <a:srgbClr val="FFFFFF"/>
+          </a:solidFill>
+          <a:ln w="0">
+            <a:noFill/>
+          </a:ln>
+        </p:spPr>
+      </p:sp>
+      <p:sp>
+        <p:nvSpPr>
+          <p:cNvPr id="193" name="DSPIRA 3"/>
+          <p:cNvSpPr>
+            <a:spLocks noGrp="1"/>
+          </p:cNvSpPr>
+          <p:nvPr/>
+        </p:nvSpPr>
+        <p:spPr>
+          <a:xfrm>
+            <a:off x="228600" y="76200"/>
+            <a:ext cx="4762500" cy="228600"/>
+          </a:xfrm>
+          <a:prstGeom prst="rect">
+            <a:avLst/>
+          </a:prstGeom>
+          <a:noFill/>
+          <a:ln w="0">
+            <a:noFill/>
+          </a:ln>
+        </p:spPr>
+        <p:txBody>
+          <a:bodyPr>
+            <a:noAutofit/>
+          </a:bodyPr>
+          <a:lstStyle/>
+          <a:p>
+            <a:pPr>
+              <a:defRPr sz="1200" b="1">
+                <a:solidFill>
+                  <a:srgbClr val="002855"/>
+                </a:solidFill>
+                <a:latin typeface="Arial"/>
+                <a:ea typeface="Arial"/>
+                <a:cs typeface="Arial"/>
+              </a:defRPr>
+            </a:pPr>
+            <a:r>
+              <a:rPr sz="1200" b="1">
+                <a:solidFill>
+                  <a:srgbClr val="002855"/>
+                </a:solidFill>
+                <a:latin typeface="Arial"/>
+                <a:ea typeface="Arial"/>
+                <a:cs typeface="Arial"/>
+              </a:rPr>
+              <a:t>WVU DSPIRA</a:t>
+            </a:r>
+          </a:p>
+        </p:txBody>
+      </p:sp>
+      <p:sp>
+        <p:nvSpPr>
+          <p:cNvPr id="194" name="DSPIRA 4"/>
+          <p:cNvSpPr>
+            <a:spLocks noGrp="1"/>
+          </p:cNvSpPr>
+          <p:nvPr/>
+        </p:nvSpPr>
+        <p:spPr>
+          <a:xfrm>
+            <a:off x="228600" y="7978775"/>
+            <a:ext cx="6667500" cy="228600"/>
+          </a:xfrm>
+          <a:prstGeom prst="rect">
+            <a:avLst/>
+          </a:prstGeom>
+          <a:noFill/>
+          <a:ln w="0">
+            <a:noFill/>
+          </a:ln>
+        </p:spPr>
+        <p:txBody>
+          <a:bodyPr>
+            <a:noAutofit/>
+          </a:bodyPr>
+          <a:lstStyle/>
+          <a:p>
+            <a:pPr>
+              <a:defRPr sz="900" b="0">
+                <a:solidFill>
+                  <a:srgbClr val="002855"/>
+                </a:solidFill>
+                <a:latin typeface="Arial"/>
+                <a:ea typeface="Arial"/>
+                <a:cs typeface="Arial"/>
+              </a:defRPr>
+            </a:pPr>
+            <a:r>
+              <a:rPr sz="900" b="0">
+                <a:solidFill>
+                  <a:srgbClr val="002855"/>
+                </a:solidFill>
+                <a:latin typeface="Arial"/>
+                <a:ea typeface="Arial"/>
+                <a:cs typeface="Arial"/>
+              </a:rPr>
+              <a:t>wvurail.org/dspira</a:t>
+            </a:r>
+          </a:p>
+        </p:txBody>
+      </p:sp>
+      <p:sp>
+        <p:nvSpPr>
+          <p:cNvPr id="195" name="DSPIRA 5"/>
+          <p:cNvSpPr>
+            <a:spLocks noGrp="1"/>
+          </p:cNvSpPr>
+          <p:nvPr/>
+        </p:nvSpPr>
+        <p:spPr>
+          <a:xfrm>
+            <a:off x="9080500" y="7978775"/>
+            <a:ext cx="762000" cy="228600"/>
+          </a:xfrm>
+          <a:prstGeom prst="rect">
+            <a:avLst/>
+          </a:prstGeom>
+          <a:noFill/>
+          <a:ln w="0">
+            <a:noFill/>
+          </a:ln>
+        </p:spPr>
+        <p:txBody>
+          <a:bodyPr>
+            <a:noAutofit/>
+          </a:bodyPr>
+          <a:lstStyle/>
+          <a:p>
+            <a:pPr>
+              <a:defRPr sz="900" b="0">
+                <a:solidFill>
+                  <a:srgbClr val="002855"/>
+                </a:solidFill>
+                <a:latin typeface="Arial"/>
+                <a:ea typeface="Arial"/>
+                <a:cs typeface="Arial"/>
+              </a:defRPr>
+            </a:pPr>
+            <a:r>
+              <a:rPr sz="900" b="0">
+                <a:solidFill>
+                  <a:srgbClr val="002855"/>
+                </a:solidFill>
+                <a:latin typeface="Arial"/>
+                <a:ea typeface="Arial"/>
+                <a:cs typeface="Arial"/>
+              </a:rPr>
+              <a:t>17 of 19</a:t>
+            </a:r>
           </a:p>
         </p:txBody>
       </p:sp>
@@ -11092,7 +12721,7 @@
         </p:nvSpPr>
         <p:spPr>
           <a:xfrm>
-            <a:off x="504000" y="301320"/>
+            <a:off x="504000" y="644220"/>
             <a:ext cx="9071700" cy="1262100"/>
           </a:xfrm>
           <a:prstGeom prst="rect">
@@ -11115,10 +12744,10 @@
               <a:buNone/>
             </a:pPr>
             <a:r>
-              <a:rPr lang="en-US" sz="3800"/>
+              <a:rPr lang="en-US" sz="3040"/>
               <a:t>Where is this gas?</a:t>
             </a:r>
-            <a:endParaRPr sz="3800"/>
+            <a:endParaRPr sz="3040"/>
           </a:p>
         </p:txBody>
       </p:sp>
@@ -11132,7 +12761,7 @@
         </p:nvSpPr>
         <p:spPr>
           <a:xfrm>
-            <a:off x="504000" y="1769040"/>
+            <a:off x="504000" y="2111940"/>
             <a:ext cx="9071700" cy="4384500"/>
           </a:xfrm>
           <a:prstGeom prst="rect">
@@ -11155,7 +12784,7 @@
               <a:buNone/>
             </a:pPr>
             <a:r>
-              <a:rPr lang="en-US" sz="2000">
+              <a:rPr lang="en-US" sz="1600">
                 <a:solidFill>
                   <a:schemeClr val="dk1"/>
                 </a:solidFill>
@@ -11163,7 +12792,7 @@
               <a:t>R = 230 km/s / (V</a:t>
             </a:r>
             <a:r>
-              <a:rPr baseline="-25000" lang="en-US" sz="2000">
+              <a:rPr baseline="-25000" lang="en-US" sz="1600">
                 <a:solidFill>
                   <a:schemeClr val="dk1"/>
                 </a:solidFill>
@@ -11171,14 +12800,14 @@
               <a:t>rad</a:t>
             </a:r>
             <a:r>
-              <a:rPr lang="en-US" sz="2000">
+              <a:rPr lang="en-US" sz="1600">
                 <a:solidFill>
                   <a:schemeClr val="dk1"/>
                 </a:solidFill>
               </a:rPr>
               <a:t> / (8.3 kpc sin l) + 29 (km/s) / kpc)</a:t>
             </a:r>
-            <a:endParaRPr sz="2000">
+            <a:endParaRPr sz="1600">
               <a:solidFill>
                 <a:schemeClr val="dk1"/>
               </a:solidFill>
@@ -11197,7 +12826,7 @@
             <a:r>
               <a:t/>
             </a:r>
-            <a:endParaRPr sz="2000">
+            <a:endParaRPr sz="1600">
               <a:solidFill>
                 <a:schemeClr val="dk1"/>
               </a:solidFill>
@@ -11216,7 +12845,7 @@
             <a:r>
               <a:t/>
             </a:r>
-            <a:endParaRPr sz="2000">
+            <a:endParaRPr sz="1600">
               <a:solidFill>
                 <a:schemeClr val="dk1"/>
               </a:solidFill>
@@ -11233,7 +12862,7 @@
               <a:buNone/>
             </a:pPr>
             <a:r>
-              <a:rPr lang="en-US" sz="2000">
+              <a:rPr lang="en-US" sz="1600">
                 <a:solidFill>
                   <a:schemeClr val="dk1"/>
                 </a:solidFill>
@@ -11241,7 +12870,7 @@
               <a:t>So for V</a:t>
             </a:r>
             <a:r>
-              <a:rPr baseline="-25000" lang="en-US" sz="2000">
+              <a:rPr baseline="-25000" lang="en-US" sz="1600">
                 <a:solidFill>
                   <a:schemeClr val="dk1"/>
                 </a:solidFill>
@@ -11249,14 +12878,14 @@
               <a:t>rad</a:t>
             </a:r>
             <a:r>
-              <a:rPr lang="en-US" sz="2000">
+              <a:rPr lang="en-US" sz="1600">
                 <a:solidFill>
                   <a:schemeClr val="dk1"/>
                 </a:solidFill>
               </a:rPr>
               <a:t> = +30, +70, +100 km/s at l= 47deg,</a:t>
             </a:r>
-            <a:endParaRPr sz="2000">
+            <a:endParaRPr sz="1600">
               <a:solidFill>
                 <a:schemeClr val="dk1"/>
               </a:solidFill>
@@ -11275,7 +12904,7 @@
             <a:r>
               <a:t/>
             </a:r>
-            <a:endParaRPr sz="2000">
+            <a:endParaRPr sz="1600">
               <a:solidFill>
                 <a:schemeClr val="dk1"/>
               </a:solidFill>
@@ -11292,14 +12921,14 @@
               <a:buNone/>
             </a:pPr>
             <a:r>
-              <a:rPr lang="en-US" sz="2000">
+              <a:rPr lang="en-US" sz="1600">
                 <a:solidFill>
                   <a:schemeClr val="dk1"/>
                 </a:solidFill>
               </a:rPr>
               <a:t>R = 6.8, 5.7, 5.1 kpc</a:t>
             </a:r>
-            <a:endParaRPr sz="2000">
+            <a:endParaRPr sz="1600">
               <a:solidFill>
                 <a:schemeClr val="dk1"/>
               </a:solidFill>
@@ -11318,7 +12947,7 @@
             <a:r>
               <a:t/>
             </a:r>
-            <a:endParaRPr sz="2000">
+            <a:endParaRPr sz="1600">
               <a:solidFill>
                 <a:schemeClr val="dk1"/>
               </a:solidFill>
@@ -11337,7 +12966,208 @@
             <a:r>
               <a:t/>
             </a:r>
-            <a:endParaRPr sz="2000"/>
+            <a:endParaRPr sz="1600"/>
+          </a:p>
+        </p:txBody>
+      </p:sp>
+      <p:sp>
+        <p:nvSpPr>
+          <p:cNvPr id="197" name="DSPIRA 1"/>
+          <p:cNvSpPr>
+            <a:spLocks noGrp="1"/>
+          </p:cNvSpPr>
+          <p:nvPr/>
+        </p:nvSpPr>
+        <p:spPr>
+          <a:xfrm>
+            <a:off x="0" y="0"/>
+            <a:ext cx="10080625" cy="342900"/>
+          </a:xfrm>
+          <a:prstGeom prst="rect">
+            <a:avLst/>
+          </a:prstGeom>
+          <a:solidFill>
+            <a:srgbClr val="FFFFFF"/>
+          </a:solidFill>
+          <a:ln w="0">
+            <a:noFill/>
+          </a:ln>
+        </p:spPr>
+      </p:sp>
+      <p:sp>
+        <p:nvSpPr>
+          <p:cNvPr id="198" name="DSPIRA 2"/>
+          <p:cNvSpPr>
+            <a:spLocks noGrp="1"/>
+          </p:cNvSpPr>
+          <p:nvPr/>
+        </p:nvSpPr>
+        <p:spPr>
+          <a:xfrm>
+            <a:off x="0" y="7902575"/>
+            <a:ext cx="10080625" cy="342900"/>
+          </a:xfrm>
+          <a:prstGeom prst="rect">
+            <a:avLst/>
+          </a:prstGeom>
+          <a:solidFill>
+            <a:srgbClr val="FFFFFF"/>
+          </a:solidFill>
+          <a:ln w="0">
+            <a:noFill/>
+          </a:ln>
+        </p:spPr>
+      </p:sp>
+      <p:sp>
+        <p:nvSpPr>
+          <p:cNvPr id="199" name="DSPIRA 3"/>
+          <p:cNvSpPr>
+            <a:spLocks noGrp="1"/>
+          </p:cNvSpPr>
+          <p:nvPr/>
+        </p:nvSpPr>
+        <p:spPr>
+          <a:xfrm>
+            <a:off x="228600" y="76200"/>
+            <a:ext cx="4762500" cy="228600"/>
+          </a:xfrm>
+          <a:prstGeom prst="rect">
+            <a:avLst/>
+          </a:prstGeom>
+          <a:noFill/>
+          <a:ln w="0">
+            <a:noFill/>
+          </a:ln>
+        </p:spPr>
+        <p:txBody>
+          <a:bodyPr>
+            <a:noAutofit/>
+          </a:bodyPr>
+          <a:lstStyle/>
+          <a:p>
+            <a:pPr>
+              <a:defRPr sz="1200" b="1">
+                <a:solidFill>
+                  <a:srgbClr val="002855"/>
+                </a:solidFill>
+                <a:latin typeface="Arial"/>
+                <a:ea typeface="Arial"/>
+                <a:cs typeface="Arial"/>
+              </a:defRPr>
+            </a:pPr>
+            <a:r>
+              <a:rPr sz="1200" b="1">
+                <a:solidFill>
+                  <a:srgbClr val="002855"/>
+                </a:solidFill>
+                <a:latin typeface="Arial"/>
+                <a:ea typeface="Arial"/>
+                <a:cs typeface="Arial"/>
+              </a:rPr>
+              <a:t>WVU DSPIRA</a:t>
+            </a:r>
+          </a:p>
+        </p:txBody>
+      </p:sp>
+      <p:sp>
+        <p:nvSpPr>
+          <p:cNvPr id="200" name="DSPIRA 4"/>
+          <p:cNvSpPr>
+            <a:spLocks noGrp="1"/>
+          </p:cNvSpPr>
+          <p:nvPr/>
+        </p:nvSpPr>
+        <p:spPr>
+          <a:xfrm>
+            <a:off x="228600" y="7978775"/>
+            <a:ext cx="6667500" cy="228600"/>
+          </a:xfrm>
+          <a:prstGeom prst="rect">
+            <a:avLst/>
+          </a:prstGeom>
+          <a:noFill/>
+          <a:ln w="0">
+            <a:noFill/>
+          </a:ln>
+        </p:spPr>
+        <p:txBody>
+          <a:bodyPr>
+            <a:noAutofit/>
+          </a:bodyPr>
+          <a:lstStyle/>
+          <a:p>
+            <a:pPr>
+              <a:defRPr sz="900" b="0">
+                <a:solidFill>
+                  <a:srgbClr val="002855"/>
+                </a:solidFill>
+                <a:latin typeface="Arial"/>
+                <a:ea typeface="Arial"/>
+                <a:cs typeface="Arial"/>
+              </a:defRPr>
+            </a:pPr>
+            <a:r>
+              <a:rPr sz="900" b="0">
+                <a:solidFill>
+                  <a:srgbClr val="002855"/>
+                </a:solidFill>
+                <a:latin typeface="Arial"/>
+                <a:ea typeface="Arial"/>
+                <a:cs typeface="Arial"/>
+              </a:rPr>
+              <a:t>wvurail.org/dspira</a:t>
+            </a:r>
+          </a:p>
+        </p:txBody>
+      </p:sp>
+      <p:sp>
+        <p:nvSpPr>
+          <p:cNvPr id="201" name="DSPIRA 5"/>
+          <p:cNvSpPr>
+            <a:spLocks noGrp="1"/>
+          </p:cNvSpPr>
+          <p:nvPr/>
+        </p:nvSpPr>
+        <p:spPr>
+          <a:xfrm>
+            <a:off x="9080500" y="7978775"/>
+            <a:ext cx="762000" cy="228600"/>
+          </a:xfrm>
+          <a:prstGeom prst="rect">
+            <a:avLst/>
+          </a:prstGeom>
+          <a:noFill/>
+          <a:ln w="0">
+            <a:noFill/>
+          </a:ln>
+        </p:spPr>
+        <p:txBody>
+          <a:bodyPr>
+            <a:noAutofit/>
+          </a:bodyPr>
+          <a:lstStyle/>
+          <a:p>
+            <a:pPr>
+              <a:defRPr sz="900" b="0">
+                <a:solidFill>
+                  <a:srgbClr val="002855"/>
+                </a:solidFill>
+                <a:latin typeface="Arial"/>
+                <a:ea typeface="Arial"/>
+                <a:cs typeface="Arial"/>
+              </a:defRPr>
+            </a:pPr>
+            <a:r>
+              <a:rPr sz="900" b="0">
+                <a:solidFill>
+                  <a:srgbClr val="002855"/>
+                </a:solidFill>
+                <a:latin typeface="Arial"/>
+                <a:ea typeface="Arial"/>
+                <a:cs typeface="Arial"/>
+              </a:rPr>
+              <a:t>18 of 19</a:t>
+            </a:r>
           </a:p>
         </p:txBody>
       </p:sp>
@@ -11376,7 +13206,7 @@
         </p:nvSpPr>
         <p:spPr>
           <a:xfrm>
-            <a:off x="504000" y="301320"/>
+            <a:off x="504000" y="644220"/>
             <a:ext cx="9071700" cy="1262100"/>
           </a:xfrm>
           <a:prstGeom prst="rect">
@@ -11415,7 +13245,7 @@
         </p:nvSpPr>
         <p:spPr>
           <a:xfrm>
-            <a:off x="504000" y="1769040"/>
+            <a:off x="504000" y="2111940"/>
             <a:ext cx="9071700" cy="4384500"/>
           </a:xfrm>
           <a:prstGeom prst="rect">
@@ -11459,7 +13289,7 @@
         </p:blipFill>
         <p:spPr>
           <a:xfrm>
-            <a:off x="1108049" y="0"/>
+            <a:off x="1108049" y="342900"/>
             <a:ext cx="8000348" cy="7559675"/>
           </a:xfrm>
           <a:prstGeom prst="rect">
@@ -11479,7 +13309,7 @@
         </p:nvCxnSpPr>
         <p:spPr>
           <a:xfrm rot="10800000">
-            <a:off x="1379200" y="1276950"/>
+            <a:off x="1379200" y="1619850"/>
             <a:ext cx="3738900" cy="4260000"/>
           </a:xfrm>
           <a:prstGeom prst="straightConnector1">
@@ -11505,7 +13335,7 @@
         </p:nvCxnSpPr>
         <p:spPr>
           <a:xfrm flipH="1">
-            <a:off x="4780925" y="4004575"/>
+            <a:off x="4780925" y="4347475"/>
             <a:ext cx="357600" cy="1134000"/>
           </a:xfrm>
           <a:prstGeom prst="straightConnector1">
@@ -11531,7 +13361,7 @@
         </p:nvCxnSpPr>
         <p:spPr>
           <a:xfrm flipH="1">
-            <a:off x="3963725" y="3994375"/>
+            <a:off x="3963725" y="4337275"/>
             <a:ext cx="1174800" cy="194100"/>
           </a:xfrm>
           <a:prstGeom prst="straightConnector1">
@@ -11549,6 +13379,207 @@
           </a:ln>
         </p:spPr>
       </p:cxnSp>
+      <p:sp>
+        <p:nvSpPr>
+          <p:cNvPr id="207" name="DSPIRA 1"/>
+          <p:cNvSpPr>
+            <a:spLocks noGrp="1"/>
+          </p:cNvSpPr>
+          <p:nvPr/>
+        </p:nvSpPr>
+        <p:spPr>
+          <a:xfrm>
+            <a:off x="0" y="0"/>
+            <a:ext cx="10080625" cy="342900"/>
+          </a:xfrm>
+          <a:prstGeom prst="rect">
+            <a:avLst/>
+          </a:prstGeom>
+          <a:solidFill>
+            <a:srgbClr val="FFFFFF"/>
+          </a:solidFill>
+          <a:ln w="0">
+            <a:noFill/>
+          </a:ln>
+        </p:spPr>
+      </p:sp>
+      <p:sp>
+        <p:nvSpPr>
+          <p:cNvPr id="208" name="DSPIRA 2"/>
+          <p:cNvSpPr>
+            <a:spLocks noGrp="1"/>
+          </p:cNvSpPr>
+          <p:nvPr/>
+        </p:nvSpPr>
+        <p:spPr>
+          <a:xfrm>
+            <a:off x="0" y="7902575"/>
+            <a:ext cx="10080625" cy="342900"/>
+          </a:xfrm>
+          <a:prstGeom prst="rect">
+            <a:avLst/>
+          </a:prstGeom>
+          <a:solidFill>
+            <a:srgbClr val="FFFFFF"/>
+          </a:solidFill>
+          <a:ln w="0">
+            <a:noFill/>
+          </a:ln>
+        </p:spPr>
+      </p:sp>
+      <p:sp>
+        <p:nvSpPr>
+          <p:cNvPr id="209" name="DSPIRA 3"/>
+          <p:cNvSpPr>
+            <a:spLocks noGrp="1"/>
+          </p:cNvSpPr>
+          <p:nvPr/>
+        </p:nvSpPr>
+        <p:spPr>
+          <a:xfrm>
+            <a:off x="228600" y="76200"/>
+            <a:ext cx="4762500" cy="228600"/>
+          </a:xfrm>
+          <a:prstGeom prst="rect">
+            <a:avLst/>
+          </a:prstGeom>
+          <a:noFill/>
+          <a:ln w="0">
+            <a:noFill/>
+          </a:ln>
+        </p:spPr>
+        <p:txBody>
+          <a:bodyPr>
+            <a:noAutofit/>
+          </a:bodyPr>
+          <a:lstStyle/>
+          <a:p>
+            <a:pPr>
+              <a:defRPr sz="1200" b="1">
+                <a:solidFill>
+                  <a:srgbClr val="002855"/>
+                </a:solidFill>
+                <a:latin typeface="Arial"/>
+                <a:ea typeface="Arial"/>
+                <a:cs typeface="Arial"/>
+              </a:defRPr>
+            </a:pPr>
+            <a:r>
+              <a:rPr sz="1200" b="1">
+                <a:solidFill>
+                  <a:srgbClr val="002855"/>
+                </a:solidFill>
+                <a:latin typeface="Arial"/>
+                <a:ea typeface="Arial"/>
+                <a:cs typeface="Arial"/>
+              </a:rPr>
+              <a:t>WVU DSPIRA</a:t>
+            </a:r>
+          </a:p>
+        </p:txBody>
+      </p:sp>
+      <p:sp>
+        <p:nvSpPr>
+          <p:cNvPr id="210" name="DSPIRA 4"/>
+          <p:cNvSpPr>
+            <a:spLocks noGrp="1"/>
+          </p:cNvSpPr>
+          <p:nvPr/>
+        </p:nvSpPr>
+        <p:spPr>
+          <a:xfrm>
+            <a:off x="228600" y="7978775"/>
+            <a:ext cx="6667500" cy="228600"/>
+          </a:xfrm>
+          <a:prstGeom prst="rect">
+            <a:avLst/>
+          </a:prstGeom>
+          <a:noFill/>
+          <a:ln w="0">
+            <a:noFill/>
+          </a:ln>
+        </p:spPr>
+        <p:txBody>
+          <a:bodyPr>
+            <a:noAutofit/>
+          </a:bodyPr>
+          <a:lstStyle/>
+          <a:p>
+            <a:pPr>
+              <a:defRPr sz="900" b="0">
+                <a:solidFill>
+                  <a:srgbClr val="002855"/>
+                </a:solidFill>
+                <a:latin typeface="Arial"/>
+                <a:ea typeface="Arial"/>
+                <a:cs typeface="Arial"/>
+              </a:defRPr>
+            </a:pPr>
+            <a:r>
+              <a:rPr sz="900" b="0">
+                <a:solidFill>
+                  <a:srgbClr val="002855"/>
+                </a:solidFill>
+                <a:latin typeface="Arial"/>
+                <a:ea typeface="Arial"/>
+                <a:cs typeface="Arial"/>
+              </a:rPr>
+              <a:t>wvurail.org/dspira</a:t>
+            </a:r>
+          </a:p>
+        </p:txBody>
+      </p:sp>
+      <p:sp>
+        <p:nvSpPr>
+          <p:cNvPr id="211" name="DSPIRA 5"/>
+          <p:cNvSpPr>
+            <a:spLocks noGrp="1"/>
+          </p:cNvSpPr>
+          <p:nvPr/>
+        </p:nvSpPr>
+        <p:spPr>
+          <a:xfrm>
+            <a:off x="9080500" y="7978775"/>
+            <a:ext cx="762000" cy="228600"/>
+          </a:xfrm>
+          <a:prstGeom prst="rect">
+            <a:avLst/>
+          </a:prstGeom>
+          <a:noFill/>
+          <a:ln w="0">
+            <a:noFill/>
+          </a:ln>
+        </p:spPr>
+        <p:txBody>
+          <a:bodyPr>
+            <a:noAutofit/>
+          </a:bodyPr>
+          <a:lstStyle/>
+          <a:p>
+            <a:pPr>
+              <a:defRPr sz="900" b="0">
+                <a:solidFill>
+                  <a:srgbClr val="002855"/>
+                </a:solidFill>
+                <a:latin typeface="Arial"/>
+                <a:ea typeface="Arial"/>
+                <a:cs typeface="Arial"/>
+              </a:defRPr>
+            </a:pPr>
+            <a:r>
+              <a:rPr sz="900" b="0">
+                <a:solidFill>
+                  <a:srgbClr val="002855"/>
+                </a:solidFill>
+                <a:latin typeface="Arial"/>
+                <a:ea typeface="Arial"/>
+                <a:cs typeface="Arial"/>
+              </a:rPr>
+              <a:t>19 of 19</a:t>
+            </a:r>
+          </a:p>
+        </p:txBody>
+      </p:sp>
     </p:spTree>
   </p:cSld>
   <p:clrMapOvr>
@@ -11584,7 +13615,7 @@
         </p:nvSpPr>
         <p:spPr>
           <a:xfrm>
-            <a:off x="504000" y="301320"/>
+            <a:off x="504000" y="644220"/>
             <a:ext cx="9071700" cy="1262100"/>
           </a:xfrm>
           <a:prstGeom prst="rect">
@@ -11624,7 +13655,7 @@
         </p:nvSpPr>
         <p:spPr>
           <a:xfrm>
-            <a:off x="504000" y="1769040"/>
+            <a:off x="504000" y="2111940"/>
             <a:ext cx="9071700" cy="4384500"/>
           </a:xfrm>
           <a:prstGeom prst="rect">
@@ -11732,7 +13763,7 @@
         </p:blipFill>
         <p:spPr>
           <a:xfrm>
-            <a:off x="3259138" y="3979863"/>
+            <a:off x="3259138" y="4322763"/>
             <a:ext cx="3562350" cy="3257550"/>
           </a:xfrm>
           <a:prstGeom prst="rect">
@@ -11744,6 +13775,207 @@
           </a:ln>
         </p:spPr>
       </p:pic>
+      <p:sp>
+        <p:nvSpPr>
+          <p:cNvPr id="70" name="DSPIRA 1"/>
+          <p:cNvSpPr>
+            <a:spLocks noGrp="1"/>
+          </p:cNvSpPr>
+          <p:nvPr/>
+        </p:nvSpPr>
+        <p:spPr>
+          <a:xfrm>
+            <a:off x="0" y="0"/>
+            <a:ext cx="10080625" cy="342900"/>
+          </a:xfrm>
+          <a:prstGeom prst="rect">
+            <a:avLst/>
+          </a:prstGeom>
+          <a:solidFill>
+            <a:srgbClr val="FFFFFF"/>
+          </a:solidFill>
+          <a:ln w="0">
+            <a:noFill/>
+          </a:ln>
+        </p:spPr>
+      </p:sp>
+      <p:sp>
+        <p:nvSpPr>
+          <p:cNvPr id="71" name="DSPIRA 2"/>
+          <p:cNvSpPr>
+            <a:spLocks noGrp="1"/>
+          </p:cNvSpPr>
+          <p:nvPr/>
+        </p:nvSpPr>
+        <p:spPr>
+          <a:xfrm>
+            <a:off x="0" y="7902575"/>
+            <a:ext cx="10080625" cy="342900"/>
+          </a:xfrm>
+          <a:prstGeom prst="rect">
+            <a:avLst/>
+          </a:prstGeom>
+          <a:solidFill>
+            <a:srgbClr val="FFFFFF"/>
+          </a:solidFill>
+          <a:ln w="0">
+            <a:noFill/>
+          </a:ln>
+        </p:spPr>
+      </p:sp>
+      <p:sp>
+        <p:nvSpPr>
+          <p:cNvPr id="72" name="DSPIRA 3"/>
+          <p:cNvSpPr>
+            <a:spLocks noGrp="1"/>
+          </p:cNvSpPr>
+          <p:nvPr/>
+        </p:nvSpPr>
+        <p:spPr>
+          <a:xfrm>
+            <a:off x="228600" y="76200"/>
+            <a:ext cx="4762500" cy="228600"/>
+          </a:xfrm>
+          <a:prstGeom prst="rect">
+            <a:avLst/>
+          </a:prstGeom>
+          <a:noFill/>
+          <a:ln w="0">
+            <a:noFill/>
+          </a:ln>
+        </p:spPr>
+        <p:txBody>
+          <a:bodyPr>
+            <a:noAutofit/>
+          </a:bodyPr>
+          <a:lstStyle/>
+          <a:p>
+            <a:pPr>
+              <a:defRPr sz="1200" b="1">
+                <a:solidFill>
+                  <a:srgbClr val="002855"/>
+                </a:solidFill>
+                <a:latin typeface="Arial"/>
+                <a:ea typeface="Arial"/>
+                <a:cs typeface="Arial"/>
+              </a:defRPr>
+            </a:pPr>
+            <a:r>
+              <a:rPr sz="1200" b="1">
+                <a:solidFill>
+                  <a:srgbClr val="002855"/>
+                </a:solidFill>
+                <a:latin typeface="Arial"/>
+                <a:ea typeface="Arial"/>
+                <a:cs typeface="Arial"/>
+              </a:rPr>
+              <a:t>WVU DSPIRA</a:t>
+            </a:r>
+          </a:p>
+        </p:txBody>
+      </p:sp>
+      <p:sp>
+        <p:nvSpPr>
+          <p:cNvPr id="73" name="DSPIRA 4"/>
+          <p:cNvSpPr>
+            <a:spLocks noGrp="1"/>
+          </p:cNvSpPr>
+          <p:nvPr/>
+        </p:nvSpPr>
+        <p:spPr>
+          <a:xfrm>
+            <a:off x="228600" y="7978775"/>
+            <a:ext cx="6667500" cy="228600"/>
+          </a:xfrm>
+          <a:prstGeom prst="rect">
+            <a:avLst/>
+          </a:prstGeom>
+          <a:noFill/>
+          <a:ln w="0">
+            <a:noFill/>
+          </a:ln>
+        </p:spPr>
+        <p:txBody>
+          <a:bodyPr>
+            <a:noAutofit/>
+          </a:bodyPr>
+          <a:lstStyle/>
+          <a:p>
+            <a:pPr>
+              <a:defRPr sz="900" b="0">
+                <a:solidFill>
+                  <a:srgbClr val="002855"/>
+                </a:solidFill>
+                <a:latin typeface="Arial"/>
+                <a:ea typeface="Arial"/>
+                <a:cs typeface="Arial"/>
+              </a:defRPr>
+            </a:pPr>
+            <a:r>
+              <a:rPr sz="900" b="0">
+                <a:solidFill>
+                  <a:srgbClr val="002855"/>
+                </a:solidFill>
+                <a:latin typeface="Arial"/>
+                <a:ea typeface="Arial"/>
+                <a:cs typeface="Arial"/>
+              </a:rPr>
+              <a:t>wvurail.org/dspira</a:t>
+            </a:r>
+          </a:p>
+        </p:txBody>
+      </p:sp>
+      <p:sp>
+        <p:nvSpPr>
+          <p:cNvPr id="74" name="DSPIRA 5"/>
+          <p:cNvSpPr>
+            <a:spLocks noGrp="1"/>
+          </p:cNvSpPr>
+          <p:nvPr/>
+        </p:nvSpPr>
+        <p:spPr>
+          <a:xfrm>
+            <a:off x="9080500" y="7978775"/>
+            <a:ext cx="762000" cy="228600"/>
+          </a:xfrm>
+          <a:prstGeom prst="rect">
+            <a:avLst/>
+          </a:prstGeom>
+          <a:noFill/>
+          <a:ln w="0">
+            <a:noFill/>
+          </a:ln>
+        </p:spPr>
+        <p:txBody>
+          <a:bodyPr>
+            <a:noAutofit/>
+          </a:bodyPr>
+          <a:lstStyle/>
+          <a:p>
+            <a:pPr>
+              <a:defRPr sz="900" b="0">
+                <a:solidFill>
+                  <a:srgbClr val="002855"/>
+                </a:solidFill>
+                <a:latin typeface="Arial"/>
+                <a:ea typeface="Arial"/>
+                <a:cs typeface="Arial"/>
+              </a:defRPr>
+            </a:pPr>
+            <a:r>
+              <a:rPr sz="900" b="0">
+                <a:solidFill>
+                  <a:srgbClr val="002855"/>
+                </a:solidFill>
+                <a:latin typeface="Arial"/>
+                <a:ea typeface="Arial"/>
+                <a:cs typeface="Arial"/>
+              </a:rPr>
+              <a:t>2 of 19</a:t>
+            </a:r>
+          </a:p>
+        </p:txBody>
+      </p:sp>
     </p:spTree>
   </p:cSld>
   <p:clrMapOvr>
@@ -11779,7 +14011,7 @@
         </p:nvSpPr>
         <p:spPr>
           <a:xfrm>
-            <a:off x="504000" y="301320"/>
+            <a:off x="504000" y="644220"/>
             <a:ext cx="9071700" cy="1262100"/>
           </a:xfrm>
           <a:prstGeom prst="rect">
@@ -11802,10 +14034,10 @@
               <a:buNone/>
             </a:pPr>
             <a:r>
-              <a:rPr lang="en-US" sz="3800"/>
+              <a:rPr lang="en-US" sz="3040"/>
               <a:t>Why are we Measuring HI?</a:t>
             </a:r>
-            <a:endParaRPr sz="3800"/>
+            <a:endParaRPr sz="3040"/>
           </a:p>
         </p:txBody>
       </p:sp>
@@ -11819,7 +14051,7 @@
         </p:nvSpPr>
         <p:spPr>
           <a:xfrm>
-            <a:off x="504000" y="1769040"/>
+            <a:off x="504000" y="2111940"/>
             <a:ext cx="9071700" cy="4384500"/>
           </a:xfrm>
           <a:prstGeom prst="rect">
@@ -11899,7 +14131,7 @@
         </p:blipFill>
         <p:spPr>
           <a:xfrm>
-            <a:off x="309863" y="2797163"/>
+            <a:off x="309863" y="3140063"/>
             <a:ext cx="9525000" cy="4762500"/>
           </a:xfrm>
           <a:prstGeom prst="rect">
@@ -11911,6 +14143,207 @@
           </a:ln>
         </p:spPr>
       </p:pic>
+      <p:sp>
+        <p:nvSpPr>
+          <p:cNvPr id="77" name="DSPIRA 1"/>
+          <p:cNvSpPr>
+            <a:spLocks noGrp="1"/>
+          </p:cNvSpPr>
+          <p:nvPr/>
+        </p:nvSpPr>
+        <p:spPr>
+          <a:xfrm>
+            <a:off x="0" y="0"/>
+            <a:ext cx="10080625" cy="342900"/>
+          </a:xfrm>
+          <a:prstGeom prst="rect">
+            <a:avLst/>
+          </a:prstGeom>
+          <a:solidFill>
+            <a:srgbClr val="FFFFFF"/>
+          </a:solidFill>
+          <a:ln w="0">
+            <a:noFill/>
+          </a:ln>
+        </p:spPr>
+      </p:sp>
+      <p:sp>
+        <p:nvSpPr>
+          <p:cNvPr id="78" name="DSPIRA 2"/>
+          <p:cNvSpPr>
+            <a:spLocks noGrp="1"/>
+          </p:cNvSpPr>
+          <p:nvPr/>
+        </p:nvSpPr>
+        <p:spPr>
+          <a:xfrm>
+            <a:off x="0" y="7902575"/>
+            <a:ext cx="10080625" cy="342900"/>
+          </a:xfrm>
+          <a:prstGeom prst="rect">
+            <a:avLst/>
+          </a:prstGeom>
+          <a:solidFill>
+            <a:srgbClr val="FFFFFF"/>
+          </a:solidFill>
+          <a:ln w="0">
+            <a:noFill/>
+          </a:ln>
+        </p:spPr>
+      </p:sp>
+      <p:sp>
+        <p:nvSpPr>
+          <p:cNvPr id="79" name="DSPIRA 3"/>
+          <p:cNvSpPr>
+            <a:spLocks noGrp="1"/>
+          </p:cNvSpPr>
+          <p:nvPr/>
+        </p:nvSpPr>
+        <p:spPr>
+          <a:xfrm>
+            <a:off x="228600" y="76200"/>
+            <a:ext cx="4762500" cy="228600"/>
+          </a:xfrm>
+          <a:prstGeom prst="rect">
+            <a:avLst/>
+          </a:prstGeom>
+          <a:noFill/>
+          <a:ln w="0">
+            <a:noFill/>
+          </a:ln>
+        </p:spPr>
+        <p:txBody>
+          <a:bodyPr>
+            <a:noAutofit/>
+          </a:bodyPr>
+          <a:lstStyle/>
+          <a:p>
+            <a:pPr>
+              <a:defRPr sz="1200" b="1">
+                <a:solidFill>
+                  <a:srgbClr val="002855"/>
+                </a:solidFill>
+                <a:latin typeface="Arial"/>
+                <a:ea typeface="Arial"/>
+                <a:cs typeface="Arial"/>
+              </a:defRPr>
+            </a:pPr>
+            <a:r>
+              <a:rPr sz="1200" b="1">
+                <a:solidFill>
+                  <a:srgbClr val="002855"/>
+                </a:solidFill>
+                <a:latin typeface="Arial"/>
+                <a:ea typeface="Arial"/>
+                <a:cs typeface="Arial"/>
+              </a:rPr>
+              <a:t>WVU DSPIRA</a:t>
+            </a:r>
+          </a:p>
+        </p:txBody>
+      </p:sp>
+      <p:sp>
+        <p:nvSpPr>
+          <p:cNvPr id="80" name="DSPIRA 4"/>
+          <p:cNvSpPr>
+            <a:spLocks noGrp="1"/>
+          </p:cNvSpPr>
+          <p:nvPr/>
+        </p:nvSpPr>
+        <p:spPr>
+          <a:xfrm>
+            <a:off x="228600" y="7978775"/>
+            <a:ext cx="6667500" cy="228600"/>
+          </a:xfrm>
+          <a:prstGeom prst="rect">
+            <a:avLst/>
+          </a:prstGeom>
+          <a:noFill/>
+          <a:ln w="0">
+            <a:noFill/>
+          </a:ln>
+        </p:spPr>
+        <p:txBody>
+          <a:bodyPr>
+            <a:noAutofit/>
+          </a:bodyPr>
+          <a:lstStyle/>
+          <a:p>
+            <a:pPr>
+              <a:defRPr sz="900" b="0">
+                <a:solidFill>
+                  <a:srgbClr val="002855"/>
+                </a:solidFill>
+                <a:latin typeface="Arial"/>
+                <a:ea typeface="Arial"/>
+                <a:cs typeface="Arial"/>
+              </a:defRPr>
+            </a:pPr>
+            <a:r>
+              <a:rPr sz="900" b="0">
+                <a:solidFill>
+                  <a:srgbClr val="002855"/>
+                </a:solidFill>
+                <a:latin typeface="Arial"/>
+                <a:ea typeface="Arial"/>
+                <a:cs typeface="Arial"/>
+              </a:rPr>
+              <a:t>wvurail.org/dspira</a:t>
+            </a:r>
+          </a:p>
+        </p:txBody>
+      </p:sp>
+      <p:sp>
+        <p:nvSpPr>
+          <p:cNvPr id="81" name="DSPIRA 5"/>
+          <p:cNvSpPr>
+            <a:spLocks noGrp="1"/>
+          </p:cNvSpPr>
+          <p:nvPr/>
+        </p:nvSpPr>
+        <p:spPr>
+          <a:xfrm>
+            <a:off x="9080500" y="7978775"/>
+            <a:ext cx="762000" cy="228600"/>
+          </a:xfrm>
+          <a:prstGeom prst="rect">
+            <a:avLst/>
+          </a:prstGeom>
+          <a:noFill/>
+          <a:ln w="0">
+            <a:noFill/>
+          </a:ln>
+        </p:spPr>
+        <p:txBody>
+          <a:bodyPr>
+            <a:noAutofit/>
+          </a:bodyPr>
+          <a:lstStyle/>
+          <a:p>
+            <a:pPr>
+              <a:defRPr sz="900" b="0">
+                <a:solidFill>
+                  <a:srgbClr val="002855"/>
+                </a:solidFill>
+                <a:latin typeface="Arial"/>
+                <a:ea typeface="Arial"/>
+                <a:cs typeface="Arial"/>
+              </a:defRPr>
+            </a:pPr>
+            <a:r>
+              <a:rPr sz="900" b="0">
+                <a:solidFill>
+                  <a:srgbClr val="002855"/>
+                </a:solidFill>
+                <a:latin typeface="Arial"/>
+                <a:ea typeface="Arial"/>
+                <a:cs typeface="Arial"/>
+              </a:rPr>
+              <a:t>3 of 19</a:t>
+            </a:r>
+          </a:p>
+        </p:txBody>
+      </p:sp>
     </p:spTree>
   </p:cSld>
   <p:clrMapOvr>
@@ -11946,7 +14379,7 @@
         </p:nvSpPr>
         <p:spPr>
           <a:xfrm>
-            <a:off x="504000" y="301320"/>
+            <a:off x="504000" y="644220"/>
             <a:ext cx="9071700" cy="1262100"/>
           </a:xfrm>
           <a:prstGeom prst="rect">
@@ -11969,10 +14402,10 @@
               <a:buNone/>
             </a:pPr>
             <a:r>
-              <a:rPr lang="en-US" sz="3800"/>
+              <a:rPr lang="en-US" sz="3040"/>
               <a:t>How Should we Observe?</a:t>
             </a:r>
-            <a:endParaRPr sz="3800"/>
+            <a:endParaRPr sz="3040"/>
           </a:p>
         </p:txBody>
       </p:sp>
@@ -11986,7 +14419,7 @@
         </p:nvSpPr>
         <p:spPr>
           <a:xfrm>
-            <a:off x="504000" y="1769040"/>
+            <a:off x="504000" y="2111940"/>
             <a:ext cx="9071700" cy="4384500"/>
           </a:xfrm>
           <a:prstGeom prst="rect">
@@ -12051,6 +14484,207 @@
               <a:t>Target a specific part of the sky</a:t>
             </a:r>
             <a:endParaRPr/>
+          </a:p>
+        </p:txBody>
+      </p:sp>
+      <p:sp>
+        <p:nvSpPr>
+          <p:cNvPr id="83" name="DSPIRA 1"/>
+          <p:cNvSpPr>
+            <a:spLocks noGrp="1"/>
+          </p:cNvSpPr>
+          <p:nvPr/>
+        </p:nvSpPr>
+        <p:spPr>
+          <a:xfrm>
+            <a:off x="0" y="0"/>
+            <a:ext cx="10080625" cy="342900"/>
+          </a:xfrm>
+          <a:prstGeom prst="rect">
+            <a:avLst/>
+          </a:prstGeom>
+          <a:solidFill>
+            <a:srgbClr val="FFFFFF"/>
+          </a:solidFill>
+          <a:ln w="0">
+            <a:noFill/>
+          </a:ln>
+        </p:spPr>
+      </p:sp>
+      <p:sp>
+        <p:nvSpPr>
+          <p:cNvPr id="84" name="DSPIRA 2"/>
+          <p:cNvSpPr>
+            <a:spLocks noGrp="1"/>
+          </p:cNvSpPr>
+          <p:nvPr/>
+        </p:nvSpPr>
+        <p:spPr>
+          <a:xfrm>
+            <a:off x="0" y="7902575"/>
+            <a:ext cx="10080625" cy="342900"/>
+          </a:xfrm>
+          <a:prstGeom prst="rect">
+            <a:avLst/>
+          </a:prstGeom>
+          <a:solidFill>
+            <a:srgbClr val="FFFFFF"/>
+          </a:solidFill>
+          <a:ln w="0">
+            <a:noFill/>
+          </a:ln>
+        </p:spPr>
+      </p:sp>
+      <p:sp>
+        <p:nvSpPr>
+          <p:cNvPr id="85" name="DSPIRA 3"/>
+          <p:cNvSpPr>
+            <a:spLocks noGrp="1"/>
+          </p:cNvSpPr>
+          <p:nvPr/>
+        </p:nvSpPr>
+        <p:spPr>
+          <a:xfrm>
+            <a:off x="228600" y="76200"/>
+            <a:ext cx="4762500" cy="228600"/>
+          </a:xfrm>
+          <a:prstGeom prst="rect">
+            <a:avLst/>
+          </a:prstGeom>
+          <a:noFill/>
+          <a:ln w="0">
+            <a:noFill/>
+          </a:ln>
+        </p:spPr>
+        <p:txBody>
+          <a:bodyPr>
+            <a:noAutofit/>
+          </a:bodyPr>
+          <a:lstStyle/>
+          <a:p>
+            <a:pPr>
+              <a:defRPr sz="1200" b="1">
+                <a:solidFill>
+                  <a:srgbClr val="002855"/>
+                </a:solidFill>
+                <a:latin typeface="Arial"/>
+                <a:ea typeface="Arial"/>
+                <a:cs typeface="Arial"/>
+              </a:defRPr>
+            </a:pPr>
+            <a:r>
+              <a:rPr sz="1200" b="1">
+                <a:solidFill>
+                  <a:srgbClr val="002855"/>
+                </a:solidFill>
+                <a:latin typeface="Arial"/>
+                <a:ea typeface="Arial"/>
+                <a:cs typeface="Arial"/>
+              </a:rPr>
+              <a:t>WVU DSPIRA</a:t>
+            </a:r>
+          </a:p>
+        </p:txBody>
+      </p:sp>
+      <p:sp>
+        <p:nvSpPr>
+          <p:cNvPr id="86" name="DSPIRA 4"/>
+          <p:cNvSpPr>
+            <a:spLocks noGrp="1"/>
+          </p:cNvSpPr>
+          <p:nvPr/>
+        </p:nvSpPr>
+        <p:spPr>
+          <a:xfrm>
+            <a:off x="228600" y="7978775"/>
+            <a:ext cx="6667500" cy="228600"/>
+          </a:xfrm>
+          <a:prstGeom prst="rect">
+            <a:avLst/>
+          </a:prstGeom>
+          <a:noFill/>
+          <a:ln w="0">
+            <a:noFill/>
+          </a:ln>
+        </p:spPr>
+        <p:txBody>
+          <a:bodyPr>
+            <a:noAutofit/>
+          </a:bodyPr>
+          <a:lstStyle/>
+          <a:p>
+            <a:pPr>
+              <a:defRPr sz="900" b="0">
+                <a:solidFill>
+                  <a:srgbClr val="002855"/>
+                </a:solidFill>
+                <a:latin typeface="Arial"/>
+                <a:ea typeface="Arial"/>
+                <a:cs typeface="Arial"/>
+              </a:defRPr>
+            </a:pPr>
+            <a:r>
+              <a:rPr sz="900" b="0">
+                <a:solidFill>
+                  <a:srgbClr val="002855"/>
+                </a:solidFill>
+                <a:latin typeface="Arial"/>
+                <a:ea typeface="Arial"/>
+                <a:cs typeface="Arial"/>
+              </a:rPr>
+              <a:t>wvurail.org/dspira</a:t>
+            </a:r>
+          </a:p>
+        </p:txBody>
+      </p:sp>
+      <p:sp>
+        <p:nvSpPr>
+          <p:cNvPr id="87" name="DSPIRA 5"/>
+          <p:cNvSpPr>
+            <a:spLocks noGrp="1"/>
+          </p:cNvSpPr>
+          <p:nvPr/>
+        </p:nvSpPr>
+        <p:spPr>
+          <a:xfrm>
+            <a:off x="9080500" y="7978775"/>
+            <a:ext cx="762000" cy="228600"/>
+          </a:xfrm>
+          <a:prstGeom prst="rect">
+            <a:avLst/>
+          </a:prstGeom>
+          <a:noFill/>
+          <a:ln w="0">
+            <a:noFill/>
+          </a:ln>
+        </p:spPr>
+        <p:txBody>
+          <a:bodyPr>
+            <a:noAutofit/>
+          </a:bodyPr>
+          <a:lstStyle/>
+          <a:p>
+            <a:pPr>
+              <a:defRPr sz="900" b="0">
+                <a:solidFill>
+                  <a:srgbClr val="002855"/>
+                </a:solidFill>
+                <a:latin typeface="Arial"/>
+                <a:ea typeface="Arial"/>
+                <a:cs typeface="Arial"/>
+              </a:defRPr>
+            </a:pPr>
+            <a:r>
+              <a:rPr sz="900" b="0">
+                <a:solidFill>
+                  <a:srgbClr val="002855"/>
+                </a:solidFill>
+                <a:latin typeface="Arial"/>
+                <a:ea typeface="Arial"/>
+                <a:cs typeface="Arial"/>
+              </a:rPr>
+              <a:t>4 of 19</a:t>
+            </a:r>
           </a:p>
         </p:txBody>
       </p:sp>
@@ -12089,7 +14723,7 @@
         </p:nvSpPr>
         <p:spPr>
           <a:xfrm>
-            <a:off x="504000" y="301320"/>
+            <a:off x="504000" y="644220"/>
             <a:ext cx="9071700" cy="1262100"/>
           </a:xfrm>
           <a:prstGeom prst="rect">
@@ -12112,10 +14746,10 @@
               <a:buNone/>
             </a:pPr>
             <a:r>
-              <a:rPr lang="en-US" sz="3800"/>
+              <a:rPr lang="en-US" sz="3040"/>
               <a:t>Drift Scans</a:t>
             </a:r>
-            <a:endParaRPr sz="3800"/>
+            <a:endParaRPr sz="3040"/>
           </a:p>
         </p:txBody>
       </p:sp>
@@ -12129,7 +14763,7 @@
         </p:nvSpPr>
         <p:spPr>
           <a:xfrm>
-            <a:off x="504000" y="1769050"/>
+            <a:off x="504000" y="2111950"/>
             <a:ext cx="4397100" cy="4384500"/>
           </a:xfrm>
           <a:prstGeom prst="rect">
@@ -12205,7 +14839,7 @@
         </p:blipFill>
         <p:spPr>
           <a:xfrm>
-            <a:off x="345975" y="2825750"/>
+            <a:off x="345975" y="3168650"/>
             <a:ext cx="9229725" cy="4733925"/>
           </a:xfrm>
           <a:prstGeom prst="rect">
@@ -12232,7 +14866,7 @@
         </p:blipFill>
         <p:spPr>
           <a:xfrm>
-            <a:off x="5611050" y="1196950"/>
+            <a:off x="5611050" y="1539850"/>
             <a:ext cx="4191000" cy="3030141"/>
           </a:xfrm>
           <a:prstGeom prst="rect">
@@ -12244,6 +14878,207 @@
           </a:ln>
         </p:spPr>
       </p:pic>
+      <p:sp>
+        <p:nvSpPr>
+          <p:cNvPr id="91" name="DSPIRA 1"/>
+          <p:cNvSpPr>
+            <a:spLocks noGrp="1"/>
+          </p:cNvSpPr>
+          <p:nvPr/>
+        </p:nvSpPr>
+        <p:spPr>
+          <a:xfrm>
+            <a:off x="0" y="0"/>
+            <a:ext cx="10080625" cy="342900"/>
+          </a:xfrm>
+          <a:prstGeom prst="rect">
+            <a:avLst/>
+          </a:prstGeom>
+          <a:solidFill>
+            <a:srgbClr val="FFFFFF"/>
+          </a:solidFill>
+          <a:ln w="0">
+            <a:noFill/>
+          </a:ln>
+        </p:spPr>
+      </p:sp>
+      <p:sp>
+        <p:nvSpPr>
+          <p:cNvPr id="92" name="DSPIRA 2"/>
+          <p:cNvSpPr>
+            <a:spLocks noGrp="1"/>
+          </p:cNvSpPr>
+          <p:nvPr/>
+        </p:nvSpPr>
+        <p:spPr>
+          <a:xfrm>
+            <a:off x="0" y="7902575"/>
+            <a:ext cx="10080625" cy="342900"/>
+          </a:xfrm>
+          <a:prstGeom prst="rect">
+            <a:avLst/>
+          </a:prstGeom>
+          <a:solidFill>
+            <a:srgbClr val="FFFFFF"/>
+          </a:solidFill>
+          <a:ln w="0">
+            <a:noFill/>
+          </a:ln>
+        </p:spPr>
+      </p:sp>
+      <p:sp>
+        <p:nvSpPr>
+          <p:cNvPr id="93" name="DSPIRA 3"/>
+          <p:cNvSpPr>
+            <a:spLocks noGrp="1"/>
+          </p:cNvSpPr>
+          <p:nvPr/>
+        </p:nvSpPr>
+        <p:spPr>
+          <a:xfrm>
+            <a:off x="228600" y="76200"/>
+            <a:ext cx="4762500" cy="228600"/>
+          </a:xfrm>
+          <a:prstGeom prst="rect">
+            <a:avLst/>
+          </a:prstGeom>
+          <a:noFill/>
+          <a:ln w="0">
+            <a:noFill/>
+          </a:ln>
+        </p:spPr>
+        <p:txBody>
+          <a:bodyPr>
+            <a:noAutofit/>
+          </a:bodyPr>
+          <a:lstStyle/>
+          <a:p>
+            <a:pPr>
+              <a:defRPr sz="1200" b="1">
+                <a:solidFill>
+                  <a:srgbClr val="002855"/>
+                </a:solidFill>
+                <a:latin typeface="Arial"/>
+                <a:ea typeface="Arial"/>
+                <a:cs typeface="Arial"/>
+              </a:defRPr>
+            </a:pPr>
+            <a:r>
+              <a:rPr sz="1200" b="1">
+                <a:solidFill>
+                  <a:srgbClr val="002855"/>
+                </a:solidFill>
+                <a:latin typeface="Arial"/>
+                <a:ea typeface="Arial"/>
+                <a:cs typeface="Arial"/>
+              </a:rPr>
+              <a:t>WVU DSPIRA</a:t>
+            </a:r>
+          </a:p>
+        </p:txBody>
+      </p:sp>
+      <p:sp>
+        <p:nvSpPr>
+          <p:cNvPr id="94" name="DSPIRA 4"/>
+          <p:cNvSpPr>
+            <a:spLocks noGrp="1"/>
+          </p:cNvSpPr>
+          <p:nvPr/>
+        </p:nvSpPr>
+        <p:spPr>
+          <a:xfrm>
+            <a:off x="228600" y="7978775"/>
+            <a:ext cx="6667500" cy="228600"/>
+          </a:xfrm>
+          <a:prstGeom prst="rect">
+            <a:avLst/>
+          </a:prstGeom>
+          <a:noFill/>
+          <a:ln w="0">
+            <a:noFill/>
+          </a:ln>
+        </p:spPr>
+        <p:txBody>
+          <a:bodyPr>
+            <a:noAutofit/>
+          </a:bodyPr>
+          <a:lstStyle/>
+          <a:p>
+            <a:pPr>
+              <a:defRPr sz="900" b="0">
+                <a:solidFill>
+                  <a:srgbClr val="002855"/>
+                </a:solidFill>
+                <a:latin typeface="Arial"/>
+                <a:ea typeface="Arial"/>
+                <a:cs typeface="Arial"/>
+              </a:defRPr>
+            </a:pPr>
+            <a:r>
+              <a:rPr sz="900" b="0">
+                <a:solidFill>
+                  <a:srgbClr val="002855"/>
+                </a:solidFill>
+                <a:latin typeface="Arial"/>
+                <a:ea typeface="Arial"/>
+                <a:cs typeface="Arial"/>
+              </a:rPr>
+              <a:t>wvurail.org/dspira</a:t>
+            </a:r>
+          </a:p>
+        </p:txBody>
+      </p:sp>
+      <p:sp>
+        <p:nvSpPr>
+          <p:cNvPr id="95" name="DSPIRA 5"/>
+          <p:cNvSpPr>
+            <a:spLocks noGrp="1"/>
+          </p:cNvSpPr>
+          <p:nvPr/>
+        </p:nvSpPr>
+        <p:spPr>
+          <a:xfrm>
+            <a:off x="9080500" y="7978775"/>
+            <a:ext cx="762000" cy="228600"/>
+          </a:xfrm>
+          <a:prstGeom prst="rect">
+            <a:avLst/>
+          </a:prstGeom>
+          <a:noFill/>
+          <a:ln w="0">
+            <a:noFill/>
+          </a:ln>
+        </p:spPr>
+        <p:txBody>
+          <a:bodyPr>
+            <a:noAutofit/>
+          </a:bodyPr>
+          <a:lstStyle/>
+          <a:p>
+            <a:pPr>
+              <a:defRPr sz="900" b="0">
+                <a:solidFill>
+                  <a:srgbClr val="002855"/>
+                </a:solidFill>
+                <a:latin typeface="Arial"/>
+                <a:ea typeface="Arial"/>
+                <a:cs typeface="Arial"/>
+              </a:defRPr>
+            </a:pPr>
+            <a:r>
+              <a:rPr sz="900" b="0">
+                <a:solidFill>
+                  <a:srgbClr val="002855"/>
+                </a:solidFill>
+                <a:latin typeface="Arial"/>
+                <a:ea typeface="Arial"/>
+                <a:cs typeface="Arial"/>
+              </a:rPr>
+              <a:t>5 of 19</a:t>
+            </a:r>
+          </a:p>
+        </p:txBody>
+      </p:sp>
     </p:spTree>
   </p:cSld>
   <p:clrMapOvr>
@@ -12279,7 +15114,7 @@
         </p:nvSpPr>
         <p:spPr>
           <a:xfrm>
-            <a:off x="504000" y="301320"/>
+            <a:off x="504000" y="644220"/>
             <a:ext cx="9071700" cy="1262100"/>
           </a:xfrm>
           <a:prstGeom prst="rect">
@@ -12302,10 +15137,10 @@
               <a:buNone/>
             </a:pPr>
             <a:r>
-              <a:rPr lang="en-US" sz="3800"/>
+              <a:rPr lang="en-US" sz="3040"/>
               <a:t>How to do Drift Scans</a:t>
             </a:r>
-            <a:endParaRPr sz="3800"/>
+            <a:endParaRPr sz="3040"/>
           </a:p>
         </p:txBody>
       </p:sp>
@@ -12319,7 +15154,7 @@
         </p:nvSpPr>
         <p:spPr>
           <a:xfrm>
-            <a:off x="504000" y="1769040"/>
+            <a:off x="504000" y="2111940"/>
             <a:ext cx="9071700" cy="4384500"/>
           </a:xfrm>
           <a:prstGeom prst="rect">
@@ -12504,7 +15339,7 @@
                 <a:solidFill>
                   <a:schemeClr val="hlink"/>
                 </a:solidFill>
-                <a:latin typeface="Calibri"/>
+                <a:latin typeface="Arial"/>
                 <a:ea typeface="Calibri"/>
                 <a:cs typeface="Calibri"/>
                 <a:sym typeface="Calibri"/>
@@ -12617,6 +15452,207 @@
                 <a:schemeClr val="dk1"/>
               </a:solidFill>
             </a:endParaRPr>
+          </a:p>
+        </p:txBody>
+      </p:sp>
+      <p:sp>
+        <p:nvSpPr>
+          <p:cNvPr id="97" name="DSPIRA 1"/>
+          <p:cNvSpPr>
+            <a:spLocks noGrp="1"/>
+          </p:cNvSpPr>
+          <p:nvPr/>
+        </p:nvSpPr>
+        <p:spPr>
+          <a:xfrm>
+            <a:off x="0" y="0"/>
+            <a:ext cx="10080625" cy="342900"/>
+          </a:xfrm>
+          <a:prstGeom prst="rect">
+            <a:avLst/>
+          </a:prstGeom>
+          <a:solidFill>
+            <a:srgbClr val="FFFFFF"/>
+          </a:solidFill>
+          <a:ln w="0">
+            <a:noFill/>
+          </a:ln>
+        </p:spPr>
+      </p:sp>
+      <p:sp>
+        <p:nvSpPr>
+          <p:cNvPr id="98" name="DSPIRA 2"/>
+          <p:cNvSpPr>
+            <a:spLocks noGrp="1"/>
+          </p:cNvSpPr>
+          <p:nvPr/>
+        </p:nvSpPr>
+        <p:spPr>
+          <a:xfrm>
+            <a:off x="0" y="7902575"/>
+            <a:ext cx="10080625" cy="342900"/>
+          </a:xfrm>
+          <a:prstGeom prst="rect">
+            <a:avLst/>
+          </a:prstGeom>
+          <a:solidFill>
+            <a:srgbClr val="FFFFFF"/>
+          </a:solidFill>
+          <a:ln w="0">
+            <a:noFill/>
+          </a:ln>
+        </p:spPr>
+      </p:sp>
+      <p:sp>
+        <p:nvSpPr>
+          <p:cNvPr id="99" name="DSPIRA 3"/>
+          <p:cNvSpPr>
+            <a:spLocks noGrp="1"/>
+          </p:cNvSpPr>
+          <p:nvPr/>
+        </p:nvSpPr>
+        <p:spPr>
+          <a:xfrm>
+            <a:off x="228600" y="76200"/>
+            <a:ext cx="4762500" cy="228600"/>
+          </a:xfrm>
+          <a:prstGeom prst="rect">
+            <a:avLst/>
+          </a:prstGeom>
+          <a:noFill/>
+          <a:ln w="0">
+            <a:noFill/>
+          </a:ln>
+        </p:spPr>
+        <p:txBody>
+          <a:bodyPr>
+            <a:noAutofit/>
+          </a:bodyPr>
+          <a:lstStyle/>
+          <a:p>
+            <a:pPr>
+              <a:defRPr sz="1200" b="1">
+                <a:solidFill>
+                  <a:srgbClr val="002855"/>
+                </a:solidFill>
+                <a:latin typeface="Arial"/>
+                <a:ea typeface="Arial"/>
+                <a:cs typeface="Arial"/>
+              </a:defRPr>
+            </a:pPr>
+            <a:r>
+              <a:rPr sz="1200" b="1">
+                <a:solidFill>
+                  <a:srgbClr val="002855"/>
+                </a:solidFill>
+                <a:latin typeface="Arial"/>
+                <a:ea typeface="Arial"/>
+                <a:cs typeface="Arial"/>
+              </a:rPr>
+              <a:t>WVU DSPIRA</a:t>
+            </a:r>
+          </a:p>
+        </p:txBody>
+      </p:sp>
+      <p:sp>
+        <p:nvSpPr>
+          <p:cNvPr id="100" name="DSPIRA 4"/>
+          <p:cNvSpPr>
+            <a:spLocks noGrp="1"/>
+          </p:cNvSpPr>
+          <p:nvPr/>
+        </p:nvSpPr>
+        <p:spPr>
+          <a:xfrm>
+            <a:off x="228600" y="7978775"/>
+            <a:ext cx="6667500" cy="228600"/>
+          </a:xfrm>
+          <a:prstGeom prst="rect">
+            <a:avLst/>
+          </a:prstGeom>
+          <a:noFill/>
+          <a:ln w="0">
+            <a:noFill/>
+          </a:ln>
+        </p:spPr>
+        <p:txBody>
+          <a:bodyPr>
+            <a:noAutofit/>
+          </a:bodyPr>
+          <a:lstStyle/>
+          <a:p>
+            <a:pPr>
+              <a:defRPr sz="900" b="0">
+                <a:solidFill>
+                  <a:srgbClr val="002855"/>
+                </a:solidFill>
+                <a:latin typeface="Arial"/>
+                <a:ea typeface="Arial"/>
+                <a:cs typeface="Arial"/>
+              </a:defRPr>
+            </a:pPr>
+            <a:r>
+              <a:rPr sz="900" b="0">
+                <a:solidFill>
+                  <a:srgbClr val="002855"/>
+                </a:solidFill>
+                <a:latin typeface="Arial"/>
+                <a:ea typeface="Arial"/>
+                <a:cs typeface="Arial"/>
+              </a:rPr>
+              <a:t>wvurail.org/dspira</a:t>
+            </a:r>
+          </a:p>
+        </p:txBody>
+      </p:sp>
+      <p:sp>
+        <p:nvSpPr>
+          <p:cNvPr id="101" name="DSPIRA 5"/>
+          <p:cNvSpPr>
+            <a:spLocks noGrp="1"/>
+          </p:cNvSpPr>
+          <p:nvPr/>
+        </p:nvSpPr>
+        <p:spPr>
+          <a:xfrm>
+            <a:off x="9080500" y="7978775"/>
+            <a:ext cx="762000" cy="228600"/>
+          </a:xfrm>
+          <a:prstGeom prst="rect">
+            <a:avLst/>
+          </a:prstGeom>
+          <a:noFill/>
+          <a:ln w="0">
+            <a:noFill/>
+          </a:ln>
+        </p:spPr>
+        <p:txBody>
+          <a:bodyPr>
+            <a:noAutofit/>
+          </a:bodyPr>
+          <a:lstStyle/>
+          <a:p>
+            <a:pPr>
+              <a:defRPr sz="900" b="0">
+                <a:solidFill>
+                  <a:srgbClr val="002855"/>
+                </a:solidFill>
+                <a:latin typeface="Arial"/>
+                <a:ea typeface="Arial"/>
+                <a:cs typeface="Arial"/>
+              </a:defRPr>
+            </a:pPr>
+            <a:r>
+              <a:rPr sz="900" b="0">
+                <a:solidFill>
+                  <a:srgbClr val="002855"/>
+                </a:solidFill>
+                <a:latin typeface="Arial"/>
+                <a:ea typeface="Arial"/>
+                <a:cs typeface="Arial"/>
+              </a:rPr>
+              <a:t>6 of 19</a:t>
+            </a:r>
           </a:p>
         </p:txBody>
       </p:sp>
@@ -12655,7 +15691,7 @@
         </p:nvSpPr>
         <p:spPr>
           <a:xfrm>
-            <a:off x="504000" y="301320"/>
+            <a:off x="504000" y="644220"/>
             <a:ext cx="9071700" cy="1262100"/>
           </a:xfrm>
           <a:prstGeom prst="rect">
@@ -12678,10 +15714,10 @@
               <a:buNone/>
             </a:pPr>
             <a:r>
-              <a:rPr lang="en-US" sz="3800"/>
+              <a:rPr lang="en-US" sz="3040"/>
               <a:t>Pointed Observations</a:t>
             </a:r>
-            <a:endParaRPr sz="3800"/>
+            <a:endParaRPr sz="3040"/>
           </a:p>
         </p:txBody>
       </p:sp>
@@ -12695,7 +15731,7 @@
         </p:nvSpPr>
         <p:spPr>
           <a:xfrm>
-            <a:off x="504000" y="1769040"/>
+            <a:off x="504000" y="2111940"/>
             <a:ext cx="9071700" cy="4384500"/>
           </a:xfrm>
           <a:prstGeom prst="rect">
@@ -12883,7 +15919,7 @@
                 <a:solidFill>
                   <a:schemeClr val="hlink"/>
                 </a:solidFill>
-                <a:latin typeface="Calibri"/>
+                <a:latin typeface="Arial"/>
                 <a:ea typeface="Calibri"/>
                 <a:cs typeface="Calibri"/>
                 <a:sym typeface="Calibri"/>
@@ -12992,6 +16028,207 @@
               <a:t> (0.63 sin(Dec) + 0.78 cos(Dec))</a:t>
             </a:r>
             <a:endParaRPr/>
+          </a:p>
+        </p:txBody>
+      </p:sp>
+      <p:sp>
+        <p:nvSpPr>
+          <p:cNvPr id="103" name="DSPIRA 1"/>
+          <p:cNvSpPr>
+            <a:spLocks noGrp="1"/>
+          </p:cNvSpPr>
+          <p:nvPr/>
+        </p:nvSpPr>
+        <p:spPr>
+          <a:xfrm>
+            <a:off x="0" y="0"/>
+            <a:ext cx="10080625" cy="342900"/>
+          </a:xfrm>
+          <a:prstGeom prst="rect">
+            <a:avLst/>
+          </a:prstGeom>
+          <a:solidFill>
+            <a:srgbClr val="FFFFFF"/>
+          </a:solidFill>
+          <a:ln w="0">
+            <a:noFill/>
+          </a:ln>
+        </p:spPr>
+      </p:sp>
+      <p:sp>
+        <p:nvSpPr>
+          <p:cNvPr id="104" name="DSPIRA 2"/>
+          <p:cNvSpPr>
+            <a:spLocks noGrp="1"/>
+          </p:cNvSpPr>
+          <p:nvPr/>
+        </p:nvSpPr>
+        <p:spPr>
+          <a:xfrm>
+            <a:off x="0" y="7902575"/>
+            <a:ext cx="10080625" cy="342900"/>
+          </a:xfrm>
+          <a:prstGeom prst="rect">
+            <a:avLst/>
+          </a:prstGeom>
+          <a:solidFill>
+            <a:srgbClr val="FFFFFF"/>
+          </a:solidFill>
+          <a:ln w="0">
+            <a:noFill/>
+          </a:ln>
+        </p:spPr>
+      </p:sp>
+      <p:sp>
+        <p:nvSpPr>
+          <p:cNvPr id="105" name="DSPIRA 3"/>
+          <p:cNvSpPr>
+            <a:spLocks noGrp="1"/>
+          </p:cNvSpPr>
+          <p:nvPr/>
+        </p:nvSpPr>
+        <p:spPr>
+          <a:xfrm>
+            <a:off x="228600" y="76200"/>
+            <a:ext cx="4762500" cy="228600"/>
+          </a:xfrm>
+          <a:prstGeom prst="rect">
+            <a:avLst/>
+          </a:prstGeom>
+          <a:noFill/>
+          <a:ln w="0">
+            <a:noFill/>
+          </a:ln>
+        </p:spPr>
+        <p:txBody>
+          <a:bodyPr>
+            <a:noAutofit/>
+          </a:bodyPr>
+          <a:lstStyle/>
+          <a:p>
+            <a:pPr>
+              <a:defRPr sz="1200" b="1">
+                <a:solidFill>
+                  <a:srgbClr val="002855"/>
+                </a:solidFill>
+                <a:latin typeface="Arial"/>
+                <a:ea typeface="Arial"/>
+                <a:cs typeface="Arial"/>
+              </a:defRPr>
+            </a:pPr>
+            <a:r>
+              <a:rPr sz="1200" b="1">
+                <a:solidFill>
+                  <a:srgbClr val="002855"/>
+                </a:solidFill>
+                <a:latin typeface="Arial"/>
+                <a:ea typeface="Arial"/>
+                <a:cs typeface="Arial"/>
+              </a:rPr>
+              <a:t>WVU DSPIRA</a:t>
+            </a:r>
+          </a:p>
+        </p:txBody>
+      </p:sp>
+      <p:sp>
+        <p:nvSpPr>
+          <p:cNvPr id="106" name="DSPIRA 4"/>
+          <p:cNvSpPr>
+            <a:spLocks noGrp="1"/>
+          </p:cNvSpPr>
+          <p:nvPr/>
+        </p:nvSpPr>
+        <p:spPr>
+          <a:xfrm>
+            <a:off x="228600" y="7978775"/>
+            <a:ext cx="6667500" cy="228600"/>
+          </a:xfrm>
+          <a:prstGeom prst="rect">
+            <a:avLst/>
+          </a:prstGeom>
+          <a:noFill/>
+          <a:ln w="0">
+            <a:noFill/>
+          </a:ln>
+        </p:spPr>
+        <p:txBody>
+          <a:bodyPr>
+            <a:noAutofit/>
+          </a:bodyPr>
+          <a:lstStyle/>
+          <a:p>
+            <a:pPr>
+              <a:defRPr sz="900" b="0">
+                <a:solidFill>
+                  <a:srgbClr val="002855"/>
+                </a:solidFill>
+                <a:latin typeface="Arial"/>
+                <a:ea typeface="Arial"/>
+                <a:cs typeface="Arial"/>
+              </a:defRPr>
+            </a:pPr>
+            <a:r>
+              <a:rPr sz="900" b="0">
+                <a:solidFill>
+                  <a:srgbClr val="002855"/>
+                </a:solidFill>
+                <a:latin typeface="Arial"/>
+                <a:ea typeface="Arial"/>
+                <a:cs typeface="Arial"/>
+              </a:rPr>
+              <a:t>wvurail.org/dspira</a:t>
+            </a:r>
+          </a:p>
+        </p:txBody>
+      </p:sp>
+      <p:sp>
+        <p:nvSpPr>
+          <p:cNvPr id="107" name="DSPIRA 5"/>
+          <p:cNvSpPr>
+            <a:spLocks noGrp="1"/>
+          </p:cNvSpPr>
+          <p:nvPr/>
+        </p:nvSpPr>
+        <p:spPr>
+          <a:xfrm>
+            <a:off x="9080500" y="7978775"/>
+            <a:ext cx="762000" cy="228600"/>
+          </a:xfrm>
+          <a:prstGeom prst="rect">
+            <a:avLst/>
+          </a:prstGeom>
+          <a:noFill/>
+          <a:ln w="0">
+            <a:noFill/>
+          </a:ln>
+        </p:spPr>
+        <p:txBody>
+          <a:bodyPr>
+            <a:noAutofit/>
+          </a:bodyPr>
+          <a:lstStyle/>
+          <a:p>
+            <a:pPr>
+              <a:defRPr sz="900" b="0">
+                <a:solidFill>
+                  <a:srgbClr val="002855"/>
+                </a:solidFill>
+                <a:latin typeface="Arial"/>
+                <a:ea typeface="Arial"/>
+                <a:cs typeface="Arial"/>
+              </a:defRPr>
+            </a:pPr>
+            <a:r>
+              <a:rPr sz="900" b="0">
+                <a:solidFill>
+                  <a:srgbClr val="002855"/>
+                </a:solidFill>
+                <a:latin typeface="Arial"/>
+                <a:ea typeface="Arial"/>
+                <a:cs typeface="Arial"/>
+              </a:rPr>
+              <a:t>7 of 19</a:t>
+            </a:r>
           </a:p>
         </p:txBody>
       </p:sp>
@@ -13030,7 +16267,7 @@
         </p:nvSpPr>
         <p:spPr>
           <a:xfrm>
-            <a:off x="504000" y="301320"/>
+            <a:off x="504000" y="644220"/>
             <a:ext cx="9071700" cy="1262100"/>
           </a:xfrm>
           <a:prstGeom prst="rect">
@@ -13053,10 +16290,10 @@
               <a:buNone/>
             </a:pPr>
             <a:r>
-              <a:rPr lang="en-US" sz="3800"/>
+              <a:rPr lang="en-US" sz="3040"/>
               <a:t>Turning into Velocities</a:t>
             </a:r>
-            <a:endParaRPr sz="3800"/>
+            <a:endParaRPr sz="3040"/>
           </a:p>
         </p:txBody>
       </p:sp>
@@ -13070,7 +16307,7 @@
         </p:nvSpPr>
         <p:spPr>
           <a:xfrm>
-            <a:off x="504000" y="1769040"/>
+            <a:off x="504000" y="2111940"/>
             <a:ext cx="9071700" cy="4384500"/>
           </a:xfrm>
           <a:prstGeom prst="rect">
@@ -13114,11 +16351,11 @@
               <a:buNone/>
             </a:pPr>
             <a:r>
-              <a:rPr lang="en-US" sz="2400">
+              <a:rPr lang="en-US" sz="1920">
                 <a:solidFill>
                   <a:schemeClr val="dk1"/>
                 </a:solidFill>
-                <a:latin typeface="Times New Roman"/>
+                <a:latin typeface="Arial"/>
                 <a:ea typeface="Times New Roman"/>
                 <a:cs typeface="Times New Roman"/>
                 <a:sym typeface="Times New Roman"/>
@@ -13126,11 +16363,11 @@
               <a:t>v = (ν</a:t>
             </a:r>
             <a:r>
-              <a:rPr baseline="-25000" lang="en-US" sz="2400">
+              <a:rPr baseline="-25000" lang="en-US" sz="1920">
                 <a:solidFill>
                   <a:schemeClr val="dk1"/>
                 </a:solidFill>
-                <a:latin typeface="Times New Roman"/>
+                <a:latin typeface="Arial"/>
                 <a:ea typeface="Times New Roman"/>
                 <a:cs typeface="Times New Roman"/>
                 <a:sym typeface="Times New Roman"/>
@@ -13138,11 +16375,11 @@
               <a:t>0</a:t>
             </a:r>
             <a:r>
-              <a:rPr baseline="30000" lang="en-US" sz="2400">
+              <a:rPr baseline="30000" lang="en-US" sz="1920">
                 <a:solidFill>
                   <a:schemeClr val="dk1"/>
                 </a:solidFill>
-                <a:latin typeface="Times New Roman"/>
+                <a:latin typeface="Arial"/>
                 <a:ea typeface="Times New Roman"/>
                 <a:cs typeface="Times New Roman"/>
                 <a:sym typeface="Times New Roman"/>
@@ -13150,11 +16387,11 @@
               <a:t>  </a:t>
             </a:r>
             <a:r>
-              <a:rPr lang="en-US" sz="2400">
+              <a:rPr lang="en-US" sz="1920">
                 <a:solidFill>
                   <a:schemeClr val="dk1"/>
                 </a:solidFill>
-                <a:latin typeface="Times New Roman"/>
+                <a:latin typeface="Arial"/>
                 <a:ea typeface="Times New Roman"/>
                 <a:cs typeface="Times New Roman"/>
                 <a:sym typeface="Times New Roman"/>
@@ -13162,11 +16399,11 @@
               <a:t>- ν)c/ν</a:t>
             </a:r>
             <a:r>
-              <a:rPr baseline="-25000" lang="en-US" sz="2400">
+              <a:rPr baseline="-25000" lang="en-US" sz="1920">
                 <a:solidFill>
                   <a:schemeClr val="dk1"/>
                 </a:solidFill>
-                <a:latin typeface="Times New Roman"/>
+                <a:latin typeface="Arial"/>
                 <a:ea typeface="Times New Roman"/>
                 <a:cs typeface="Times New Roman"/>
                 <a:sym typeface="Times New Roman"/>
@@ -13174,11 +16411,11 @@
               <a:t>0</a:t>
             </a:r>
             <a:r>
-              <a:rPr lang="en-US" sz="2400">
+              <a:rPr lang="en-US" sz="1920">
                 <a:solidFill>
                   <a:schemeClr val="dk1"/>
                 </a:solidFill>
-                <a:latin typeface="Times New Roman"/>
+                <a:latin typeface="Arial"/>
                 <a:ea typeface="Times New Roman"/>
                 <a:cs typeface="Times New Roman"/>
                 <a:sym typeface="Times New Roman"/>
@@ -13186,11 +16423,11 @@
               <a:t> = Δνc/ν</a:t>
             </a:r>
             <a:r>
-              <a:rPr baseline="-25000" lang="en-US" sz="2400">
+              <a:rPr baseline="-25000" lang="en-US" sz="1920">
                 <a:solidFill>
                   <a:schemeClr val="dk1"/>
                 </a:solidFill>
-                <a:latin typeface="Times New Roman"/>
+                <a:latin typeface="Arial"/>
                 <a:ea typeface="Times New Roman"/>
                 <a:cs typeface="Times New Roman"/>
                 <a:sym typeface="Times New Roman"/>
@@ -13216,7 +16453,7 @@
         </p:blipFill>
         <p:spPr>
           <a:xfrm>
-            <a:off x="2065022" y="2986303"/>
+            <a:off x="2065022" y="3329203"/>
             <a:ext cx="5543850" cy="4126925"/>
           </a:xfrm>
           <a:prstGeom prst="rect">
@@ -13236,7 +16473,7 @@
         </p:nvCxnSpPr>
         <p:spPr>
           <a:xfrm>
-            <a:off x="5371625" y="3205475"/>
+            <a:off x="5371625" y="3548375"/>
             <a:ext cx="11100" cy="2964900"/>
           </a:xfrm>
           <a:prstGeom prst="straightConnector1">
@@ -13254,6 +16491,207 @@
           </a:ln>
         </p:spPr>
       </p:cxnSp>
+      <p:sp>
+        <p:nvSpPr>
+          <p:cNvPr id="111" name="DSPIRA 1"/>
+          <p:cNvSpPr>
+            <a:spLocks noGrp="1"/>
+          </p:cNvSpPr>
+          <p:nvPr/>
+        </p:nvSpPr>
+        <p:spPr>
+          <a:xfrm>
+            <a:off x="0" y="0"/>
+            <a:ext cx="10080625" cy="342900"/>
+          </a:xfrm>
+          <a:prstGeom prst="rect">
+            <a:avLst/>
+          </a:prstGeom>
+          <a:solidFill>
+            <a:srgbClr val="FFFFFF"/>
+          </a:solidFill>
+          <a:ln w="0">
+            <a:noFill/>
+          </a:ln>
+        </p:spPr>
+      </p:sp>
+      <p:sp>
+        <p:nvSpPr>
+          <p:cNvPr id="112" name="DSPIRA 2"/>
+          <p:cNvSpPr>
+            <a:spLocks noGrp="1"/>
+          </p:cNvSpPr>
+          <p:nvPr/>
+        </p:nvSpPr>
+        <p:spPr>
+          <a:xfrm>
+            <a:off x="0" y="7902575"/>
+            <a:ext cx="10080625" cy="342900"/>
+          </a:xfrm>
+          <a:prstGeom prst="rect">
+            <a:avLst/>
+          </a:prstGeom>
+          <a:solidFill>
+            <a:srgbClr val="FFFFFF"/>
+          </a:solidFill>
+          <a:ln w="0">
+            <a:noFill/>
+          </a:ln>
+        </p:spPr>
+      </p:sp>
+      <p:sp>
+        <p:nvSpPr>
+          <p:cNvPr id="113" name="DSPIRA 3"/>
+          <p:cNvSpPr>
+            <a:spLocks noGrp="1"/>
+          </p:cNvSpPr>
+          <p:nvPr/>
+        </p:nvSpPr>
+        <p:spPr>
+          <a:xfrm>
+            <a:off x="228600" y="76200"/>
+            <a:ext cx="4762500" cy="228600"/>
+          </a:xfrm>
+          <a:prstGeom prst="rect">
+            <a:avLst/>
+          </a:prstGeom>
+          <a:noFill/>
+          <a:ln w="0">
+            <a:noFill/>
+          </a:ln>
+        </p:spPr>
+        <p:txBody>
+          <a:bodyPr>
+            <a:noAutofit/>
+          </a:bodyPr>
+          <a:lstStyle/>
+          <a:p>
+            <a:pPr>
+              <a:defRPr sz="1200" b="1">
+                <a:solidFill>
+                  <a:srgbClr val="002855"/>
+                </a:solidFill>
+                <a:latin typeface="Arial"/>
+                <a:ea typeface="Arial"/>
+                <a:cs typeface="Arial"/>
+              </a:defRPr>
+            </a:pPr>
+            <a:r>
+              <a:rPr sz="1200" b="1">
+                <a:solidFill>
+                  <a:srgbClr val="002855"/>
+                </a:solidFill>
+                <a:latin typeface="Arial"/>
+                <a:ea typeface="Arial"/>
+                <a:cs typeface="Arial"/>
+              </a:rPr>
+              <a:t>WVU DSPIRA</a:t>
+            </a:r>
+          </a:p>
+        </p:txBody>
+      </p:sp>
+      <p:sp>
+        <p:nvSpPr>
+          <p:cNvPr id="114" name="DSPIRA 4"/>
+          <p:cNvSpPr>
+            <a:spLocks noGrp="1"/>
+          </p:cNvSpPr>
+          <p:nvPr/>
+        </p:nvSpPr>
+        <p:spPr>
+          <a:xfrm>
+            <a:off x="228600" y="7978775"/>
+            <a:ext cx="6667500" cy="228600"/>
+          </a:xfrm>
+          <a:prstGeom prst="rect">
+            <a:avLst/>
+          </a:prstGeom>
+          <a:noFill/>
+          <a:ln w="0">
+            <a:noFill/>
+          </a:ln>
+        </p:spPr>
+        <p:txBody>
+          <a:bodyPr>
+            <a:noAutofit/>
+          </a:bodyPr>
+          <a:lstStyle/>
+          <a:p>
+            <a:pPr>
+              <a:defRPr sz="900" b="0">
+                <a:solidFill>
+                  <a:srgbClr val="002855"/>
+                </a:solidFill>
+                <a:latin typeface="Arial"/>
+                <a:ea typeface="Arial"/>
+                <a:cs typeface="Arial"/>
+              </a:defRPr>
+            </a:pPr>
+            <a:r>
+              <a:rPr sz="900" b="0">
+                <a:solidFill>
+                  <a:srgbClr val="002855"/>
+                </a:solidFill>
+                <a:latin typeface="Arial"/>
+                <a:ea typeface="Arial"/>
+                <a:cs typeface="Arial"/>
+              </a:rPr>
+              <a:t>wvurail.org/dspira</a:t>
+            </a:r>
+          </a:p>
+        </p:txBody>
+      </p:sp>
+      <p:sp>
+        <p:nvSpPr>
+          <p:cNvPr id="115" name="DSPIRA 5"/>
+          <p:cNvSpPr>
+            <a:spLocks noGrp="1"/>
+          </p:cNvSpPr>
+          <p:nvPr/>
+        </p:nvSpPr>
+        <p:spPr>
+          <a:xfrm>
+            <a:off x="9080500" y="7978775"/>
+            <a:ext cx="762000" cy="228600"/>
+          </a:xfrm>
+          <a:prstGeom prst="rect">
+            <a:avLst/>
+          </a:prstGeom>
+          <a:noFill/>
+          <a:ln w="0">
+            <a:noFill/>
+          </a:ln>
+        </p:spPr>
+        <p:txBody>
+          <a:bodyPr>
+            <a:noAutofit/>
+          </a:bodyPr>
+          <a:lstStyle/>
+          <a:p>
+            <a:pPr>
+              <a:defRPr sz="900" b="0">
+                <a:solidFill>
+                  <a:srgbClr val="002855"/>
+                </a:solidFill>
+                <a:latin typeface="Arial"/>
+                <a:ea typeface="Arial"/>
+                <a:cs typeface="Arial"/>
+              </a:defRPr>
+            </a:pPr>
+            <a:r>
+              <a:rPr sz="900" b="0">
+                <a:solidFill>
+                  <a:srgbClr val="002855"/>
+                </a:solidFill>
+                <a:latin typeface="Arial"/>
+                <a:ea typeface="Arial"/>
+                <a:cs typeface="Arial"/>
+              </a:rPr>
+              <a:t>8 of 19</a:t>
+            </a:r>
+          </a:p>
+        </p:txBody>
+      </p:sp>
     </p:spTree>
   </p:cSld>
   <p:clrMapOvr>
@@ -13289,7 +16727,7 @@
         </p:nvSpPr>
         <p:spPr>
           <a:xfrm>
-            <a:off x="504000" y="301320"/>
+            <a:off x="504000" y="644220"/>
             <a:ext cx="9071700" cy="1262100"/>
           </a:xfrm>
           <a:prstGeom prst="rect">
@@ -13312,10 +16750,10 @@
               <a:buNone/>
             </a:pPr>
             <a:r>
-              <a:rPr lang="en-US" sz="3800"/>
+              <a:rPr lang="en-US" sz="3040"/>
               <a:t>Turning into Velocities</a:t>
             </a:r>
-            <a:endParaRPr sz="3800"/>
+            <a:endParaRPr sz="3040"/>
           </a:p>
         </p:txBody>
       </p:sp>
@@ -13329,7 +16767,7 @@
         </p:nvSpPr>
         <p:spPr>
           <a:xfrm>
-            <a:off x="504000" y="1769040"/>
+            <a:off x="504000" y="2111940"/>
             <a:ext cx="9071700" cy="4384500"/>
           </a:xfrm>
           <a:prstGeom prst="rect">
@@ -13352,7 +16790,7 @@
               <a:buNone/>
             </a:pPr>
             <a:r>
-              <a:rPr lang="en-US" sz="2400">
+              <a:rPr lang="en-US" sz="1920">
                 <a:solidFill>
                   <a:schemeClr val="dk1"/>
                 </a:solidFill>
@@ -13378,7 +16816,7 @@
         </p:blipFill>
         <p:spPr>
           <a:xfrm>
-            <a:off x="2065022" y="2986303"/>
+            <a:off x="2065022" y="3329203"/>
             <a:ext cx="5543850" cy="4126925"/>
           </a:xfrm>
           <a:prstGeom prst="rect">
@@ -13398,7 +16836,7 @@
         </p:nvCxnSpPr>
         <p:spPr>
           <a:xfrm>
-            <a:off x="5371625" y="3205475"/>
+            <a:off x="5371625" y="3548375"/>
             <a:ext cx="11100" cy="2964900"/>
           </a:xfrm>
           <a:prstGeom prst="straightConnector1">
@@ -13416,6 +16854,207 @@
           </a:ln>
         </p:spPr>
       </p:cxnSp>
+      <p:sp>
+        <p:nvSpPr>
+          <p:cNvPr id="119" name="DSPIRA 1"/>
+          <p:cNvSpPr>
+            <a:spLocks noGrp="1"/>
+          </p:cNvSpPr>
+          <p:nvPr/>
+        </p:nvSpPr>
+        <p:spPr>
+          <a:xfrm>
+            <a:off x="0" y="0"/>
+            <a:ext cx="10080625" cy="342900"/>
+          </a:xfrm>
+          <a:prstGeom prst="rect">
+            <a:avLst/>
+          </a:prstGeom>
+          <a:solidFill>
+            <a:srgbClr val="FFFFFF"/>
+          </a:solidFill>
+          <a:ln w="0">
+            <a:noFill/>
+          </a:ln>
+        </p:spPr>
+      </p:sp>
+      <p:sp>
+        <p:nvSpPr>
+          <p:cNvPr id="120" name="DSPIRA 2"/>
+          <p:cNvSpPr>
+            <a:spLocks noGrp="1"/>
+          </p:cNvSpPr>
+          <p:nvPr/>
+        </p:nvSpPr>
+        <p:spPr>
+          <a:xfrm>
+            <a:off x="0" y="7902575"/>
+            <a:ext cx="10080625" cy="342900"/>
+          </a:xfrm>
+          <a:prstGeom prst="rect">
+            <a:avLst/>
+          </a:prstGeom>
+          <a:solidFill>
+            <a:srgbClr val="FFFFFF"/>
+          </a:solidFill>
+          <a:ln w="0">
+            <a:noFill/>
+          </a:ln>
+        </p:spPr>
+      </p:sp>
+      <p:sp>
+        <p:nvSpPr>
+          <p:cNvPr id="121" name="DSPIRA 3"/>
+          <p:cNvSpPr>
+            <a:spLocks noGrp="1"/>
+          </p:cNvSpPr>
+          <p:nvPr/>
+        </p:nvSpPr>
+        <p:spPr>
+          <a:xfrm>
+            <a:off x="228600" y="76200"/>
+            <a:ext cx="4762500" cy="228600"/>
+          </a:xfrm>
+          <a:prstGeom prst="rect">
+            <a:avLst/>
+          </a:prstGeom>
+          <a:noFill/>
+          <a:ln w="0">
+            <a:noFill/>
+          </a:ln>
+        </p:spPr>
+        <p:txBody>
+          <a:bodyPr>
+            <a:noAutofit/>
+          </a:bodyPr>
+          <a:lstStyle/>
+          <a:p>
+            <a:pPr>
+              <a:defRPr sz="1200" b="1">
+                <a:solidFill>
+                  <a:srgbClr val="002855"/>
+                </a:solidFill>
+                <a:latin typeface="Arial"/>
+                <a:ea typeface="Arial"/>
+                <a:cs typeface="Arial"/>
+              </a:defRPr>
+            </a:pPr>
+            <a:r>
+              <a:rPr sz="1200" b="1">
+                <a:solidFill>
+                  <a:srgbClr val="002855"/>
+                </a:solidFill>
+                <a:latin typeface="Arial"/>
+                <a:ea typeface="Arial"/>
+                <a:cs typeface="Arial"/>
+              </a:rPr>
+              <a:t>WVU DSPIRA</a:t>
+            </a:r>
+          </a:p>
+        </p:txBody>
+      </p:sp>
+      <p:sp>
+        <p:nvSpPr>
+          <p:cNvPr id="122" name="DSPIRA 4"/>
+          <p:cNvSpPr>
+            <a:spLocks noGrp="1"/>
+          </p:cNvSpPr>
+          <p:nvPr/>
+        </p:nvSpPr>
+        <p:spPr>
+          <a:xfrm>
+            <a:off x="228600" y="7978775"/>
+            <a:ext cx="6667500" cy="228600"/>
+          </a:xfrm>
+          <a:prstGeom prst="rect">
+            <a:avLst/>
+          </a:prstGeom>
+          <a:noFill/>
+          <a:ln w="0">
+            <a:noFill/>
+          </a:ln>
+        </p:spPr>
+        <p:txBody>
+          <a:bodyPr>
+            <a:noAutofit/>
+          </a:bodyPr>
+          <a:lstStyle/>
+          <a:p>
+            <a:pPr>
+              <a:defRPr sz="900" b="0">
+                <a:solidFill>
+                  <a:srgbClr val="002855"/>
+                </a:solidFill>
+                <a:latin typeface="Arial"/>
+                <a:ea typeface="Arial"/>
+                <a:cs typeface="Arial"/>
+              </a:defRPr>
+            </a:pPr>
+            <a:r>
+              <a:rPr sz="900" b="0">
+                <a:solidFill>
+                  <a:srgbClr val="002855"/>
+                </a:solidFill>
+                <a:latin typeface="Arial"/>
+                <a:ea typeface="Arial"/>
+                <a:cs typeface="Arial"/>
+              </a:rPr>
+              <a:t>wvurail.org/dspira</a:t>
+            </a:r>
+          </a:p>
+        </p:txBody>
+      </p:sp>
+      <p:sp>
+        <p:nvSpPr>
+          <p:cNvPr id="123" name="DSPIRA 5"/>
+          <p:cNvSpPr>
+            <a:spLocks noGrp="1"/>
+          </p:cNvSpPr>
+          <p:nvPr/>
+        </p:nvSpPr>
+        <p:spPr>
+          <a:xfrm>
+            <a:off x="9080500" y="7978775"/>
+            <a:ext cx="762000" cy="228600"/>
+          </a:xfrm>
+          <a:prstGeom prst="rect">
+            <a:avLst/>
+          </a:prstGeom>
+          <a:noFill/>
+          <a:ln w="0">
+            <a:noFill/>
+          </a:ln>
+        </p:spPr>
+        <p:txBody>
+          <a:bodyPr>
+            <a:noAutofit/>
+          </a:bodyPr>
+          <a:lstStyle/>
+          <a:p>
+            <a:pPr>
+              <a:defRPr sz="900" b="0">
+                <a:solidFill>
+                  <a:srgbClr val="002855"/>
+                </a:solidFill>
+                <a:latin typeface="Arial"/>
+                <a:ea typeface="Arial"/>
+                <a:cs typeface="Arial"/>
+              </a:defRPr>
+            </a:pPr>
+            <a:r>
+              <a:rPr sz="900" b="0">
+                <a:solidFill>
+                  <a:srgbClr val="002855"/>
+                </a:solidFill>
+                <a:latin typeface="Arial"/>
+                <a:ea typeface="Arial"/>
+                <a:cs typeface="Arial"/>
+              </a:rPr>
+              <a:t>9 of 19</a:t>
+            </a:r>
+          </a:p>
+        </p:txBody>
+      </p:sp>
     </p:spTree>
   </p:cSld>
   <p:clrMapOvr>

--- a/assets/lessons/lectures/astronomy/your-observations-2018.pptx
+++ b/assets/lessons/lectures/astronomy/your-observations-2018.pptx
@@ -8284,30 +8284,6 @@
       </p:sp>
       <p:sp>
         <p:nvSpPr>
-          <p:cNvPr id="63" name="DSPIRA 1"/>
-          <p:cNvSpPr>
-            <a:spLocks noGrp="1"/>
-          </p:cNvSpPr>
-          <p:nvPr/>
-        </p:nvSpPr>
-        <p:spPr>
-          <a:xfrm>
-            <a:off x="0" y="0"/>
-            <a:ext cx="10080625" cy="342900"/>
-          </a:xfrm>
-          <a:prstGeom prst="rect">
-            <a:avLst/>
-          </a:prstGeom>
-          <a:solidFill>
-            <a:srgbClr val="FFFFFF"/>
-          </a:solidFill>
-          <a:ln w="0">
-            <a:noFill/>
-          </a:ln>
-        </p:spPr>
-      </p:sp>
-      <p:sp>
-        <p:nvSpPr>
           <p:cNvPr id="64" name="DSPIRA 2"/>
           <p:cNvSpPr>
             <a:spLocks noGrp="1"/>
@@ -8332,7 +8308,7 @@
       </p:sp>
       <p:sp>
         <p:nvSpPr>
-          <p:cNvPr id="65" name="DSPIRA 3"/>
+          <p:cNvPr id="66" name="DSPIRA 4"/>
           <p:cNvSpPr>
             <a:spLocks noGrp="1"/>
           </p:cNvSpPr>
@@ -8340,8 +8316,8 @@
         </p:nvSpPr>
         <p:spPr>
           <a:xfrm>
-            <a:off x="228600" y="76200"/>
-            <a:ext cx="4762500" cy="228600"/>
+            <a:off x="228600" y="7978775"/>
+            <a:ext cx="6667500" cy="228600"/>
           </a:xfrm>
           <a:prstGeom prst="rect">
             <a:avLst/>
@@ -8358,7 +8334,7 @@
           <a:lstStyle/>
           <a:p>
             <a:pPr>
-              <a:defRPr sz="1200" b="1">
+              <a:defRPr sz="900" b="0">
                 <a:solidFill>
                   <a:srgbClr val="002855"/>
                 </a:solidFill>
@@ -8368,9 +8344,159 @@
               </a:defRPr>
             </a:pPr>
             <a:r>
-              <a:rPr sz="1200" b="1">
+              <a:rPr sz="900" b="0">
                 <a:solidFill>
                   <a:srgbClr val="002855"/>
+                </a:solidFill>
+                <a:latin typeface="Arial"/>
+                <a:ea typeface="Arial"/>
+                <a:cs typeface="Arial"/>
+              </a:rPr>
+              <a:t>wvurail.org/dspira</a:t>
+            </a:r>
+          </a:p>
+        </p:txBody>
+      </p:sp>
+      <p:sp>
+        <p:nvSpPr>
+          <p:cNvPr id="67" name="DSPIRA 5"/>
+          <p:cNvSpPr>
+            <a:spLocks noGrp="1"/>
+          </p:cNvSpPr>
+          <p:nvPr/>
+        </p:nvSpPr>
+        <p:spPr>
+          <a:xfrm>
+            <a:off x="9080500" y="7978775"/>
+            <a:ext cx="762000" cy="228600"/>
+          </a:xfrm>
+          <a:prstGeom prst="rect">
+            <a:avLst/>
+          </a:prstGeom>
+          <a:noFill/>
+          <a:ln w="0">
+            <a:noFill/>
+          </a:ln>
+        </p:spPr>
+        <p:txBody>
+          <a:bodyPr>
+            <a:noAutofit/>
+          </a:bodyPr>
+          <a:lstStyle/>
+          <a:p>
+            <a:pPr>
+              <a:defRPr sz="900" b="0">
+                <a:solidFill>
+                  <a:srgbClr val="002855"/>
+                </a:solidFill>
+                <a:latin typeface="Arial"/>
+                <a:ea typeface="Arial"/>
+                <a:cs typeface="Arial"/>
+              </a:defRPr>
+            </a:pPr>
+            <a:r>
+              <a:rPr sz="900" b="0">
+                <a:solidFill>
+                  <a:srgbClr val="002855"/>
+                </a:solidFill>
+                <a:latin typeface="Arial"/>
+                <a:ea typeface="Arial"/>
+                <a:cs typeface="Arial"/>
+              </a:rPr>
+              <a:t>1 of 19</a:t>
+            </a:r>
+          </a:p>
+        </p:txBody>
+      </p:sp>
+      <p:sp>
+        <p:nvSpPr>
+          <p:cNvPr id="68" name="WVU DSPIRA navy band"/>
+          <p:cNvSpPr>
+            <a:spLocks noGrp="1"/>
+          </p:cNvSpPr>
+          <p:nvPr/>
+        </p:nvSpPr>
+        <p:spPr>
+          <a:xfrm>
+            <a:off x="0" y="0"/>
+            <a:ext cx="10080625" cy="323850"/>
+          </a:xfrm>
+          <a:prstGeom prst="rect">
+            <a:avLst/>
+          </a:prstGeom>
+          <a:solidFill>
+            <a:srgbClr val="002855"/>
+          </a:solidFill>
+          <a:ln w="0">
+            <a:noFill/>
+          </a:ln>
+        </p:spPr>
+      </p:sp>
+      <p:sp>
+        <p:nvSpPr>
+          <p:cNvPr id="69" name="WVU DSPIRA gold rule"/>
+          <p:cNvSpPr>
+            <a:spLocks noGrp="1"/>
+          </p:cNvSpPr>
+          <p:nvPr/>
+        </p:nvSpPr>
+        <p:spPr>
+          <a:xfrm>
+            <a:off x="0" y="323850"/>
+            <a:ext cx="10080625" cy="19050"/>
+          </a:xfrm>
+          <a:prstGeom prst="rect">
+            <a:avLst/>
+          </a:prstGeom>
+          <a:solidFill>
+            <a:srgbClr val="EEAA00"/>
+          </a:solidFill>
+          <a:ln w="0">
+            <a:noFill/>
+          </a:ln>
+        </p:spPr>
+      </p:sp>
+      <p:sp>
+        <p:nvSpPr>
+          <p:cNvPr id="70" name="WVU DSPIRA name"/>
+          <p:cNvSpPr>
+            <a:spLocks noGrp="1"/>
+          </p:cNvSpPr>
+          <p:nvPr/>
+        </p:nvSpPr>
+        <p:spPr>
+          <a:xfrm>
+            <a:off x="228600" y="19050"/>
+            <a:ext cx="2857500" cy="257175"/>
+          </a:xfrm>
+          <a:prstGeom prst="rect">
+            <a:avLst/>
+          </a:prstGeom>
+          <a:noFill/>
+          <a:ln w="0">
+            <a:noFill/>
+          </a:ln>
+        </p:spPr>
+        <p:txBody>
+          <a:bodyPr>
+            <a:noAutofit/>
+          </a:bodyPr>
+          <a:lstStyle/>
+          <a:p>
+            <a:pPr>
+              <a:defRPr sz="1600" b="1">
+                <a:solidFill>
+                  <a:srgbClr val="FFFFFF"/>
+                </a:solidFill>
+                <a:latin typeface="Arial"/>
+                <a:ea typeface="Arial"/>
+                <a:cs typeface="Arial"/>
+              </a:defRPr>
+            </a:pPr>
+            <a:r>
+              <a:rPr sz="1600" b="1">
+                <a:solidFill>
+                  <a:srgbClr val="FFFFFF"/>
                 </a:solidFill>
                 <a:latin typeface="Arial"/>
                 <a:ea typeface="Arial"/>
@@ -8383,7 +8509,7 @@
       </p:sp>
       <p:sp>
         <p:nvSpPr>
-          <p:cNvPr id="66" name="DSPIRA 4"/>
+          <p:cNvPr id="71" name="WVU DSPIRA university"/>
           <p:cNvSpPr>
             <a:spLocks noGrp="1"/>
           </p:cNvSpPr>
@@ -8391,8 +8517,8 @@
         </p:nvSpPr>
         <p:spPr>
           <a:xfrm>
-            <a:off x="228600" y="7978775"/>
-            <a:ext cx="6667500" cy="228600"/>
+            <a:off x="7223125" y="114300"/>
+            <a:ext cx="2628900" cy="171450"/>
           </a:xfrm>
           <a:prstGeom prst="rect">
             <a:avLst/>
@@ -8408,10 +8534,10 @@
           </a:bodyPr>
           <a:lstStyle/>
           <a:p>
-            <a:pPr>
-              <a:defRPr sz="900" b="0">
-                <a:solidFill>
-                  <a:srgbClr val="002855"/>
+            <a:pPr algn="r">
+              <a:defRPr sz="900">
+                <a:solidFill>
+                  <a:srgbClr val="FFFFFF"/>
                 </a:solidFill>
                 <a:latin typeface="Arial"/>
                 <a:ea typeface="Arial"/>
@@ -8419,66 +8545,15 @@
               </a:defRPr>
             </a:pPr>
             <a:r>
-              <a:rPr sz="900" b="0">
-                <a:solidFill>
-                  <a:srgbClr val="002855"/>
+              <a:rPr sz="900">
+                <a:solidFill>
+                  <a:srgbClr val="FFFFFF"/>
                 </a:solidFill>
                 <a:latin typeface="Arial"/>
                 <a:ea typeface="Arial"/>
                 <a:cs typeface="Arial"/>
               </a:rPr>
-              <a:t>wvurail.org/dspira</a:t>
-            </a:r>
-          </a:p>
-        </p:txBody>
-      </p:sp>
-      <p:sp>
-        <p:nvSpPr>
-          <p:cNvPr id="67" name="DSPIRA 5"/>
-          <p:cNvSpPr>
-            <a:spLocks noGrp="1"/>
-          </p:cNvSpPr>
-          <p:nvPr/>
-        </p:nvSpPr>
-        <p:spPr>
-          <a:xfrm>
-            <a:off x="9080500" y="7978775"/>
-            <a:ext cx="762000" cy="228600"/>
-          </a:xfrm>
-          <a:prstGeom prst="rect">
-            <a:avLst/>
-          </a:prstGeom>
-          <a:noFill/>
-          <a:ln w="0">
-            <a:noFill/>
-          </a:ln>
-        </p:spPr>
-        <p:txBody>
-          <a:bodyPr>
-            <a:noAutofit/>
-          </a:bodyPr>
-          <a:lstStyle/>
-          <a:p>
-            <a:pPr>
-              <a:defRPr sz="900" b="0">
-                <a:solidFill>
-                  <a:srgbClr val="002855"/>
-                </a:solidFill>
-                <a:latin typeface="Arial"/>
-                <a:ea typeface="Arial"/>
-                <a:cs typeface="Arial"/>
-              </a:defRPr>
-            </a:pPr>
-            <a:r>
-              <a:rPr sz="900" b="0">
-                <a:solidFill>
-                  <a:srgbClr val="002855"/>
-                </a:solidFill>
-                <a:latin typeface="Arial"/>
-                <a:ea typeface="Arial"/>
-                <a:cs typeface="Arial"/>
-              </a:rPr>
-              <a:t>1 of 19</a:t>
+              <a:t>WEST VIRGINIA UNIVERSITY</a:t>
             </a:r>
           </a:p>
         </p:txBody>
@@ -8742,30 +8817,6 @@
       </p:sp>
       <p:sp>
         <p:nvSpPr>
-          <p:cNvPr id="129" name="DSPIRA 1"/>
-          <p:cNvSpPr>
-            <a:spLocks noGrp="1"/>
-          </p:cNvSpPr>
-          <p:nvPr/>
-        </p:nvSpPr>
-        <p:spPr>
-          <a:xfrm>
-            <a:off x="0" y="0"/>
-            <a:ext cx="10080625" cy="342900"/>
-          </a:xfrm>
-          <a:prstGeom prst="rect">
-            <a:avLst/>
-          </a:prstGeom>
-          <a:solidFill>
-            <a:srgbClr val="FFFFFF"/>
-          </a:solidFill>
-          <a:ln w="0">
-            <a:noFill/>
-          </a:ln>
-        </p:spPr>
-      </p:sp>
-      <p:sp>
-        <p:nvSpPr>
           <p:cNvPr id="130" name="DSPIRA 2"/>
           <p:cNvSpPr>
             <a:spLocks noGrp="1"/>
@@ -8790,7 +8841,7 @@
       </p:sp>
       <p:sp>
         <p:nvSpPr>
-          <p:cNvPr id="131" name="DSPIRA 3"/>
+          <p:cNvPr id="132" name="DSPIRA 4"/>
           <p:cNvSpPr>
             <a:spLocks noGrp="1"/>
           </p:cNvSpPr>
@@ -8798,8 +8849,8 @@
         </p:nvSpPr>
         <p:spPr>
           <a:xfrm>
-            <a:off x="228600" y="76200"/>
-            <a:ext cx="4762500" cy="228600"/>
+            <a:off x="228600" y="7978775"/>
+            <a:ext cx="6667500" cy="228600"/>
           </a:xfrm>
           <a:prstGeom prst="rect">
             <a:avLst/>
@@ -8816,7 +8867,7 @@
           <a:lstStyle/>
           <a:p>
             <a:pPr>
-              <a:defRPr sz="1200" b="1">
+              <a:defRPr sz="900" b="0">
                 <a:solidFill>
                   <a:srgbClr val="002855"/>
                 </a:solidFill>
@@ -8826,9 +8877,159 @@
               </a:defRPr>
             </a:pPr>
             <a:r>
-              <a:rPr sz="1200" b="1">
+              <a:rPr sz="900" b="0">
                 <a:solidFill>
                   <a:srgbClr val="002855"/>
+                </a:solidFill>
+                <a:latin typeface="Arial"/>
+                <a:ea typeface="Arial"/>
+                <a:cs typeface="Arial"/>
+              </a:rPr>
+              <a:t>wvurail.org/dspira</a:t>
+            </a:r>
+          </a:p>
+        </p:txBody>
+      </p:sp>
+      <p:sp>
+        <p:nvSpPr>
+          <p:cNvPr id="133" name="DSPIRA 5"/>
+          <p:cNvSpPr>
+            <a:spLocks noGrp="1"/>
+          </p:cNvSpPr>
+          <p:nvPr/>
+        </p:nvSpPr>
+        <p:spPr>
+          <a:xfrm>
+            <a:off x="9080500" y="7978775"/>
+            <a:ext cx="762000" cy="228600"/>
+          </a:xfrm>
+          <a:prstGeom prst="rect">
+            <a:avLst/>
+          </a:prstGeom>
+          <a:noFill/>
+          <a:ln w="0">
+            <a:noFill/>
+          </a:ln>
+        </p:spPr>
+        <p:txBody>
+          <a:bodyPr>
+            <a:noAutofit/>
+          </a:bodyPr>
+          <a:lstStyle/>
+          <a:p>
+            <a:pPr>
+              <a:defRPr sz="900" b="0">
+                <a:solidFill>
+                  <a:srgbClr val="002855"/>
+                </a:solidFill>
+                <a:latin typeface="Arial"/>
+                <a:ea typeface="Arial"/>
+                <a:cs typeface="Arial"/>
+              </a:defRPr>
+            </a:pPr>
+            <a:r>
+              <a:rPr sz="900" b="0">
+                <a:solidFill>
+                  <a:srgbClr val="002855"/>
+                </a:solidFill>
+                <a:latin typeface="Arial"/>
+                <a:ea typeface="Arial"/>
+                <a:cs typeface="Arial"/>
+              </a:rPr>
+              <a:t>10 of 19</a:t>
+            </a:r>
+          </a:p>
+        </p:txBody>
+      </p:sp>
+      <p:sp>
+        <p:nvSpPr>
+          <p:cNvPr id="134" name="WVU DSPIRA navy band"/>
+          <p:cNvSpPr>
+            <a:spLocks noGrp="1"/>
+          </p:cNvSpPr>
+          <p:nvPr/>
+        </p:nvSpPr>
+        <p:spPr>
+          <a:xfrm>
+            <a:off x="0" y="0"/>
+            <a:ext cx="10080625" cy="323850"/>
+          </a:xfrm>
+          <a:prstGeom prst="rect">
+            <a:avLst/>
+          </a:prstGeom>
+          <a:solidFill>
+            <a:srgbClr val="002855"/>
+          </a:solidFill>
+          <a:ln w="0">
+            <a:noFill/>
+          </a:ln>
+        </p:spPr>
+      </p:sp>
+      <p:sp>
+        <p:nvSpPr>
+          <p:cNvPr id="135" name="WVU DSPIRA gold rule"/>
+          <p:cNvSpPr>
+            <a:spLocks noGrp="1"/>
+          </p:cNvSpPr>
+          <p:nvPr/>
+        </p:nvSpPr>
+        <p:spPr>
+          <a:xfrm>
+            <a:off x="0" y="323850"/>
+            <a:ext cx="10080625" cy="19050"/>
+          </a:xfrm>
+          <a:prstGeom prst="rect">
+            <a:avLst/>
+          </a:prstGeom>
+          <a:solidFill>
+            <a:srgbClr val="EEAA00"/>
+          </a:solidFill>
+          <a:ln w="0">
+            <a:noFill/>
+          </a:ln>
+        </p:spPr>
+      </p:sp>
+      <p:sp>
+        <p:nvSpPr>
+          <p:cNvPr id="136" name="WVU DSPIRA name"/>
+          <p:cNvSpPr>
+            <a:spLocks noGrp="1"/>
+          </p:cNvSpPr>
+          <p:nvPr/>
+        </p:nvSpPr>
+        <p:spPr>
+          <a:xfrm>
+            <a:off x="228600" y="19050"/>
+            <a:ext cx="2857500" cy="257175"/>
+          </a:xfrm>
+          <a:prstGeom prst="rect">
+            <a:avLst/>
+          </a:prstGeom>
+          <a:noFill/>
+          <a:ln w="0">
+            <a:noFill/>
+          </a:ln>
+        </p:spPr>
+        <p:txBody>
+          <a:bodyPr>
+            <a:noAutofit/>
+          </a:bodyPr>
+          <a:lstStyle/>
+          <a:p>
+            <a:pPr>
+              <a:defRPr sz="1600" b="1">
+                <a:solidFill>
+                  <a:srgbClr val="FFFFFF"/>
+                </a:solidFill>
+                <a:latin typeface="Arial"/>
+                <a:ea typeface="Arial"/>
+                <a:cs typeface="Arial"/>
+              </a:defRPr>
+            </a:pPr>
+            <a:r>
+              <a:rPr sz="1600" b="1">
+                <a:solidFill>
+                  <a:srgbClr val="FFFFFF"/>
                 </a:solidFill>
                 <a:latin typeface="Arial"/>
                 <a:ea typeface="Arial"/>
@@ -8841,7 +9042,7 @@
       </p:sp>
       <p:sp>
         <p:nvSpPr>
-          <p:cNvPr id="132" name="DSPIRA 4"/>
+          <p:cNvPr id="137" name="WVU DSPIRA university"/>
           <p:cNvSpPr>
             <a:spLocks noGrp="1"/>
           </p:cNvSpPr>
@@ -8849,8 +9050,8 @@
         </p:nvSpPr>
         <p:spPr>
           <a:xfrm>
-            <a:off x="228600" y="7978775"/>
-            <a:ext cx="6667500" cy="228600"/>
+            <a:off x="7223125" y="114300"/>
+            <a:ext cx="2628900" cy="171450"/>
           </a:xfrm>
           <a:prstGeom prst="rect">
             <a:avLst/>
@@ -8866,10 +9067,10 @@
           </a:bodyPr>
           <a:lstStyle/>
           <a:p>
-            <a:pPr>
-              <a:defRPr sz="900" b="0">
-                <a:solidFill>
-                  <a:srgbClr val="002855"/>
+            <a:pPr algn="r">
+              <a:defRPr sz="900">
+                <a:solidFill>
+                  <a:srgbClr val="FFFFFF"/>
                 </a:solidFill>
                 <a:latin typeface="Arial"/>
                 <a:ea typeface="Arial"/>
@@ -8877,66 +9078,15 @@
               </a:defRPr>
             </a:pPr>
             <a:r>
-              <a:rPr sz="900" b="0">
-                <a:solidFill>
-                  <a:srgbClr val="002855"/>
+              <a:rPr sz="900">
+                <a:solidFill>
+                  <a:srgbClr val="FFFFFF"/>
                 </a:solidFill>
                 <a:latin typeface="Arial"/>
                 <a:ea typeface="Arial"/>
                 <a:cs typeface="Arial"/>
               </a:rPr>
-              <a:t>wvurail.org/dspira</a:t>
-            </a:r>
-          </a:p>
-        </p:txBody>
-      </p:sp>
-      <p:sp>
-        <p:nvSpPr>
-          <p:cNvPr id="133" name="DSPIRA 5"/>
-          <p:cNvSpPr>
-            <a:spLocks noGrp="1"/>
-          </p:cNvSpPr>
-          <p:nvPr/>
-        </p:nvSpPr>
-        <p:spPr>
-          <a:xfrm>
-            <a:off x="9080500" y="7978775"/>
-            <a:ext cx="762000" cy="228600"/>
-          </a:xfrm>
-          <a:prstGeom prst="rect">
-            <a:avLst/>
-          </a:prstGeom>
-          <a:noFill/>
-          <a:ln w="0">
-            <a:noFill/>
-          </a:ln>
-        </p:spPr>
-        <p:txBody>
-          <a:bodyPr>
-            <a:noAutofit/>
-          </a:bodyPr>
-          <a:lstStyle/>
-          <a:p>
-            <a:pPr>
-              <a:defRPr sz="900" b="0">
-                <a:solidFill>
-                  <a:srgbClr val="002855"/>
-                </a:solidFill>
-                <a:latin typeface="Arial"/>
-                <a:ea typeface="Arial"/>
-                <a:cs typeface="Arial"/>
-              </a:defRPr>
-            </a:pPr>
-            <a:r>
-              <a:rPr sz="900" b="0">
-                <a:solidFill>
-                  <a:srgbClr val="002855"/>
-                </a:solidFill>
-                <a:latin typeface="Arial"/>
-                <a:ea typeface="Arial"/>
-                <a:cs typeface="Arial"/>
-              </a:rPr>
-              <a:t>10 of 19</a:t>
+              <a:t>WEST VIRGINIA UNIVERSITY</a:t>
             </a:r>
           </a:p>
         </p:txBody>
@@ -9273,30 +9423,6 @@
       </p:sp>
       <p:sp>
         <p:nvSpPr>
-          <p:cNvPr id="140" name="DSPIRA 1"/>
-          <p:cNvSpPr>
-            <a:spLocks noGrp="1"/>
-          </p:cNvSpPr>
-          <p:nvPr/>
-        </p:nvSpPr>
-        <p:spPr>
-          <a:xfrm>
-            <a:off x="0" y="0"/>
-            <a:ext cx="10080625" cy="342900"/>
-          </a:xfrm>
-          <a:prstGeom prst="rect">
-            <a:avLst/>
-          </a:prstGeom>
-          <a:solidFill>
-            <a:srgbClr val="FFFFFF"/>
-          </a:solidFill>
-          <a:ln w="0">
-            <a:noFill/>
-          </a:ln>
-        </p:spPr>
-      </p:sp>
-      <p:sp>
-        <p:nvSpPr>
           <p:cNvPr id="141" name="DSPIRA 2"/>
           <p:cNvSpPr>
             <a:spLocks noGrp="1"/>
@@ -9321,7 +9447,7 @@
       </p:sp>
       <p:sp>
         <p:nvSpPr>
-          <p:cNvPr id="142" name="DSPIRA 3"/>
+          <p:cNvPr id="143" name="DSPIRA 4"/>
           <p:cNvSpPr>
             <a:spLocks noGrp="1"/>
           </p:cNvSpPr>
@@ -9329,8 +9455,8 @@
         </p:nvSpPr>
         <p:spPr>
           <a:xfrm>
-            <a:off x="228600" y="76200"/>
-            <a:ext cx="4762500" cy="228600"/>
+            <a:off x="228600" y="7978775"/>
+            <a:ext cx="6667500" cy="228600"/>
           </a:xfrm>
           <a:prstGeom prst="rect">
             <a:avLst/>
@@ -9347,7 +9473,7 @@
           <a:lstStyle/>
           <a:p>
             <a:pPr>
-              <a:defRPr sz="1200" b="1">
+              <a:defRPr sz="900" b="0">
                 <a:solidFill>
                   <a:srgbClr val="002855"/>
                 </a:solidFill>
@@ -9357,9 +9483,159 @@
               </a:defRPr>
             </a:pPr>
             <a:r>
-              <a:rPr sz="1200" b="1">
+              <a:rPr sz="900" b="0">
                 <a:solidFill>
                   <a:srgbClr val="002855"/>
+                </a:solidFill>
+                <a:latin typeface="Arial"/>
+                <a:ea typeface="Arial"/>
+                <a:cs typeface="Arial"/>
+              </a:rPr>
+              <a:t>wvurail.org/dspira</a:t>
+            </a:r>
+          </a:p>
+        </p:txBody>
+      </p:sp>
+      <p:sp>
+        <p:nvSpPr>
+          <p:cNvPr id="144" name="DSPIRA 5"/>
+          <p:cNvSpPr>
+            <a:spLocks noGrp="1"/>
+          </p:cNvSpPr>
+          <p:nvPr/>
+        </p:nvSpPr>
+        <p:spPr>
+          <a:xfrm>
+            <a:off x="9080500" y="7978775"/>
+            <a:ext cx="762000" cy="228600"/>
+          </a:xfrm>
+          <a:prstGeom prst="rect">
+            <a:avLst/>
+          </a:prstGeom>
+          <a:noFill/>
+          <a:ln w="0">
+            <a:noFill/>
+          </a:ln>
+        </p:spPr>
+        <p:txBody>
+          <a:bodyPr>
+            <a:noAutofit/>
+          </a:bodyPr>
+          <a:lstStyle/>
+          <a:p>
+            <a:pPr>
+              <a:defRPr sz="900" b="0">
+                <a:solidFill>
+                  <a:srgbClr val="002855"/>
+                </a:solidFill>
+                <a:latin typeface="Arial"/>
+                <a:ea typeface="Arial"/>
+                <a:cs typeface="Arial"/>
+              </a:defRPr>
+            </a:pPr>
+            <a:r>
+              <a:rPr sz="900" b="0">
+                <a:solidFill>
+                  <a:srgbClr val="002855"/>
+                </a:solidFill>
+                <a:latin typeface="Arial"/>
+                <a:ea typeface="Arial"/>
+                <a:cs typeface="Arial"/>
+              </a:rPr>
+              <a:t>11 of 19</a:t>
+            </a:r>
+          </a:p>
+        </p:txBody>
+      </p:sp>
+      <p:sp>
+        <p:nvSpPr>
+          <p:cNvPr id="145" name="WVU DSPIRA navy band"/>
+          <p:cNvSpPr>
+            <a:spLocks noGrp="1"/>
+          </p:cNvSpPr>
+          <p:nvPr/>
+        </p:nvSpPr>
+        <p:spPr>
+          <a:xfrm>
+            <a:off x="0" y="0"/>
+            <a:ext cx="10080625" cy="323850"/>
+          </a:xfrm>
+          <a:prstGeom prst="rect">
+            <a:avLst/>
+          </a:prstGeom>
+          <a:solidFill>
+            <a:srgbClr val="002855"/>
+          </a:solidFill>
+          <a:ln w="0">
+            <a:noFill/>
+          </a:ln>
+        </p:spPr>
+      </p:sp>
+      <p:sp>
+        <p:nvSpPr>
+          <p:cNvPr id="146" name="WVU DSPIRA gold rule"/>
+          <p:cNvSpPr>
+            <a:spLocks noGrp="1"/>
+          </p:cNvSpPr>
+          <p:nvPr/>
+        </p:nvSpPr>
+        <p:spPr>
+          <a:xfrm>
+            <a:off x="0" y="323850"/>
+            <a:ext cx="10080625" cy="19050"/>
+          </a:xfrm>
+          <a:prstGeom prst="rect">
+            <a:avLst/>
+          </a:prstGeom>
+          <a:solidFill>
+            <a:srgbClr val="EEAA00"/>
+          </a:solidFill>
+          <a:ln w="0">
+            <a:noFill/>
+          </a:ln>
+        </p:spPr>
+      </p:sp>
+      <p:sp>
+        <p:nvSpPr>
+          <p:cNvPr id="147" name="WVU DSPIRA name"/>
+          <p:cNvSpPr>
+            <a:spLocks noGrp="1"/>
+          </p:cNvSpPr>
+          <p:nvPr/>
+        </p:nvSpPr>
+        <p:spPr>
+          <a:xfrm>
+            <a:off x="228600" y="19050"/>
+            <a:ext cx="2857500" cy="257175"/>
+          </a:xfrm>
+          <a:prstGeom prst="rect">
+            <a:avLst/>
+          </a:prstGeom>
+          <a:noFill/>
+          <a:ln w="0">
+            <a:noFill/>
+          </a:ln>
+        </p:spPr>
+        <p:txBody>
+          <a:bodyPr>
+            <a:noAutofit/>
+          </a:bodyPr>
+          <a:lstStyle/>
+          <a:p>
+            <a:pPr>
+              <a:defRPr sz="1600" b="1">
+                <a:solidFill>
+                  <a:srgbClr val="FFFFFF"/>
+                </a:solidFill>
+                <a:latin typeface="Arial"/>
+                <a:ea typeface="Arial"/>
+                <a:cs typeface="Arial"/>
+              </a:defRPr>
+            </a:pPr>
+            <a:r>
+              <a:rPr sz="1600" b="1">
+                <a:solidFill>
+                  <a:srgbClr val="FFFFFF"/>
                 </a:solidFill>
                 <a:latin typeface="Arial"/>
                 <a:ea typeface="Arial"/>
@@ -9372,7 +9648,7 @@
       </p:sp>
       <p:sp>
         <p:nvSpPr>
-          <p:cNvPr id="143" name="DSPIRA 4"/>
+          <p:cNvPr id="148" name="WVU DSPIRA university"/>
           <p:cNvSpPr>
             <a:spLocks noGrp="1"/>
           </p:cNvSpPr>
@@ -9380,8 +9656,8 @@
         </p:nvSpPr>
         <p:spPr>
           <a:xfrm>
-            <a:off x="228600" y="7978775"/>
-            <a:ext cx="6667500" cy="228600"/>
+            <a:off x="7223125" y="114300"/>
+            <a:ext cx="2628900" cy="171450"/>
           </a:xfrm>
           <a:prstGeom prst="rect">
             <a:avLst/>
@@ -9397,10 +9673,10 @@
           </a:bodyPr>
           <a:lstStyle/>
           <a:p>
-            <a:pPr>
-              <a:defRPr sz="900" b="0">
-                <a:solidFill>
-                  <a:srgbClr val="002855"/>
+            <a:pPr algn="r">
+              <a:defRPr sz="900">
+                <a:solidFill>
+                  <a:srgbClr val="FFFFFF"/>
                 </a:solidFill>
                 <a:latin typeface="Arial"/>
                 <a:ea typeface="Arial"/>
@@ -9408,66 +9684,15 @@
               </a:defRPr>
             </a:pPr>
             <a:r>
-              <a:rPr sz="900" b="0">
-                <a:solidFill>
-                  <a:srgbClr val="002855"/>
+              <a:rPr sz="900">
+                <a:solidFill>
+                  <a:srgbClr val="FFFFFF"/>
                 </a:solidFill>
                 <a:latin typeface="Arial"/>
                 <a:ea typeface="Arial"/>
                 <a:cs typeface="Arial"/>
               </a:rPr>
-              <a:t>wvurail.org/dspira</a:t>
-            </a:r>
-          </a:p>
-        </p:txBody>
-      </p:sp>
-      <p:sp>
-        <p:nvSpPr>
-          <p:cNvPr id="144" name="DSPIRA 5"/>
-          <p:cNvSpPr>
-            <a:spLocks noGrp="1"/>
-          </p:cNvSpPr>
-          <p:nvPr/>
-        </p:nvSpPr>
-        <p:spPr>
-          <a:xfrm>
-            <a:off x="9080500" y="7978775"/>
-            <a:ext cx="762000" cy="228600"/>
-          </a:xfrm>
-          <a:prstGeom prst="rect">
-            <a:avLst/>
-          </a:prstGeom>
-          <a:noFill/>
-          <a:ln w="0">
-            <a:noFill/>
-          </a:ln>
-        </p:spPr>
-        <p:txBody>
-          <a:bodyPr>
-            <a:noAutofit/>
-          </a:bodyPr>
-          <a:lstStyle/>
-          <a:p>
-            <a:pPr>
-              <a:defRPr sz="900" b="0">
-                <a:solidFill>
-                  <a:srgbClr val="002855"/>
-                </a:solidFill>
-                <a:latin typeface="Arial"/>
-                <a:ea typeface="Arial"/>
-                <a:cs typeface="Arial"/>
-              </a:defRPr>
-            </a:pPr>
-            <a:r>
-              <a:rPr sz="900" b="0">
-                <a:solidFill>
-                  <a:srgbClr val="002855"/>
-                </a:solidFill>
-                <a:latin typeface="Arial"/>
-                <a:ea typeface="Arial"/>
-                <a:cs typeface="Arial"/>
-              </a:rPr>
-              <a:t>11 of 19</a:t>
+              <a:t>WEST VIRGINIA UNIVERSITY</a:t>
             </a:r>
           </a:p>
         </p:txBody>
@@ -9677,30 +9902,6 @@
       </p:sp>
       <p:sp>
         <p:nvSpPr>
-          <p:cNvPr id="146" name="DSPIRA 1"/>
-          <p:cNvSpPr>
-            <a:spLocks noGrp="1"/>
-          </p:cNvSpPr>
-          <p:nvPr/>
-        </p:nvSpPr>
-        <p:spPr>
-          <a:xfrm>
-            <a:off x="0" y="0"/>
-            <a:ext cx="10080625" cy="342900"/>
-          </a:xfrm>
-          <a:prstGeom prst="rect">
-            <a:avLst/>
-          </a:prstGeom>
-          <a:solidFill>
-            <a:srgbClr val="FFFFFF"/>
-          </a:solidFill>
-          <a:ln w="0">
-            <a:noFill/>
-          </a:ln>
-        </p:spPr>
-      </p:sp>
-      <p:sp>
-        <p:nvSpPr>
           <p:cNvPr id="147" name="DSPIRA 2"/>
           <p:cNvSpPr>
             <a:spLocks noGrp="1"/>
@@ -9725,7 +9926,7 @@
       </p:sp>
       <p:sp>
         <p:nvSpPr>
-          <p:cNvPr id="148" name="DSPIRA 3"/>
+          <p:cNvPr id="149" name="DSPIRA 4"/>
           <p:cNvSpPr>
             <a:spLocks noGrp="1"/>
           </p:cNvSpPr>
@@ -9733,8 +9934,8 @@
         </p:nvSpPr>
         <p:spPr>
           <a:xfrm>
-            <a:off x="228600" y="76200"/>
-            <a:ext cx="4762500" cy="228600"/>
+            <a:off x="228600" y="7978775"/>
+            <a:ext cx="6667500" cy="228600"/>
           </a:xfrm>
           <a:prstGeom prst="rect">
             <a:avLst/>
@@ -9751,7 +9952,7 @@
           <a:lstStyle/>
           <a:p>
             <a:pPr>
-              <a:defRPr sz="1200" b="1">
+              <a:defRPr sz="900" b="0">
                 <a:solidFill>
                   <a:srgbClr val="002855"/>
                 </a:solidFill>
@@ -9761,9 +9962,159 @@
               </a:defRPr>
             </a:pPr>
             <a:r>
-              <a:rPr sz="1200" b="1">
+              <a:rPr sz="900" b="0">
                 <a:solidFill>
                   <a:srgbClr val="002855"/>
+                </a:solidFill>
+                <a:latin typeface="Arial"/>
+                <a:ea typeface="Arial"/>
+                <a:cs typeface="Arial"/>
+              </a:rPr>
+              <a:t>wvurail.org/dspira</a:t>
+            </a:r>
+          </a:p>
+        </p:txBody>
+      </p:sp>
+      <p:sp>
+        <p:nvSpPr>
+          <p:cNvPr id="150" name="DSPIRA 5"/>
+          <p:cNvSpPr>
+            <a:spLocks noGrp="1"/>
+          </p:cNvSpPr>
+          <p:nvPr/>
+        </p:nvSpPr>
+        <p:spPr>
+          <a:xfrm>
+            <a:off x="9080500" y="7978775"/>
+            <a:ext cx="762000" cy="228600"/>
+          </a:xfrm>
+          <a:prstGeom prst="rect">
+            <a:avLst/>
+          </a:prstGeom>
+          <a:noFill/>
+          <a:ln w="0">
+            <a:noFill/>
+          </a:ln>
+        </p:spPr>
+        <p:txBody>
+          <a:bodyPr>
+            <a:noAutofit/>
+          </a:bodyPr>
+          <a:lstStyle/>
+          <a:p>
+            <a:pPr>
+              <a:defRPr sz="900" b="0">
+                <a:solidFill>
+                  <a:srgbClr val="002855"/>
+                </a:solidFill>
+                <a:latin typeface="Arial"/>
+                <a:ea typeface="Arial"/>
+                <a:cs typeface="Arial"/>
+              </a:defRPr>
+            </a:pPr>
+            <a:r>
+              <a:rPr sz="900" b="0">
+                <a:solidFill>
+                  <a:srgbClr val="002855"/>
+                </a:solidFill>
+                <a:latin typeface="Arial"/>
+                <a:ea typeface="Arial"/>
+                <a:cs typeface="Arial"/>
+              </a:rPr>
+              <a:t>12 of 19</a:t>
+            </a:r>
+          </a:p>
+        </p:txBody>
+      </p:sp>
+      <p:sp>
+        <p:nvSpPr>
+          <p:cNvPr id="151" name="WVU DSPIRA navy band"/>
+          <p:cNvSpPr>
+            <a:spLocks noGrp="1"/>
+          </p:cNvSpPr>
+          <p:nvPr/>
+        </p:nvSpPr>
+        <p:spPr>
+          <a:xfrm>
+            <a:off x="0" y="0"/>
+            <a:ext cx="10080625" cy="323850"/>
+          </a:xfrm>
+          <a:prstGeom prst="rect">
+            <a:avLst/>
+          </a:prstGeom>
+          <a:solidFill>
+            <a:srgbClr val="002855"/>
+          </a:solidFill>
+          <a:ln w="0">
+            <a:noFill/>
+          </a:ln>
+        </p:spPr>
+      </p:sp>
+      <p:sp>
+        <p:nvSpPr>
+          <p:cNvPr id="152" name="WVU DSPIRA gold rule"/>
+          <p:cNvSpPr>
+            <a:spLocks noGrp="1"/>
+          </p:cNvSpPr>
+          <p:nvPr/>
+        </p:nvSpPr>
+        <p:spPr>
+          <a:xfrm>
+            <a:off x="0" y="323850"/>
+            <a:ext cx="10080625" cy="19050"/>
+          </a:xfrm>
+          <a:prstGeom prst="rect">
+            <a:avLst/>
+          </a:prstGeom>
+          <a:solidFill>
+            <a:srgbClr val="EEAA00"/>
+          </a:solidFill>
+          <a:ln w="0">
+            <a:noFill/>
+          </a:ln>
+        </p:spPr>
+      </p:sp>
+      <p:sp>
+        <p:nvSpPr>
+          <p:cNvPr id="153" name="WVU DSPIRA name"/>
+          <p:cNvSpPr>
+            <a:spLocks noGrp="1"/>
+          </p:cNvSpPr>
+          <p:nvPr/>
+        </p:nvSpPr>
+        <p:spPr>
+          <a:xfrm>
+            <a:off x="228600" y="19050"/>
+            <a:ext cx="2857500" cy="257175"/>
+          </a:xfrm>
+          <a:prstGeom prst="rect">
+            <a:avLst/>
+          </a:prstGeom>
+          <a:noFill/>
+          <a:ln w="0">
+            <a:noFill/>
+          </a:ln>
+        </p:spPr>
+        <p:txBody>
+          <a:bodyPr>
+            <a:noAutofit/>
+          </a:bodyPr>
+          <a:lstStyle/>
+          <a:p>
+            <a:pPr>
+              <a:defRPr sz="1600" b="1">
+                <a:solidFill>
+                  <a:srgbClr val="FFFFFF"/>
+                </a:solidFill>
+                <a:latin typeface="Arial"/>
+                <a:ea typeface="Arial"/>
+                <a:cs typeface="Arial"/>
+              </a:defRPr>
+            </a:pPr>
+            <a:r>
+              <a:rPr sz="1600" b="1">
+                <a:solidFill>
+                  <a:srgbClr val="FFFFFF"/>
                 </a:solidFill>
                 <a:latin typeface="Arial"/>
                 <a:ea typeface="Arial"/>
@@ -9776,7 +10127,7 @@
       </p:sp>
       <p:sp>
         <p:nvSpPr>
-          <p:cNvPr id="149" name="DSPIRA 4"/>
+          <p:cNvPr id="154" name="WVU DSPIRA university"/>
           <p:cNvSpPr>
             <a:spLocks noGrp="1"/>
           </p:cNvSpPr>
@@ -9784,8 +10135,8 @@
         </p:nvSpPr>
         <p:spPr>
           <a:xfrm>
-            <a:off x="228600" y="7978775"/>
-            <a:ext cx="6667500" cy="228600"/>
+            <a:off x="7223125" y="114300"/>
+            <a:ext cx="2628900" cy="171450"/>
           </a:xfrm>
           <a:prstGeom prst="rect">
             <a:avLst/>
@@ -9801,10 +10152,10 @@
           </a:bodyPr>
           <a:lstStyle/>
           <a:p>
-            <a:pPr>
-              <a:defRPr sz="900" b="0">
-                <a:solidFill>
-                  <a:srgbClr val="002855"/>
+            <a:pPr algn="r">
+              <a:defRPr sz="900">
+                <a:solidFill>
+                  <a:srgbClr val="FFFFFF"/>
                 </a:solidFill>
                 <a:latin typeface="Arial"/>
                 <a:ea typeface="Arial"/>
@@ -9812,66 +10163,15 @@
               </a:defRPr>
             </a:pPr>
             <a:r>
-              <a:rPr sz="900" b="0">
-                <a:solidFill>
-                  <a:srgbClr val="002855"/>
+              <a:rPr sz="900">
+                <a:solidFill>
+                  <a:srgbClr val="FFFFFF"/>
                 </a:solidFill>
                 <a:latin typeface="Arial"/>
                 <a:ea typeface="Arial"/>
                 <a:cs typeface="Arial"/>
               </a:rPr>
-              <a:t>wvurail.org/dspira</a:t>
-            </a:r>
-          </a:p>
-        </p:txBody>
-      </p:sp>
-      <p:sp>
-        <p:nvSpPr>
-          <p:cNvPr id="150" name="DSPIRA 5"/>
-          <p:cNvSpPr>
-            <a:spLocks noGrp="1"/>
-          </p:cNvSpPr>
-          <p:nvPr/>
-        </p:nvSpPr>
-        <p:spPr>
-          <a:xfrm>
-            <a:off x="9080500" y="7978775"/>
-            <a:ext cx="762000" cy="228600"/>
-          </a:xfrm>
-          <a:prstGeom prst="rect">
-            <a:avLst/>
-          </a:prstGeom>
-          <a:noFill/>
-          <a:ln w="0">
-            <a:noFill/>
-          </a:ln>
-        </p:spPr>
-        <p:txBody>
-          <a:bodyPr>
-            <a:noAutofit/>
-          </a:bodyPr>
-          <a:lstStyle/>
-          <a:p>
-            <a:pPr>
-              <a:defRPr sz="900" b="0">
-                <a:solidFill>
-                  <a:srgbClr val="002855"/>
-                </a:solidFill>
-                <a:latin typeface="Arial"/>
-                <a:ea typeface="Arial"/>
-                <a:cs typeface="Arial"/>
-              </a:defRPr>
-            </a:pPr>
-            <a:r>
-              <a:rPr sz="900" b="0">
-                <a:solidFill>
-                  <a:srgbClr val="002855"/>
-                </a:solidFill>
-                <a:latin typeface="Arial"/>
-                <a:ea typeface="Arial"/>
-                <a:cs typeface="Arial"/>
-              </a:rPr>
-              <a:t>12 of 19</a:t>
+              <a:t>WEST VIRGINIA UNIVERSITY</a:t>
             </a:r>
           </a:p>
         </p:txBody>
@@ -10218,30 +10518,6 @@
       </p:sp>
       <p:sp>
         <p:nvSpPr>
-          <p:cNvPr id="152" name="DSPIRA 1"/>
-          <p:cNvSpPr>
-            <a:spLocks noGrp="1"/>
-          </p:cNvSpPr>
-          <p:nvPr/>
-        </p:nvSpPr>
-        <p:spPr>
-          <a:xfrm>
-            <a:off x="0" y="0"/>
-            <a:ext cx="10080625" cy="342900"/>
-          </a:xfrm>
-          <a:prstGeom prst="rect">
-            <a:avLst/>
-          </a:prstGeom>
-          <a:solidFill>
-            <a:srgbClr val="FFFFFF"/>
-          </a:solidFill>
-          <a:ln w="0">
-            <a:noFill/>
-          </a:ln>
-        </p:spPr>
-      </p:sp>
-      <p:sp>
-        <p:nvSpPr>
           <p:cNvPr id="153" name="DSPIRA 2"/>
           <p:cNvSpPr>
             <a:spLocks noGrp="1"/>
@@ -10266,7 +10542,7 @@
       </p:sp>
       <p:sp>
         <p:nvSpPr>
-          <p:cNvPr id="154" name="DSPIRA 3"/>
+          <p:cNvPr id="155" name="DSPIRA 4"/>
           <p:cNvSpPr>
             <a:spLocks noGrp="1"/>
           </p:cNvSpPr>
@@ -10274,8 +10550,8 @@
         </p:nvSpPr>
         <p:spPr>
           <a:xfrm>
-            <a:off x="228600" y="76200"/>
-            <a:ext cx="4762500" cy="228600"/>
+            <a:off x="228600" y="7978775"/>
+            <a:ext cx="6667500" cy="228600"/>
           </a:xfrm>
           <a:prstGeom prst="rect">
             <a:avLst/>
@@ -10292,7 +10568,7 @@
           <a:lstStyle/>
           <a:p>
             <a:pPr>
-              <a:defRPr sz="1200" b="1">
+              <a:defRPr sz="900" b="0">
                 <a:solidFill>
                   <a:srgbClr val="002855"/>
                 </a:solidFill>
@@ -10302,9 +10578,159 @@
               </a:defRPr>
             </a:pPr>
             <a:r>
-              <a:rPr sz="1200" b="1">
+              <a:rPr sz="900" b="0">
                 <a:solidFill>
                   <a:srgbClr val="002855"/>
+                </a:solidFill>
+                <a:latin typeface="Arial"/>
+                <a:ea typeface="Arial"/>
+                <a:cs typeface="Arial"/>
+              </a:rPr>
+              <a:t>wvurail.org/dspira</a:t>
+            </a:r>
+          </a:p>
+        </p:txBody>
+      </p:sp>
+      <p:sp>
+        <p:nvSpPr>
+          <p:cNvPr id="156" name="DSPIRA 5"/>
+          <p:cNvSpPr>
+            <a:spLocks noGrp="1"/>
+          </p:cNvSpPr>
+          <p:nvPr/>
+        </p:nvSpPr>
+        <p:spPr>
+          <a:xfrm>
+            <a:off x="9080500" y="7978775"/>
+            <a:ext cx="762000" cy="228600"/>
+          </a:xfrm>
+          <a:prstGeom prst="rect">
+            <a:avLst/>
+          </a:prstGeom>
+          <a:noFill/>
+          <a:ln w="0">
+            <a:noFill/>
+          </a:ln>
+        </p:spPr>
+        <p:txBody>
+          <a:bodyPr>
+            <a:noAutofit/>
+          </a:bodyPr>
+          <a:lstStyle/>
+          <a:p>
+            <a:pPr>
+              <a:defRPr sz="900" b="0">
+                <a:solidFill>
+                  <a:srgbClr val="002855"/>
+                </a:solidFill>
+                <a:latin typeface="Arial"/>
+                <a:ea typeface="Arial"/>
+                <a:cs typeface="Arial"/>
+              </a:defRPr>
+            </a:pPr>
+            <a:r>
+              <a:rPr sz="900" b="0">
+                <a:solidFill>
+                  <a:srgbClr val="002855"/>
+                </a:solidFill>
+                <a:latin typeface="Arial"/>
+                <a:ea typeface="Arial"/>
+                <a:cs typeface="Arial"/>
+              </a:rPr>
+              <a:t>13 of 19</a:t>
+            </a:r>
+          </a:p>
+        </p:txBody>
+      </p:sp>
+      <p:sp>
+        <p:nvSpPr>
+          <p:cNvPr id="157" name="WVU DSPIRA navy band"/>
+          <p:cNvSpPr>
+            <a:spLocks noGrp="1"/>
+          </p:cNvSpPr>
+          <p:nvPr/>
+        </p:nvSpPr>
+        <p:spPr>
+          <a:xfrm>
+            <a:off x="0" y="0"/>
+            <a:ext cx="10080625" cy="323850"/>
+          </a:xfrm>
+          <a:prstGeom prst="rect">
+            <a:avLst/>
+          </a:prstGeom>
+          <a:solidFill>
+            <a:srgbClr val="002855"/>
+          </a:solidFill>
+          <a:ln w="0">
+            <a:noFill/>
+          </a:ln>
+        </p:spPr>
+      </p:sp>
+      <p:sp>
+        <p:nvSpPr>
+          <p:cNvPr id="158" name="WVU DSPIRA gold rule"/>
+          <p:cNvSpPr>
+            <a:spLocks noGrp="1"/>
+          </p:cNvSpPr>
+          <p:nvPr/>
+        </p:nvSpPr>
+        <p:spPr>
+          <a:xfrm>
+            <a:off x="0" y="323850"/>
+            <a:ext cx="10080625" cy="19050"/>
+          </a:xfrm>
+          <a:prstGeom prst="rect">
+            <a:avLst/>
+          </a:prstGeom>
+          <a:solidFill>
+            <a:srgbClr val="EEAA00"/>
+          </a:solidFill>
+          <a:ln w="0">
+            <a:noFill/>
+          </a:ln>
+        </p:spPr>
+      </p:sp>
+      <p:sp>
+        <p:nvSpPr>
+          <p:cNvPr id="159" name="WVU DSPIRA name"/>
+          <p:cNvSpPr>
+            <a:spLocks noGrp="1"/>
+          </p:cNvSpPr>
+          <p:nvPr/>
+        </p:nvSpPr>
+        <p:spPr>
+          <a:xfrm>
+            <a:off x="228600" y="19050"/>
+            <a:ext cx="2857500" cy="257175"/>
+          </a:xfrm>
+          <a:prstGeom prst="rect">
+            <a:avLst/>
+          </a:prstGeom>
+          <a:noFill/>
+          <a:ln w="0">
+            <a:noFill/>
+          </a:ln>
+        </p:spPr>
+        <p:txBody>
+          <a:bodyPr>
+            <a:noAutofit/>
+          </a:bodyPr>
+          <a:lstStyle/>
+          <a:p>
+            <a:pPr>
+              <a:defRPr sz="1600" b="1">
+                <a:solidFill>
+                  <a:srgbClr val="FFFFFF"/>
+                </a:solidFill>
+                <a:latin typeface="Arial"/>
+                <a:ea typeface="Arial"/>
+                <a:cs typeface="Arial"/>
+              </a:defRPr>
+            </a:pPr>
+            <a:r>
+              <a:rPr sz="1600" b="1">
+                <a:solidFill>
+                  <a:srgbClr val="FFFFFF"/>
                 </a:solidFill>
                 <a:latin typeface="Arial"/>
                 <a:ea typeface="Arial"/>
@@ -10317,7 +10743,7 @@
       </p:sp>
       <p:sp>
         <p:nvSpPr>
-          <p:cNvPr id="155" name="DSPIRA 4"/>
+          <p:cNvPr id="160" name="WVU DSPIRA university"/>
           <p:cNvSpPr>
             <a:spLocks noGrp="1"/>
           </p:cNvSpPr>
@@ -10325,8 +10751,8 @@
         </p:nvSpPr>
         <p:spPr>
           <a:xfrm>
-            <a:off x="228600" y="7978775"/>
-            <a:ext cx="6667500" cy="228600"/>
+            <a:off x="7223125" y="114300"/>
+            <a:ext cx="2628900" cy="171450"/>
           </a:xfrm>
           <a:prstGeom prst="rect">
             <a:avLst/>
@@ -10342,10 +10768,10 @@
           </a:bodyPr>
           <a:lstStyle/>
           <a:p>
-            <a:pPr>
-              <a:defRPr sz="900" b="0">
-                <a:solidFill>
-                  <a:srgbClr val="002855"/>
+            <a:pPr algn="r">
+              <a:defRPr sz="900">
+                <a:solidFill>
+                  <a:srgbClr val="FFFFFF"/>
                 </a:solidFill>
                 <a:latin typeface="Arial"/>
                 <a:ea typeface="Arial"/>
@@ -10353,66 +10779,15 @@
               </a:defRPr>
             </a:pPr>
             <a:r>
-              <a:rPr sz="900" b="0">
-                <a:solidFill>
-                  <a:srgbClr val="002855"/>
+              <a:rPr sz="900">
+                <a:solidFill>
+                  <a:srgbClr val="FFFFFF"/>
                 </a:solidFill>
                 <a:latin typeface="Arial"/>
                 <a:ea typeface="Arial"/>
                 <a:cs typeface="Arial"/>
               </a:rPr>
-              <a:t>wvurail.org/dspira</a:t>
-            </a:r>
-          </a:p>
-        </p:txBody>
-      </p:sp>
-      <p:sp>
-        <p:nvSpPr>
-          <p:cNvPr id="156" name="DSPIRA 5"/>
-          <p:cNvSpPr>
-            <a:spLocks noGrp="1"/>
-          </p:cNvSpPr>
-          <p:nvPr/>
-        </p:nvSpPr>
-        <p:spPr>
-          <a:xfrm>
-            <a:off x="9080500" y="7978775"/>
-            <a:ext cx="762000" cy="228600"/>
-          </a:xfrm>
-          <a:prstGeom prst="rect">
-            <a:avLst/>
-          </a:prstGeom>
-          <a:noFill/>
-          <a:ln w="0">
-            <a:noFill/>
-          </a:ln>
-        </p:spPr>
-        <p:txBody>
-          <a:bodyPr>
-            <a:noAutofit/>
-          </a:bodyPr>
-          <a:lstStyle/>
-          <a:p>
-            <a:pPr>
-              <a:defRPr sz="900" b="0">
-                <a:solidFill>
-                  <a:srgbClr val="002855"/>
-                </a:solidFill>
-                <a:latin typeface="Arial"/>
-                <a:ea typeface="Arial"/>
-                <a:cs typeface="Arial"/>
-              </a:defRPr>
-            </a:pPr>
-            <a:r>
-              <a:rPr sz="900" b="0">
-                <a:solidFill>
-                  <a:srgbClr val="002855"/>
-                </a:solidFill>
-                <a:latin typeface="Arial"/>
-                <a:ea typeface="Arial"/>
-                <a:cs typeface="Arial"/>
-              </a:rPr>
-              <a:t>13 of 19</a:t>
+              <a:t>WEST VIRGINIA UNIVERSITY</a:t>
             </a:r>
           </a:p>
         </p:txBody>
@@ -10745,30 +11120,6 @@
       </p:sp>
       <p:sp>
         <p:nvSpPr>
-          <p:cNvPr id="163" name="DSPIRA 1"/>
-          <p:cNvSpPr>
-            <a:spLocks noGrp="1"/>
-          </p:cNvSpPr>
-          <p:nvPr/>
-        </p:nvSpPr>
-        <p:spPr>
-          <a:xfrm>
-            <a:off x="0" y="0"/>
-            <a:ext cx="10080625" cy="342900"/>
-          </a:xfrm>
-          <a:prstGeom prst="rect">
-            <a:avLst/>
-          </a:prstGeom>
-          <a:solidFill>
-            <a:srgbClr val="FFFFFF"/>
-          </a:solidFill>
-          <a:ln w="0">
-            <a:noFill/>
-          </a:ln>
-        </p:spPr>
-      </p:sp>
-      <p:sp>
-        <p:nvSpPr>
           <p:cNvPr id="164" name="DSPIRA 2"/>
           <p:cNvSpPr>
             <a:spLocks noGrp="1"/>
@@ -10793,7 +11144,7 @@
       </p:sp>
       <p:sp>
         <p:nvSpPr>
-          <p:cNvPr id="165" name="DSPIRA 3"/>
+          <p:cNvPr id="166" name="DSPIRA 4"/>
           <p:cNvSpPr>
             <a:spLocks noGrp="1"/>
           </p:cNvSpPr>
@@ -10801,8 +11152,8 @@
         </p:nvSpPr>
         <p:spPr>
           <a:xfrm>
-            <a:off x="228600" y="76200"/>
-            <a:ext cx="4762500" cy="228600"/>
+            <a:off x="228600" y="7978775"/>
+            <a:ext cx="6667500" cy="228600"/>
           </a:xfrm>
           <a:prstGeom prst="rect">
             <a:avLst/>
@@ -10819,7 +11170,7 @@
           <a:lstStyle/>
           <a:p>
             <a:pPr>
-              <a:defRPr sz="1200" b="1">
+              <a:defRPr sz="900" b="0">
                 <a:solidFill>
                   <a:srgbClr val="002855"/>
                 </a:solidFill>
@@ -10829,9 +11180,159 @@
               </a:defRPr>
             </a:pPr>
             <a:r>
-              <a:rPr sz="1200" b="1">
+              <a:rPr sz="900" b="0">
                 <a:solidFill>
                   <a:srgbClr val="002855"/>
+                </a:solidFill>
+                <a:latin typeface="Arial"/>
+                <a:ea typeface="Arial"/>
+                <a:cs typeface="Arial"/>
+              </a:rPr>
+              <a:t>wvurail.org/dspira</a:t>
+            </a:r>
+          </a:p>
+        </p:txBody>
+      </p:sp>
+      <p:sp>
+        <p:nvSpPr>
+          <p:cNvPr id="167" name="DSPIRA 5"/>
+          <p:cNvSpPr>
+            <a:spLocks noGrp="1"/>
+          </p:cNvSpPr>
+          <p:nvPr/>
+        </p:nvSpPr>
+        <p:spPr>
+          <a:xfrm>
+            <a:off x="9080500" y="7978775"/>
+            <a:ext cx="762000" cy="228600"/>
+          </a:xfrm>
+          <a:prstGeom prst="rect">
+            <a:avLst/>
+          </a:prstGeom>
+          <a:noFill/>
+          <a:ln w="0">
+            <a:noFill/>
+          </a:ln>
+        </p:spPr>
+        <p:txBody>
+          <a:bodyPr>
+            <a:noAutofit/>
+          </a:bodyPr>
+          <a:lstStyle/>
+          <a:p>
+            <a:pPr>
+              <a:defRPr sz="900" b="0">
+                <a:solidFill>
+                  <a:srgbClr val="002855"/>
+                </a:solidFill>
+                <a:latin typeface="Arial"/>
+                <a:ea typeface="Arial"/>
+                <a:cs typeface="Arial"/>
+              </a:defRPr>
+            </a:pPr>
+            <a:r>
+              <a:rPr sz="900" b="0">
+                <a:solidFill>
+                  <a:srgbClr val="002855"/>
+                </a:solidFill>
+                <a:latin typeface="Arial"/>
+                <a:ea typeface="Arial"/>
+                <a:cs typeface="Arial"/>
+              </a:rPr>
+              <a:t>14 of 19</a:t>
+            </a:r>
+          </a:p>
+        </p:txBody>
+      </p:sp>
+      <p:sp>
+        <p:nvSpPr>
+          <p:cNvPr id="168" name="WVU DSPIRA navy band"/>
+          <p:cNvSpPr>
+            <a:spLocks noGrp="1"/>
+          </p:cNvSpPr>
+          <p:nvPr/>
+        </p:nvSpPr>
+        <p:spPr>
+          <a:xfrm>
+            <a:off x="0" y="0"/>
+            <a:ext cx="10080625" cy="323850"/>
+          </a:xfrm>
+          <a:prstGeom prst="rect">
+            <a:avLst/>
+          </a:prstGeom>
+          <a:solidFill>
+            <a:srgbClr val="002855"/>
+          </a:solidFill>
+          <a:ln w="0">
+            <a:noFill/>
+          </a:ln>
+        </p:spPr>
+      </p:sp>
+      <p:sp>
+        <p:nvSpPr>
+          <p:cNvPr id="169" name="WVU DSPIRA gold rule"/>
+          <p:cNvSpPr>
+            <a:spLocks noGrp="1"/>
+          </p:cNvSpPr>
+          <p:nvPr/>
+        </p:nvSpPr>
+        <p:spPr>
+          <a:xfrm>
+            <a:off x="0" y="323850"/>
+            <a:ext cx="10080625" cy="19050"/>
+          </a:xfrm>
+          <a:prstGeom prst="rect">
+            <a:avLst/>
+          </a:prstGeom>
+          <a:solidFill>
+            <a:srgbClr val="EEAA00"/>
+          </a:solidFill>
+          <a:ln w="0">
+            <a:noFill/>
+          </a:ln>
+        </p:spPr>
+      </p:sp>
+      <p:sp>
+        <p:nvSpPr>
+          <p:cNvPr id="170" name="WVU DSPIRA name"/>
+          <p:cNvSpPr>
+            <a:spLocks noGrp="1"/>
+          </p:cNvSpPr>
+          <p:nvPr/>
+        </p:nvSpPr>
+        <p:spPr>
+          <a:xfrm>
+            <a:off x="228600" y="19050"/>
+            <a:ext cx="2857500" cy="257175"/>
+          </a:xfrm>
+          <a:prstGeom prst="rect">
+            <a:avLst/>
+          </a:prstGeom>
+          <a:noFill/>
+          <a:ln w="0">
+            <a:noFill/>
+          </a:ln>
+        </p:spPr>
+        <p:txBody>
+          <a:bodyPr>
+            <a:noAutofit/>
+          </a:bodyPr>
+          <a:lstStyle/>
+          <a:p>
+            <a:pPr>
+              <a:defRPr sz="1600" b="1">
+                <a:solidFill>
+                  <a:srgbClr val="FFFFFF"/>
+                </a:solidFill>
+                <a:latin typeface="Arial"/>
+                <a:ea typeface="Arial"/>
+                <a:cs typeface="Arial"/>
+              </a:defRPr>
+            </a:pPr>
+            <a:r>
+              <a:rPr sz="1600" b="1">
+                <a:solidFill>
+                  <a:srgbClr val="FFFFFF"/>
                 </a:solidFill>
                 <a:latin typeface="Arial"/>
                 <a:ea typeface="Arial"/>
@@ -10844,7 +11345,7 @@
       </p:sp>
       <p:sp>
         <p:nvSpPr>
-          <p:cNvPr id="166" name="DSPIRA 4"/>
+          <p:cNvPr id="171" name="WVU DSPIRA university"/>
           <p:cNvSpPr>
             <a:spLocks noGrp="1"/>
           </p:cNvSpPr>
@@ -10852,8 +11353,8 @@
         </p:nvSpPr>
         <p:spPr>
           <a:xfrm>
-            <a:off x="228600" y="7978775"/>
-            <a:ext cx="6667500" cy="228600"/>
+            <a:off x="7223125" y="114300"/>
+            <a:ext cx="2628900" cy="171450"/>
           </a:xfrm>
           <a:prstGeom prst="rect">
             <a:avLst/>
@@ -10869,10 +11370,10 @@
           </a:bodyPr>
           <a:lstStyle/>
           <a:p>
-            <a:pPr>
-              <a:defRPr sz="900" b="0">
-                <a:solidFill>
-                  <a:srgbClr val="002855"/>
+            <a:pPr algn="r">
+              <a:defRPr sz="900">
+                <a:solidFill>
+                  <a:srgbClr val="FFFFFF"/>
                 </a:solidFill>
                 <a:latin typeface="Arial"/>
                 <a:ea typeface="Arial"/>
@@ -10880,66 +11381,15 @@
               </a:defRPr>
             </a:pPr>
             <a:r>
-              <a:rPr sz="900" b="0">
-                <a:solidFill>
-                  <a:srgbClr val="002855"/>
+              <a:rPr sz="900">
+                <a:solidFill>
+                  <a:srgbClr val="FFFFFF"/>
                 </a:solidFill>
                 <a:latin typeface="Arial"/>
                 <a:ea typeface="Arial"/>
                 <a:cs typeface="Arial"/>
               </a:rPr>
-              <a:t>wvurail.org/dspira</a:t>
-            </a:r>
-          </a:p>
-        </p:txBody>
-      </p:sp>
-      <p:sp>
-        <p:nvSpPr>
-          <p:cNvPr id="167" name="DSPIRA 5"/>
-          <p:cNvSpPr>
-            <a:spLocks noGrp="1"/>
-          </p:cNvSpPr>
-          <p:nvPr/>
-        </p:nvSpPr>
-        <p:spPr>
-          <a:xfrm>
-            <a:off x="9080500" y="7978775"/>
-            <a:ext cx="762000" cy="228600"/>
-          </a:xfrm>
-          <a:prstGeom prst="rect">
-            <a:avLst/>
-          </a:prstGeom>
-          <a:noFill/>
-          <a:ln w="0">
-            <a:noFill/>
-          </a:ln>
-        </p:spPr>
-        <p:txBody>
-          <a:bodyPr>
-            <a:noAutofit/>
-          </a:bodyPr>
-          <a:lstStyle/>
-          <a:p>
-            <a:pPr>
-              <a:defRPr sz="900" b="0">
-                <a:solidFill>
-                  <a:srgbClr val="002855"/>
-                </a:solidFill>
-                <a:latin typeface="Arial"/>
-                <a:ea typeface="Arial"/>
-                <a:cs typeface="Arial"/>
-              </a:defRPr>
-            </a:pPr>
-            <a:r>
-              <a:rPr sz="900" b="0">
-                <a:solidFill>
-                  <a:srgbClr val="002855"/>
-                </a:solidFill>
-                <a:latin typeface="Arial"/>
-                <a:ea typeface="Arial"/>
-                <a:cs typeface="Arial"/>
-              </a:rPr>
-              <a:t>14 of 19</a:t>
+              <a:t>WEST VIRGINIA UNIVERSITY</a:t>
             </a:r>
           </a:p>
         </p:txBody>
@@ -11276,30 +11726,6 @@
       </p:sp>
       <p:sp>
         <p:nvSpPr>
-          <p:cNvPr id="174" name="DSPIRA 1"/>
-          <p:cNvSpPr>
-            <a:spLocks noGrp="1"/>
-          </p:cNvSpPr>
-          <p:nvPr/>
-        </p:nvSpPr>
-        <p:spPr>
-          <a:xfrm>
-            <a:off x="0" y="0"/>
-            <a:ext cx="10080625" cy="342900"/>
-          </a:xfrm>
-          <a:prstGeom prst="rect">
-            <a:avLst/>
-          </a:prstGeom>
-          <a:solidFill>
-            <a:srgbClr val="FFFFFF"/>
-          </a:solidFill>
-          <a:ln w="0">
-            <a:noFill/>
-          </a:ln>
-        </p:spPr>
-      </p:sp>
-      <p:sp>
-        <p:nvSpPr>
           <p:cNvPr id="175" name="DSPIRA 2"/>
           <p:cNvSpPr>
             <a:spLocks noGrp="1"/>
@@ -11324,7 +11750,7 @@
       </p:sp>
       <p:sp>
         <p:nvSpPr>
-          <p:cNvPr id="176" name="DSPIRA 3"/>
+          <p:cNvPr id="177" name="DSPIRA 4"/>
           <p:cNvSpPr>
             <a:spLocks noGrp="1"/>
           </p:cNvSpPr>
@@ -11332,8 +11758,8 @@
         </p:nvSpPr>
         <p:spPr>
           <a:xfrm>
-            <a:off x="228600" y="76200"/>
-            <a:ext cx="4762500" cy="228600"/>
+            <a:off x="228600" y="7978775"/>
+            <a:ext cx="6667500" cy="228600"/>
           </a:xfrm>
           <a:prstGeom prst="rect">
             <a:avLst/>
@@ -11350,7 +11776,7 @@
           <a:lstStyle/>
           <a:p>
             <a:pPr>
-              <a:defRPr sz="1200" b="1">
+              <a:defRPr sz="900" b="0">
                 <a:solidFill>
                   <a:srgbClr val="002855"/>
                 </a:solidFill>
@@ -11360,9 +11786,159 @@
               </a:defRPr>
             </a:pPr>
             <a:r>
-              <a:rPr sz="1200" b="1">
+              <a:rPr sz="900" b="0">
                 <a:solidFill>
                   <a:srgbClr val="002855"/>
+                </a:solidFill>
+                <a:latin typeface="Arial"/>
+                <a:ea typeface="Arial"/>
+                <a:cs typeface="Arial"/>
+              </a:rPr>
+              <a:t>wvurail.org/dspira</a:t>
+            </a:r>
+          </a:p>
+        </p:txBody>
+      </p:sp>
+      <p:sp>
+        <p:nvSpPr>
+          <p:cNvPr id="178" name="DSPIRA 5"/>
+          <p:cNvSpPr>
+            <a:spLocks noGrp="1"/>
+          </p:cNvSpPr>
+          <p:nvPr/>
+        </p:nvSpPr>
+        <p:spPr>
+          <a:xfrm>
+            <a:off x="9080500" y="7978775"/>
+            <a:ext cx="762000" cy="228600"/>
+          </a:xfrm>
+          <a:prstGeom prst="rect">
+            <a:avLst/>
+          </a:prstGeom>
+          <a:noFill/>
+          <a:ln w="0">
+            <a:noFill/>
+          </a:ln>
+        </p:spPr>
+        <p:txBody>
+          <a:bodyPr>
+            <a:noAutofit/>
+          </a:bodyPr>
+          <a:lstStyle/>
+          <a:p>
+            <a:pPr>
+              <a:defRPr sz="900" b="0">
+                <a:solidFill>
+                  <a:srgbClr val="002855"/>
+                </a:solidFill>
+                <a:latin typeface="Arial"/>
+                <a:ea typeface="Arial"/>
+                <a:cs typeface="Arial"/>
+              </a:defRPr>
+            </a:pPr>
+            <a:r>
+              <a:rPr sz="900" b="0">
+                <a:solidFill>
+                  <a:srgbClr val="002855"/>
+                </a:solidFill>
+                <a:latin typeface="Arial"/>
+                <a:ea typeface="Arial"/>
+                <a:cs typeface="Arial"/>
+              </a:rPr>
+              <a:t>15 of 19</a:t>
+            </a:r>
+          </a:p>
+        </p:txBody>
+      </p:sp>
+      <p:sp>
+        <p:nvSpPr>
+          <p:cNvPr id="179" name="WVU DSPIRA navy band"/>
+          <p:cNvSpPr>
+            <a:spLocks noGrp="1"/>
+          </p:cNvSpPr>
+          <p:nvPr/>
+        </p:nvSpPr>
+        <p:spPr>
+          <a:xfrm>
+            <a:off x="0" y="0"/>
+            <a:ext cx="10080625" cy="323850"/>
+          </a:xfrm>
+          <a:prstGeom prst="rect">
+            <a:avLst/>
+          </a:prstGeom>
+          <a:solidFill>
+            <a:srgbClr val="002855"/>
+          </a:solidFill>
+          <a:ln w="0">
+            <a:noFill/>
+          </a:ln>
+        </p:spPr>
+      </p:sp>
+      <p:sp>
+        <p:nvSpPr>
+          <p:cNvPr id="180" name="WVU DSPIRA gold rule"/>
+          <p:cNvSpPr>
+            <a:spLocks noGrp="1"/>
+          </p:cNvSpPr>
+          <p:nvPr/>
+        </p:nvSpPr>
+        <p:spPr>
+          <a:xfrm>
+            <a:off x="0" y="323850"/>
+            <a:ext cx="10080625" cy="19050"/>
+          </a:xfrm>
+          <a:prstGeom prst="rect">
+            <a:avLst/>
+          </a:prstGeom>
+          <a:solidFill>
+            <a:srgbClr val="EEAA00"/>
+          </a:solidFill>
+          <a:ln w="0">
+            <a:noFill/>
+          </a:ln>
+        </p:spPr>
+      </p:sp>
+      <p:sp>
+        <p:nvSpPr>
+          <p:cNvPr id="181" name="WVU DSPIRA name"/>
+          <p:cNvSpPr>
+            <a:spLocks noGrp="1"/>
+          </p:cNvSpPr>
+          <p:nvPr/>
+        </p:nvSpPr>
+        <p:spPr>
+          <a:xfrm>
+            <a:off x="228600" y="19050"/>
+            <a:ext cx="2857500" cy="257175"/>
+          </a:xfrm>
+          <a:prstGeom prst="rect">
+            <a:avLst/>
+          </a:prstGeom>
+          <a:noFill/>
+          <a:ln w="0">
+            <a:noFill/>
+          </a:ln>
+        </p:spPr>
+        <p:txBody>
+          <a:bodyPr>
+            <a:noAutofit/>
+          </a:bodyPr>
+          <a:lstStyle/>
+          <a:p>
+            <a:pPr>
+              <a:defRPr sz="1600" b="1">
+                <a:solidFill>
+                  <a:srgbClr val="FFFFFF"/>
+                </a:solidFill>
+                <a:latin typeface="Arial"/>
+                <a:ea typeface="Arial"/>
+                <a:cs typeface="Arial"/>
+              </a:defRPr>
+            </a:pPr>
+            <a:r>
+              <a:rPr sz="1600" b="1">
+                <a:solidFill>
+                  <a:srgbClr val="FFFFFF"/>
                 </a:solidFill>
                 <a:latin typeface="Arial"/>
                 <a:ea typeface="Arial"/>
@@ -11375,7 +11951,7 @@
       </p:sp>
       <p:sp>
         <p:nvSpPr>
-          <p:cNvPr id="177" name="DSPIRA 4"/>
+          <p:cNvPr id="182" name="WVU DSPIRA university"/>
           <p:cNvSpPr>
             <a:spLocks noGrp="1"/>
           </p:cNvSpPr>
@@ -11383,8 +11959,8 @@
         </p:nvSpPr>
         <p:spPr>
           <a:xfrm>
-            <a:off x="228600" y="7978775"/>
-            <a:ext cx="6667500" cy="228600"/>
+            <a:off x="7223125" y="114300"/>
+            <a:ext cx="2628900" cy="171450"/>
           </a:xfrm>
           <a:prstGeom prst="rect">
             <a:avLst/>
@@ -11400,10 +11976,10 @@
           </a:bodyPr>
           <a:lstStyle/>
           <a:p>
-            <a:pPr>
-              <a:defRPr sz="900" b="0">
-                <a:solidFill>
-                  <a:srgbClr val="002855"/>
+            <a:pPr algn="r">
+              <a:defRPr sz="900">
+                <a:solidFill>
+                  <a:srgbClr val="FFFFFF"/>
                 </a:solidFill>
                 <a:latin typeface="Arial"/>
                 <a:ea typeface="Arial"/>
@@ -11411,66 +11987,15 @@
               </a:defRPr>
             </a:pPr>
             <a:r>
-              <a:rPr sz="900" b="0">
-                <a:solidFill>
-                  <a:srgbClr val="002855"/>
+              <a:rPr sz="900">
+                <a:solidFill>
+                  <a:srgbClr val="FFFFFF"/>
                 </a:solidFill>
                 <a:latin typeface="Arial"/>
                 <a:ea typeface="Arial"/>
                 <a:cs typeface="Arial"/>
               </a:rPr>
-              <a:t>wvurail.org/dspira</a:t>
-            </a:r>
-          </a:p>
-        </p:txBody>
-      </p:sp>
-      <p:sp>
-        <p:nvSpPr>
-          <p:cNvPr id="178" name="DSPIRA 5"/>
-          <p:cNvSpPr>
-            <a:spLocks noGrp="1"/>
-          </p:cNvSpPr>
-          <p:nvPr/>
-        </p:nvSpPr>
-        <p:spPr>
-          <a:xfrm>
-            <a:off x="9080500" y="7978775"/>
-            <a:ext cx="762000" cy="228600"/>
-          </a:xfrm>
-          <a:prstGeom prst="rect">
-            <a:avLst/>
-          </a:prstGeom>
-          <a:noFill/>
-          <a:ln w="0">
-            <a:noFill/>
-          </a:ln>
-        </p:spPr>
-        <p:txBody>
-          <a:bodyPr>
-            <a:noAutofit/>
-          </a:bodyPr>
-          <a:lstStyle/>
-          <a:p>
-            <a:pPr>
-              <a:defRPr sz="900" b="0">
-                <a:solidFill>
-                  <a:srgbClr val="002855"/>
-                </a:solidFill>
-                <a:latin typeface="Arial"/>
-                <a:ea typeface="Arial"/>
-                <a:cs typeface="Arial"/>
-              </a:defRPr>
-            </a:pPr>
-            <a:r>
-              <a:rPr sz="900" b="0">
-                <a:solidFill>
-                  <a:srgbClr val="002855"/>
-                </a:solidFill>
-                <a:latin typeface="Arial"/>
-                <a:ea typeface="Arial"/>
-                <a:cs typeface="Arial"/>
-              </a:rPr>
-              <a:t>15 of 19</a:t>
+              <a:t>WEST VIRGINIA UNIVERSITY</a:t>
             </a:r>
           </a:p>
         </p:txBody>
@@ -11787,30 +12312,6 @@
       </p:sp>
       <p:sp>
         <p:nvSpPr>
-          <p:cNvPr id="185" name="DSPIRA 1"/>
-          <p:cNvSpPr>
-            <a:spLocks noGrp="1"/>
-          </p:cNvSpPr>
-          <p:nvPr/>
-        </p:nvSpPr>
-        <p:spPr>
-          <a:xfrm>
-            <a:off x="0" y="0"/>
-            <a:ext cx="10080625" cy="342900"/>
-          </a:xfrm>
-          <a:prstGeom prst="rect">
-            <a:avLst/>
-          </a:prstGeom>
-          <a:solidFill>
-            <a:srgbClr val="FFFFFF"/>
-          </a:solidFill>
-          <a:ln w="0">
-            <a:noFill/>
-          </a:ln>
-        </p:spPr>
-      </p:sp>
-      <p:sp>
-        <p:nvSpPr>
           <p:cNvPr id="186" name="DSPIRA 2"/>
           <p:cNvSpPr>
             <a:spLocks noGrp="1"/>
@@ -11835,7 +12336,7 @@
       </p:sp>
       <p:sp>
         <p:nvSpPr>
-          <p:cNvPr id="187" name="DSPIRA 3"/>
+          <p:cNvPr id="188" name="DSPIRA 4"/>
           <p:cNvSpPr>
             <a:spLocks noGrp="1"/>
           </p:cNvSpPr>
@@ -11843,8 +12344,8 @@
         </p:nvSpPr>
         <p:spPr>
           <a:xfrm>
-            <a:off x="228600" y="76200"/>
-            <a:ext cx="4762500" cy="228600"/>
+            <a:off x="228600" y="7978775"/>
+            <a:ext cx="6667500" cy="228600"/>
           </a:xfrm>
           <a:prstGeom prst="rect">
             <a:avLst/>
@@ -11861,7 +12362,7 @@
           <a:lstStyle/>
           <a:p>
             <a:pPr>
-              <a:defRPr sz="1200" b="1">
+              <a:defRPr sz="900" b="0">
                 <a:solidFill>
                   <a:srgbClr val="002855"/>
                 </a:solidFill>
@@ -11871,9 +12372,159 @@
               </a:defRPr>
             </a:pPr>
             <a:r>
-              <a:rPr sz="1200" b="1">
+              <a:rPr sz="900" b="0">
                 <a:solidFill>
                   <a:srgbClr val="002855"/>
+                </a:solidFill>
+                <a:latin typeface="Arial"/>
+                <a:ea typeface="Arial"/>
+                <a:cs typeface="Arial"/>
+              </a:rPr>
+              <a:t>wvurail.org/dspira</a:t>
+            </a:r>
+          </a:p>
+        </p:txBody>
+      </p:sp>
+      <p:sp>
+        <p:nvSpPr>
+          <p:cNvPr id="189" name="DSPIRA 5"/>
+          <p:cNvSpPr>
+            <a:spLocks noGrp="1"/>
+          </p:cNvSpPr>
+          <p:nvPr/>
+        </p:nvSpPr>
+        <p:spPr>
+          <a:xfrm>
+            <a:off x="9080500" y="7978775"/>
+            <a:ext cx="762000" cy="228600"/>
+          </a:xfrm>
+          <a:prstGeom prst="rect">
+            <a:avLst/>
+          </a:prstGeom>
+          <a:noFill/>
+          <a:ln w="0">
+            <a:noFill/>
+          </a:ln>
+        </p:spPr>
+        <p:txBody>
+          <a:bodyPr>
+            <a:noAutofit/>
+          </a:bodyPr>
+          <a:lstStyle/>
+          <a:p>
+            <a:pPr>
+              <a:defRPr sz="900" b="0">
+                <a:solidFill>
+                  <a:srgbClr val="002855"/>
+                </a:solidFill>
+                <a:latin typeface="Arial"/>
+                <a:ea typeface="Arial"/>
+                <a:cs typeface="Arial"/>
+              </a:defRPr>
+            </a:pPr>
+            <a:r>
+              <a:rPr sz="900" b="0">
+                <a:solidFill>
+                  <a:srgbClr val="002855"/>
+                </a:solidFill>
+                <a:latin typeface="Arial"/>
+                <a:ea typeface="Arial"/>
+                <a:cs typeface="Arial"/>
+              </a:rPr>
+              <a:t>16 of 19</a:t>
+            </a:r>
+          </a:p>
+        </p:txBody>
+      </p:sp>
+      <p:sp>
+        <p:nvSpPr>
+          <p:cNvPr id="190" name="WVU DSPIRA navy band"/>
+          <p:cNvSpPr>
+            <a:spLocks noGrp="1"/>
+          </p:cNvSpPr>
+          <p:nvPr/>
+        </p:nvSpPr>
+        <p:spPr>
+          <a:xfrm>
+            <a:off x="0" y="0"/>
+            <a:ext cx="10080625" cy="323850"/>
+          </a:xfrm>
+          <a:prstGeom prst="rect">
+            <a:avLst/>
+          </a:prstGeom>
+          <a:solidFill>
+            <a:srgbClr val="002855"/>
+          </a:solidFill>
+          <a:ln w="0">
+            <a:noFill/>
+          </a:ln>
+        </p:spPr>
+      </p:sp>
+      <p:sp>
+        <p:nvSpPr>
+          <p:cNvPr id="191" name="WVU DSPIRA gold rule"/>
+          <p:cNvSpPr>
+            <a:spLocks noGrp="1"/>
+          </p:cNvSpPr>
+          <p:nvPr/>
+        </p:nvSpPr>
+        <p:spPr>
+          <a:xfrm>
+            <a:off x="0" y="323850"/>
+            <a:ext cx="10080625" cy="19050"/>
+          </a:xfrm>
+          <a:prstGeom prst="rect">
+            <a:avLst/>
+          </a:prstGeom>
+          <a:solidFill>
+            <a:srgbClr val="EEAA00"/>
+          </a:solidFill>
+          <a:ln w="0">
+            <a:noFill/>
+          </a:ln>
+        </p:spPr>
+      </p:sp>
+      <p:sp>
+        <p:nvSpPr>
+          <p:cNvPr id="192" name="WVU DSPIRA name"/>
+          <p:cNvSpPr>
+            <a:spLocks noGrp="1"/>
+          </p:cNvSpPr>
+          <p:nvPr/>
+        </p:nvSpPr>
+        <p:spPr>
+          <a:xfrm>
+            <a:off x="228600" y="19050"/>
+            <a:ext cx="2857500" cy="257175"/>
+          </a:xfrm>
+          <a:prstGeom prst="rect">
+            <a:avLst/>
+          </a:prstGeom>
+          <a:noFill/>
+          <a:ln w="0">
+            <a:noFill/>
+          </a:ln>
+        </p:spPr>
+        <p:txBody>
+          <a:bodyPr>
+            <a:noAutofit/>
+          </a:bodyPr>
+          <a:lstStyle/>
+          <a:p>
+            <a:pPr>
+              <a:defRPr sz="1600" b="1">
+                <a:solidFill>
+                  <a:srgbClr val="FFFFFF"/>
+                </a:solidFill>
+                <a:latin typeface="Arial"/>
+                <a:ea typeface="Arial"/>
+                <a:cs typeface="Arial"/>
+              </a:defRPr>
+            </a:pPr>
+            <a:r>
+              <a:rPr sz="1600" b="1">
+                <a:solidFill>
+                  <a:srgbClr val="FFFFFF"/>
                 </a:solidFill>
                 <a:latin typeface="Arial"/>
                 <a:ea typeface="Arial"/>
@@ -11886,7 +12537,7 @@
       </p:sp>
       <p:sp>
         <p:nvSpPr>
-          <p:cNvPr id="188" name="DSPIRA 4"/>
+          <p:cNvPr id="193" name="WVU DSPIRA university"/>
           <p:cNvSpPr>
             <a:spLocks noGrp="1"/>
           </p:cNvSpPr>
@@ -11894,8 +12545,8 @@
         </p:nvSpPr>
         <p:spPr>
           <a:xfrm>
-            <a:off x="228600" y="7978775"/>
-            <a:ext cx="6667500" cy="228600"/>
+            <a:off x="7223125" y="114300"/>
+            <a:ext cx="2628900" cy="171450"/>
           </a:xfrm>
           <a:prstGeom prst="rect">
             <a:avLst/>
@@ -11911,10 +12562,10 @@
           </a:bodyPr>
           <a:lstStyle/>
           <a:p>
-            <a:pPr>
-              <a:defRPr sz="900" b="0">
-                <a:solidFill>
-                  <a:srgbClr val="002855"/>
+            <a:pPr algn="r">
+              <a:defRPr sz="900">
+                <a:solidFill>
+                  <a:srgbClr val="FFFFFF"/>
                 </a:solidFill>
                 <a:latin typeface="Arial"/>
                 <a:ea typeface="Arial"/>
@@ -11922,66 +12573,15 @@
               </a:defRPr>
             </a:pPr>
             <a:r>
-              <a:rPr sz="900" b="0">
-                <a:solidFill>
-                  <a:srgbClr val="002855"/>
+              <a:rPr sz="900">
+                <a:solidFill>
+                  <a:srgbClr val="FFFFFF"/>
                 </a:solidFill>
                 <a:latin typeface="Arial"/>
                 <a:ea typeface="Arial"/>
                 <a:cs typeface="Arial"/>
               </a:rPr>
-              <a:t>wvurail.org/dspira</a:t>
-            </a:r>
-          </a:p>
-        </p:txBody>
-      </p:sp>
-      <p:sp>
-        <p:nvSpPr>
-          <p:cNvPr id="189" name="DSPIRA 5"/>
-          <p:cNvSpPr>
-            <a:spLocks noGrp="1"/>
-          </p:cNvSpPr>
-          <p:nvPr/>
-        </p:nvSpPr>
-        <p:spPr>
-          <a:xfrm>
-            <a:off x="9080500" y="7978775"/>
-            <a:ext cx="762000" cy="228600"/>
-          </a:xfrm>
-          <a:prstGeom prst="rect">
-            <a:avLst/>
-          </a:prstGeom>
-          <a:noFill/>
-          <a:ln w="0">
-            <a:noFill/>
-          </a:ln>
-        </p:spPr>
-        <p:txBody>
-          <a:bodyPr>
-            <a:noAutofit/>
-          </a:bodyPr>
-          <a:lstStyle/>
-          <a:p>
-            <a:pPr>
-              <a:defRPr sz="900" b="0">
-                <a:solidFill>
-                  <a:srgbClr val="002855"/>
-                </a:solidFill>
-                <a:latin typeface="Arial"/>
-                <a:ea typeface="Arial"/>
-                <a:cs typeface="Arial"/>
-              </a:defRPr>
-            </a:pPr>
-            <a:r>
-              <a:rPr sz="900" b="0">
-                <a:solidFill>
-                  <a:srgbClr val="002855"/>
-                </a:solidFill>
-                <a:latin typeface="Arial"/>
-                <a:ea typeface="Arial"/>
-                <a:cs typeface="Arial"/>
-              </a:rPr>
-              <a:t>16 of 19</a:t>
+              <a:t>WEST VIRGINIA UNIVERSITY</a:t>
             </a:r>
           </a:p>
         </p:txBody>
@@ -12487,30 +13087,6 @@
       </p:sp>
       <p:sp>
         <p:nvSpPr>
-          <p:cNvPr id="191" name="DSPIRA 1"/>
-          <p:cNvSpPr>
-            <a:spLocks noGrp="1"/>
-          </p:cNvSpPr>
-          <p:nvPr/>
-        </p:nvSpPr>
-        <p:spPr>
-          <a:xfrm>
-            <a:off x="0" y="0"/>
-            <a:ext cx="10080625" cy="342900"/>
-          </a:xfrm>
-          <a:prstGeom prst="rect">
-            <a:avLst/>
-          </a:prstGeom>
-          <a:solidFill>
-            <a:srgbClr val="FFFFFF"/>
-          </a:solidFill>
-          <a:ln w="0">
-            <a:noFill/>
-          </a:ln>
-        </p:spPr>
-      </p:sp>
-      <p:sp>
-        <p:nvSpPr>
           <p:cNvPr id="192" name="DSPIRA 2"/>
           <p:cNvSpPr>
             <a:spLocks noGrp="1"/>
@@ -12535,7 +13111,7 @@
       </p:sp>
       <p:sp>
         <p:nvSpPr>
-          <p:cNvPr id="193" name="DSPIRA 3"/>
+          <p:cNvPr id="194" name="DSPIRA 4"/>
           <p:cNvSpPr>
             <a:spLocks noGrp="1"/>
           </p:cNvSpPr>
@@ -12543,8 +13119,8 @@
         </p:nvSpPr>
         <p:spPr>
           <a:xfrm>
-            <a:off x="228600" y="76200"/>
-            <a:ext cx="4762500" cy="228600"/>
+            <a:off x="228600" y="7978775"/>
+            <a:ext cx="6667500" cy="228600"/>
           </a:xfrm>
           <a:prstGeom prst="rect">
             <a:avLst/>
@@ -12561,7 +13137,7 @@
           <a:lstStyle/>
           <a:p>
             <a:pPr>
-              <a:defRPr sz="1200" b="1">
+              <a:defRPr sz="900" b="0">
                 <a:solidFill>
                   <a:srgbClr val="002855"/>
                 </a:solidFill>
@@ -12571,9 +13147,159 @@
               </a:defRPr>
             </a:pPr>
             <a:r>
-              <a:rPr sz="1200" b="1">
+              <a:rPr sz="900" b="0">
                 <a:solidFill>
                   <a:srgbClr val="002855"/>
+                </a:solidFill>
+                <a:latin typeface="Arial"/>
+                <a:ea typeface="Arial"/>
+                <a:cs typeface="Arial"/>
+              </a:rPr>
+              <a:t>wvurail.org/dspira</a:t>
+            </a:r>
+          </a:p>
+        </p:txBody>
+      </p:sp>
+      <p:sp>
+        <p:nvSpPr>
+          <p:cNvPr id="195" name="DSPIRA 5"/>
+          <p:cNvSpPr>
+            <a:spLocks noGrp="1"/>
+          </p:cNvSpPr>
+          <p:nvPr/>
+        </p:nvSpPr>
+        <p:spPr>
+          <a:xfrm>
+            <a:off x="9080500" y="7978775"/>
+            <a:ext cx="762000" cy="228600"/>
+          </a:xfrm>
+          <a:prstGeom prst="rect">
+            <a:avLst/>
+          </a:prstGeom>
+          <a:noFill/>
+          <a:ln w="0">
+            <a:noFill/>
+          </a:ln>
+        </p:spPr>
+        <p:txBody>
+          <a:bodyPr>
+            <a:noAutofit/>
+          </a:bodyPr>
+          <a:lstStyle/>
+          <a:p>
+            <a:pPr>
+              <a:defRPr sz="900" b="0">
+                <a:solidFill>
+                  <a:srgbClr val="002855"/>
+                </a:solidFill>
+                <a:latin typeface="Arial"/>
+                <a:ea typeface="Arial"/>
+                <a:cs typeface="Arial"/>
+              </a:defRPr>
+            </a:pPr>
+            <a:r>
+              <a:rPr sz="900" b="0">
+                <a:solidFill>
+                  <a:srgbClr val="002855"/>
+                </a:solidFill>
+                <a:latin typeface="Arial"/>
+                <a:ea typeface="Arial"/>
+                <a:cs typeface="Arial"/>
+              </a:rPr>
+              <a:t>17 of 19</a:t>
+            </a:r>
+          </a:p>
+        </p:txBody>
+      </p:sp>
+      <p:sp>
+        <p:nvSpPr>
+          <p:cNvPr id="196" name="WVU DSPIRA navy band"/>
+          <p:cNvSpPr>
+            <a:spLocks noGrp="1"/>
+          </p:cNvSpPr>
+          <p:nvPr/>
+        </p:nvSpPr>
+        <p:spPr>
+          <a:xfrm>
+            <a:off x="0" y="0"/>
+            <a:ext cx="10080625" cy="323850"/>
+          </a:xfrm>
+          <a:prstGeom prst="rect">
+            <a:avLst/>
+          </a:prstGeom>
+          <a:solidFill>
+            <a:srgbClr val="002855"/>
+          </a:solidFill>
+          <a:ln w="0">
+            <a:noFill/>
+          </a:ln>
+        </p:spPr>
+      </p:sp>
+      <p:sp>
+        <p:nvSpPr>
+          <p:cNvPr id="197" name="WVU DSPIRA gold rule"/>
+          <p:cNvSpPr>
+            <a:spLocks noGrp="1"/>
+          </p:cNvSpPr>
+          <p:nvPr/>
+        </p:nvSpPr>
+        <p:spPr>
+          <a:xfrm>
+            <a:off x="0" y="323850"/>
+            <a:ext cx="10080625" cy="19050"/>
+          </a:xfrm>
+          <a:prstGeom prst="rect">
+            <a:avLst/>
+          </a:prstGeom>
+          <a:solidFill>
+            <a:srgbClr val="EEAA00"/>
+          </a:solidFill>
+          <a:ln w="0">
+            <a:noFill/>
+          </a:ln>
+        </p:spPr>
+      </p:sp>
+      <p:sp>
+        <p:nvSpPr>
+          <p:cNvPr id="198" name="WVU DSPIRA name"/>
+          <p:cNvSpPr>
+            <a:spLocks noGrp="1"/>
+          </p:cNvSpPr>
+          <p:nvPr/>
+        </p:nvSpPr>
+        <p:spPr>
+          <a:xfrm>
+            <a:off x="228600" y="19050"/>
+            <a:ext cx="2857500" cy="257175"/>
+          </a:xfrm>
+          <a:prstGeom prst="rect">
+            <a:avLst/>
+          </a:prstGeom>
+          <a:noFill/>
+          <a:ln w="0">
+            <a:noFill/>
+          </a:ln>
+        </p:spPr>
+        <p:txBody>
+          <a:bodyPr>
+            <a:noAutofit/>
+          </a:bodyPr>
+          <a:lstStyle/>
+          <a:p>
+            <a:pPr>
+              <a:defRPr sz="1600" b="1">
+                <a:solidFill>
+                  <a:srgbClr val="FFFFFF"/>
+                </a:solidFill>
+                <a:latin typeface="Arial"/>
+                <a:ea typeface="Arial"/>
+                <a:cs typeface="Arial"/>
+              </a:defRPr>
+            </a:pPr>
+            <a:r>
+              <a:rPr sz="1600" b="1">
+                <a:solidFill>
+                  <a:srgbClr val="FFFFFF"/>
                 </a:solidFill>
                 <a:latin typeface="Arial"/>
                 <a:ea typeface="Arial"/>
@@ -12586,7 +13312,7 @@
       </p:sp>
       <p:sp>
         <p:nvSpPr>
-          <p:cNvPr id="194" name="DSPIRA 4"/>
+          <p:cNvPr id="199" name="WVU DSPIRA university"/>
           <p:cNvSpPr>
             <a:spLocks noGrp="1"/>
           </p:cNvSpPr>
@@ -12594,8 +13320,8 @@
         </p:nvSpPr>
         <p:spPr>
           <a:xfrm>
-            <a:off x="228600" y="7978775"/>
-            <a:ext cx="6667500" cy="228600"/>
+            <a:off x="7223125" y="114300"/>
+            <a:ext cx="2628900" cy="171450"/>
           </a:xfrm>
           <a:prstGeom prst="rect">
             <a:avLst/>
@@ -12611,10 +13337,10 @@
           </a:bodyPr>
           <a:lstStyle/>
           <a:p>
-            <a:pPr>
-              <a:defRPr sz="900" b="0">
-                <a:solidFill>
-                  <a:srgbClr val="002855"/>
+            <a:pPr algn="r">
+              <a:defRPr sz="900">
+                <a:solidFill>
+                  <a:srgbClr val="FFFFFF"/>
                 </a:solidFill>
                 <a:latin typeface="Arial"/>
                 <a:ea typeface="Arial"/>
@@ -12622,66 +13348,15 @@
               </a:defRPr>
             </a:pPr>
             <a:r>
-              <a:rPr sz="900" b="0">
-                <a:solidFill>
-                  <a:srgbClr val="002855"/>
+              <a:rPr sz="900">
+                <a:solidFill>
+                  <a:srgbClr val="FFFFFF"/>
                 </a:solidFill>
                 <a:latin typeface="Arial"/>
                 <a:ea typeface="Arial"/>
                 <a:cs typeface="Arial"/>
               </a:rPr>
-              <a:t>wvurail.org/dspira</a:t>
-            </a:r>
-          </a:p>
-        </p:txBody>
-      </p:sp>
-      <p:sp>
-        <p:nvSpPr>
-          <p:cNvPr id="195" name="DSPIRA 5"/>
-          <p:cNvSpPr>
-            <a:spLocks noGrp="1"/>
-          </p:cNvSpPr>
-          <p:nvPr/>
-        </p:nvSpPr>
-        <p:spPr>
-          <a:xfrm>
-            <a:off x="9080500" y="7978775"/>
-            <a:ext cx="762000" cy="228600"/>
-          </a:xfrm>
-          <a:prstGeom prst="rect">
-            <a:avLst/>
-          </a:prstGeom>
-          <a:noFill/>
-          <a:ln w="0">
-            <a:noFill/>
-          </a:ln>
-        </p:spPr>
-        <p:txBody>
-          <a:bodyPr>
-            <a:noAutofit/>
-          </a:bodyPr>
-          <a:lstStyle/>
-          <a:p>
-            <a:pPr>
-              <a:defRPr sz="900" b="0">
-                <a:solidFill>
-                  <a:srgbClr val="002855"/>
-                </a:solidFill>
-                <a:latin typeface="Arial"/>
-                <a:ea typeface="Arial"/>
-                <a:cs typeface="Arial"/>
-              </a:defRPr>
-            </a:pPr>
-            <a:r>
-              <a:rPr sz="900" b="0">
-                <a:solidFill>
-                  <a:srgbClr val="002855"/>
-                </a:solidFill>
-                <a:latin typeface="Arial"/>
-                <a:ea typeface="Arial"/>
-                <a:cs typeface="Arial"/>
-              </a:rPr>
-              <a:t>17 of 19</a:t>
+              <a:t>WEST VIRGINIA UNIVERSITY</a:t>
             </a:r>
           </a:p>
         </p:txBody>
@@ -12972,30 +13647,6 @@
       </p:sp>
       <p:sp>
         <p:nvSpPr>
-          <p:cNvPr id="197" name="DSPIRA 1"/>
-          <p:cNvSpPr>
-            <a:spLocks noGrp="1"/>
-          </p:cNvSpPr>
-          <p:nvPr/>
-        </p:nvSpPr>
-        <p:spPr>
-          <a:xfrm>
-            <a:off x="0" y="0"/>
-            <a:ext cx="10080625" cy="342900"/>
-          </a:xfrm>
-          <a:prstGeom prst="rect">
-            <a:avLst/>
-          </a:prstGeom>
-          <a:solidFill>
-            <a:srgbClr val="FFFFFF"/>
-          </a:solidFill>
-          <a:ln w="0">
-            <a:noFill/>
-          </a:ln>
-        </p:spPr>
-      </p:sp>
-      <p:sp>
-        <p:nvSpPr>
           <p:cNvPr id="198" name="DSPIRA 2"/>
           <p:cNvSpPr>
             <a:spLocks noGrp="1"/>
@@ -13020,7 +13671,7 @@
       </p:sp>
       <p:sp>
         <p:nvSpPr>
-          <p:cNvPr id="199" name="DSPIRA 3"/>
+          <p:cNvPr id="200" name="DSPIRA 4"/>
           <p:cNvSpPr>
             <a:spLocks noGrp="1"/>
           </p:cNvSpPr>
@@ -13028,8 +13679,8 @@
         </p:nvSpPr>
         <p:spPr>
           <a:xfrm>
-            <a:off x="228600" y="76200"/>
-            <a:ext cx="4762500" cy="228600"/>
+            <a:off x="228600" y="7978775"/>
+            <a:ext cx="6667500" cy="228600"/>
           </a:xfrm>
           <a:prstGeom prst="rect">
             <a:avLst/>
@@ -13046,7 +13697,7 @@
           <a:lstStyle/>
           <a:p>
             <a:pPr>
-              <a:defRPr sz="1200" b="1">
+              <a:defRPr sz="900" b="0">
                 <a:solidFill>
                   <a:srgbClr val="002855"/>
                 </a:solidFill>
@@ -13056,9 +13707,159 @@
               </a:defRPr>
             </a:pPr>
             <a:r>
-              <a:rPr sz="1200" b="1">
+              <a:rPr sz="900" b="0">
                 <a:solidFill>
                   <a:srgbClr val="002855"/>
+                </a:solidFill>
+                <a:latin typeface="Arial"/>
+                <a:ea typeface="Arial"/>
+                <a:cs typeface="Arial"/>
+              </a:rPr>
+              <a:t>wvurail.org/dspira</a:t>
+            </a:r>
+          </a:p>
+        </p:txBody>
+      </p:sp>
+      <p:sp>
+        <p:nvSpPr>
+          <p:cNvPr id="201" name="DSPIRA 5"/>
+          <p:cNvSpPr>
+            <a:spLocks noGrp="1"/>
+          </p:cNvSpPr>
+          <p:nvPr/>
+        </p:nvSpPr>
+        <p:spPr>
+          <a:xfrm>
+            <a:off x="9080500" y="7978775"/>
+            <a:ext cx="762000" cy="228600"/>
+          </a:xfrm>
+          <a:prstGeom prst="rect">
+            <a:avLst/>
+          </a:prstGeom>
+          <a:noFill/>
+          <a:ln w="0">
+            <a:noFill/>
+          </a:ln>
+        </p:spPr>
+        <p:txBody>
+          <a:bodyPr>
+            <a:noAutofit/>
+          </a:bodyPr>
+          <a:lstStyle/>
+          <a:p>
+            <a:pPr>
+              <a:defRPr sz="900" b="0">
+                <a:solidFill>
+                  <a:srgbClr val="002855"/>
+                </a:solidFill>
+                <a:latin typeface="Arial"/>
+                <a:ea typeface="Arial"/>
+                <a:cs typeface="Arial"/>
+              </a:defRPr>
+            </a:pPr>
+            <a:r>
+              <a:rPr sz="900" b="0">
+                <a:solidFill>
+                  <a:srgbClr val="002855"/>
+                </a:solidFill>
+                <a:latin typeface="Arial"/>
+                <a:ea typeface="Arial"/>
+                <a:cs typeface="Arial"/>
+              </a:rPr>
+              <a:t>18 of 19</a:t>
+            </a:r>
+          </a:p>
+        </p:txBody>
+      </p:sp>
+      <p:sp>
+        <p:nvSpPr>
+          <p:cNvPr id="202" name="WVU DSPIRA navy band"/>
+          <p:cNvSpPr>
+            <a:spLocks noGrp="1"/>
+          </p:cNvSpPr>
+          <p:nvPr/>
+        </p:nvSpPr>
+        <p:spPr>
+          <a:xfrm>
+            <a:off x="0" y="0"/>
+            <a:ext cx="10080625" cy="323850"/>
+          </a:xfrm>
+          <a:prstGeom prst="rect">
+            <a:avLst/>
+          </a:prstGeom>
+          <a:solidFill>
+            <a:srgbClr val="002855"/>
+          </a:solidFill>
+          <a:ln w="0">
+            <a:noFill/>
+          </a:ln>
+        </p:spPr>
+      </p:sp>
+      <p:sp>
+        <p:nvSpPr>
+          <p:cNvPr id="203" name="WVU DSPIRA gold rule"/>
+          <p:cNvSpPr>
+            <a:spLocks noGrp="1"/>
+          </p:cNvSpPr>
+          <p:nvPr/>
+        </p:nvSpPr>
+        <p:spPr>
+          <a:xfrm>
+            <a:off x="0" y="323850"/>
+            <a:ext cx="10080625" cy="19050"/>
+          </a:xfrm>
+          <a:prstGeom prst="rect">
+            <a:avLst/>
+          </a:prstGeom>
+          <a:solidFill>
+            <a:srgbClr val="EEAA00"/>
+          </a:solidFill>
+          <a:ln w="0">
+            <a:noFill/>
+          </a:ln>
+        </p:spPr>
+      </p:sp>
+      <p:sp>
+        <p:nvSpPr>
+          <p:cNvPr id="204" name="WVU DSPIRA name"/>
+          <p:cNvSpPr>
+            <a:spLocks noGrp="1"/>
+          </p:cNvSpPr>
+          <p:nvPr/>
+        </p:nvSpPr>
+        <p:spPr>
+          <a:xfrm>
+            <a:off x="228600" y="19050"/>
+            <a:ext cx="2857500" cy="257175"/>
+          </a:xfrm>
+          <a:prstGeom prst="rect">
+            <a:avLst/>
+          </a:prstGeom>
+          <a:noFill/>
+          <a:ln w="0">
+            <a:noFill/>
+          </a:ln>
+        </p:spPr>
+        <p:txBody>
+          <a:bodyPr>
+            <a:noAutofit/>
+          </a:bodyPr>
+          <a:lstStyle/>
+          <a:p>
+            <a:pPr>
+              <a:defRPr sz="1600" b="1">
+                <a:solidFill>
+                  <a:srgbClr val="FFFFFF"/>
+                </a:solidFill>
+                <a:latin typeface="Arial"/>
+                <a:ea typeface="Arial"/>
+                <a:cs typeface="Arial"/>
+              </a:defRPr>
+            </a:pPr>
+            <a:r>
+              <a:rPr sz="1600" b="1">
+                <a:solidFill>
+                  <a:srgbClr val="FFFFFF"/>
                 </a:solidFill>
                 <a:latin typeface="Arial"/>
                 <a:ea typeface="Arial"/>
@@ -13071,7 +13872,7 @@
       </p:sp>
       <p:sp>
         <p:nvSpPr>
-          <p:cNvPr id="200" name="DSPIRA 4"/>
+          <p:cNvPr id="205" name="WVU DSPIRA university"/>
           <p:cNvSpPr>
             <a:spLocks noGrp="1"/>
           </p:cNvSpPr>
@@ -13079,8 +13880,8 @@
         </p:nvSpPr>
         <p:spPr>
           <a:xfrm>
-            <a:off x="228600" y="7978775"/>
-            <a:ext cx="6667500" cy="228600"/>
+            <a:off x="7223125" y="114300"/>
+            <a:ext cx="2628900" cy="171450"/>
           </a:xfrm>
           <a:prstGeom prst="rect">
             <a:avLst/>
@@ -13096,10 +13897,10 @@
           </a:bodyPr>
           <a:lstStyle/>
           <a:p>
-            <a:pPr>
-              <a:defRPr sz="900" b="0">
-                <a:solidFill>
-                  <a:srgbClr val="002855"/>
+            <a:pPr algn="r">
+              <a:defRPr sz="900">
+                <a:solidFill>
+                  <a:srgbClr val="FFFFFF"/>
                 </a:solidFill>
                 <a:latin typeface="Arial"/>
                 <a:ea typeface="Arial"/>
@@ -13107,66 +13908,15 @@
               </a:defRPr>
             </a:pPr>
             <a:r>
-              <a:rPr sz="900" b="0">
-                <a:solidFill>
-                  <a:srgbClr val="002855"/>
+              <a:rPr sz="900">
+                <a:solidFill>
+                  <a:srgbClr val="FFFFFF"/>
                 </a:solidFill>
                 <a:latin typeface="Arial"/>
                 <a:ea typeface="Arial"/>
                 <a:cs typeface="Arial"/>
               </a:rPr>
-              <a:t>wvurail.org/dspira</a:t>
-            </a:r>
-          </a:p>
-        </p:txBody>
-      </p:sp>
-      <p:sp>
-        <p:nvSpPr>
-          <p:cNvPr id="201" name="DSPIRA 5"/>
-          <p:cNvSpPr>
-            <a:spLocks noGrp="1"/>
-          </p:cNvSpPr>
-          <p:nvPr/>
-        </p:nvSpPr>
-        <p:spPr>
-          <a:xfrm>
-            <a:off x="9080500" y="7978775"/>
-            <a:ext cx="762000" cy="228600"/>
-          </a:xfrm>
-          <a:prstGeom prst="rect">
-            <a:avLst/>
-          </a:prstGeom>
-          <a:noFill/>
-          <a:ln w="0">
-            <a:noFill/>
-          </a:ln>
-        </p:spPr>
-        <p:txBody>
-          <a:bodyPr>
-            <a:noAutofit/>
-          </a:bodyPr>
-          <a:lstStyle/>
-          <a:p>
-            <a:pPr>
-              <a:defRPr sz="900" b="0">
-                <a:solidFill>
-                  <a:srgbClr val="002855"/>
-                </a:solidFill>
-                <a:latin typeface="Arial"/>
-                <a:ea typeface="Arial"/>
-                <a:cs typeface="Arial"/>
-              </a:defRPr>
-            </a:pPr>
-            <a:r>
-              <a:rPr sz="900" b="0">
-                <a:solidFill>
-                  <a:srgbClr val="002855"/>
-                </a:solidFill>
-                <a:latin typeface="Arial"/>
-                <a:ea typeface="Arial"/>
-                <a:cs typeface="Arial"/>
-              </a:rPr>
-              <a:t>18 of 19</a:t>
+              <a:t>WEST VIRGINIA UNIVERSITY</a:t>
             </a:r>
           </a:p>
         </p:txBody>
@@ -13381,30 +14131,6 @@
       </p:cxnSp>
       <p:sp>
         <p:nvSpPr>
-          <p:cNvPr id="207" name="DSPIRA 1"/>
-          <p:cNvSpPr>
-            <a:spLocks noGrp="1"/>
-          </p:cNvSpPr>
-          <p:nvPr/>
-        </p:nvSpPr>
-        <p:spPr>
-          <a:xfrm>
-            <a:off x="0" y="0"/>
-            <a:ext cx="10080625" cy="342900"/>
-          </a:xfrm>
-          <a:prstGeom prst="rect">
-            <a:avLst/>
-          </a:prstGeom>
-          <a:solidFill>
-            <a:srgbClr val="FFFFFF"/>
-          </a:solidFill>
-          <a:ln w="0">
-            <a:noFill/>
-          </a:ln>
-        </p:spPr>
-      </p:sp>
-      <p:sp>
-        <p:nvSpPr>
           <p:cNvPr id="208" name="DSPIRA 2"/>
           <p:cNvSpPr>
             <a:spLocks noGrp="1"/>
@@ -13429,7 +14155,7 @@
       </p:sp>
       <p:sp>
         <p:nvSpPr>
-          <p:cNvPr id="209" name="DSPIRA 3"/>
+          <p:cNvPr id="210" name="DSPIRA 4"/>
           <p:cNvSpPr>
             <a:spLocks noGrp="1"/>
           </p:cNvSpPr>
@@ -13437,8 +14163,8 @@
         </p:nvSpPr>
         <p:spPr>
           <a:xfrm>
-            <a:off x="228600" y="76200"/>
-            <a:ext cx="4762500" cy="228600"/>
+            <a:off x="228600" y="7978775"/>
+            <a:ext cx="6667500" cy="228600"/>
           </a:xfrm>
           <a:prstGeom prst="rect">
             <a:avLst/>
@@ -13455,7 +14181,7 @@
           <a:lstStyle/>
           <a:p>
             <a:pPr>
-              <a:defRPr sz="1200" b="1">
+              <a:defRPr sz="900" b="0">
                 <a:solidFill>
                   <a:srgbClr val="002855"/>
                 </a:solidFill>
@@ -13465,9 +14191,159 @@
               </a:defRPr>
             </a:pPr>
             <a:r>
-              <a:rPr sz="1200" b="1">
+              <a:rPr sz="900" b="0">
                 <a:solidFill>
                   <a:srgbClr val="002855"/>
+                </a:solidFill>
+                <a:latin typeface="Arial"/>
+                <a:ea typeface="Arial"/>
+                <a:cs typeface="Arial"/>
+              </a:rPr>
+              <a:t>wvurail.org/dspira</a:t>
+            </a:r>
+          </a:p>
+        </p:txBody>
+      </p:sp>
+      <p:sp>
+        <p:nvSpPr>
+          <p:cNvPr id="211" name="DSPIRA 5"/>
+          <p:cNvSpPr>
+            <a:spLocks noGrp="1"/>
+          </p:cNvSpPr>
+          <p:nvPr/>
+        </p:nvSpPr>
+        <p:spPr>
+          <a:xfrm>
+            <a:off x="9080500" y="7978775"/>
+            <a:ext cx="762000" cy="228600"/>
+          </a:xfrm>
+          <a:prstGeom prst="rect">
+            <a:avLst/>
+          </a:prstGeom>
+          <a:noFill/>
+          <a:ln w="0">
+            <a:noFill/>
+          </a:ln>
+        </p:spPr>
+        <p:txBody>
+          <a:bodyPr>
+            <a:noAutofit/>
+          </a:bodyPr>
+          <a:lstStyle/>
+          <a:p>
+            <a:pPr>
+              <a:defRPr sz="900" b="0">
+                <a:solidFill>
+                  <a:srgbClr val="002855"/>
+                </a:solidFill>
+                <a:latin typeface="Arial"/>
+                <a:ea typeface="Arial"/>
+                <a:cs typeface="Arial"/>
+              </a:defRPr>
+            </a:pPr>
+            <a:r>
+              <a:rPr sz="900" b="0">
+                <a:solidFill>
+                  <a:srgbClr val="002855"/>
+                </a:solidFill>
+                <a:latin typeface="Arial"/>
+                <a:ea typeface="Arial"/>
+                <a:cs typeface="Arial"/>
+              </a:rPr>
+              <a:t>19 of 19</a:t>
+            </a:r>
+          </a:p>
+        </p:txBody>
+      </p:sp>
+      <p:sp>
+        <p:nvSpPr>
+          <p:cNvPr id="212" name="WVU DSPIRA navy band"/>
+          <p:cNvSpPr>
+            <a:spLocks noGrp="1"/>
+          </p:cNvSpPr>
+          <p:nvPr/>
+        </p:nvSpPr>
+        <p:spPr>
+          <a:xfrm>
+            <a:off x="0" y="0"/>
+            <a:ext cx="10080625" cy="323850"/>
+          </a:xfrm>
+          <a:prstGeom prst="rect">
+            <a:avLst/>
+          </a:prstGeom>
+          <a:solidFill>
+            <a:srgbClr val="002855"/>
+          </a:solidFill>
+          <a:ln w="0">
+            <a:noFill/>
+          </a:ln>
+        </p:spPr>
+      </p:sp>
+      <p:sp>
+        <p:nvSpPr>
+          <p:cNvPr id="213" name="WVU DSPIRA gold rule"/>
+          <p:cNvSpPr>
+            <a:spLocks noGrp="1"/>
+          </p:cNvSpPr>
+          <p:nvPr/>
+        </p:nvSpPr>
+        <p:spPr>
+          <a:xfrm>
+            <a:off x="0" y="323850"/>
+            <a:ext cx="10080625" cy="19050"/>
+          </a:xfrm>
+          <a:prstGeom prst="rect">
+            <a:avLst/>
+          </a:prstGeom>
+          <a:solidFill>
+            <a:srgbClr val="EEAA00"/>
+          </a:solidFill>
+          <a:ln w="0">
+            <a:noFill/>
+          </a:ln>
+        </p:spPr>
+      </p:sp>
+      <p:sp>
+        <p:nvSpPr>
+          <p:cNvPr id="214" name="WVU DSPIRA name"/>
+          <p:cNvSpPr>
+            <a:spLocks noGrp="1"/>
+          </p:cNvSpPr>
+          <p:nvPr/>
+        </p:nvSpPr>
+        <p:spPr>
+          <a:xfrm>
+            <a:off x="228600" y="19050"/>
+            <a:ext cx="2857500" cy="257175"/>
+          </a:xfrm>
+          <a:prstGeom prst="rect">
+            <a:avLst/>
+          </a:prstGeom>
+          <a:noFill/>
+          <a:ln w="0">
+            <a:noFill/>
+          </a:ln>
+        </p:spPr>
+        <p:txBody>
+          <a:bodyPr>
+            <a:noAutofit/>
+          </a:bodyPr>
+          <a:lstStyle/>
+          <a:p>
+            <a:pPr>
+              <a:defRPr sz="1600" b="1">
+                <a:solidFill>
+                  <a:srgbClr val="FFFFFF"/>
+                </a:solidFill>
+                <a:latin typeface="Arial"/>
+                <a:ea typeface="Arial"/>
+                <a:cs typeface="Arial"/>
+              </a:defRPr>
+            </a:pPr>
+            <a:r>
+              <a:rPr sz="1600" b="1">
+                <a:solidFill>
+                  <a:srgbClr val="FFFFFF"/>
                 </a:solidFill>
                 <a:latin typeface="Arial"/>
                 <a:ea typeface="Arial"/>
@@ -13480,7 +14356,7 @@
       </p:sp>
       <p:sp>
         <p:nvSpPr>
-          <p:cNvPr id="210" name="DSPIRA 4"/>
+          <p:cNvPr id="215" name="WVU DSPIRA university"/>
           <p:cNvSpPr>
             <a:spLocks noGrp="1"/>
           </p:cNvSpPr>
@@ -13488,8 +14364,8 @@
         </p:nvSpPr>
         <p:spPr>
           <a:xfrm>
-            <a:off x="228600" y="7978775"/>
-            <a:ext cx="6667500" cy="228600"/>
+            <a:off x="7223125" y="114300"/>
+            <a:ext cx="2628900" cy="171450"/>
           </a:xfrm>
           <a:prstGeom prst="rect">
             <a:avLst/>
@@ -13505,10 +14381,10 @@
           </a:bodyPr>
           <a:lstStyle/>
           <a:p>
-            <a:pPr>
-              <a:defRPr sz="900" b="0">
-                <a:solidFill>
-                  <a:srgbClr val="002855"/>
+            <a:pPr algn="r">
+              <a:defRPr sz="900">
+                <a:solidFill>
+                  <a:srgbClr val="FFFFFF"/>
                 </a:solidFill>
                 <a:latin typeface="Arial"/>
                 <a:ea typeface="Arial"/>
@@ -13516,66 +14392,15 @@
               </a:defRPr>
             </a:pPr>
             <a:r>
-              <a:rPr sz="900" b="0">
-                <a:solidFill>
-                  <a:srgbClr val="002855"/>
+              <a:rPr sz="900">
+                <a:solidFill>
+                  <a:srgbClr val="FFFFFF"/>
                 </a:solidFill>
                 <a:latin typeface="Arial"/>
                 <a:ea typeface="Arial"/>
                 <a:cs typeface="Arial"/>
               </a:rPr>
-              <a:t>wvurail.org/dspira</a:t>
-            </a:r>
-          </a:p>
-        </p:txBody>
-      </p:sp>
-      <p:sp>
-        <p:nvSpPr>
-          <p:cNvPr id="211" name="DSPIRA 5"/>
-          <p:cNvSpPr>
-            <a:spLocks noGrp="1"/>
-          </p:cNvSpPr>
-          <p:nvPr/>
-        </p:nvSpPr>
-        <p:spPr>
-          <a:xfrm>
-            <a:off x="9080500" y="7978775"/>
-            <a:ext cx="762000" cy="228600"/>
-          </a:xfrm>
-          <a:prstGeom prst="rect">
-            <a:avLst/>
-          </a:prstGeom>
-          <a:noFill/>
-          <a:ln w="0">
-            <a:noFill/>
-          </a:ln>
-        </p:spPr>
-        <p:txBody>
-          <a:bodyPr>
-            <a:noAutofit/>
-          </a:bodyPr>
-          <a:lstStyle/>
-          <a:p>
-            <a:pPr>
-              <a:defRPr sz="900" b="0">
-                <a:solidFill>
-                  <a:srgbClr val="002855"/>
-                </a:solidFill>
-                <a:latin typeface="Arial"/>
-                <a:ea typeface="Arial"/>
-                <a:cs typeface="Arial"/>
-              </a:defRPr>
-            </a:pPr>
-            <a:r>
-              <a:rPr sz="900" b="0">
-                <a:solidFill>
-                  <a:srgbClr val="002855"/>
-                </a:solidFill>
-                <a:latin typeface="Arial"/>
-                <a:ea typeface="Arial"/>
-                <a:cs typeface="Arial"/>
-              </a:rPr>
-              <a:t>19 of 19</a:t>
+              <a:t>WEST VIRGINIA UNIVERSITY</a:t>
             </a:r>
           </a:p>
         </p:txBody>
@@ -13777,30 +14602,6 @@
       </p:pic>
       <p:sp>
         <p:nvSpPr>
-          <p:cNvPr id="70" name="DSPIRA 1"/>
-          <p:cNvSpPr>
-            <a:spLocks noGrp="1"/>
-          </p:cNvSpPr>
-          <p:nvPr/>
-        </p:nvSpPr>
-        <p:spPr>
-          <a:xfrm>
-            <a:off x="0" y="0"/>
-            <a:ext cx="10080625" cy="342900"/>
-          </a:xfrm>
-          <a:prstGeom prst="rect">
-            <a:avLst/>
-          </a:prstGeom>
-          <a:solidFill>
-            <a:srgbClr val="FFFFFF"/>
-          </a:solidFill>
-          <a:ln w="0">
-            <a:noFill/>
-          </a:ln>
-        </p:spPr>
-      </p:sp>
-      <p:sp>
-        <p:nvSpPr>
           <p:cNvPr id="71" name="DSPIRA 2"/>
           <p:cNvSpPr>
             <a:spLocks noGrp="1"/>
@@ -13825,7 +14626,7 @@
       </p:sp>
       <p:sp>
         <p:nvSpPr>
-          <p:cNvPr id="72" name="DSPIRA 3"/>
+          <p:cNvPr id="73" name="DSPIRA 4"/>
           <p:cNvSpPr>
             <a:spLocks noGrp="1"/>
           </p:cNvSpPr>
@@ -13833,8 +14634,8 @@
         </p:nvSpPr>
         <p:spPr>
           <a:xfrm>
-            <a:off x="228600" y="76200"/>
-            <a:ext cx="4762500" cy="228600"/>
+            <a:off x="228600" y="7978775"/>
+            <a:ext cx="6667500" cy="228600"/>
           </a:xfrm>
           <a:prstGeom prst="rect">
             <a:avLst/>
@@ -13851,7 +14652,7 @@
           <a:lstStyle/>
           <a:p>
             <a:pPr>
-              <a:defRPr sz="1200" b="1">
+              <a:defRPr sz="900" b="0">
                 <a:solidFill>
                   <a:srgbClr val="002855"/>
                 </a:solidFill>
@@ -13861,9 +14662,159 @@
               </a:defRPr>
             </a:pPr>
             <a:r>
-              <a:rPr sz="1200" b="1">
+              <a:rPr sz="900" b="0">
                 <a:solidFill>
                   <a:srgbClr val="002855"/>
+                </a:solidFill>
+                <a:latin typeface="Arial"/>
+                <a:ea typeface="Arial"/>
+                <a:cs typeface="Arial"/>
+              </a:rPr>
+              <a:t>wvurail.org/dspira</a:t>
+            </a:r>
+          </a:p>
+        </p:txBody>
+      </p:sp>
+      <p:sp>
+        <p:nvSpPr>
+          <p:cNvPr id="74" name="DSPIRA 5"/>
+          <p:cNvSpPr>
+            <a:spLocks noGrp="1"/>
+          </p:cNvSpPr>
+          <p:nvPr/>
+        </p:nvSpPr>
+        <p:spPr>
+          <a:xfrm>
+            <a:off x="9080500" y="7978775"/>
+            <a:ext cx="762000" cy="228600"/>
+          </a:xfrm>
+          <a:prstGeom prst="rect">
+            <a:avLst/>
+          </a:prstGeom>
+          <a:noFill/>
+          <a:ln w="0">
+            <a:noFill/>
+          </a:ln>
+        </p:spPr>
+        <p:txBody>
+          <a:bodyPr>
+            <a:noAutofit/>
+          </a:bodyPr>
+          <a:lstStyle/>
+          <a:p>
+            <a:pPr>
+              <a:defRPr sz="900" b="0">
+                <a:solidFill>
+                  <a:srgbClr val="002855"/>
+                </a:solidFill>
+                <a:latin typeface="Arial"/>
+                <a:ea typeface="Arial"/>
+                <a:cs typeface="Arial"/>
+              </a:defRPr>
+            </a:pPr>
+            <a:r>
+              <a:rPr sz="900" b="0">
+                <a:solidFill>
+                  <a:srgbClr val="002855"/>
+                </a:solidFill>
+                <a:latin typeface="Arial"/>
+                <a:ea typeface="Arial"/>
+                <a:cs typeface="Arial"/>
+              </a:rPr>
+              <a:t>2 of 19</a:t>
+            </a:r>
+          </a:p>
+        </p:txBody>
+      </p:sp>
+      <p:sp>
+        <p:nvSpPr>
+          <p:cNvPr id="75" name="WVU DSPIRA navy band"/>
+          <p:cNvSpPr>
+            <a:spLocks noGrp="1"/>
+          </p:cNvSpPr>
+          <p:nvPr/>
+        </p:nvSpPr>
+        <p:spPr>
+          <a:xfrm>
+            <a:off x="0" y="0"/>
+            <a:ext cx="10080625" cy="323850"/>
+          </a:xfrm>
+          <a:prstGeom prst="rect">
+            <a:avLst/>
+          </a:prstGeom>
+          <a:solidFill>
+            <a:srgbClr val="002855"/>
+          </a:solidFill>
+          <a:ln w="0">
+            <a:noFill/>
+          </a:ln>
+        </p:spPr>
+      </p:sp>
+      <p:sp>
+        <p:nvSpPr>
+          <p:cNvPr id="76" name="WVU DSPIRA gold rule"/>
+          <p:cNvSpPr>
+            <a:spLocks noGrp="1"/>
+          </p:cNvSpPr>
+          <p:nvPr/>
+        </p:nvSpPr>
+        <p:spPr>
+          <a:xfrm>
+            <a:off x="0" y="323850"/>
+            <a:ext cx="10080625" cy="19050"/>
+          </a:xfrm>
+          <a:prstGeom prst="rect">
+            <a:avLst/>
+          </a:prstGeom>
+          <a:solidFill>
+            <a:srgbClr val="EEAA00"/>
+          </a:solidFill>
+          <a:ln w="0">
+            <a:noFill/>
+          </a:ln>
+        </p:spPr>
+      </p:sp>
+      <p:sp>
+        <p:nvSpPr>
+          <p:cNvPr id="77" name="WVU DSPIRA name"/>
+          <p:cNvSpPr>
+            <a:spLocks noGrp="1"/>
+          </p:cNvSpPr>
+          <p:nvPr/>
+        </p:nvSpPr>
+        <p:spPr>
+          <a:xfrm>
+            <a:off x="228600" y="19050"/>
+            <a:ext cx="2857500" cy="257175"/>
+          </a:xfrm>
+          <a:prstGeom prst="rect">
+            <a:avLst/>
+          </a:prstGeom>
+          <a:noFill/>
+          <a:ln w="0">
+            <a:noFill/>
+          </a:ln>
+        </p:spPr>
+        <p:txBody>
+          <a:bodyPr>
+            <a:noAutofit/>
+          </a:bodyPr>
+          <a:lstStyle/>
+          <a:p>
+            <a:pPr>
+              <a:defRPr sz="1600" b="1">
+                <a:solidFill>
+                  <a:srgbClr val="FFFFFF"/>
+                </a:solidFill>
+                <a:latin typeface="Arial"/>
+                <a:ea typeface="Arial"/>
+                <a:cs typeface="Arial"/>
+              </a:defRPr>
+            </a:pPr>
+            <a:r>
+              <a:rPr sz="1600" b="1">
+                <a:solidFill>
+                  <a:srgbClr val="FFFFFF"/>
                 </a:solidFill>
                 <a:latin typeface="Arial"/>
                 <a:ea typeface="Arial"/>
@@ -13876,7 +14827,7 @@
       </p:sp>
       <p:sp>
         <p:nvSpPr>
-          <p:cNvPr id="73" name="DSPIRA 4"/>
+          <p:cNvPr id="78" name="WVU DSPIRA university"/>
           <p:cNvSpPr>
             <a:spLocks noGrp="1"/>
           </p:cNvSpPr>
@@ -13884,8 +14835,8 @@
         </p:nvSpPr>
         <p:spPr>
           <a:xfrm>
-            <a:off x="228600" y="7978775"/>
-            <a:ext cx="6667500" cy="228600"/>
+            <a:off x="7223125" y="114300"/>
+            <a:ext cx="2628900" cy="171450"/>
           </a:xfrm>
           <a:prstGeom prst="rect">
             <a:avLst/>
@@ -13901,10 +14852,10 @@
           </a:bodyPr>
           <a:lstStyle/>
           <a:p>
-            <a:pPr>
-              <a:defRPr sz="900" b="0">
-                <a:solidFill>
-                  <a:srgbClr val="002855"/>
+            <a:pPr algn="r">
+              <a:defRPr sz="900">
+                <a:solidFill>
+                  <a:srgbClr val="FFFFFF"/>
                 </a:solidFill>
                 <a:latin typeface="Arial"/>
                 <a:ea typeface="Arial"/>
@@ -13912,66 +14863,15 @@
               </a:defRPr>
             </a:pPr>
             <a:r>
-              <a:rPr sz="900" b="0">
-                <a:solidFill>
-                  <a:srgbClr val="002855"/>
+              <a:rPr sz="900">
+                <a:solidFill>
+                  <a:srgbClr val="FFFFFF"/>
                 </a:solidFill>
                 <a:latin typeface="Arial"/>
                 <a:ea typeface="Arial"/>
                 <a:cs typeface="Arial"/>
               </a:rPr>
-              <a:t>wvurail.org/dspira</a:t>
-            </a:r>
-          </a:p>
-        </p:txBody>
-      </p:sp>
-      <p:sp>
-        <p:nvSpPr>
-          <p:cNvPr id="74" name="DSPIRA 5"/>
-          <p:cNvSpPr>
-            <a:spLocks noGrp="1"/>
-          </p:cNvSpPr>
-          <p:nvPr/>
-        </p:nvSpPr>
-        <p:spPr>
-          <a:xfrm>
-            <a:off x="9080500" y="7978775"/>
-            <a:ext cx="762000" cy="228600"/>
-          </a:xfrm>
-          <a:prstGeom prst="rect">
-            <a:avLst/>
-          </a:prstGeom>
-          <a:noFill/>
-          <a:ln w="0">
-            <a:noFill/>
-          </a:ln>
-        </p:spPr>
-        <p:txBody>
-          <a:bodyPr>
-            <a:noAutofit/>
-          </a:bodyPr>
-          <a:lstStyle/>
-          <a:p>
-            <a:pPr>
-              <a:defRPr sz="900" b="0">
-                <a:solidFill>
-                  <a:srgbClr val="002855"/>
-                </a:solidFill>
-                <a:latin typeface="Arial"/>
-                <a:ea typeface="Arial"/>
-                <a:cs typeface="Arial"/>
-              </a:defRPr>
-            </a:pPr>
-            <a:r>
-              <a:rPr sz="900" b="0">
-                <a:solidFill>
-                  <a:srgbClr val="002855"/>
-                </a:solidFill>
-                <a:latin typeface="Arial"/>
-                <a:ea typeface="Arial"/>
-                <a:cs typeface="Arial"/>
-              </a:rPr>
-              <a:t>2 of 19</a:t>
+              <a:t>WEST VIRGINIA UNIVERSITY</a:t>
             </a:r>
           </a:p>
         </p:txBody>
@@ -14145,30 +15045,6 @@
       </p:pic>
       <p:sp>
         <p:nvSpPr>
-          <p:cNvPr id="77" name="DSPIRA 1"/>
-          <p:cNvSpPr>
-            <a:spLocks noGrp="1"/>
-          </p:cNvSpPr>
-          <p:nvPr/>
-        </p:nvSpPr>
-        <p:spPr>
-          <a:xfrm>
-            <a:off x="0" y="0"/>
-            <a:ext cx="10080625" cy="342900"/>
-          </a:xfrm>
-          <a:prstGeom prst="rect">
-            <a:avLst/>
-          </a:prstGeom>
-          <a:solidFill>
-            <a:srgbClr val="FFFFFF"/>
-          </a:solidFill>
-          <a:ln w="0">
-            <a:noFill/>
-          </a:ln>
-        </p:spPr>
-      </p:sp>
-      <p:sp>
-        <p:nvSpPr>
           <p:cNvPr id="78" name="DSPIRA 2"/>
           <p:cNvSpPr>
             <a:spLocks noGrp="1"/>
@@ -14193,7 +15069,7 @@
       </p:sp>
       <p:sp>
         <p:nvSpPr>
-          <p:cNvPr id="79" name="DSPIRA 3"/>
+          <p:cNvPr id="80" name="DSPIRA 4"/>
           <p:cNvSpPr>
             <a:spLocks noGrp="1"/>
           </p:cNvSpPr>
@@ -14201,8 +15077,8 @@
         </p:nvSpPr>
         <p:spPr>
           <a:xfrm>
-            <a:off x="228600" y="76200"/>
-            <a:ext cx="4762500" cy="228600"/>
+            <a:off x="228600" y="7978775"/>
+            <a:ext cx="6667500" cy="228600"/>
           </a:xfrm>
           <a:prstGeom prst="rect">
             <a:avLst/>
@@ -14219,7 +15095,7 @@
           <a:lstStyle/>
           <a:p>
             <a:pPr>
-              <a:defRPr sz="1200" b="1">
+              <a:defRPr sz="900" b="0">
                 <a:solidFill>
                   <a:srgbClr val="002855"/>
                 </a:solidFill>
@@ -14229,9 +15105,159 @@
               </a:defRPr>
             </a:pPr>
             <a:r>
-              <a:rPr sz="1200" b="1">
+              <a:rPr sz="900" b="0">
                 <a:solidFill>
                   <a:srgbClr val="002855"/>
+                </a:solidFill>
+                <a:latin typeface="Arial"/>
+                <a:ea typeface="Arial"/>
+                <a:cs typeface="Arial"/>
+              </a:rPr>
+              <a:t>wvurail.org/dspira</a:t>
+            </a:r>
+          </a:p>
+        </p:txBody>
+      </p:sp>
+      <p:sp>
+        <p:nvSpPr>
+          <p:cNvPr id="81" name="DSPIRA 5"/>
+          <p:cNvSpPr>
+            <a:spLocks noGrp="1"/>
+          </p:cNvSpPr>
+          <p:nvPr/>
+        </p:nvSpPr>
+        <p:spPr>
+          <a:xfrm>
+            <a:off x="9080500" y="7978775"/>
+            <a:ext cx="762000" cy="228600"/>
+          </a:xfrm>
+          <a:prstGeom prst="rect">
+            <a:avLst/>
+          </a:prstGeom>
+          <a:noFill/>
+          <a:ln w="0">
+            <a:noFill/>
+          </a:ln>
+        </p:spPr>
+        <p:txBody>
+          <a:bodyPr>
+            <a:noAutofit/>
+          </a:bodyPr>
+          <a:lstStyle/>
+          <a:p>
+            <a:pPr>
+              <a:defRPr sz="900" b="0">
+                <a:solidFill>
+                  <a:srgbClr val="002855"/>
+                </a:solidFill>
+                <a:latin typeface="Arial"/>
+                <a:ea typeface="Arial"/>
+                <a:cs typeface="Arial"/>
+              </a:defRPr>
+            </a:pPr>
+            <a:r>
+              <a:rPr sz="900" b="0">
+                <a:solidFill>
+                  <a:srgbClr val="002855"/>
+                </a:solidFill>
+                <a:latin typeface="Arial"/>
+                <a:ea typeface="Arial"/>
+                <a:cs typeface="Arial"/>
+              </a:rPr>
+              <a:t>3 of 19</a:t>
+            </a:r>
+          </a:p>
+        </p:txBody>
+      </p:sp>
+      <p:sp>
+        <p:nvSpPr>
+          <p:cNvPr id="82" name="WVU DSPIRA navy band"/>
+          <p:cNvSpPr>
+            <a:spLocks noGrp="1"/>
+          </p:cNvSpPr>
+          <p:nvPr/>
+        </p:nvSpPr>
+        <p:spPr>
+          <a:xfrm>
+            <a:off x="0" y="0"/>
+            <a:ext cx="10080625" cy="323850"/>
+          </a:xfrm>
+          <a:prstGeom prst="rect">
+            <a:avLst/>
+          </a:prstGeom>
+          <a:solidFill>
+            <a:srgbClr val="002855"/>
+          </a:solidFill>
+          <a:ln w="0">
+            <a:noFill/>
+          </a:ln>
+        </p:spPr>
+      </p:sp>
+      <p:sp>
+        <p:nvSpPr>
+          <p:cNvPr id="83" name="WVU DSPIRA gold rule"/>
+          <p:cNvSpPr>
+            <a:spLocks noGrp="1"/>
+          </p:cNvSpPr>
+          <p:nvPr/>
+        </p:nvSpPr>
+        <p:spPr>
+          <a:xfrm>
+            <a:off x="0" y="323850"/>
+            <a:ext cx="10080625" cy="19050"/>
+          </a:xfrm>
+          <a:prstGeom prst="rect">
+            <a:avLst/>
+          </a:prstGeom>
+          <a:solidFill>
+            <a:srgbClr val="EEAA00"/>
+          </a:solidFill>
+          <a:ln w="0">
+            <a:noFill/>
+          </a:ln>
+        </p:spPr>
+      </p:sp>
+      <p:sp>
+        <p:nvSpPr>
+          <p:cNvPr id="84" name="WVU DSPIRA name"/>
+          <p:cNvSpPr>
+            <a:spLocks noGrp="1"/>
+          </p:cNvSpPr>
+          <p:nvPr/>
+        </p:nvSpPr>
+        <p:spPr>
+          <a:xfrm>
+            <a:off x="228600" y="19050"/>
+            <a:ext cx="2857500" cy="257175"/>
+          </a:xfrm>
+          <a:prstGeom prst="rect">
+            <a:avLst/>
+          </a:prstGeom>
+          <a:noFill/>
+          <a:ln w="0">
+            <a:noFill/>
+          </a:ln>
+        </p:spPr>
+        <p:txBody>
+          <a:bodyPr>
+            <a:noAutofit/>
+          </a:bodyPr>
+          <a:lstStyle/>
+          <a:p>
+            <a:pPr>
+              <a:defRPr sz="1600" b="1">
+                <a:solidFill>
+                  <a:srgbClr val="FFFFFF"/>
+                </a:solidFill>
+                <a:latin typeface="Arial"/>
+                <a:ea typeface="Arial"/>
+                <a:cs typeface="Arial"/>
+              </a:defRPr>
+            </a:pPr>
+            <a:r>
+              <a:rPr sz="1600" b="1">
+                <a:solidFill>
+                  <a:srgbClr val="FFFFFF"/>
                 </a:solidFill>
                 <a:latin typeface="Arial"/>
                 <a:ea typeface="Arial"/>
@@ -14244,7 +15270,7 @@
       </p:sp>
       <p:sp>
         <p:nvSpPr>
-          <p:cNvPr id="80" name="DSPIRA 4"/>
+          <p:cNvPr id="85" name="WVU DSPIRA university"/>
           <p:cNvSpPr>
             <a:spLocks noGrp="1"/>
           </p:cNvSpPr>
@@ -14252,8 +15278,8 @@
         </p:nvSpPr>
         <p:spPr>
           <a:xfrm>
-            <a:off x="228600" y="7978775"/>
-            <a:ext cx="6667500" cy="228600"/>
+            <a:off x="7223125" y="114300"/>
+            <a:ext cx="2628900" cy="171450"/>
           </a:xfrm>
           <a:prstGeom prst="rect">
             <a:avLst/>
@@ -14269,10 +15295,10 @@
           </a:bodyPr>
           <a:lstStyle/>
           <a:p>
-            <a:pPr>
-              <a:defRPr sz="900" b="0">
-                <a:solidFill>
-                  <a:srgbClr val="002855"/>
+            <a:pPr algn="r">
+              <a:defRPr sz="900">
+                <a:solidFill>
+                  <a:srgbClr val="FFFFFF"/>
                 </a:solidFill>
                 <a:latin typeface="Arial"/>
                 <a:ea typeface="Arial"/>
@@ -14280,66 +15306,15 @@
               </a:defRPr>
             </a:pPr>
             <a:r>
-              <a:rPr sz="900" b="0">
-                <a:solidFill>
-                  <a:srgbClr val="002855"/>
+              <a:rPr sz="900">
+                <a:solidFill>
+                  <a:srgbClr val="FFFFFF"/>
                 </a:solidFill>
                 <a:latin typeface="Arial"/>
                 <a:ea typeface="Arial"/>
                 <a:cs typeface="Arial"/>
               </a:rPr>
-              <a:t>wvurail.org/dspira</a:t>
-            </a:r>
-          </a:p>
-        </p:txBody>
-      </p:sp>
-      <p:sp>
-        <p:nvSpPr>
-          <p:cNvPr id="81" name="DSPIRA 5"/>
-          <p:cNvSpPr>
-            <a:spLocks noGrp="1"/>
-          </p:cNvSpPr>
-          <p:nvPr/>
-        </p:nvSpPr>
-        <p:spPr>
-          <a:xfrm>
-            <a:off x="9080500" y="7978775"/>
-            <a:ext cx="762000" cy="228600"/>
-          </a:xfrm>
-          <a:prstGeom prst="rect">
-            <a:avLst/>
-          </a:prstGeom>
-          <a:noFill/>
-          <a:ln w="0">
-            <a:noFill/>
-          </a:ln>
-        </p:spPr>
-        <p:txBody>
-          <a:bodyPr>
-            <a:noAutofit/>
-          </a:bodyPr>
-          <a:lstStyle/>
-          <a:p>
-            <a:pPr>
-              <a:defRPr sz="900" b="0">
-                <a:solidFill>
-                  <a:srgbClr val="002855"/>
-                </a:solidFill>
-                <a:latin typeface="Arial"/>
-                <a:ea typeface="Arial"/>
-                <a:cs typeface="Arial"/>
-              </a:defRPr>
-            </a:pPr>
-            <a:r>
-              <a:rPr sz="900" b="0">
-                <a:solidFill>
-                  <a:srgbClr val="002855"/>
-                </a:solidFill>
-                <a:latin typeface="Arial"/>
-                <a:ea typeface="Arial"/>
-                <a:cs typeface="Arial"/>
-              </a:rPr>
-              <a:t>3 of 19</a:t>
+              <a:t>WEST VIRGINIA UNIVERSITY</a:t>
             </a:r>
           </a:p>
         </p:txBody>
@@ -14489,30 +15464,6 @@
       </p:sp>
       <p:sp>
         <p:nvSpPr>
-          <p:cNvPr id="83" name="DSPIRA 1"/>
-          <p:cNvSpPr>
-            <a:spLocks noGrp="1"/>
-          </p:cNvSpPr>
-          <p:nvPr/>
-        </p:nvSpPr>
-        <p:spPr>
-          <a:xfrm>
-            <a:off x="0" y="0"/>
-            <a:ext cx="10080625" cy="342900"/>
-          </a:xfrm>
-          <a:prstGeom prst="rect">
-            <a:avLst/>
-          </a:prstGeom>
-          <a:solidFill>
-            <a:srgbClr val="FFFFFF"/>
-          </a:solidFill>
-          <a:ln w="0">
-            <a:noFill/>
-          </a:ln>
-        </p:spPr>
-      </p:sp>
-      <p:sp>
-        <p:nvSpPr>
           <p:cNvPr id="84" name="DSPIRA 2"/>
           <p:cNvSpPr>
             <a:spLocks noGrp="1"/>
@@ -14537,7 +15488,7 @@
       </p:sp>
       <p:sp>
         <p:nvSpPr>
-          <p:cNvPr id="85" name="DSPIRA 3"/>
+          <p:cNvPr id="86" name="DSPIRA 4"/>
           <p:cNvSpPr>
             <a:spLocks noGrp="1"/>
           </p:cNvSpPr>
@@ -14545,8 +15496,8 @@
         </p:nvSpPr>
         <p:spPr>
           <a:xfrm>
-            <a:off x="228600" y="76200"/>
-            <a:ext cx="4762500" cy="228600"/>
+            <a:off x="228600" y="7978775"/>
+            <a:ext cx="6667500" cy="228600"/>
           </a:xfrm>
           <a:prstGeom prst="rect">
             <a:avLst/>
@@ -14563,7 +15514,7 @@
           <a:lstStyle/>
           <a:p>
             <a:pPr>
-              <a:defRPr sz="1200" b="1">
+              <a:defRPr sz="900" b="0">
                 <a:solidFill>
                   <a:srgbClr val="002855"/>
                 </a:solidFill>
@@ -14573,9 +15524,159 @@
               </a:defRPr>
             </a:pPr>
             <a:r>
-              <a:rPr sz="1200" b="1">
+              <a:rPr sz="900" b="0">
                 <a:solidFill>
                   <a:srgbClr val="002855"/>
+                </a:solidFill>
+                <a:latin typeface="Arial"/>
+                <a:ea typeface="Arial"/>
+                <a:cs typeface="Arial"/>
+              </a:rPr>
+              <a:t>wvurail.org/dspira</a:t>
+            </a:r>
+          </a:p>
+        </p:txBody>
+      </p:sp>
+      <p:sp>
+        <p:nvSpPr>
+          <p:cNvPr id="87" name="DSPIRA 5"/>
+          <p:cNvSpPr>
+            <a:spLocks noGrp="1"/>
+          </p:cNvSpPr>
+          <p:nvPr/>
+        </p:nvSpPr>
+        <p:spPr>
+          <a:xfrm>
+            <a:off x="9080500" y="7978775"/>
+            <a:ext cx="762000" cy="228600"/>
+          </a:xfrm>
+          <a:prstGeom prst="rect">
+            <a:avLst/>
+          </a:prstGeom>
+          <a:noFill/>
+          <a:ln w="0">
+            <a:noFill/>
+          </a:ln>
+        </p:spPr>
+        <p:txBody>
+          <a:bodyPr>
+            <a:noAutofit/>
+          </a:bodyPr>
+          <a:lstStyle/>
+          <a:p>
+            <a:pPr>
+              <a:defRPr sz="900" b="0">
+                <a:solidFill>
+                  <a:srgbClr val="002855"/>
+                </a:solidFill>
+                <a:latin typeface="Arial"/>
+                <a:ea typeface="Arial"/>
+                <a:cs typeface="Arial"/>
+              </a:defRPr>
+            </a:pPr>
+            <a:r>
+              <a:rPr sz="900" b="0">
+                <a:solidFill>
+                  <a:srgbClr val="002855"/>
+                </a:solidFill>
+                <a:latin typeface="Arial"/>
+                <a:ea typeface="Arial"/>
+                <a:cs typeface="Arial"/>
+              </a:rPr>
+              <a:t>4 of 19</a:t>
+            </a:r>
+          </a:p>
+        </p:txBody>
+      </p:sp>
+      <p:sp>
+        <p:nvSpPr>
+          <p:cNvPr id="88" name="WVU DSPIRA navy band"/>
+          <p:cNvSpPr>
+            <a:spLocks noGrp="1"/>
+          </p:cNvSpPr>
+          <p:nvPr/>
+        </p:nvSpPr>
+        <p:spPr>
+          <a:xfrm>
+            <a:off x="0" y="0"/>
+            <a:ext cx="10080625" cy="323850"/>
+          </a:xfrm>
+          <a:prstGeom prst="rect">
+            <a:avLst/>
+          </a:prstGeom>
+          <a:solidFill>
+            <a:srgbClr val="002855"/>
+          </a:solidFill>
+          <a:ln w="0">
+            <a:noFill/>
+          </a:ln>
+        </p:spPr>
+      </p:sp>
+      <p:sp>
+        <p:nvSpPr>
+          <p:cNvPr id="89" name="WVU DSPIRA gold rule"/>
+          <p:cNvSpPr>
+            <a:spLocks noGrp="1"/>
+          </p:cNvSpPr>
+          <p:nvPr/>
+        </p:nvSpPr>
+        <p:spPr>
+          <a:xfrm>
+            <a:off x="0" y="323850"/>
+            <a:ext cx="10080625" cy="19050"/>
+          </a:xfrm>
+          <a:prstGeom prst="rect">
+            <a:avLst/>
+          </a:prstGeom>
+          <a:solidFill>
+            <a:srgbClr val="EEAA00"/>
+          </a:solidFill>
+          <a:ln w="0">
+            <a:noFill/>
+          </a:ln>
+        </p:spPr>
+      </p:sp>
+      <p:sp>
+        <p:nvSpPr>
+          <p:cNvPr id="90" name="WVU DSPIRA name"/>
+          <p:cNvSpPr>
+            <a:spLocks noGrp="1"/>
+          </p:cNvSpPr>
+          <p:nvPr/>
+        </p:nvSpPr>
+        <p:spPr>
+          <a:xfrm>
+            <a:off x="228600" y="19050"/>
+            <a:ext cx="2857500" cy="257175"/>
+          </a:xfrm>
+          <a:prstGeom prst="rect">
+            <a:avLst/>
+          </a:prstGeom>
+          <a:noFill/>
+          <a:ln w="0">
+            <a:noFill/>
+          </a:ln>
+        </p:spPr>
+        <p:txBody>
+          <a:bodyPr>
+            <a:noAutofit/>
+          </a:bodyPr>
+          <a:lstStyle/>
+          <a:p>
+            <a:pPr>
+              <a:defRPr sz="1600" b="1">
+                <a:solidFill>
+                  <a:srgbClr val="FFFFFF"/>
+                </a:solidFill>
+                <a:latin typeface="Arial"/>
+                <a:ea typeface="Arial"/>
+                <a:cs typeface="Arial"/>
+              </a:defRPr>
+            </a:pPr>
+            <a:r>
+              <a:rPr sz="1600" b="1">
+                <a:solidFill>
+                  <a:srgbClr val="FFFFFF"/>
                 </a:solidFill>
                 <a:latin typeface="Arial"/>
                 <a:ea typeface="Arial"/>
@@ -14588,7 +15689,7 @@
       </p:sp>
       <p:sp>
         <p:nvSpPr>
-          <p:cNvPr id="86" name="DSPIRA 4"/>
+          <p:cNvPr id="91" name="WVU DSPIRA university"/>
           <p:cNvSpPr>
             <a:spLocks noGrp="1"/>
           </p:cNvSpPr>
@@ -14596,8 +15697,8 @@
         </p:nvSpPr>
         <p:spPr>
           <a:xfrm>
-            <a:off x="228600" y="7978775"/>
-            <a:ext cx="6667500" cy="228600"/>
+            <a:off x="7223125" y="114300"/>
+            <a:ext cx="2628900" cy="171450"/>
           </a:xfrm>
           <a:prstGeom prst="rect">
             <a:avLst/>
@@ -14613,10 +15714,10 @@
           </a:bodyPr>
           <a:lstStyle/>
           <a:p>
-            <a:pPr>
-              <a:defRPr sz="900" b="0">
-                <a:solidFill>
-                  <a:srgbClr val="002855"/>
+            <a:pPr algn="r">
+              <a:defRPr sz="900">
+                <a:solidFill>
+                  <a:srgbClr val="FFFFFF"/>
                 </a:solidFill>
                 <a:latin typeface="Arial"/>
                 <a:ea typeface="Arial"/>
@@ -14624,66 +15725,15 @@
               </a:defRPr>
             </a:pPr>
             <a:r>
-              <a:rPr sz="900" b="0">
-                <a:solidFill>
-                  <a:srgbClr val="002855"/>
+              <a:rPr sz="900">
+                <a:solidFill>
+                  <a:srgbClr val="FFFFFF"/>
                 </a:solidFill>
                 <a:latin typeface="Arial"/>
                 <a:ea typeface="Arial"/>
                 <a:cs typeface="Arial"/>
               </a:rPr>
-              <a:t>wvurail.org/dspira</a:t>
-            </a:r>
-          </a:p>
-        </p:txBody>
-      </p:sp>
-      <p:sp>
-        <p:nvSpPr>
-          <p:cNvPr id="87" name="DSPIRA 5"/>
-          <p:cNvSpPr>
-            <a:spLocks noGrp="1"/>
-          </p:cNvSpPr>
-          <p:nvPr/>
-        </p:nvSpPr>
-        <p:spPr>
-          <a:xfrm>
-            <a:off x="9080500" y="7978775"/>
-            <a:ext cx="762000" cy="228600"/>
-          </a:xfrm>
-          <a:prstGeom prst="rect">
-            <a:avLst/>
-          </a:prstGeom>
-          <a:noFill/>
-          <a:ln w="0">
-            <a:noFill/>
-          </a:ln>
-        </p:spPr>
-        <p:txBody>
-          <a:bodyPr>
-            <a:noAutofit/>
-          </a:bodyPr>
-          <a:lstStyle/>
-          <a:p>
-            <a:pPr>
-              <a:defRPr sz="900" b="0">
-                <a:solidFill>
-                  <a:srgbClr val="002855"/>
-                </a:solidFill>
-                <a:latin typeface="Arial"/>
-                <a:ea typeface="Arial"/>
-                <a:cs typeface="Arial"/>
-              </a:defRPr>
-            </a:pPr>
-            <a:r>
-              <a:rPr sz="900" b="0">
-                <a:solidFill>
-                  <a:srgbClr val="002855"/>
-                </a:solidFill>
-                <a:latin typeface="Arial"/>
-                <a:ea typeface="Arial"/>
-                <a:cs typeface="Arial"/>
-              </a:rPr>
-              <a:t>4 of 19</a:t>
+              <a:t>WEST VIRGINIA UNIVERSITY</a:t>
             </a:r>
           </a:p>
         </p:txBody>
@@ -14880,30 +15930,6 @@
       </p:pic>
       <p:sp>
         <p:nvSpPr>
-          <p:cNvPr id="91" name="DSPIRA 1"/>
-          <p:cNvSpPr>
-            <a:spLocks noGrp="1"/>
-          </p:cNvSpPr>
-          <p:nvPr/>
-        </p:nvSpPr>
-        <p:spPr>
-          <a:xfrm>
-            <a:off x="0" y="0"/>
-            <a:ext cx="10080625" cy="342900"/>
-          </a:xfrm>
-          <a:prstGeom prst="rect">
-            <a:avLst/>
-          </a:prstGeom>
-          <a:solidFill>
-            <a:srgbClr val="FFFFFF"/>
-          </a:solidFill>
-          <a:ln w="0">
-            <a:noFill/>
-          </a:ln>
-        </p:spPr>
-      </p:sp>
-      <p:sp>
-        <p:nvSpPr>
           <p:cNvPr id="92" name="DSPIRA 2"/>
           <p:cNvSpPr>
             <a:spLocks noGrp="1"/>
@@ -14928,7 +15954,7 @@
       </p:sp>
       <p:sp>
         <p:nvSpPr>
-          <p:cNvPr id="93" name="DSPIRA 3"/>
+          <p:cNvPr id="94" name="DSPIRA 4"/>
           <p:cNvSpPr>
             <a:spLocks noGrp="1"/>
           </p:cNvSpPr>
@@ -14936,8 +15962,8 @@
         </p:nvSpPr>
         <p:spPr>
           <a:xfrm>
-            <a:off x="228600" y="76200"/>
-            <a:ext cx="4762500" cy="228600"/>
+            <a:off x="228600" y="7978775"/>
+            <a:ext cx="6667500" cy="228600"/>
           </a:xfrm>
           <a:prstGeom prst="rect">
             <a:avLst/>
@@ -14954,7 +15980,7 @@
           <a:lstStyle/>
           <a:p>
             <a:pPr>
-              <a:defRPr sz="1200" b="1">
+              <a:defRPr sz="900" b="0">
                 <a:solidFill>
                   <a:srgbClr val="002855"/>
                 </a:solidFill>
@@ -14964,9 +15990,159 @@
               </a:defRPr>
             </a:pPr>
             <a:r>
-              <a:rPr sz="1200" b="1">
+              <a:rPr sz="900" b="0">
                 <a:solidFill>
                   <a:srgbClr val="002855"/>
+                </a:solidFill>
+                <a:latin typeface="Arial"/>
+                <a:ea typeface="Arial"/>
+                <a:cs typeface="Arial"/>
+              </a:rPr>
+              <a:t>wvurail.org/dspira</a:t>
+            </a:r>
+          </a:p>
+        </p:txBody>
+      </p:sp>
+      <p:sp>
+        <p:nvSpPr>
+          <p:cNvPr id="95" name="DSPIRA 5"/>
+          <p:cNvSpPr>
+            <a:spLocks noGrp="1"/>
+          </p:cNvSpPr>
+          <p:nvPr/>
+        </p:nvSpPr>
+        <p:spPr>
+          <a:xfrm>
+            <a:off x="9080500" y="7978775"/>
+            <a:ext cx="762000" cy="228600"/>
+          </a:xfrm>
+          <a:prstGeom prst="rect">
+            <a:avLst/>
+          </a:prstGeom>
+          <a:noFill/>
+          <a:ln w="0">
+            <a:noFill/>
+          </a:ln>
+        </p:spPr>
+        <p:txBody>
+          <a:bodyPr>
+            <a:noAutofit/>
+          </a:bodyPr>
+          <a:lstStyle/>
+          <a:p>
+            <a:pPr>
+              <a:defRPr sz="900" b="0">
+                <a:solidFill>
+                  <a:srgbClr val="002855"/>
+                </a:solidFill>
+                <a:latin typeface="Arial"/>
+                <a:ea typeface="Arial"/>
+                <a:cs typeface="Arial"/>
+              </a:defRPr>
+            </a:pPr>
+            <a:r>
+              <a:rPr sz="900" b="0">
+                <a:solidFill>
+                  <a:srgbClr val="002855"/>
+                </a:solidFill>
+                <a:latin typeface="Arial"/>
+                <a:ea typeface="Arial"/>
+                <a:cs typeface="Arial"/>
+              </a:rPr>
+              <a:t>5 of 19</a:t>
+            </a:r>
+          </a:p>
+        </p:txBody>
+      </p:sp>
+      <p:sp>
+        <p:nvSpPr>
+          <p:cNvPr id="96" name="WVU DSPIRA navy band"/>
+          <p:cNvSpPr>
+            <a:spLocks noGrp="1"/>
+          </p:cNvSpPr>
+          <p:nvPr/>
+        </p:nvSpPr>
+        <p:spPr>
+          <a:xfrm>
+            <a:off x="0" y="0"/>
+            <a:ext cx="10080625" cy="323850"/>
+          </a:xfrm>
+          <a:prstGeom prst="rect">
+            <a:avLst/>
+          </a:prstGeom>
+          <a:solidFill>
+            <a:srgbClr val="002855"/>
+          </a:solidFill>
+          <a:ln w="0">
+            <a:noFill/>
+          </a:ln>
+        </p:spPr>
+      </p:sp>
+      <p:sp>
+        <p:nvSpPr>
+          <p:cNvPr id="97" name="WVU DSPIRA gold rule"/>
+          <p:cNvSpPr>
+            <a:spLocks noGrp="1"/>
+          </p:cNvSpPr>
+          <p:nvPr/>
+        </p:nvSpPr>
+        <p:spPr>
+          <a:xfrm>
+            <a:off x="0" y="323850"/>
+            <a:ext cx="10080625" cy="19050"/>
+          </a:xfrm>
+          <a:prstGeom prst="rect">
+            <a:avLst/>
+          </a:prstGeom>
+          <a:solidFill>
+            <a:srgbClr val="EEAA00"/>
+          </a:solidFill>
+          <a:ln w="0">
+            <a:noFill/>
+          </a:ln>
+        </p:spPr>
+      </p:sp>
+      <p:sp>
+        <p:nvSpPr>
+          <p:cNvPr id="98" name="WVU DSPIRA name"/>
+          <p:cNvSpPr>
+            <a:spLocks noGrp="1"/>
+          </p:cNvSpPr>
+          <p:nvPr/>
+        </p:nvSpPr>
+        <p:spPr>
+          <a:xfrm>
+            <a:off x="228600" y="19050"/>
+            <a:ext cx="2857500" cy="257175"/>
+          </a:xfrm>
+          <a:prstGeom prst="rect">
+            <a:avLst/>
+          </a:prstGeom>
+          <a:noFill/>
+          <a:ln w="0">
+            <a:noFill/>
+          </a:ln>
+        </p:spPr>
+        <p:txBody>
+          <a:bodyPr>
+            <a:noAutofit/>
+          </a:bodyPr>
+          <a:lstStyle/>
+          <a:p>
+            <a:pPr>
+              <a:defRPr sz="1600" b="1">
+                <a:solidFill>
+                  <a:srgbClr val="FFFFFF"/>
+                </a:solidFill>
+                <a:latin typeface="Arial"/>
+                <a:ea typeface="Arial"/>
+                <a:cs typeface="Arial"/>
+              </a:defRPr>
+            </a:pPr>
+            <a:r>
+              <a:rPr sz="1600" b="1">
+                <a:solidFill>
+                  <a:srgbClr val="FFFFFF"/>
                 </a:solidFill>
                 <a:latin typeface="Arial"/>
                 <a:ea typeface="Arial"/>
@@ -14979,7 +16155,7 @@
       </p:sp>
       <p:sp>
         <p:nvSpPr>
-          <p:cNvPr id="94" name="DSPIRA 4"/>
+          <p:cNvPr id="99" name="WVU DSPIRA university"/>
           <p:cNvSpPr>
             <a:spLocks noGrp="1"/>
           </p:cNvSpPr>
@@ -14987,8 +16163,8 @@
         </p:nvSpPr>
         <p:spPr>
           <a:xfrm>
-            <a:off x="228600" y="7978775"/>
-            <a:ext cx="6667500" cy="228600"/>
+            <a:off x="7223125" y="114300"/>
+            <a:ext cx="2628900" cy="171450"/>
           </a:xfrm>
           <a:prstGeom prst="rect">
             <a:avLst/>
@@ -15004,10 +16180,10 @@
           </a:bodyPr>
           <a:lstStyle/>
           <a:p>
-            <a:pPr>
-              <a:defRPr sz="900" b="0">
-                <a:solidFill>
-                  <a:srgbClr val="002855"/>
+            <a:pPr algn="r">
+              <a:defRPr sz="900">
+                <a:solidFill>
+                  <a:srgbClr val="FFFFFF"/>
                 </a:solidFill>
                 <a:latin typeface="Arial"/>
                 <a:ea typeface="Arial"/>
@@ -15015,66 +16191,15 @@
               </a:defRPr>
             </a:pPr>
             <a:r>
-              <a:rPr sz="900" b="0">
-                <a:solidFill>
-                  <a:srgbClr val="002855"/>
+              <a:rPr sz="900">
+                <a:solidFill>
+                  <a:srgbClr val="FFFFFF"/>
                 </a:solidFill>
                 <a:latin typeface="Arial"/>
                 <a:ea typeface="Arial"/>
                 <a:cs typeface="Arial"/>
               </a:rPr>
-              <a:t>wvurail.org/dspira</a:t>
-            </a:r>
-          </a:p>
-        </p:txBody>
-      </p:sp>
-      <p:sp>
-        <p:nvSpPr>
-          <p:cNvPr id="95" name="DSPIRA 5"/>
-          <p:cNvSpPr>
-            <a:spLocks noGrp="1"/>
-          </p:cNvSpPr>
-          <p:nvPr/>
-        </p:nvSpPr>
-        <p:spPr>
-          <a:xfrm>
-            <a:off x="9080500" y="7978775"/>
-            <a:ext cx="762000" cy="228600"/>
-          </a:xfrm>
-          <a:prstGeom prst="rect">
-            <a:avLst/>
-          </a:prstGeom>
-          <a:noFill/>
-          <a:ln w="0">
-            <a:noFill/>
-          </a:ln>
-        </p:spPr>
-        <p:txBody>
-          <a:bodyPr>
-            <a:noAutofit/>
-          </a:bodyPr>
-          <a:lstStyle/>
-          <a:p>
-            <a:pPr>
-              <a:defRPr sz="900" b="0">
-                <a:solidFill>
-                  <a:srgbClr val="002855"/>
-                </a:solidFill>
-                <a:latin typeface="Arial"/>
-                <a:ea typeface="Arial"/>
-                <a:cs typeface="Arial"/>
-              </a:defRPr>
-            </a:pPr>
-            <a:r>
-              <a:rPr sz="900" b="0">
-                <a:solidFill>
-                  <a:srgbClr val="002855"/>
-                </a:solidFill>
-                <a:latin typeface="Arial"/>
-                <a:ea typeface="Arial"/>
-                <a:cs typeface="Arial"/>
-              </a:rPr>
-              <a:t>5 of 19</a:t>
+              <a:t>WEST VIRGINIA UNIVERSITY</a:t>
             </a:r>
           </a:p>
         </p:txBody>
@@ -15457,30 +16582,6 @@
       </p:sp>
       <p:sp>
         <p:nvSpPr>
-          <p:cNvPr id="97" name="DSPIRA 1"/>
-          <p:cNvSpPr>
-            <a:spLocks noGrp="1"/>
-          </p:cNvSpPr>
-          <p:nvPr/>
-        </p:nvSpPr>
-        <p:spPr>
-          <a:xfrm>
-            <a:off x="0" y="0"/>
-            <a:ext cx="10080625" cy="342900"/>
-          </a:xfrm>
-          <a:prstGeom prst="rect">
-            <a:avLst/>
-          </a:prstGeom>
-          <a:solidFill>
-            <a:srgbClr val="FFFFFF"/>
-          </a:solidFill>
-          <a:ln w="0">
-            <a:noFill/>
-          </a:ln>
-        </p:spPr>
-      </p:sp>
-      <p:sp>
-        <p:nvSpPr>
           <p:cNvPr id="98" name="DSPIRA 2"/>
           <p:cNvSpPr>
             <a:spLocks noGrp="1"/>
@@ -15505,7 +16606,7 @@
       </p:sp>
       <p:sp>
         <p:nvSpPr>
-          <p:cNvPr id="99" name="DSPIRA 3"/>
+          <p:cNvPr id="100" name="DSPIRA 4"/>
           <p:cNvSpPr>
             <a:spLocks noGrp="1"/>
           </p:cNvSpPr>
@@ -15513,8 +16614,8 @@
         </p:nvSpPr>
         <p:spPr>
           <a:xfrm>
-            <a:off x="228600" y="76200"/>
-            <a:ext cx="4762500" cy="228600"/>
+            <a:off x="228600" y="7978775"/>
+            <a:ext cx="6667500" cy="228600"/>
           </a:xfrm>
           <a:prstGeom prst="rect">
             <a:avLst/>
@@ -15531,7 +16632,7 @@
           <a:lstStyle/>
           <a:p>
             <a:pPr>
-              <a:defRPr sz="1200" b="1">
+              <a:defRPr sz="900" b="0">
                 <a:solidFill>
                   <a:srgbClr val="002855"/>
                 </a:solidFill>
@@ -15541,9 +16642,159 @@
               </a:defRPr>
             </a:pPr>
             <a:r>
-              <a:rPr sz="1200" b="1">
+              <a:rPr sz="900" b="0">
                 <a:solidFill>
                   <a:srgbClr val="002855"/>
+                </a:solidFill>
+                <a:latin typeface="Arial"/>
+                <a:ea typeface="Arial"/>
+                <a:cs typeface="Arial"/>
+              </a:rPr>
+              <a:t>wvurail.org/dspira</a:t>
+            </a:r>
+          </a:p>
+        </p:txBody>
+      </p:sp>
+      <p:sp>
+        <p:nvSpPr>
+          <p:cNvPr id="101" name="DSPIRA 5"/>
+          <p:cNvSpPr>
+            <a:spLocks noGrp="1"/>
+          </p:cNvSpPr>
+          <p:nvPr/>
+        </p:nvSpPr>
+        <p:spPr>
+          <a:xfrm>
+            <a:off x="9080500" y="7978775"/>
+            <a:ext cx="762000" cy="228600"/>
+          </a:xfrm>
+          <a:prstGeom prst="rect">
+            <a:avLst/>
+          </a:prstGeom>
+          <a:noFill/>
+          <a:ln w="0">
+            <a:noFill/>
+          </a:ln>
+        </p:spPr>
+        <p:txBody>
+          <a:bodyPr>
+            <a:noAutofit/>
+          </a:bodyPr>
+          <a:lstStyle/>
+          <a:p>
+            <a:pPr>
+              <a:defRPr sz="900" b="0">
+                <a:solidFill>
+                  <a:srgbClr val="002855"/>
+                </a:solidFill>
+                <a:latin typeface="Arial"/>
+                <a:ea typeface="Arial"/>
+                <a:cs typeface="Arial"/>
+              </a:defRPr>
+            </a:pPr>
+            <a:r>
+              <a:rPr sz="900" b="0">
+                <a:solidFill>
+                  <a:srgbClr val="002855"/>
+                </a:solidFill>
+                <a:latin typeface="Arial"/>
+                <a:ea typeface="Arial"/>
+                <a:cs typeface="Arial"/>
+              </a:rPr>
+              <a:t>6 of 19</a:t>
+            </a:r>
+          </a:p>
+        </p:txBody>
+      </p:sp>
+      <p:sp>
+        <p:nvSpPr>
+          <p:cNvPr id="102" name="WVU DSPIRA navy band"/>
+          <p:cNvSpPr>
+            <a:spLocks noGrp="1"/>
+          </p:cNvSpPr>
+          <p:nvPr/>
+        </p:nvSpPr>
+        <p:spPr>
+          <a:xfrm>
+            <a:off x="0" y="0"/>
+            <a:ext cx="10080625" cy="323850"/>
+          </a:xfrm>
+          <a:prstGeom prst="rect">
+            <a:avLst/>
+          </a:prstGeom>
+          <a:solidFill>
+            <a:srgbClr val="002855"/>
+          </a:solidFill>
+          <a:ln w="0">
+            <a:noFill/>
+          </a:ln>
+        </p:spPr>
+      </p:sp>
+      <p:sp>
+        <p:nvSpPr>
+          <p:cNvPr id="103" name="WVU DSPIRA gold rule"/>
+          <p:cNvSpPr>
+            <a:spLocks noGrp="1"/>
+          </p:cNvSpPr>
+          <p:nvPr/>
+        </p:nvSpPr>
+        <p:spPr>
+          <a:xfrm>
+            <a:off x="0" y="323850"/>
+            <a:ext cx="10080625" cy="19050"/>
+          </a:xfrm>
+          <a:prstGeom prst="rect">
+            <a:avLst/>
+          </a:prstGeom>
+          <a:solidFill>
+            <a:srgbClr val="EEAA00"/>
+          </a:solidFill>
+          <a:ln w="0">
+            <a:noFill/>
+          </a:ln>
+        </p:spPr>
+      </p:sp>
+      <p:sp>
+        <p:nvSpPr>
+          <p:cNvPr id="104" name="WVU DSPIRA name"/>
+          <p:cNvSpPr>
+            <a:spLocks noGrp="1"/>
+          </p:cNvSpPr>
+          <p:nvPr/>
+        </p:nvSpPr>
+        <p:spPr>
+          <a:xfrm>
+            <a:off x="228600" y="19050"/>
+            <a:ext cx="2857500" cy="257175"/>
+          </a:xfrm>
+          <a:prstGeom prst="rect">
+            <a:avLst/>
+          </a:prstGeom>
+          <a:noFill/>
+          <a:ln w="0">
+            <a:noFill/>
+          </a:ln>
+        </p:spPr>
+        <p:txBody>
+          <a:bodyPr>
+            <a:noAutofit/>
+          </a:bodyPr>
+          <a:lstStyle/>
+          <a:p>
+            <a:pPr>
+              <a:defRPr sz="1600" b="1">
+                <a:solidFill>
+                  <a:srgbClr val="FFFFFF"/>
+                </a:solidFill>
+                <a:latin typeface="Arial"/>
+                <a:ea typeface="Arial"/>
+                <a:cs typeface="Arial"/>
+              </a:defRPr>
+            </a:pPr>
+            <a:r>
+              <a:rPr sz="1600" b="1">
+                <a:solidFill>
+                  <a:srgbClr val="FFFFFF"/>
                 </a:solidFill>
                 <a:latin typeface="Arial"/>
                 <a:ea typeface="Arial"/>
@@ -15556,7 +16807,7 @@
       </p:sp>
       <p:sp>
         <p:nvSpPr>
-          <p:cNvPr id="100" name="DSPIRA 4"/>
+          <p:cNvPr id="105" name="WVU DSPIRA university"/>
           <p:cNvSpPr>
             <a:spLocks noGrp="1"/>
           </p:cNvSpPr>
@@ -15564,8 +16815,8 @@
         </p:nvSpPr>
         <p:spPr>
           <a:xfrm>
-            <a:off x="228600" y="7978775"/>
-            <a:ext cx="6667500" cy="228600"/>
+            <a:off x="7223125" y="114300"/>
+            <a:ext cx="2628900" cy="171450"/>
           </a:xfrm>
           <a:prstGeom prst="rect">
             <a:avLst/>
@@ -15581,10 +16832,10 @@
           </a:bodyPr>
           <a:lstStyle/>
           <a:p>
-            <a:pPr>
-              <a:defRPr sz="900" b="0">
-                <a:solidFill>
-                  <a:srgbClr val="002855"/>
+            <a:pPr algn="r">
+              <a:defRPr sz="900">
+                <a:solidFill>
+                  <a:srgbClr val="FFFFFF"/>
                 </a:solidFill>
                 <a:latin typeface="Arial"/>
                 <a:ea typeface="Arial"/>
@@ -15592,66 +16843,15 @@
               </a:defRPr>
             </a:pPr>
             <a:r>
-              <a:rPr sz="900" b="0">
-                <a:solidFill>
-                  <a:srgbClr val="002855"/>
+              <a:rPr sz="900">
+                <a:solidFill>
+                  <a:srgbClr val="FFFFFF"/>
                 </a:solidFill>
                 <a:latin typeface="Arial"/>
                 <a:ea typeface="Arial"/>
                 <a:cs typeface="Arial"/>
               </a:rPr>
-              <a:t>wvurail.org/dspira</a:t>
-            </a:r>
-          </a:p>
-        </p:txBody>
-      </p:sp>
-      <p:sp>
-        <p:nvSpPr>
-          <p:cNvPr id="101" name="DSPIRA 5"/>
-          <p:cNvSpPr>
-            <a:spLocks noGrp="1"/>
-          </p:cNvSpPr>
-          <p:nvPr/>
-        </p:nvSpPr>
-        <p:spPr>
-          <a:xfrm>
-            <a:off x="9080500" y="7978775"/>
-            <a:ext cx="762000" cy="228600"/>
-          </a:xfrm>
-          <a:prstGeom prst="rect">
-            <a:avLst/>
-          </a:prstGeom>
-          <a:noFill/>
-          <a:ln w="0">
-            <a:noFill/>
-          </a:ln>
-        </p:spPr>
-        <p:txBody>
-          <a:bodyPr>
-            <a:noAutofit/>
-          </a:bodyPr>
-          <a:lstStyle/>
-          <a:p>
-            <a:pPr>
-              <a:defRPr sz="900" b="0">
-                <a:solidFill>
-                  <a:srgbClr val="002855"/>
-                </a:solidFill>
-                <a:latin typeface="Arial"/>
-                <a:ea typeface="Arial"/>
-                <a:cs typeface="Arial"/>
-              </a:defRPr>
-            </a:pPr>
-            <a:r>
-              <a:rPr sz="900" b="0">
-                <a:solidFill>
-                  <a:srgbClr val="002855"/>
-                </a:solidFill>
-                <a:latin typeface="Arial"/>
-                <a:ea typeface="Arial"/>
-                <a:cs typeface="Arial"/>
-              </a:rPr>
-              <a:t>6 of 19</a:t>
+              <a:t>WEST VIRGINIA UNIVERSITY</a:t>
             </a:r>
           </a:p>
         </p:txBody>
@@ -16033,30 +17233,6 @@
       </p:sp>
       <p:sp>
         <p:nvSpPr>
-          <p:cNvPr id="103" name="DSPIRA 1"/>
-          <p:cNvSpPr>
-            <a:spLocks noGrp="1"/>
-          </p:cNvSpPr>
-          <p:nvPr/>
-        </p:nvSpPr>
-        <p:spPr>
-          <a:xfrm>
-            <a:off x="0" y="0"/>
-            <a:ext cx="10080625" cy="342900"/>
-          </a:xfrm>
-          <a:prstGeom prst="rect">
-            <a:avLst/>
-          </a:prstGeom>
-          <a:solidFill>
-            <a:srgbClr val="FFFFFF"/>
-          </a:solidFill>
-          <a:ln w="0">
-            <a:noFill/>
-          </a:ln>
-        </p:spPr>
-      </p:sp>
-      <p:sp>
-        <p:nvSpPr>
           <p:cNvPr id="104" name="DSPIRA 2"/>
           <p:cNvSpPr>
             <a:spLocks noGrp="1"/>
@@ -16081,7 +17257,7 @@
       </p:sp>
       <p:sp>
         <p:nvSpPr>
-          <p:cNvPr id="105" name="DSPIRA 3"/>
+          <p:cNvPr id="106" name="DSPIRA 4"/>
           <p:cNvSpPr>
             <a:spLocks noGrp="1"/>
           </p:cNvSpPr>
@@ -16089,8 +17265,8 @@
         </p:nvSpPr>
         <p:spPr>
           <a:xfrm>
-            <a:off x="228600" y="76200"/>
-            <a:ext cx="4762500" cy="228600"/>
+            <a:off x="228600" y="7978775"/>
+            <a:ext cx="6667500" cy="228600"/>
           </a:xfrm>
           <a:prstGeom prst="rect">
             <a:avLst/>
@@ -16107,7 +17283,7 @@
           <a:lstStyle/>
           <a:p>
             <a:pPr>
-              <a:defRPr sz="1200" b="1">
+              <a:defRPr sz="900" b="0">
                 <a:solidFill>
                   <a:srgbClr val="002855"/>
                 </a:solidFill>
@@ -16117,9 +17293,159 @@
               </a:defRPr>
             </a:pPr>
             <a:r>
-              <a:rPr sz="1200" b="1">
+              <a:rPr sz="900" b="0">
                 <a:solidFill>
                   <a:srgbClr val="002855"/>
+                </a:solidFill>
+                <a:latin typeface="Arial"/>
+                <a:ea typeface="Arial"/>
+                <a:cs typeface="Arial"/>
+              </a:rPr>
+              <a:t>wvurail.org/dspira</a:t>
+            </a:r>
+          </a:p>
+        </p:txBody>
+      </p:sp>
+      <p:sp>
+        <p:nvSpPr>
+          <p:cNvPr id="107" name="DSPIRA 5"/>
+          <p:cNvSpPr>
+            <a:spLocks noGrp="1"/>
+          </p:cNvSpPr>
+          <p:nvPr/>
+        </p:nvSpPr>
+        <p:spPr>
+          <a:xfrm>
+            <a:off x="9080500" y="7978775"/>
+            <a:ext cx="762000" cy="228600"/>
+          </a:xfrm>
+          <a:prstGeom prst="rect">
+            <a:avLst/>
+          </a:prstGeom>
+          <a:noFill/>
+          <a:ln w="0">
+            <a:noFill/>
+          </a:ln>
+        </p:spPr>
+        <p:txBody>
+          <a:bodyPr>
+            <a:noAutofit/>
+          </a:bodyPr>
+          <a:lstStyle/>
+          <a:p>
+            <a:pPr>
+              <a:defRPr sz="900" b="0">
+                <a:solidFill>
+                  <a:srgbClr val="002855"/>
+                </a:solidFill>
+                <a:latin typeface="Arial"/>
+                <a:ea typeface="Arial"/>
+                <a:cs typeface="Arial"/>
+              </a:defRPr>
+            </a:pPr>
+            <a:r>
+              <a:rPr sz="900" b="0">
+                <a:solidFill>
+                  <a:srgbClr val="002855"/>
+                </a:solidFill>
+                <a:latin typeface="Arial"/>
+                <a:ea typeface="Arial"/>
+                <a:cs typeface="Arial"/>
+              </a:rPr>
+              <a:t>7 of 19</a:t>
+            </a:r>
+          </a:p>
+        </p:txBody>
+      </p:sp>
+      <p:sp>
+        <p:nvSpPr>
+          <p:cNvPr id="108" name="WVU DSPIRA navy band"/>
+          <p:cNvSpPr>
+            <a:spLocks noGrp="1"/>
+          </p:cNvSpPr>
+          <p:nvPr/>
+        </p:nvSpPr>
+        <p:spPr>
+          <a:xfrm>
+            <a:off x="0" y="0"/>
+            <a:ext cx="10080625" cy="323850"/>
+          </a:xfrm>
+          <a:prstGeom prst="rect">
+            <a:avLst/>
+          </a:prstGeom>
+          <a:solidFill>
+            <a:srgbClr val="002855"/>
+          </a:solidFill>
+          <a:ln w="0">
+            <a:noFill/>
+          </a:ln>
+        </p:spPr>
+      </p:sp>
+      <p:sp>
+        <p:nvSpPr>
+          <p:cNvPr id="109" name="WVU DSPIRA gold rule"/>
+          <p:cNvSpPr>
+            <a:spLocks noGrp="1"/>
+          </p:cNvSpPr>
+          <p:nvPr/>
+        </p:nvSpPr>
+        <p:spPr>
+          <a:xfrm>
+            <a:off x="0" y="323850"/>
+            <a:ext cx="10080625" cy="19050"/>
+          </a:xfrm>
+          <a:prstGeom prst="rect">
+            <a:avLst/>
+          </a:prstGeom>
+          <a:solidFill>
+            <a:srgbClr val="EEAA00"/>
+          </a:solidFill>
+          <a:ln w="0">
+            <a:noFill/>
+          </a:ln>
+        </p:spPr>
+      </p:sp>
+      <p:sp>
+        <p:nvSpPr>
+          <p:cNvPr id="110" name="WVU DSPIRA name"/>
+          <p:cNvSpPr>
+            <a:spLocks noGrp="1"/>
+          </p:cNvSpPr>
+          <p:nvPr/>
+        </p:nvSpPr>
+        <p:spPr>
+          <a:xfrm>
+            <a:off x="228600" y="19050"/>
+            <a:ext cx="2857500" cy="257175"/>
+          </a:xfrm>
+          <a:prstGeom prst="rect">
+            <a:avLst/>
+          </a:prstGeom>
+          <a:noFill/>
+          <a:ln w="0">
+            <a:noFill/>
+          </a:ln>
+        </p:spPr>
+        <p:txBody>
+          <a:bodyPr>
+            <a:noAutofit/>
+          </a:bodyPr>
+          <a:lstStyle/>
+          <a:p>
+            <a:pPr>
+              <a:defRPr sz="1600" b="1">
+                <a:solidFill>
+                  <a:srgbClr val="FFFFFF"/>
+                </a:solidFill>
+                <a:latin typeface="Arial"/>
+                <a:ea typeface="Arial"/>
+                <a:cs typeface="Arial"/>
+              </a:defRPr>
+            </a:pPr>
+            <a:r>
+              <a:rPr sz="1600" b="1">
+                <a:solidFill>
+                  <a:srgbClr val="FFFFFF"/>
                 </a:solidFill>
                 <a:latin typeface="Arial"/>
                 <a:ea typeface="Arial"/>
@@ -16132,7 +17458,7 @@
       </p:sp>
       <p:sp>
         <p:nvSpPr>
-          <p:cNvPr id="106" name="DSPIRA 4"/>
+          <p:cNvPr id="111" name="WVU DSPIRA university"/>
           <p:cNvSpPr>
             <a:spLocks noGrp="1"/>
           </p:cNvSpPr>
@@ -16140,8 +17466,8 @@
         </p:nvSpPr>
         <p:spPr>
           <a:xfrm>
-            <a:off x="228600" y="7978775"/>
-            <a:ext cx="6667500" cy="228600"/>
+            <a:off x="7223125" y="114300"/>
+            <a:ext cx="2628900" cy="171450"/>
           </a:xfrm>
           <a:prstGeom prst="rect">
             <a:avLst/>
@@ -16157,10 +17483,10 @@
           </a:bodyPr>
           <a:lstStyle/>
           <a:p>
-            <a:pPr>
-              <a:defRPr sz="900" b="0">
-                <a:solidFill>
-                  <a:srgbClr val="002855"/>
+            <a:pPr algn="r">
+              <a:defRPr sz="900">
+                <a:solidFill>
+                  <a:srgbClr val="FFFFFF"/>
                 </a:solidFill>
                 <a:latin typeface="Arial"/>
                 <a:ea typeface="Arial"/>
@@ -16168,66 +17494,15 @@
               </a:defRPr>
             </a:pPr>
             <a:r>
-              <a:rPr sz="900" b="0">
-                <a:solidFill>
-                  <a:srgbClr val="002855"/>
+              <a:rPr sz="900">
+                <a:solidFill>
+                  <a:srgbClr val="FFFFFF"/>
                 </a:solidFill>
                 <a:latin typeface="Arial"/>
                 <a:ea typeface="Arial"/>
                 <a:cs typeface="Arial"/>
               </a:rPr>
-              <a:t>wvurail.org/dspira</a:t>
-            </a:r>
-          </a:p>
-        </p:txBody>
-      </p:sp>
-      <p:sp>
-        <p:nvSpPr>
-          <p:cNvPr id="107" name="DSPIRA 5"/>
-          <p:cNvSpPr>
-            <a:spLocks noGrp="1"/>
-          </p:cNvSpPr>
-          <p:nvPr/>
-        </p:nvSpPr>
-        <p:spPr>
-          <a:xfrm>
-            <a:off x="9080500" y="7978775"/>
-            <a:ext cx="762000" cy="228600"/>
-          </a:xfrm>
-          <a:prstGeom prst="rect">
-            <a:avLst/>
-          </a:prstGeom>
-          <a:noFill/>
-          <a:ln w="0">
-            <a:noFill/>
-          </a:ln>
-        </p:spPr>
-        <p:txBody>
-          <a:bodyPr>
-            <a:noAutofit/>
-          </a:bodyPr>
-          <a:lstStyle/>
-          <a:p>
-            <a:pPr>
-              <a:defRPr sz="900" b="0">
-                <a:solidFill>
-                  <a:srgbClr val="002855"/>
-                </a:solidFill>
-                <a:latin typeface="Arial"/>
-                <a:ea typeface="Arial"/>
-                <a:cs typeface="Arial"/>
-              </a:defRPr>
-            </a:pPr>
-            <a:r>
-              <a:rPr sz="900" b="0">
-                <a:solidFill>
-                  <a:srgbClr val="002855"/>
-                </a:solidFill>
-                <a:latin typeface="Arial"/>
-                <a:ea typeface="Arial"/>
-                <a:cs typeface="Arial"/>
-              </a:rPr>
-              <a:t>7 of 19</a:t>
+              <a:t>WEST VIRGINIA UNIVERSITY</a:t>
             </a:r>
           </a:p>
         </p:txBody>
@@ -16493,30 +17768,6 @@
       </p:cxnSp>
       <p:sp>
         <p:nvSpPr>
-          <p:cNvPr id="111" name="DSPIRA 1"/>
-          <p:cNvSpPr>
-            <a:spLocks noGrp="1"/>
-          </p:cNvSpPr>
-          <p:nvPr/>
-        </p:nvSpPr>
-        <p:spPr>
-          <a:xfrm>
-            <a:off x="0" y="0"/>
-            <a:ext cx="10080625" cy="342900"/>
-          </a:xfrm>
-          <a:prstGeom prst="rect">
-            <a:avLst/>
-          </a:prstGeom>
-          <a:solidFill>
-            <a:srgbClr val="FFFFFF"/>
-          </a:solidFill>
-          <a:ln w="0">
-            <a:noFill/>
-          </a:ln>
-        </p:spPr>
-      </p:sp>
-      <p:sp>
-        <p:nvSpPr>
           <p:cNvPr id="112" name="DSPIRA 2"/>
           <p:cNvSpPr>
             <a:spLocks noGrp="1"/>
@@ -16541,7 +17792,7 @@
       </p:sp>
       <p:sp>
         <p:nvSpPr>
-          <p:cNvPr id="113" name="DSPIRA 3"/>
+          <p:cNvPr id="114" name="DSPIRA 4"/>
           <p:cNvSpPr>
             <a:spLocks noGrp="1"/>
           </p:cNvSpPr>
@@ -16549,8 +17800,8 @@
         </p:nvSpPr>
         <p:spPr>
           <a:xfrm>
-            <a:off x="228600" y="76200"/>
-            <a:ext cx="4762500" cy="228600"/>
+            <a:off x="228600" y="7978775"/>
+            <a:ext cx="6667500" cy="228600"/>
           </a:xfrm>
           <a:prstGeom prst="rect">
             <a:avLst/>
@@ -16567,7 +17818,7 @@
           <a:lstStyle/>
           <a:p>
             <a:pPr>
-              <a:defRPr sz="1200" b="1">
+              <a:defRPr sz="900" b="0">
                 <a:solidFill>
                   <a:srgbClr val="002855"/>
                 </a:solidFill>
@@ -16577,9 +17828,159 @@
               </a:defRPr>
             </a:pPr>
             <a:r>
-              <a:rPr sz="1200" b="1">
+              <a:rPr sz="900" b="0">
                 <a:solidFill>
                   <a:srgbClr val="002855"/>
+                </a:solidFill>
+                <a:latin typeface="Arial"/>
+                <a:ea typeface="Arial"/>
+                <a:cs typeface="Arial"/>
+              </a:rPr>
+              <a:t>wvurail.org/dspira</a:t>
+            </a:r>
+          </a:p>
+        </p:txBody>
+      </p:sp>
+      <p:sp>
+        <p:nvSpPr>
+          <p:cNvPr id="115" name="DSPIRA 5"/>
+          <p:cNvSpPr>
+            <a:spLocks noGrp="1"/>
+          </p:cNvSpPr>
+          <p:nvPr/>
+        </p:nvSpPr>
+        <p:spPr>
+          <a:xfrm>
+            <a:off x="9080500" y="7978775"/>
+            <a:ext cx="762000" cy="228600"/>
+          </a:xfrm>
+          <a:prstGeom prst="rect">
+            <a:avLst/>
+          </a:prstGeom>
+          <a:noFill/>
+          <a:ln w="0">
+            <a:noFill/>
+          </a:ln>
+        </p:spPr>
+        <p:txBody>
+          <a:bodyPr>
+            <a:noAutofit/>
+          </a:bodyPr>
+          <a:lstStyle/>
+          <a:p>
+            <a:pPr>
+              <a:defRPr sz="900" b="0">
+                <a:solidFill>
+                  <a:srgbClr val="002855"/>
+                </a:solidFill>
+                <a:latin typeface="Arial"/>
+                <a:ea typeface="Arial"/>
+                <a:cs typeface="Arial"/>
+              </a:defRPr>
+            </a:pPr>
+            <a:r>
+              <a:rPr sz="900" b="0">
+                <a:solidFill>
+                  <a:srgbClr val="002855"/>
+                </a:solidFill>
+                <a:latin typeface="Arial"/>
+                <a:ea typeface="Arial"/>
+                <a:cs typeface="Arial"/>
+              </a:rPr>
+              <a:t>8 of 19</a:t>
+            </a:r>
+          </a:p>
+        </p:txBody>
+      </p:sp>
+      <p:sp>
+        <p:nvSpPr>
+          <p:cNvPr id="116" name="WVU DSPIRA navy band"/>
+          <p:cNvSpPr>
+            <a:spLocks noGrp="1"/>
+          </p:cNvSpPr>
+          <p:nvPr/>
+        </p:nvSpPr>
+        <p:spPr>
+          <a:xfrm>
+            <a:off x="0" y="0"/>
+            <a:ext cx="10080625" cy="323850"/>
+          </a:xfrm>
+          <a:prstGeom prst="rect">
+            <a:avLst/>
+          </a:prstGeom>
+          <a:solidFill>
+            <a:srgbClr val="002855"/>
+          </a:solidFill>
+          <a:ln w="0">
+            <a:noFill/>
+          </a:ln>
+        </p:spPr>
+      </p:sp>
+      <p:sp>
+        <p:nvSpPr>
+          <p:cNvPr id="117" name="WVU DSPIRA gold rule"/>
+          <p:cNvSpPr>
+            <a:spLocks noGrp="1"/>
+          </p:cNvSpPr>
+          <p:nvPr/>
+        </p:nvSpPr>
+        <p:spPr>
+          <a:xfrm>
+            <a:off x="0" y="323850"/>
+            <a:ext cx="10080625" cy="19050"/>
+          </a:xfrm>
+          <a:prstGeom prst="rect">
+            <a:avLst/>
+          </a:prstGeom>
+          <a:solidFill>
+            <a:srgbClr val="EEAA00"/>
+          </a:solidFill>
+          <a:ln w="0">
+            <a:noFill/>
+          </a:ln>
+        </p:spPr>
+      </p:sp>
+      <p:sp>
+        <p:nvSpPr>
+          <p:cNvPr id="118" name="WVU DSPIRA name"/>
+          <p:cNvSpPr>
+            <a:spLocks noGrp="1"/>
+          </p:cNvSpPr>
+          <p:nvPr/>
+        </p:nvSpPr>
+        <p:spPr>
+          <a:xfrm>
+            <a:off x="228600" y="19050"/>
+            <a:ext cx="2857500" cy="257175"/>
+          </a:xfrm>
+          <a:prstGeom prst="rect">
+            <a:avLst/>
+          </a:prstGeom>
+          <a:noFill/>
+          <a:ln w="0">
+            <a:noFill/>
+          </a:ln>
+        </p:spPr>
+        <p:txBody>
+          <a:bodyPr>
+            <a:noAutofit/>
+          </a:bodyPr>
+          <a:lstStyle/>
+          <a:p>
+            <a:pPr>
+              <a:defRPr sz="1600" b="1">
+                <a:solidFill>
+                  <a:srgbClr val="FFFFFF"/>
+                </a:solidFill>
+                <a:latin typeface="Arial"/>
+                <a:ea typeface="Arial"/>
+                <a:cs typeface="Arial"/>
+              </a:defRPr>
+            </a:pPr>
+            <a:r>
+              <a:rPr sz="1600" b="1">
+                <a:solidFill>
+                  <a:srgbClr val="FFFFFF"/>
                 </a:solidFill>
                 <a:latin typeface="Arial"/>
                 <a:ea typeface="Arial"/>
@@ -16592,7 +17993,7 @@
       </p:sp>
       <p:sp>
         <p:nvSpPr>
-          <p:cNvPr id="114" name="DSPIRA 4"/>
+          <p:cNvPr id="119" name="WVU DSPIRA university"/>
           <p:cNvSpPr>
             <a:spLocks noGrp="1"/>
           </p:cNvSpPr>
@@ -16600,8 +18001,8 @@
         </p:nvSpPr>
         <p:spPr>
           <a:xfrm>
-            <a:off x="228600" y="7978775"/>
-            <a:ext cx="6667500" cy="228600"/>
+            <a:off x="7223125" y="114300"/>
+            <a:ext cx="2628900" cy="171450"/>
           </a:xfrm>
           <a:prstGeom prst="rect">
             <a:avLst/>
@@ -16617,10 +18018,10 @@
           </a:bodyPr>
           <a:lstStyle/>
           <a:p>
-            <a:pPr>
-              <a:defRPr sz="900" b="0">
-                <a:solidFill>
-                  <a:srgbClr val="002855"/>
+            <a:pPr algn="r">
+              <a:defRPr sz="900">
+                <a:solidFill>
+                  <a:srgbClr val="FFFFFF"/>
                 </a:solidFill>
                 <a:latin typeface="Arial"/>
                 <a:ea typeface="Arial"/>
@@ -16628,66 +18029,15 @@
               </a:defRPr>
             </a:pPr>
             <a:r>
-              <a:rPr sz="900" b="0">
-                <a:solidFill>
-                  <a:srgbClr val="002855"/>
+              <a:rPr sz="900">
+                <a:solidFill>
+                  <a:srgbClr val="FFFFFF"/>
                 </a:solidFill>
                 <a:latin typeface="Arial"/>
                 <a:ea typeface="Arial"/>
                 <a:cs typeface="Arial"/>
               </a:rPr>
-              <a:t>wvurail.org/dspira</a:t>
-            </a:r>
-          </a:p>
-        </p:txBody>
-      </p:sp>
-      <p:sp>
-        <p:nvSpPr>
-          <p:cNvPr id="115" name="DSPIRA 5"/>
-          <p:cNvSpPr>
-            <a:spLocks noGrp="1"/>
-          </p:cNvSpPr>
-          <p:nvPr/>
-        </p:nvSpPr>
-        <p:spPr>
-          <a:xfrm>
-            <a:off x="9080500" y="7978775"/>
-            <a:ext cx="762000" cy="228600"/>
-          </a:xfrm>
-          <a:prstGeom prst="rect">
-            <a:avLst/>
-          </a:prstGeom>
-          <a:noFill/>
-          <a:ln w="0">
-            <a:noFill/>
-          </a:ln>
-        </p:spPr>
-        <p:txBody>
-          <a:bodyPr>
-            <a:noAutofit/>
-          </a:bodyPr>
-          <a:lstStyle/>
-          <a:p>
-            <a:pPr>
-              <a:defRPr sz="900" b="0">
-                <a:solidFill>
-                  <a:srgbClr val="002855"/>
-                </a:solidFill>
-                <a:latin typeface="Arial"/>
-                <a:ea typeface="Arial"/>
-                <a:cs typeface="Arial"/>
-              </a:defRPr>
-            </a:pPr>
-            <a:r>
-              <a:rPr sz="900" b="0">
-                <a:solidFill>
-                  <a:srgbClr val="002855"/>
-                </a:solidFill>
-                <a:latin typeface="Arial"/>
-                <a:ea typeface="Arial"/>
-                <a:cs typeface="Arial"/>
-              </a:rPr>
-              <a:t>8 of 19</a:t>
+              <a:t>WEST VIRGINIA UNIVERSITY</a:t>
             </a:r>
           </a:p>
         </p:txBody>
@@ -16856,30 +18206,6 @@
       </p:cxnSp>
       <p:sp>
         <p:nvSpPr>
-          <p:cNvPr id="119" name="DSPIRA 1"/>
-          <p:cNvSpPr>
-            <a:spLocks noGrp="1"/>
-          </p:cNvSpPr>
-          <p:nvPr/>
-        </p:nvSpPr>
-        <p:spPr>
-          <a:xfrm>
-            <a:off x="0" y="0"/>
-            <a:ext cx="10080625" cy="342900"/>
-          </a:xfrm>
-          <a:prstGeom prst="rect">
-            <a:avLst/>
-          </a:prstGeom>
-          <a:solidFill>
-            <a:srgbClr val="FFFFFF"/>
-          </a:solidFill>
-          <a:ln w="0">
-            <a:noFill/>
-          </a:ln>
-        </p:spPr>
-      </p:sp>
-      <p:sp>
-        <p:nvSpPr>
           <p:cNvPr id="120" name="DSPIRA 2"/>
           <p:cNvSpPr>
             <a:spLocks noGrp="1"/>
@@ -16904,7 +18230,7 @@
       </p:sp>
       <p:sp>
         <p:nvSpPr>
-          <p:cNvPr id="121" name="DSPIRA 3"/>
+          <p:cNvPr id="122" name="DSPIRA 4"/>
           <p:cNvSpPr>
             <a:spLocks noGrp="1"/>
           </p:cNvSpPr>
@@ -16912,8 +18238,8 @@
         </p:nvSpPr>
         <p:spPr>
           <a:xfrm>
-            <a:off x="228600" y="76200"/>
-            <a:ext cx="4762500" cy="228600"/>
+            <a:off x="228600" y="7978775"/>
+            <a:ext cx="6667500" cy="228600"/>
           </a:xfrm>
           <a:prstGeom prst="rect">
             <a:avLst/>
@@ -16930,7 +18256,7 @@
           <a:lstStyle/>
           <a:p>
             <a:pPr>
-              <a:defRPr sz="1200" b="1">
+              <a:defRPr sz="900" b="0">
                 <a:solidFill>
                   <a:srgbClr val="002855"/>
                 </a:solidFill>
@@ -16940,9 +18266,159 @@
               </a:defRPr>
             </a:pPr>
             <a:r>
-              <a:rPr sz="1200" b="1">
+              <a:rPr sz="900" b="0">
                 <a:solidFill>
                   <a:srgbClr val="002855"/>
+                </a:solidFill>
+                <a:latin typeface="Arial"/>
+                <a:ea typeface="Arial"/>
+                <a:cs typeface="Arial"/>
+              </a:rPr>
+              <a:t>wvurail.org/dspira</a:t>
+            </a:r>
+          </a:p>
+        </p:txBody>
+      </p:sp>
+      <p:sp>
+        <p:nvSpPr>
+          <p:cNvPr id="123" name="DSPIRA 5"/>
+          <p:cNvSpPr>
+            <a:spLocks noGrp="1"/>
+          </p:cNvSpPr>
+          <p:nvPr/>
+        </p:nvSpPr>
+        <p:spPr>
+          <a:xfrm>
+            <a:off x="9080500" y="7978775"/>
+            <a:ext cx="762000" cy="228600"/>
+          </a:xfrm>
+          <a:prstGeom prst="rect">
+            <a:avLst/>
+          </a:prstGeom>
+          <a:noFill/>
+          <a:ln w="0">
+            <a:noFill/>
+          </a:ln>
+        </p:spPr>
+        <p:txBody>
+          <a:bodyPr>
+            <a:noAutofit/>
+          </a:bodyPr>
+          <a:lstStyle/>
+          <a:p>
+            <a:pPr>
+              <a:defRPr sz="900" b="0">
+                <a:solidFill>
+                  <a:srgbClr val="002855"/>
+                </a:solidFill>
+                <a:latin typeface="Arial"/>
+                <a:ea typeface="Arial"/>
+                <a:cs typeface="Arial"/>
+              </a:defRPr>
+            </a:pPr>
+            <a:r>
+              <a:rPr sz="900" b="0">
+                <a:solidFill>
+                  <a:srgbClr val="002855"/>
+                </a:solidFill>
+                <a:latin typeface="Arial"/>
+                <a:ea typeface="Arial"/>
+                <a:cs typeface="Arial"/>
+              </a:rPr>
+              <a:t>9 of 19</a:t>
+            </a:r>
+          </a:p>
+        </p:txBody>
+      </p:sp>
+      <p:sp>
+        <p:nvSpPr>
+          <p:cNvPr id="124" name="WVU DSPIRA navy band"/>
+          <p:cNvSpPr>
+            <a:spLocks noGrp="1"/>
+          </p:cNvSpPr>
+          <p:nvPr/>
+        </p:nvSpPr>
+        <p:spPr>
+          <a:xfrm>
+            <a:off x="0" y="0"/>
+            <a:ext cx="10080625" cy="323850"/>
+          </a:xfrm>
+          <a:prstGeom prst="rect">
+            <a:avLst/>
+          </a:prstGeom>
+          <a:solidFill>
+            <a:srgbClr val="002855"/>
+          </a:solidFill>
+          <a:ln w="0">
+            <a:noFill/>
+          </a:ln>
+        </p:spPr>
+      </p:sp>
+      <p:sp>
+        <p:nvSpPr>
+          <p:cNvPr id="125" name="WVU DSPIRA gold rule"/>
+          <p:cNvSpPr>
+            <a:spLocks noGrp="1"/>
+          </p:cNvSpPr>
+          <p:nvPr/>
+        </p:nvSpPr>
+        <p:spPr>
+          <a:xfrm>
+            <a:off x="0" y="323850"/>
+            <a:ext cx="10080625" cy="19050"/>
+          </a:xfrm>
+          <a:prstGeom prst="rect">
+            <a:avLst/>
+          </a:prstGeom>
+          <a:solidFill>
+            <a:srgbClr val="EEAA00"/>
+          </a:solidFill>
+          <a:ln w="0">
+            <a:noFill/>
+          </a:ln>
+        </p:spPr>
+      </p:sp>
+      <p:sp>
+        <p:nvSpPr>
+          <p:cNvPr id="126" name="WVU DSPIRA name"/>
+          <p:cNvSpPr>
+            <a:spLocks noGrp="1"/>
+          </p:cNvSpPr>
+          <p:nvPr/>
+        </p:nvSpPr>
+        <p:spPr>
+          <a:xfrm>
+            <a:off x="228600" y="19050"/>
+            <a:ext cx="2857500" cy="257175"/>
+          </a:xfrm>
+          <a:prstGeom prst="rect">
+            <a:avLst/>
+          </a:prstGeom>
+          <a:noFill/>
+          <a:ln w="0">
+            <a:noFill/>
+          </a:ln>
+        </p:spPr>
+        <p:txBody>
+          <a:bodyPr>
+            <a:noAutofit/>
+          </a:bodyPr>
+          <a:lstStyle/>
+          <a:p>
+            <a:pPr>
+              <a:defRPr sz="1600" b="1">
+                <a:solidFill>
+                  <a:srgbClr val="FFFFFF"/>
+                </a:solidFill>
+                <a:latin typeface="Arial"/>
+                <a:ea typeface="Arial"/>
+                <a:cs typeface="Arial"/>
+              </a:defRPr>
+            </a:pPr>
+            <a:r>
+              <a:rPr sz="1600" b="1">
+                <a:solidFill>
+                  <a:srgbClr val="FFFFFF"/>
                 </a:solidFill>
                 <a:latin typeface="Arial"/>
                 <a:ea typeface="Arial"/>
@@ -16955,7 +18431,7 @@
       </p:sp>
       <p:sp>
         <p:nvSpPr>
-          <p:cNvPr id="122" name="DSPIRA 4"/>
+          <p:cNvPr id="127" name="WVU DSPIRA university"/>
           <p:cNvSpPr>
             <a:spLocks noGrp="1"/>
           </p:cNvSpPr>
@@ -16963,8 +18439,8 @@
         </p:nvSpPr>
         <p:spPr>
           <a:xfrm>
-            <a:off x="228600" y="7978775"/>
-            <a:ext cx="6667500" cy="228600"/>
+            <a:off x="7223125" y="114300"/>
+            <a:ext cx="2628900" cy="171450"/>
           </a:xfrm>
           <a:prstGeom prst="rect">
             <a:avLst/>
@@ -16980,10 +18456,10 @@
           </a:bodyPr>
           <a:lstStyle/>
           <a:p>
-            <a:pPr>
-              <a:defRPr sz="900" b="0">
-                <a:solidFill>
-                  <a:srgbClr val="002855"/>
+            <a:pPr algn="r">
+              <a:defRPr sz="900">
+                <a:solidFill>
+                  <a:srgbClr val="FFFFFF"/>
                 </a:solidFill>
                 <a:latin typeface="Arial"/>
                 <a:ea typeface="Arial"/>
@@ -16991,66 +18467,15 @@
               </a:defRPr>
             </a:pPr>
             <a:r>
-              <a:rPr sz="900" b="0">
-                <a:solidFill>
-                  <a:srgbClr val="002855"/>
+              <a:rPr sz="900">
+                <a:solidFill>
+                  <a:srgbClr val="FFFFFF"/>
                 </a:solidFill>
                 <a:latin typeface="Arial"/>
                 <a:ea typeface="Arial"/>
                 <a:cs typeface="Arial"/>
               </a:rPr>
-              <a:t>wvurail.org/dspira</a:t>
-            </a:r>
-          </a:p>
-        </p:txBody>
-      </p:sp>
-      <p:sp>
-        <p:nvSpPr>
-          <p:cNvPr id="123" name="DSPIRA 5"/>
-          <p:cNvSpPr>
-            <a:spLocks noGrp="1"/>
-          </p:cNvSpPr>
-          <p:nvPr/>
-        </p:nvSpPr>
-        <p:spPr>
-          <a:xfrm>
-            <a:off x="9080500" y="7978775"/>
-            <a:ext cx="762000" cy="228600"/>
-          </a:xfrm>
-          <a:prstGeom prst="rect">
-            <a:avLst/>
-          </a:prstGeom>
-          <a:noFill/>
-          <a:ln w="0">
-            <a:noFill/>
-          </a:ln>
-        </p:spPr>
-        <p:txBody>
-          <a:bodyPr>
-            <a:noAutofit/>
-          </a:bodyPr>
-          <a:lstStyle/>
-          <a:p>
-            <a:pPr>
-              <a:defRPr sz="900" b="0">
-                <a:solidFill>
-                  <a:srgbClr val="002855"/>
-                </a:solidFill>
-                <a:latin typeface="Arial"/>
-                <a:ea typeface="Arial"/>
-                <a:cs typeface="Arial"/>
-              </a:defRPr>
-            </a:pPr>
-            <a:r>
-              <a:rPr sz="900" b="0">
-                <a:solidFill>
-                  <a:srgbClr val="002855"/>
-                </a:solidFill>
-                <a:latin typeface="Arial"/>
-                <a:ea typeface="Arial"/>
-                <a:cs typeface="Arial"/>
-              </a:rPr>
-              <a:t>9 of 19</a:t>
+              <a:t>WEST VIRGINIA UNIVERSITY</a:t>
             </a:r>
           </a:p>
         </p:txBody>

--- a/assets/lessons/lectures/astronomy/your-observations-2018.pptx
+++ b/assets/lessons/lectures/astronomy/your-observations-2018.pptx
@@ -6356,7 +6356,7 @@
                 <a:ea typeface="Arial"/>
                 <a:cs typeface="Arial"/>
               </a:rPr>
-              <a:t>wvurail.org/dspira</a:t>
+              <a:t>rail.wvu.edu/dspira</a:t>
             </a:r>
           </a:p>
         </p:txBody>
